--- a/docs/PPT/TerraGrid_AI_Builder_Cup_Submission_copilot_terragrid.pptx
+++ b/docs/PPT/TerraGrid_AI_Builder_Cup_Submission_copilot_terragrid.pptx
@@ -3352,7 +3352,7 @@
                 <a:ea typeface="Calibri" pitchFamily="34" charset="-122"/>
                 <a:cs typeface="Calibri" pitchFamily="34" charset="-120"/>
               </a:rPr>
-              <a:t>Decision-lineage &amp; validation logging</a:t>
+              <a:t>Source of Truth — 4-layer data lineage (raw -&gt; validated -&gt; enriched -&gt; stored)</a:t>
             </a:r>
             <a:endParaRPr lang="en-US" sz="1050" dirty="0"/>
           </a:p>
@@ -13374,7 +13374,7 @@
                           <a:ea typeface="Calibri" pitchFamily="34" charset="-122"/>
                           <a:cs typeface="Calibri" pitchFamily="34" charset="-120"/>
                         </a:rPr>
-                        <a:t>Every AI recommendation logged — source data and model output both</a:t>
+                        <a:t>Source of Truth — 4-layer data lineage (raw -&gt; validated -&gt; enriched -&gt; stored), plus every AI recommendation logged</a:t>
                       </a:r>
                       <a:endParaRPr lang="en-US" sz="1050" dirty="0">
                         <a:latin typeface="Calibri" charset="0"/>
@@ -16583,12 +16583,12 @@
         </p:nvSpPr>
         <p:spPr>
           <a:xfrm>
-            <a:off x="777240" y="1828800"/>
-            <a:ext cx="2556434" cy="1188720"/>
+            <a:off x="777240" y="1737360"/>
+            <a:ext cx="2556434" cy="896112"/>
           </a:xfrm>
           <a:prstGeom prst="roundRect">
             <a:avLst>
-              <a:gd name="adj" fmla="val 5385"/>
+              <a:gd name="adj" fmla="val 7143"/>
             </a:avLst>
           </a:prstGeom>
           <a:solidFill>
@@ -16610,8 +16610,8 @@
         </p:nvSpPr>
         <p:spPr>
           <a:xfrm>
-            <a:off x="914400" y="1965960"/>
-            <a:ext cx="274320" cy="274320"/>
+            <a:off x="896112" y="1856232"/>
+            <a:ext cx="237744" cy="237744"/>
           </a:xfrm>
           <a:prstGeom prst="ellipse">
             <a:avLst/>
@@ -16630,8 +16630,8 @@
         </p:nvSpPr>
         <p:spPr>
           <a:xfrm>
-            <a:off x="914400" y="2304288"/>
-            <a:ext cx="2282114" cy="274320"/>
+            <a:off x="896112" y="2139696"/>
+            <a:ext cx="2318690" cy="237744"/>
           </a:xfrm>
           <a:prstGeom prst="rect">
             <a:avLst/>
@@ -16647,14 +16647,14 @@
               <a:buNone/>
             </a:pPr>
             <a:r>
-              <a:rPr lang="en-US" sz="1100" b="1" dirty="0">
+              <a:rPr lang="en-US" sz="950" b="1" dirty="0">
                 <a:solidFill>
                   <a:srgbClr val="0F1B2D"/>
                 </a:solidFill>
               </a:rPr>
               <a:t>Multi-Source Intelligence</a:t>
             </a:r>
-            <a:endParaRPr lang="en-US" sz="1100" dirty="0"/>
+            <a:endParaRPr lang="en-US" sz="950" dirty="0"/>
           </a:p>
         </p:txBody>
       </p:sp>
@@ -16666,8 +16666,8 @@
         </p:nvSpPr>
         <p:spPr>
           <a:xfrm>
-            <a:off x="914400" y="2578608"/>
-            <a:ext cx="2282114" cy="384048"/>
+            <a:off x="896112" y="2377440"/>
+            <a:ext cx="2318690" cy="246888"/>
           </a:xfrm>
           <a:prstGeom prst="rect">
             <a:avLst/>
@@ -16683,14 +16683,14 @@
               <a:buNone/>
             </a:pPr>
             <a:r>
-              <a:rPr lang="en-US" sz="850" dirty="0">
+              <a:rPr lang="en-US" sz="750" dirty="0">
                 <a:solidFill>
                   <a:srgbClr val="6B7684"/>
                 </a:solidFill>
               </a:rPr>
               <a:t>6 live APIs auto-ingested — NASA EONET, USGS, NOAA, GDACS, OpenWeatherMap, OSM/Overpass</a:t>
             </a:r>
-            <a:endParaRPr lang="en-US" sz="850" dirty="0"/>
+            <a:endParaRPr lang="en-US" sz="750" dirty="0"/>
           </a:p>
         </p:txBody>
       </p:sp>
@@ -16702,12 +16702,12 @@
         </p:nvSpPr>
         <p:spPr>
           <a:xfrm>
-            <a:off x="3470834" y="1828800"/>
-            <a:ext cx="2556434" cy="1188720"/>
+            <a:off x="3470834" y="1737360"/>
+            <a:ext cx="2556434" cy="896112"/>
           </a:xfrm>
           <a:prstGeom prst="roundRect">
             <a:avLst>
-              <a:gd name="adj" fmla="val 5385"/>
+              <a:gd name="adj" fmla="val 7143"/>
             </a:avLst>
           </a:prstGeom>
           <a:solidFill>
@@ -16729,8 +16729,8 @@
         </p:nvSpPr>
         <p:spPr>
           <a:xfrm>
-            <a:off x="3607994" y="1965960"/>
-            <a:ext cx="274320" cy="274320"/>
+            <a:off x="3589706" y="1856232"/>
+            <a:ext cx="237744" cy="237744"/>
           </a:xfrm>
           <a:prstGeom prst="ellipse">
             <a:avLst/>
@@ -16749,8 +16749,8 @@
         </p:nvSpPr>
         <p:spPr>
           <a:xfrm>
-            <a:off x="3607994" y="2304288"/>
-            <a:ext cx="2282114" cy="274320"/>
+            <a:off x="3589706" y="2139696"/>
+            <a:ext cx="2318690" cy="237744"/>
           </a:xfrm>
           <a:prstGeom prst="rect">
             <a:avLst/>
@@ -16766,14 +16766,14 @@
               <a:buNone/>
             </a:pPr>
             <a:r>
-              <a:rPr lang="en-US" sz="1100" b="1" dirty="0">
+              <a:rPr lang="en-US" sz="950" b="1" dirty="0">
                 <a:solidFill>
                   <a:srgbClr val="0F1B2D"/>
                 </a:solidFill>
               </a:rPr>
               <a:t>AI Decision Support</a:t>
             </a:r>
-            <a:endParaRPr lang="en-US" sz="1100" dirty="0"/>
+            <a:endParaRPr lang="en-US" sz="950" dirty="0"/>
           </a:p>
         </p:txBody>
       </p:sp>
@@ -16785,8 +16785,8 @@
         </p:nvSpPr>
         <p:spPr>
           <a:xfrm>
-            <a:off x="3607994" y="2578608"/>
-            <a:ext cx="2282114" cy="384048"/>
+            <a:off x="3589706" y="2377440"/>
+            <a:ext cx="2318690" cy="246888"/>
           </a:xfrm>
           <a:prstGeom prst="rect">
             <a:avLst/>
@@ -16802,14 +16802,14 @@
               <a:buNone/>
             </a:pPr>
             <a:r>
-              <a:rPr lang="en-US" sz="850" dirty="0">
+              <a:rPr lang="en-US" sz="750" dirty="0">
                 <a:solidFill>
                   <a:srgbClr val="6B7684"/>
                 </a:solidFill>
               </a:rPr>
               <a:t>Gemini 2.5 Flash generates action plans with confidence scoring</a:t>
             </a:r>
-            <a:endParaRPr lang="en-US" sz="850" dirty="0"/>
+            <a:endParaRPr lang="en-US" sz="750" dirty="0"/>
           </a:p>
         </p:txBody>
       </p:sp>
@@ -16821,12 +16821,12 @@
         </p:nvSpPr>
         <p:spPr>
           <a:xfrm>
-            <a:off x="6164428" y="1828800"/>
-            <a:ext cx="2556434" cy="1188720"/>
+            <a:off x="6164428" y="1737360"/>
+            <a:ext cx="2556434" cy="896112"/>
           </a:xfrm>
           <a:prstGeom prst="roundRect">
             <a:avLst>
-              <a:gd name="adj" fmla="val 5385"/>
+              <a:gd name="adj" fmla="val 7143"/>
             </a:avLst>
           </a:prstGeom>
           <a:solidFill>
@@ -16848,8 +16848,8 @@
         </p:nvSpPr>
         <p:spPr>
           <a:xfrm>
-            <a:off x="6301588" y="1965960"/>
-            <a:ext cx="274320" cy="274320"/>
+            <a:off x="6283300" y="1856232"/>
+            <a:ext cx="237744" cy="237744"/>
           </a:xfrm>
           <a:prstGeom prst="ellipse">
             <a:avLst/>
@@ -16868,8 +16868,8 @@
         </p:nvSpPr>
         <p:spPr>
           <a:xfrm>
-            <a:off x="6301588" y="2304288"/>
-            <a:ext cx="2282114" cy="274320"/>
+            <a:off x="6283300" y="2139696"/>
+            <a:ext cx="2318690" cy="237744"/>
           </a:xfrm>
           <a:prstGeom prst="rect">
             <a:avLst/>
@@ -16885,14 +16885,14 @@
               <a:buNone/>
             </a:pPr>
             <a:r>
-              <a:rPr lang="en-US" sz="1100" b="1" dirty="0">
+              <a:rPr lang="en-US" sz="950" b="1" dirty="0">
                 <a:solidFill>
                   <a:srgbClr val="0F1B2D"/>
                 </a:solidFill>
               </a:rPr>
               <a:t>Satellite Verification</a:t>
             </a:r>
-            <a:endParaRPr lang="en-US" sz="1100" dirty="0"/>
+            <a:endParaRPr lang="en-US" sz="950" dirty="0"/>
           </a:p>
         </p:txBody>
       </p:sp>
@@ -16904,8 +16904,8 @@
         </p:nvSpPr>
         <p:spPr>
           <a:xfrm>
-            <a:off x="6301588" y="2578608"/>
-            <a:ext cx="2282114" cy="384048"/>
+            <a:off x="6283300" y="2377440"/>
+            <a:ext cx="2318690" cy="246888"/>
           </a:xfrm>
           <a:prstGeom prst="rect">
             <a:avLst/>
@@ -16921,14 +16921,14 @@
               <a:buNone/>
             </a:pPr>
             <a:r>
-              <a:rPr lang="en-US" sz="850" dirty="0">
+              <a:rPr lang="en-US" sz="750" dirty="0">
                 <a:solidFill>
                   <a:srgbClr val="6B7684"/>
                 </a:solidFill>
               </a:rPr>
               <a:t>Sentinel-1 SAR cross-validation via Google Earth Engine</a:t>
             </a:r>
-            <a:endParaRPr lang="en-US" sz="850" dirty="0"/>
+            <a:endParaRPr lang="en-US" sz="750" dirty="0"/>
           </a:p>
         </p:txBody>
       </p:sp>
@@ -16940,12 +16940,12 @@
         </p:nvSpPr>
         <p:spPr>
           <a:xfrm>
-            <a:off x="8858021" y="1828800"/>
-            <a:ext cx="2556434" cy="1188720"/>
+            <a:off x="8858021" y="1737360"/>
+            <a:ext cx="2556434" cy="896112"/>
           </a:xfrm>
           <a:prstGeom prst="roundRect">
             <a:avLst>
-              <a:gd name="adj" fmla="val 5385"/>
+              <a:gd name="adj" fmla="val 7143"/>
             </a:avLst>
           </a:prstGeom>
           <a:solidFill>
@@ -16967,8 +16967,8 @@
         </p:nvSpPr>
         <p:spPr>
           <a:xfrm>
-            <a:off x="8995181" y="1965960"/>
-            <a:ext cx="274320" cy="274320"/>
+            <a:off x="8976893" y="1856232"/>
+            <a:ext cx="237744" cy="237744"/>
           </a:xfrm>
           <a:prstGeom prst="ellipse">
             <a:avLst/>
@@ -16987,8 +16987,8 @@
         </p:nvSpPr>
         <p:spPr>
           <a:xfrm>
-            <a:off x="8995181" y="2304288"/>
-            <a:ext cx="2282114" cy="274320"/>
+            <a:off x="8976893" y="2139696"/>
+            <a:ext cx="2318690" cy="237744"/>
           </a:xfrm>
           <a:prstGeom prst="rect">
             <a:avLst/>
@@ -17004,14 +17004,14 @@
               <a:buNone/>
             </a:pPr>
             <a:r>
-              <a:rPr lang="en-US" sz="1100" b="1" dirty="0">
+              <a:rPr lang="en-US" sz="950" b="1" dirty="0">
                 <a:solidFill>
                   <a:srgbClr val="0F1B2D"/>
                 </a:solidFill>
               </a:rPr>
               <a:t>Decision Lineage</a:t>
             </a:r>
-            <a:endParaRPr lang="en-US" sz="1100" dirty="0"/>
+            <a:endParaRPr lang="en-US" sz="950" dirty="0"/>
           </a:p>
         </p:txBody>
       </p:sp>
@@ -17023,8 +17023,8 @@
         </p:nvSpPr>
         <p:spPr>
           <a:xfrm>
-            <a:off x="8995181" y="2578608"/>
-            <a:ext cx="2282114" cy="384048"/>
+            <a:off x="8976893" y="2377440"/>
+            <a:ext cx="2318690" cy="246888"/>
           </a:xfrm>
           <a:prstGeom prst="rect">
             <a:avLst/>
@@ -17040,14 +17040,14 @@
               <a:buNone/>
             </a:pPr>
             <a:r>
-              <a:rPr lang="en-US" sz="850" dirty="0">
+              <a:rPr lang="en-US" sz="750" dirty="0">
                 <a:solidFill>
                   <a:srgbClr val="6B7684"/>
                 </a:solidFill>
               </a:rPr>
               <a:t>Every AI output logged as a timestamped, auditable record</a:t>
             </a:r>
-            <a:endParaRPr lang="en-US" sz="850" dirty="0"/>
+            <a:endParaRPr lang="en-US" sz="750" dirty="0"/>
           </a:p>
         </p:txBody>
       </p:sp>
@@ -17059,12 +17059,12 @@
         </p:nvSpPr>
         <p:spPr>
           <a:xfrm>
-            <a:off x="777240" y="3154680"/>
-            <a:ext cx="2556434" cy="1188720"/>
+            <a:off x="777240" y="2724912"/>
+            <a:ext cx="2556434" cy="896112"/>
           </a:xfrm>
           <a:prstGeom prst="roundRect">
             <a:avLst>
-              <a:gd name="adj" fmla="val 5385"/>
+              <a:gd name="adj" fmla="val 7143"/>
             </a:avLst>
           </a:prstGeom>
           <a:solidFill>
@@ -17086,14 +17086,14 @@
         </p:nvSpPr>
         <p:spPr>
           <a:xfrm>
-            <a:off x="914400" y="3291840"/>
-            <a:ext cx="274320" cy="274320"/>
+            <a:off x="896112" y="2843784"/>
+            <a:ext cx="237744" cy="237744"/>
           </a:xfrm>
           <a:prstGeom prst="ellipse">
             <a:avLst/>
           </a:prstGeom>
           <a:solidFill>
-            <a:srgbClr val="E8722C"/>
+            <a:srgbClr val="0E7490"/>
           </a:solidFill>
           <a:ln/>
         </p:spPr>
@@ -17106,8 +17106,8 @@
         </p:nvSpPr>
         <p:spPr>
           <a:xfrm>
-            <a:off x="914400" y="3630168"/>
-            <a:ext cx="2282114" cy="274320"/>
+            <a:off x="896112" y="3127248"/>
+            <a:ext cx="2318690" cy="237744"/>
           </a:xfrm>
           <a:prstGeom prst="rect">
             <a:avLst/>
@@ -17123,14 +17123,14 @@
               <a:buNone/>
             </a:pPr>
             <a:r>
-              <a:rPr lang="en-US" sz="1100" b="1" dirty="0">
+              <a:rPr lang="en-US" sz="950" b="1" dirty="0">
                 <a:solidFill>
                   <a:srgbClr val="0F1B2D"/>
                 </a:solidFill>
               </a:rPr>
-              <a:t>7-Day Risk Forecasting</a:t>
-            </a:r>
-            <a:endParaRPr lang="en-US" sz="1100" dirty="0"/>
+              <a:t>Source Of Truth</a:t>
+            </a:r>
+            <a:endParaRPr lang="en-US" sz="950" dirty="0"/>
           </a:p>
         </p:txBody>
       </p:sp>
@@ -17142,8 +17142,8 @@
         </p:nvSpPr>
         <p:spPr>
           <a:xfrm>
-            <a:off x="914400" y="3904488"/>
-            <a:ext cx="2282114" cy="384048"/>
+            <a:off x="896112" y="3364992"/>
+            <a:ext cx="2318690" cy="246888"/>
           </a:xfrm>
           <a:prstGeom prst="rect">
             <a:avLst/>
@@ -17159,14 +17159,14 @@
               <a:buNone/>
             </a:pPr>
             <a:r>
-              <a:rPr lang="en-US" sz="850" dirty="0">
+              <a:rPr lang="en-US" sz="750" dirty="0">
                 <a:solidFill>
                   <a:srgbClr val="6B7684"/>
                 </a:solidFill>
               </a:rPr>
-              <a:t>Rolling forecasts across 8 cities, updated continuously</a:t>
-            </a:r>
-            <a:endParaRPr lang="en-US" sz="850" dirty="0"/>
+              <a:t>4-layer data lineage — raw -&gt; validated -&gt; enriched -&gt; stored — tracked per incident, with its own audit tab in the UI</a:t>
+            </a:r>
+            <a:endParaRPr lang="en-US" sz="750" dirty="0"/>
           </a:p>
         </p:txBody>
       </p:sp>
@@ -17178,12 +17178,12 @@
         </p:nvSpPr>
         <p:spPr>
           <a:xfrm>
-            <a:off x="3470834" y="3154680"/>
-            <a:ext cx="2556434" cy="1188720"/>
+            <a:off x="3470834" y="2724912"/>
+            <a:ext cx="2556434" cy="896112"/>
           </a:xfrm>
           <a:prstGeom prst="roundRect">
             <a:avLst>
-              <a:gd name="adj" fmla="val 5385"/>
+              <a:gd name="adj" fmla="val 7143"/>
             </a:avLst>
           </a:prstGeom>
           <a:solidFill>
@@ -17205,8 +17205,8 @@
         </p:nvSpPr>
         <p:spPr>
           <a:xfrm>
-            <a:off x="3607994" y="3291840"/>
-            <a:ext cx="274320" cy="274320"/>
+            <a:off x="3589706" y="2843784"/>
+            <a:ext cx="237744" cy="237744"/>
           </a:xfrm>
           <a:prstGeom prst="ellipse">
             <a:avLst/>
@@ -17225,8 +17225,8 @@
         </p:nvSpPr>
         <p:spPr>
           <a:xfrm>
-            <a:off x="3607994" y="3630168"/>
-            <a:ext cx="2282114" cy="274320"/>
+            <a:off x="3589706" y="3127248"/>
+            <a:ext cx="2318690" cy="237744"/>
           </a:xfrm>
           <a:prstGeom prst="rect">
             <a:avLst/>
@@ -17242,14 +17242,14 @@
               <a:buNone/>
             </a:pPr>
             <a:r>
-              <a:rPr lang="en-US" sz="1100" b="1" dirty="0">
+              <a:rPr lang="en-US" sz="950" b="1" dirty="0">
                 <a:solidFill>
                   <a:srgbClr val="0F1B2D"/>
                 </a:solidFill>
               </a:rPr>
-              <a:t>Risk-Escalation Timeline</a:t>
-            </a:r>
-            <a:endParaRPr lang="en-US" sz="1100" dirty="0"/>
+              <a:t>7-Day Risk Forecasting</a:t>
+            </a:r>
+            <a:endParaRPr lang="en-US" sz="950" dirty="0"/>
           </a:p>
         </p:txBody>
       </p:sp>
@@ -17261,8 +17261,8 @@
         </p:nvSpPr>
         <p:spPr>
           <a:xfrm>
-            <a:off x="3607994" y="3904488"/>
-            <a:ext cx="2282114" cy="384048"/>
+            <a:off x="3589706" y="3364992"/>
+            <a:ext cx="2318690" cy="246888"/>
           </a:xfrm>
           <a:prstGeom prst="rect">
             <a:avLst/>
@@ -17278,14 +17278,14 @@
               <a:buNone/>
             </a:pPr>
             <a:r>
-              <a:rPr lang="en-US" sz="850" dirty="0">
+              <a:rPr lang="en-US" sz="750" dirty="0">
                 <a:solidFill>
                   <a:srgbClr val="6B7684"/>
                 </a:solidFill>
               </a:rPr>
-              <a:t>AI-generated, phase-by-phase escalation outlook</a:t>
-            </a:r>
-            <a:endParaRPr lang="en-US" sz="850" dirty="0"/>
+              <a:t>Rolling forecasts across 8 cities, updated continuously</a:t>
+            </a:r>
+            <a:endParaRPr lang="en-US" sz="750" dirty="0"/>
           </a:p>
         </p:txBody>
       </p:sp>
@@ -17297,12 +17297,12 @@
         </p:nvSpPr>
         <p:spPr>
           <a:xfrm>
-            <a:off x="6164428" y="3154680"/>
-            <a:ext cx="2556434" cy="1188720"/>
+            <a:off x="6164428" y="2724912"/>
+            <a:ext cx="2556434" cy="896112"/>
           </a:xfrm>
           <a:prstGeom prst="roundRect">
             <a:avLst>
-              <a:gd name="adj" fmla="val 5385"/>
+              <a:gd name="adj" fmla="val 7143"/>
             </a:avLst>
           </a:prstGeom>
           <a:solidFill>
@@ -17324,8 +17324,8 @@
         </p:nvSpPr>
         <p:spPr>
           <a:xfrm>
-            <a:off x="6301588" y="3291840"/>
-            <a:ext cx="274320" cy="274320"/>
+            <a:off x="6283300" y="2843784"/>
+            <a:ext cx="237744" cy="237744"/>
           </a:xfrm>
           <a:prstGeom prst="ellipse">
             <a:avLst/>
@@ -17344,8 +17344,8 @@
         </p:nvSpPr>
         <p:spPr>
           <a:xfrm>
-            <a:off x="6301588" y="3630168"/>
-            <a:ext cx="2282114" cy="274320"/>
+            <a:off x="6283300" y="3127248"/>
+            <a:ext cx="2318690" cy="237744"/>
           </a:xfrm>
           <a:prstGeom prst="rect">
             <a:avLst/>
@@ -17361,14 +17361,14 @@
               <a:buNone/>
             </a:pPr>
             <a:r>
-              <a:rPr lang="en-US" sz="1100" b="1" dirty="0">
+              <a:rPr lang="en-US" sz="950" b="1" dirty="0">
                 <a:solidFill>
                   <a:srgbClr val="0F1B2D"/>
                 </a:solidFill>
               </a:rPr>
-              <a:t>Preparedness Checklists</a:t>
-            </a:r>
-            <a:endParaRPr lang="en-US" sz="1100" dirty="0"/>
+              <a:t>Risk-Escalation Timeline</a:t>
+            </a:r>
+            <a:endParaRPr lang="en-US" sz="950" dirty="0"/>
           </a:p>
         </p:txBody>
       </p:sp>
@@ -17380,8 +17380,8 @@
         </p:nvSpPr>
         <p:spPr>
           <a:xfrm>
-            <a:off x="6301588" y="3904488"/>
-            <a:ext cx="2282114" cy="384048"/>
+            <a:off x="6283300" y="3364992"/>
+            <a:ext cx="2318690" cy="246888"/>
           </a:xfrm>
           <a:prstGeom prst="rect">
             <a:avLst/>
@@ -17397,14 +17397,14 @@
               <a:buNone/>
             </a:pPr>
             <a:r>
-              <a:rPr lang="en-US" sz="850" dirty="0">
+              <a:rPr lang="en-US" sz="750" dirty="0">
                 <a:solidFill>
                   <a:srgbClr val="6B7684"/>
                 </a:solidFill>
               </a:rPr>
-              <a:t>Auto-generated per agency, ready before an event escalates</a:t>
-            </a:r>
-            <a:endParaRPr lang="en-US" sz="850" dirty="0"/>
+              <a:t>AI-generated, phase-by-phase escalation outlook</a:t>
+            </a:r>
+            <a:endParaRPr lang="en-US" sz="750" dirty="0"/>
           </a:p>
         </p:txBody>
       </p:sp>
@@ -17416,12 +17416,12 @@
         </p:nvSpPr>
         <p:spPr>
           <a:xfrm>
-            <a:off x="8858021" y="3154680"/>
-            <a:ext cx="2556434" cy="1188720"/>
+            <a:off x="8858021" y="2724912"/>
+            <a:ext cx="2556434" cy="896112"/>
           </a:xfrm>
           <a:prstGeom prst="roundRect">
             <a:avLst>
-              <a:gd name="adj" fmla="val 5385"/>
+              <a:gd name="adj" fmla="val 7143"/>
             </a:avLst>
           </a:prstGeom>
           <a:solidFill>
@@ -17443,8 +17443,8 @@
         </p:nvSpPr>
         <p:spPr>
           <a:xfrm>
-            <a:off x="8995181" y="3291840"/>
-            <a:ext cx="274320" cy="274320"/>
+            <a:off x="8976893" y="2843784"/>
+            <a:ext cx="237744" cy="237744"/>
           </a:xfrm>
           <a:prstGeom prst="ellipse">
             <a:avLst/>
@@ -17463,8 +17463,8 @@
         </p:nvSpPr>
         <p:spPr>
           <a:xfrm>
-            <a:off x="8995181" y="3630168"/>
-            <a:ext cx="2282114" cy="274320"/>
+            <a:off x="8976893" y="3127248"/>
+            <a:ext cx="2318690" cy="237744"/>
           </a:xfrm>
           <a:prstGeom prst="rect">
             <a:avLst/>
@@ -17480,14 +17480,14 @@
               <a:buNone/>
             </a:pPr>
             <a:r>
-              <a:rPr lang="en-US" sz="1100" b="1" dirty="0">
+              <a:rPr lang="en-US" sz="950" b="1" dirty="0">
                 <a:solidFill>
                   <a:srgbClr val="0F1B2D"/>
                 </a:solidFill>
               </a:rPr>
-              <a:t>Agency Alert Drafting</a:t>
-            </a:r>
-            <a:endParaRPr lang="en-US" sz="1100" dirty="0"/>
+              <a:t>Preparedness Checklists</a:t>
+            </a:r>
+            <a:endParaRPr lang="en-US" sz="950" dirty="0"/>
           </a:p>
         </p:txBody>
       </p:sp>
@@ -17499,8 +17499,8 @@
         </p:nvSpPr>
         <p:spPr>
           <a:xfrm>
-            <a:off x="8995181" y="3904488"/>
-            <a:ext cx="2282114" cy="384048"/>
+            <a:off x="8976893" y="3364992"/>
+            <a:ext cx="2318690" cy="246888"/>
           </a:xfrm>
           <a:prstGeom prst="rect">
             <a:avLst/>
@@ -17516,14 +17516,14 @@
               <a:buNone/>
             </a:pPr>
             <a:r>
-              <a:rPr lang="en-US" sz="850" dirty="0">
+              <a:rPr lang="en-US" sz="750" dirty="0">
                 <a:solidFill>
                   <a:srgbClr val="6B7684"/>
                 </a:solidFill>
               </a:rPr>
-              <a:t>Automated first-draft alerts, ready for review and send</a:t>
-            </a:r>
-            <a:endParaRPr lang="en-US" sz="850" dirty="0"/>
+              <a:t>Auto-generated per agency, ready before an event escalates</a:t>
+            </a:r>
+            <a:endParaRPr lang="en-US" sz="750" dirty="0"/>
           </a:p>
         </p:txBody>
       </p:sp>
@@ -17535,12 +17535,12 @@
         </p:nvSpPr>
         <p:spPr>
           <a:xfrm>
-            <a:off x="777240" y="4480560"/>
-            <a:ext cx="2556434" cy="1188720"/>
+            <a:off x="777240" y="3712464"/>
+            <a:ext cx="2556434" cy="896112"/>
           </a:xfrm>
           <a:prstGeom prst="roundRect">
             <a:avLst>
-              <a:gd name="adj" fmla="val 5385"/>
+              <a:gd name="adj" fmla="val 7143"/>
             </a:avLst>
           </a:prstGeom>
           <a:solidFill>
@@ -17562,14 +17562,14 @@
         </p:nvSpPr>
         <p:spPr>
           <a:xfrm>
-            <a:off x="914400" y="4617720"/>
-            <a:ext cx="274320" cy="274320"/>
+            <a:off x="896112" y="3831336"/>
+            <a:ext cx="237744" cy="237744"/>
           </a:xfrm>
           <a:prstGeom prst="ellipse">
             <a:avLst/>
           </a:prstGeom>
           <a:solidFill>
-            <a:srgbClr val="5B6472"/>
+            <a:srgbClr val="E8722C"/>
           </a:solidFill>
           <a:ln/>
         </p:spPr>
@@ -17582,8 +17582,8 @@
         </p:nvSpPr>
         <p:spPr>
           <a:xfrm>
-            <a:off x="914400" y="4956048"/>
-            <a:ext cx="2282114" cy="274320"/>
+            <a:off x="896112" y="4114800"/>
+            <a:ext cx="2318690" cy="237744"/>
           </a:xfrm>
           <a:prstGeom prst="rect">
             <a:avLst/>
@@ -17599,14 +17599,14 @@
               <a:buNone/>
             </a:pPr>
             <a:r>
-              <a:rPr lang="en-US" sz="1100" b="1" dirty="0">
+              <a:rPr lang="en-US" sz="950" b="1" dirty="0">
                 <a:solidFill>
                   <a:srgbClr val="0F1B2D"/>
                 </a:solidFill>
               </a:rPr>
-              <a:t>Live Incident Dashboard</a:t>
-            </a:r>
-            <a:endParaRPr lang="en-US" sz="1100" dirty="0"/>
+              <a:t>Agency Alert Drafting</a:t>
+            </a:r>
+            <a:endParaRPr lang="en-US" sz="950" dirty="0"/>
           </a:p>
         </p:txBody>
       </p:sp>
@@ -17618,8 +17618,8 @@
         </p:nvSpPr>
         <p:spPr>
           <a:xfrm>
-            <a:off x="914400" y="5230368"/>
-            <a:ext cx="2282114" cy="384048"/>
+            <a:off x="896112" y="4352544"/>
+            <a:ext cx="2318690" cy="246888"/>
           </a:xfrm>
           <a:prstGeom prst="rect">
             <a:avLst/>
@@ -17635,14 +17635,14 @@
               <a:buNone/>
             </a:pPr>
             <a:r>
-              <a:rPr lang="en-US" sz="850" dirty="0">
+              <a:rPr lang="en-US" sz="750" dirty="0">
                 <a:solidFill>
                   <a:srgbClr val="6B7684"/>
                 </a:solidFill>
               </a:rPr>
-              <a:t>Multi-hazard map + detail panel, WebSocket-live</a:t>
-            </a:r>
-            <a:endParaRPr lang="en-US" sz="850" dirty="0"/>
+              <a:t>Automated first-draft alerts, ready for review and send</a:t>
+            </a:r>
+            <a:endParaRPr lang="en-US" sz="750" dirty="0"/>
           </a:p>
         </p:txBody>
       </p:sp>
@@ -17654,12 +17654,12 @@
         </p:nvSpPr>
         <p:spPr>
           <a:xfrm>
-            <a:off x="3470834" y="4480560"/>
-            <a:ext cx="2556434" cy="1188720"/>
+            <a:off x="3470834" y="3712464"/>
+            <a:ext cx="2556434" cy="896112"/>
           </a:xfrm>
           <a:prstGeom prst="roundRect">
             <a:avLst>
-              <a:gd name="adj" fmla="val 5385"/>
+              <a:gd name="adj" fmla="val 7143"/>
             </a:avLst>
           </a:prstGeom>
           <a:solidFill>
@@ -17681,8 +17681,8 @@
         </p:nvSpPr>
         <p:spPr>
           <a:xfrm>
-            <a:off x="3607994" y="4617720"/>
-            <a:ext cx="274320" cy="274320"/>
+            <a:off x="3589706" y="3831336"/>
+            <a:ext cx="237744" cy="237744"/>
           </a:xfrm>
           <a:prstGeom prst="ellipse">
             <a:avLst/>
@@ -17701,8 +17701,8 @@
         </p:nvSpPr>
         <p:spPr>
           <a:xfrm>
-            <a:off x="3607994" y="4956048"/>
-            <a:ext cx="2282114" cy="274320"/>
+            <a:off x="3589706" y="4114800"/>
+            <a:ext cx="2318690" cy="237744"/>
           </a:xfrm>
           <a:prstGeom prst="rect">
             <a:avLst/>
@@ -17718,14 +17718,14 @@
               <a:buNone/>
             </a:pPr>
             <a:r>
-              <a:rPr lang="en-US" sz="1100" b="1" dirty="0">
+              <a:rPr lang="en-US" sz="950" b="1" dirty="0">
                 <a:solidFill>
                   <a:srgbClr val="0F1B2D"/>
                 </a:solidFill>
               </a:rPr>
-              <a:t>Evacuation Routing</a:t>
-            </a:r>
-            <a:endParaRPr lang="en-US" sz="1100" dirty="0"/>
+              <a:t>Live Incident Dashboard</a:t>
+            </a:r>
+            <a:endParaRPr lang="en-US" sz="950" dirty="0"/>
           </a:p>
         </p:txBody>
       </p:sp>
@@ -17737,8 +17737,8 @@
         </p:nvSpPr>
         <p:spPr>
           <a:xfrm>
-            <a:off x="3607994" y="5230368"/>
-            <a:ext cx="2282114" cy="384048"/>
+            <a:off x="3589706" y="4352544"/>
+            <a:ext cx="2318690" cy="246888"/>
           </a:xfrm>
           <a:prstGeom prst="rect">
             <a:avLst/>
@@ -17754,14 +17754,14 @@
               <a:buNone/>
             </a:pPr>
             <a:r>
-              <a:rPr lang="en-US" sz="850" dirty="0">
+              <a:rPr lang="en-US" sz="750" dirty="0">
                 <a:solidFill>
                   <a:srgbClr val="6B7684"/>
                 </a:solidFill>
               </a:rPr>
-              <a:t>OSRM road-network routing with automatic geodesic fallback</a:t>
-            </a:r>
-            <a:endParaRPr lang="en-US" sz="850" dirty="0"/>
+              <a:t>Multi-hazard map + detail panel, WebSocket-live</a:t>
+            </a:r>
+            <a:endParaRPr lang="en-US" sz="750" dirty="0"/>
           </a:p>
         </p:txBody>
       </p:sp>
@@ -17773,12 +17773,12 @@
         </p:nvSpPr>
         <p:spPr>
           <a:xfrm>
-            <a:off x="6164428" y="4480560"/>
-            <a:ext cx="2556434" cy="1188720"/>
+            <a:off x="6164428" y="3712464"/>
+            <a:ext cx="2556434" cy="896112"/>
           </a:xfrm>
           <a:prstGeom prst="roundRect">
             <a:avLst>
-              <a:gd name="adj" fmla="val 5385"/>
+              <a:gd name="adj" fmla="val 7143"/>
             </a:avLst>
           </a:prstGeom>
           <a:solidFill>
@@ -17800,8 +17800,8 @@
         </p:nvSpPr>
         <p:spPr>
           <a:xfrm>
-            <a:off x="6301588" y="4617720"/>
-            <a:ext cx="274320" cy="274320"/>
+            <a:off x="6283300" y="3831336"/>
+            <a:ext cx="237744" cy="237744"/>
           </a:xfrm>
           <a:prstGeom prst="ellipse">
             <a:avLst/>
@@ -17820,8 +17820,8 @@
         </p:nvSpPr>
         <p:spPr>
           <a:xfrm>
-            <a:off x="6301588" y="4956048"/>
-            <a:ext cx="2282114" cy="274320"/>
+            <a:off x="6283300" y="4114800"/>
+            <a:ext cx="2318690" cy="237744"/>
           </a:xfrm>
           <a:prstGeom prst="rect">
             <a:avLst/>
@@ -17837,14 +17837,14 @@
               <a:buNone/>
             </a:pPr>
             <a:r>
-              <a:rPr lang="en-US" sz="1100" b="1" dirty="0">
+              <a:rPr lang="en-US" sz="950" b="1" dirty="0">
                 <a:solidFill>
                   <a:srgbClr val="0F1B2D"/>
                 </a:solidFill>
               </a:rPr>
-              <a:t>Audience-Tailored Alerts</a:t>
-            </a:r>
-            <a:endParaRPr lang="en-US" sz="1100" dirty="0"/>
+              <a:t>Evacuation Routing</a:t>
+            </a:r>
+            <a:endParaRPr lang="en-US" sz="950" dirty="0"/>
           </a:p>
         </p:txBody>
       </p:sp>
@@ -17856,8 +17856,8 @@
         </p:nvSpPr>
         <p:spPr>
           <a:xfrm>
-            <a:off x="6301588" y="5230368"/>
-            <a:ext cx="2282114" cy="384048"/>
+            <a:off x="6283300" y="4352544"/>
+            <a:ext cx="2318690" cy="246888"/>
           </a:xfrm>
           <a:prstGeom prst="rect">
             <a:avLst/>
@@ -17873,14 +17873,14 @@
               <a:buNone/>
             </a:pPr>
             <a:r>
-              <a:rPr lang="en-US" sz="850" dirty="0">
+              <a:rPr lang="en-US" sz="750" dirty="0">
                 <a:solidFill>
                   <a:srgbClr val="6B7684"/>
                 </a:solidFill>
               </a:rPr>
-              <a:t>Role-based email dispatch — farmers, hospitals, NGOs, municipal corps</a:t>
-            </a:r>
-            <a:endParaRPr lang="en-US" sz="850" dirty="0"/>
+              <a:t>OSRM road-network routing with automatic geodesic fallback</a:t>
+            </a:r>
+            <a:endParaRPr lang="en-US" sz="750" dirty="0"/>
           </a:p>
         </p:txBody>
       </p:sp>
@@ -17892,12 +17892,12 @@
         </p:nvSpPr>
         <p:spPr>
           <a:xfrm>
-            <a:off x="8858021" y="4480560"/>
-            <a:ext cx="2556434" cy="1188720"/>
+            <a:off x="8858021" y="3712464"/>
+            <a:ext cx="2556434" cy="896112"/>
           </a:xfrm>
           <a:prstGeom prst="roundRect">
             <a:avLst>
-              <a:gd name="adj" fmla="val 5385"/>
+              <a:gd name="adj" fmla="val 7143"/>
             </a:avLst>
           </a:prstGeom>
           <a:solidFill>
@@ -17919,8 +17919,8 @@
         </p:nvSpPr>
         <p:spPr>
           <a:xfrm>
-            <a:off x="8995181" y="4617720"/>
-            <a:ext cx="274320" cy="274320"/>
+            <a:off x="8976893" y="3831336"/>
+            <a:ext cx="237744" cy="237744"/>
           </a:xfrm>
           <a:prstGeom prst="ellipse">
             <a:avLst/>
@@ -17939,8 +17939,8 @@
         </p:nvSpPr>
         <p:spPr>
           <a:xfrm>
-            <a:off x="8995181" y="4956048"/>
-            <a:ext cx="2282114" cy="274320"/>
+            <a:off x="8976893" y="4114800"/>
+            <a:ext cx="2318690" cy="237744"/>
           </a:xfrm>
           <a:prstGeom prst="rect">
             <a:avLst/>
@@ -17956,27 +17956,146 @@
               <a:buNone/>
             </a:pPr>
             <a:r>
-              <a:rPr lang="en-US" sz="1100" b="1" dirty="0">
+              <a:rPr lang="en-US" sz="950" b="1" dirty="0">
                 <a:solidFill>
                   <a:srgbClr val="0F1B2D"/>
                 </a:solidFill>
               </a:rPr>
+              <a:t>Audience-Tailored Alerts</a:t>
+            </a:r>
+            <a:endParaRPr lang="en-US" sz="950" dirty="0"/>
+          </a:p>
+        </p:txBody>
+      </p:sp>
+      <p:sp>
+        <p:nvSpPr>
+          <p:cNvPr id="55" name="Text 52"/>
+          <p:cNvSpPr txBox="1"/>
+          <p:nvPr/>
+        </p:nvSpPr>
+        <p:spPr>
+          <a:xfrm>
+            <a:off x="8976893" y="4352544"/>
+            <a:ext cx="2318690" cy="246888"/>
+          </a:xfrm>
+          <a:prstGeom prst="rect">
+            <a:avLst/>
+          </a:prstGeom>
+          <a:noFill/>
+          <a:ln/>
+        </p:spPr>
+        <p:txBody>
+          <a:bodyPr wrap="square" lIns="0" tIns="0" rIns="0" bIns="0" rtlCol="0" anchor="t"/>
+          <a:lstStyle/>
+          <a:p>
+            <a:pPr indent="0" marL="0">
+              <a:buNone/>
+            </a:pPr>
+            <a:r>
+              <a:rPr lang="en-US" sz="750" dirty="0">
+                <a:solidFill>
+                  <a:srgbClr val="6B7684"/>
+                </a:solidFill>
+              </a:rPr>
+              <a:t>Role-based email dispatch — farmers, hospitals, NGOs, municipal corps</a:t>
+            </a:r>
+            <a:endParaRPr lang="en-US" sz="750" dirty="0"/>
+          </a:p>
+        </p:txBody>
+      </p:sp>
+      <p:sp>
+        <p:nvSpPr>
+          <p:cNvPr id="56" name="Shape 53"/>
+          <p:cNvSpPr/>
+          <p:nvPr/>
+        </p:nvSpPr>
+        <p:spPr>
+          <a:xfrm>
+            <a:off x="777240" y="4700016"/>
+            <a:ext cx="2556434" cy="896112"/>
+          </a:xfrm>
+          <a:prstGeom prst="roundRect">
+            <a:avLst>
+              <a:gd name="adj" fmla="val 7143"/>
+            </a:avLst>
+          </a:prstGeom>
+          <a:solidFill>
+            <a:srgbClr val="FFFFFF"/>
+          </a:solidFill>
+          <a:ln w="9525">
+            <a:solidFill>
+              <a:srgbClr val="E2E1D6"/>
+            </a:solidFill>
+            <a:prstDash val="solid"/>
+          </a:ln>
+        </p:spPr>
+      </p:sp>
+      <p:sp>
+        <p:nvSpPr>
+          <p:cNvPr id="57" name="Shape 54"/>
+          <p:cNvSpPr/>
+          <p:nvPr/>
+        </p:nvSpPr>
+        <p:spPr>
+          <a:xfrm>
+            <a:off x="896112" y="4818888"/>
+            <a:ext cx="237744" cy="237744"/>
+          </a:xfrm>
+          <a:prstGeom prst="ellipse">
+            <a:avLst/>
+          </a:prstGeom>
+          <a:solidFill>
+            <a:srgbClr val="5B6472"/>
+          </a:solidFill>
+          <a:ln/>
+        </p:spPr>
+      </p:sp>
+      <p:sp>
+        <p:nvSpPr>
+          <p:cNvPr id="58" name="Text 55"/>
+          <p:cNvSpPr txBox="1"/>
+          <p:nvPr/>
+        </p:nvSpPr>
+        <p:spPr>
+          <a:xfrm>
+            <a:off x="896112" y="5102352"/>
+            <a:ext cx="2318690" cy="237744"/>
+          </a:xfrm>
+          <a:prstGeom prst="rect">
+            <a:avLst/>
+          </a:prstGeom>
+          <a:noFill/>
+          <a:ln/>
+        </p:spPr>
+        <p:txBody>
+          <a:bodyPr wrap="square" lIns="0" tIns="0" rIns="0" bIns="0" rtlCol="0" anchor="ctr"/>
+          <a:lstStyle/>
+          <a:p>
+            <a:pPr indent="0" marL="0">
+              <a:buNone/>
+            </a:pPr>
+            <a:r>
+              <a:rPr lang="en-US" sz="950" b="1" dirty="0">
+                <a:solidFill>
+                  <a:srgbClr val="0F1B2D"/>
+                </a:solidFill>
+              </a:rPr>
               <a:t>Multi-Language UI</a:t>
             </a:r>
-            <a:endParaRPr lang="en-US" sz="1100" dirty="0"/>
-          </a:p>
-        </p:txBody>
-      </p:sp>
-      <p:sp>
-        <p:nvSpPr>
-          <p:cNvPr id="55" name="Text 52"/>
-          <p:cNvSpPr txBox="1"/>
-          <p:nvPr/>
-        </p:nvSpPr>
-        <p:spPr>
-          <a:xfrm>
-            <a:off x="8995181" y="5230368"/>
-            <a:ext cx="2282114" cy="384048"/>
+            <a:endParaRPr lang="en-US" sz="950" dirty="0"/>
+          </a:p>
+        </p:txBody>
+      </p:sp>
+      <p:sp>
+        <p:nvSpPr>
+          <p:cNvPr id="59" name="Text 56"/>
+          <p:cNvSpPr txBox="1"/>
+          <p:nvPr/>
+        </p:nvSpPr>
+        <p:spPr>
+          <a:xfrm>
+            <a:off x="896112" y="5340096"/>
+            <a:ext cx="2318690" cy="246888"/>
           </a:xfrm>
           <a:prstGeom prst="rect">
             <a:avLst/>
@@ -17992,26 +18111,26 @@
               <a:buNone/>
             </a:pPr>
             <a:r>
-              <a:rPr lang="en-US" sz="850" dirty="0">
+              <a:rPr lang="en-US" sz="750" dirty="0">
                 <a:solidFill>
                   <a:srgbClr val="6B7684"/>
                 </a:solidFill>
               </a:rPr>
               <a:t>vue-i18n across the dashboard, with interactive Mapbox GL mapping</a:t>
             </a:r>
-            <a:endParaRPr lang="en-US" sz="850" dirty="0"/>
-          </a:p>
-        </p:txBody>
-      </p:sp>
-      <p:sp>
-        <p:nvSpPr>
-          <p:cNvPr id="56" name="Text 53"/>
-          <p:cNvSpPr txBox="1"/>
-          <p:nvPr/>
-        </p:nvSpPr>
-        <p:spPr>
-          <a:xfrm>
-            <a:off x="777240" y="5989320"/>
+            <a:endParaRPr lang="en-US" sz="750" dirty="0"/>
+          </a:p>
+        </p:txBody>
+      </p:sp>
+      <p:sp>
+        <p:nvSpPr>
+          <p:cNvPr id="60" name="Text 57"/>
+          <p:cNvSpPr txBox="1"/>
+          <p:nvPr/>
+        </p:nvSpPr>
+        <p:spPr>
+          <a:xfrm>
+            <a:off x="777240" y="5897880"/>
             <a:ext cx="10637215" cy="365760"/>
           </a:xfrm>
           <a:prstGeom prst="rect">
@@ -18028,14 +18147,14 @@
               <a:buNone/>
             </a:pPr>
             <a:r>
-              <a:rPr lang="en-US" sz="1050" i="1" dirty="0">
+              <a:rPr lang="en-US" sz="1000" i="1" dirty="0">
                 <a:solidFill>
                   <a:srgbClr val="8A8470"/>
                 </a:solidFill>
               </a:rPr>
               <a:t>WhatsApp (WAHA) alerting is built and self-hosted but not yet production-reliable; SMS is in progress — both stay off this list until confirmed.</a:t>
             </a:r>
-            <a:endParaRPr lang="en-US" sz="1050" dirty="0"/>
+            <a:endParaRPr lang="en-US" sz="1000" dirty="0"/>
           </a:p>
         </p:txBody>
       </p:sp>

--- a/docs/PPT/TerraGrid_AI_Builder_Cup_Submission_copilot_terragrid.pptx
+++ b/docs/PPT/TerraGrid_AI_Builder_Cup_Submission_copilot_terragrid.pptx
@@ -16569,7 +16569,7 @@
                 <a:ea typeface="Cambria" pitchFamily="34" charset="-122"/>
                 <a:cs typeface="Cambria" pitchFamily="34" charset="-120"/>
               </a:rPr>
-              <a:t>Everything Built And Working Today</a:t>
+              <a:t>Features Offered By The Solution</a:t>
             </a:r>
             <a:endParaRPr lang="en-US" sz="2400" dirty="0"/>
           </a:p>
@@ -16584,36 +16584,143 @@
         <p:spPr>
           <a:xfrm>
             <a:off x="777240" y="1737360"/>
-            <a:ext cx="2556434" cy="896112"/>
-          </a:xfrm>
-          <a:prstGeom prst="roundRect">
-            <a:avLst>
-              <a:gd name="adj" fmla="val 7143"/>
-            </a:avLst>
+            <a:ext cx="2556434" cy="54864"/>
+          </a:xfrm>
+          <a:prstGeom prst="rect">
+            <a:avLst/>
+          </a:prstGeom>
+          <a:solidFill>
+            <a:srgbClr val="5B6472"/>
+          </a:solidFill>
+          <a:ln/>
+        </p:spPr>
+      </p:sp>
+      <p:sp>
+        <p:nvSpPr>
+          <p:cNvPr id="9" name="Shape 6"/>
+          <p:cNvSpPr/>
+          <p:nvPr/>
+        </p:nvSpPr>
+        <p:spPr>
+          <a:xfrm>
+            <a:off x="777240" y="1792224"/>
+            <a:ext cx="2556434" cy="3968496"/>
+          </a:xfrm>
+          <a:prstGeom prst="rect">
+            <a:avLst/>
           </a:prstGeom>
           <a:solidFill>
             <a:srgbClr val="FFFFFF"/>
           </a:solidFill>
-          <a:ln w="9525">
-            <a:solidFill>
-              <a:srgbClr val="E2E1D6"/>
-            </a:solidFill>
-            <a:prstDash val="solid"/>
-          </a:ln>
-        </p:spPr>
-      </p:sp>
-      <p:sp>
-        <p:nvSpPr>
-          <p:cNvPr id="9" name="Shape 6"/>
+          <a:ln/>
+        </p:spPr>
+      </p:sp>
+      <p:sp>
+        <p:nvSpPr>
+          <p:cNvPr id="10" name="Text 7"/>
+          <p:cNvSpPr txBox="1"/>
+          <p:nvPr/>
+        </p:nvSpPr>
+        <p:spPr>
+          <a:xfrm>
+            <a:off x="914400" y="1901952"/>
+            <a:ext cx="2282114" cy="320040"/>
+          </a:xfrm>
+          <a:prstGeom prst="rect">
+            <a:avLst/>
+          </a:prstGeom>
+          <a:noFill/>
+          <a:ln/>
+        </p:spPr>
+        <p:txBody>
+          <a:bodyPr wrap="square" lIns="0" tIns="0" rIns="0" bIns="0" rtlCol="0" anchor="ctr"/>
+          <a:lstStyle/>
+          <a:p>
+            <a:pPr indent="0" marL="0">
+              <a:buNone/>
+            </a:pPr>
+            <a:r>
+              <a:rPr lang="en-US" sz="1500" b="1" dirty="0">
+                <a:solidFill>
+                  <a:srgbClr val="5B6472"/>
+                </a:solidFill>
+              </a:rPr>
+              <a:t>Predict</a:t>
+            </a:r>
+            <a:endParaRPr lang="en-US" sz="1500" dirty="0"/>
+          </a:p>
+        </p:txBody>
+      </p:sp>
+      <p:sp>
+        <p:nvSpPr>
+          <p:cNvPr id="11" name="Text 8"/>
+          <p:cNvSpPr txBox="1"/>
+          <p:nvPr/>
+        </p:nvSpPr>
+        <p:spPr>
+          <a:xfrm>
+            <a:off x="914400" y="2286000"/>
+            <a:ext cx="2282114" cy="3337560"/>
+          </a:xfrm>
+          <a:prstGeom prst="rect">
+            <a:avLst/>
+          </a:prstGeom>
+          <a:noFill/>
+          <a:ln/>
+        </p:spPr>
+        <p:txBody>
+          <a:bodyPr wrap="square" lIns="0" tIns="0" rIns="0" bIns="0" rtlCol="0" anchor="t"/>
+          <a:lstStyle/>
+          <a:p>
+            <a:pPr marL="342900" indent="-342900">
+              <a:spcAft>
+                <a:spcPts val="800"/>
+              </a:spcAft>
+              <a:buSzPct val="100000"/>
+              <a:buChar char="✓"/>
+            </a:pPr>
+            <a:r>
+              <a:rPr lang="en-US" sz="1050" dirty="0">
+                <a:solidFill>
+                  <a:srgbClr val="3A4452"/>
+                </a:solidFill>
+              </a:rPr>
+              <a:t>6-month early-warning signal from climate indicators — ENSO, seasonal rainfall outlook</a:t>
+            </a:r>
+            <a:endParaRPr lang="en-US" sz="1050" dirty="0"/>
+          </a:p>
+          <a:p>
+            <a:pPr marL="342900" indent="-342900">
+              <a:spcAft>
+                <a:spcPts val="800"/>
+              </a:spcAft>
+              <a:buSzPct val="100000"/>
+              <a:buChar char="✓"/>
+            </a:pPr>
+            <a:r>
+              <a:rPr lang="en-US" sz="1050" dirty="0">
+                <a:solidFill>
+                  <a:srgbClr val="3A4452"/>
+                </a:solidFill>
+              </a:rPr>
+              <a:t>Surfaced on a climate-signal dashboard</a:t>
+            </a:r>
+            <a:endParaRPr lang="en-US" sz="1050" dirty="0"/>
+          </a:p>
+        </p:txBody>
+      </p:sp>
+      <p:sp>
+        <p:nvSpPr>
+          <p:cNvPr id="12" name="Shape 9"/>
           <p:cNvSpPr/>
           <p:nvPr/>
         </p:nvSpPr>
         <p:spPr>
           <a:xfrm>
-            <a:off x="896112" y="1856232"/>
-            <a:ext cx="237744" cy="237744"/>
-          </a:xfrm>
-          <a:prstGeom prst="ellipse">
+            <a:off x="3470834" y="1737360"/>
+            <a:ext cx="2556434" cy="54864"/>
+          </a:xfrm>
+          <a:prstGeom prst="rect">
             <a:avLst/>
           </a:prstGeom>
           <a:solidFill>
@@ -16624,120 +16731,21 @@
       </p:sp>
       <p:sp>
         <p:nvSpPr>
-          <p:cNvPr id="10" name="Text 7"/>
-          <p:cNvSpPr txBox="1"/>
-          <p:nvPr/>
-        </p:nvSpPr>
-        <p:spPr>
-          <a:xfrm>
-            <a:off x="896112" y="2139696"/>
-            <a:ext cx="2318690" cy="237744"/>
-          </a:xfrm>
-          <a:prstGeom prst="rect">
-            <a:avLst/>
-          </a:prstGeom>
-          <a:noFill/>
-          <a:ln/>
-        </p:spPr>
-        <p:txBody>
-          <a:bodyPr wrap="square" lIns="0" tIns="0" rIns="0" bIns="0" rtlCol="0" anchor="ctr"/>
-          <a:lstStyle/>
-          <a:p>
-            <a:pPr indent="0" marL="0">
-              <a:buNone/>
-            </a:pPr>
-            <a:r>
-              <a:rPr lang="en-US" sz="950" b="1" dirty="0">
-                <a:solidFill>
-                  <a:srgbClr val="0F1B2D"/>
-                </a:solidFill>
-              </a:rPr>
-              <a:t>Multi-Source Intelligence</a:t>
-            </a:r>
-            <a:endParaRPr lang="en-US" sz="950" dirty="0"/>
-          </a:p>
-        </p:txBody>
-      </p:sp>
-      <p:sp>
-        <p:nvSpPr>
-          <p:cNvPr id="11" name="Text 8"/>
-          <p:cNvSpPr txBox="1"/>
-          <p:nvPr/>
-        </p:nvSpPr>
-        <p:spPr>
-          <a:xfrm>
-            <a:off x="896112" y="2377440"/>
-            <a:ext cx="2318690" cy="246888"/>
-          </a:xfrm>
-          <a:prstGeom prst="rect">
-            <a:avLst/>
-          </a:prstGeom>
-          <a:noFill/>
-          <a:ln/>
-        </p:spPr>
-        <p:txBody>
-          <a:bodyPr wrap="square" lIns="0" tIns="0" rIns="0" bIns="0" rtlCol="0" anchor="t"/>
-          <a:lstStyle/>
-          <a:p>
-            <a:pPr indent="0" marL="0">
-              <a:buNone/>
-            </a:pPr>
-            <a:r>
-              <a:rPr lang="en-US" sz="750" dirty="0">
-                <a:solidFill>
-                  <a:srgbClr val="6B7684"/>
-                </a:solidFill>
-              </a:rPr>
-              <a:t>6 live APIs auto-ingested — NASA EONET, USGS, NOAA, GDACS, OpenWeatherMap, OSM/Overpass</a:t>
-            </a:r>
-            <a:endParaRPr lang="en-US" sz="750" dirty="0"/>
-          </a:p>
-        </p:txBody>
-      </p:sp>
-      <p:sp>
-        <p:nvSpPr>
-          <p:cNvPr id="12" name="Shape 9"/>
+          <p:cNvPr id="13" name="Shape 10"/>
           <p:cNvSpPr/>
           <p:nvPr/>
         </p:nvSpPr>
         <p:spPr>
           <a:xfrm>
-            <a:off x="3470834" y="1737360"/>
-            <a:ext cx="2556434" cy="896112"/>
-          </a:xfrm>
-          <a:prstGeom prst="roundRect">
-            <a:avLst>
-              <a:gd name="adj" fmla="val 7143"/>
-            </a:avLst>
+            <a:off x="3470834" y="1792224"/>
+            <a:ext cx="2556434" cy="3968496"/>
+          </a:xfrm>
+          <a:prstGeom prst="rect">
+            <a:avLst/>
           </a:prstGeom>
           <a:solidFill>
             <a:srgbClr val="FFFFFF"/>
           </a:solidFill>
-          <a:ln w="9525">
-            <a:solidFill>
-              <a:srgbClr val="E2E1D6"/>
-            </a:solidFill>
-            <a:prstDash val="solid"/>
-          </a:ln>
-        </p:spPr>
-      </p:sp>
-      <p:sp>
-        <p:nvSpPr>
-          <p:cNvPr id="13" name="Shape 10"/>
-          <p:cNvSpPr/>
-          <p:nvPr/>
-        </p:nvSpPr>
-        <p:spPr>
-          <a:xfrm>
-            <a:off x="3589706" y="1856232"/>
-            <a:ext cx="237744" cy="237744"/>
-          </a:xfrm>
-          <a:prstGeom prst="ellipse">
-            <a:avLst/>
-          </a:prstGeom>
-          <a:solidFill>
-            <a:srgbClr val="0E7490"/>
-          </a:solidFill>
           <a:ln/>
         </p:spPr>
       </p:sp>
@@ -16749,8 +16757,8 @@
         </p:nvSpPr>
         <p:spPr>
           <a:xfrm>
-            <a:off x="3589706" y="2139696"/>
-            <a:ext cx="2318690" cy="237744"/>
+            <a:off x="3607994" y="1901952"/>
+            <a:ext cx="2282114" cy="320040"/>
           </a:xfrm>
           <a:prstGeom prst="rect">
             <a:avLst/>
@@ -16766,14 +16774,14 @@
               <a:buNone/>
             </a:pPr>
             <a:r>
-              <a:rPr lang="en-US" sz="950" b="1" dirty="0">
-                <a:solidFill>
-                  <a:srgbClr val="0F1B2D"/>
-                </a:solidFill>
-              </a:rPr>
-              <a:t>AI Decision Support</a:t>
-            </a:r>
-            <a:endParaRPr lang="en-US" sz="950" dirty="0"/>
+              <a:rPr lang="en-US" sz="1500" b="1" dirty="0">
+                <a:solidFill>
+                  <a:srgbClr val="0E7490"/>
+                </a:solidFill>
+              </a:rPr>
+              <a:t>Prepare</a:t>
+            </a:r>
+            <a:endParaRPr lang="en-US" sz="1500" dirty="0"/>
           </a:p>
         </p:txBody>
       </p:sp>
@@ -16785,8 +16793,8 @@
         </p:nvSpPr>
         <p:spPr>
           <a:xfrm>
-            <a:off x="3589706" y="2377440"/>
-            <a:ext cx="2318690" cy="246888"/>
+            <a:off x="3607994" y="2286000"/>
+            <a:ext cx="2282114" cy="3337560"/>
           </a:xfrm>
           <a:prstGeom prst="rect">
             <a:avLst/>
@@ -16798,18 +16806,94 @@
           <a:bodyPr wrap="square" lIns="0" tIns="0" rIns="0" bIns="0" rtlCol="0" anchor="t"/>
           <a:lstStyle/>
           <a:p>
-            <a:pPr indent="0" marL="0">
-              <a:buNone/>
-            </a:pPr>
-            <a:r>
-              <a:rPr lang="en-US" sz="750" dirty="0">
-                <a:solidFill>
-                  <a:srgbClr val="6B7684"/>
-                </a:solidFill>
-              </a:rPr>
-              <a:t>Gemini 2.5 Flash generates action plans with confidence scoring</a:t>
-            </a:r>
-            <a:endParaRPr lang="en-US" sz="750" dirty="0"/>
+            <a:pPr marL="342900" indent="-342900">
+              <a:spcAft>
+                <a:spcPts val="800"/>
+              </a:spcAft>
+              <a:buSzPct val="100000"/>
+              <a:buChar char="✓"/>
+            </a:pPr>
+            <a:r>
+              <a:rPr lang="en-US" sz="1050" dirty="0">
+                <a:solidFill>
+                  <a:srgbClr val="3A4452"/>
+                </a:solidFill>
+              </a:rPr>
+              <a:t>7-day risk forecasting across 8 cities</a:t>
+            </a:r>
+            <a:endParaRPr lang="en-US" sz="1050" dirty="0"/>
+          </a:p>
+          <a:p>
+            <a:pPr marL="342900" indent="-342900">
+              <a:spcAft>
+                <a:spcPts val="800"/>
+              </a:spcAft>
+              <a:buSzPct val="100000"/>
+              <a:buChar char="✓"/>
+            </a:pPr>
+            <a:r>
+              <a:rPr lang="en-US" sz="1050" dirty="0">
+                <a:solidFill>
+                  <a:srgbClr val="3A4452"/>
+                </a:solidFill>
+              </a:rPr>
+              <a:t>AI-generated risk-escalation timeline</a:t>
+            </a:r>
+            <a:endParaRPr lang="en-US" sz="1050" dirty="0"/>
+          </a:p>
+          <a:p>
+            <a:pPr marL="342900" indent="-342900">
+              <a:spcAft>
+                <a:spcPts val="800"/>
+              </a:spcAft>
+              <a:buSzPct val="100000"/>
+              <a:buChar char="✓"/>
+            </a:pPr>
+            <a:r>
+              <a:rPr lang="en-US" sz="1050" dirty="0">
+                <a:solidFill>
+                  <a:srgbClr val="3A4452"/>
+                </a:solidFill>
+              </a:rPr>
+              <a:t>Preparedness checklists, auto-generated per agency</a:t>
+            </a:r>
+            <a:endParaRPr lang="en-US" sz="1050" dirty="0"/>
+          </a:p>
+          <a:p>
+            <a:pPr marL="342900" indent="-342900">
+              <a:spcAft>
+                <a:spcPts val="800"/>
+              </a:spcAft>
+              <a:buSzPct val="100000"/>
+              <a:buChar char="✓"/>
+            </a:pPr>
+            <a:r>
+              <a:rPr lang="en-US" sz="1050" dirty="0">
+                <a:solidFill>
+                  <a:srgbClr val="3A4452"/>
+                </a:solidFill>
+              </a:rPr>
+              <a:t>Automated agency alert drafting</a:t>
+            </a:r>
+            <a:endParaRPr lang="en-US" sz="1050" dirty="0"/>
+          </a:p>
+          <a:p>
+            <a:pPr marL="342900" indent="-342900">
+              <a:spcAft>
+                <a:spcPts val="800"/>
+              </a:spcAft>
+              <a:buSzPct val="100000"/>
+              <a:buChar char="✓"/>
+            </a:pPr>
+            <a:r>
+              <a:rPr lang="en-US" sz="1050" dirty="0">
+                <a:solidFill>
+                  <a:srgbClr val="3A4452"/>
+                </a:solidFill>
+              </a:rPr>
+              <a:t>Source of Truth — 4-layer data lineage per incident</a:t>
+            </a:r>
+            <a:endParaRPr lang="en-US" sz="1050" dirty="0"/>
           </a:p>
         </p:txBody>
       </p:sp>
@@ -16822,41 +16906,34 @@
         <p:spPr>
           <a:xfrm>
             <a:off x="6164428" y="1737360"/>
-            <a:ext cx="2556434" cy="896112"/>
-          </a:xfrm>
-          <a:prstGeom prst="roundRect">
-            <a:avLst>
-              <a:gd name="adj" fmla="val 7143"/>
-            </a:avLst>
+            <a:ext cx="2556434" cy="54864"/>
+          </a:xfrm>
+          <a:prstGeom prst="rect">
+            <a:avLst/>
+          </a:prstGeom>
+          <a:solidFill>
+            <a:srgbClr val="E8722C"/>
+          </a:solidFill>
+          <a:ln/>
+        </p:spPr>
+      </p:sp>
+      <p:sp>
+        <p:nvSpPr>
+          <p:cNvPr id="17" name="Shape 14"/>
+          <p:cNvSpPr/>
+          <p:nvPr/>
+        </p:nvSpPr>
+        <p:spPr>
+          <a:xfrm>
+            <a:off x="6164428" y="1792224"/>
+            <a:ext cx="2556434" cy="3968496"/>
+          </a:xfrm>
+          <a:prstGeom prst="rect">
+            <a:avLst/>
           </a:prstGeom>
           <a:solidFill>
             <a:srgbClr val="FFFFFF"/>
           </a:solidFill>
-          <a:ln w="9525">
-            <a:solidFill>
-              <a:srgbClr val="E2E1D6"/>
-            </a:solidFill>
-            <a:prstDash val="solid"/>
-          </a:ln>
-        </p:spPr>
-      </p:sp>
-      <p:sp>
-        <p:nvSpPr>
-          <p:cNvPr id="17" name="Shape 14"/>
-          <p:cNvSpPr/>
-          <p:nvPr/>
-        </p:nvSpPr>
-        <p:spPr>
-          <a:xfrm>
-            <a:off x="6283300" y="1856232"/>
-            <a:ext cx="237744" cy="237744"/>
-          </a:xfrm>
-          <a:prstGeom prst="ellipse">
-            <a:avLst/>
-          </a:prstGeom>
-          <a:solidFill>
-            <a:srgbClr val="0E7490"/>
-          </a:solidFill>
           <a:ln/>
         </p:spPr>
       </p:sp>
@@ -16868,8 +16945,8 @@
         </p:nvSpPr>
         <p:spPr>
           <a:xfrm>
-            <a:off x="6283300" y="2139696"/>
-            <a:ext cx="2318690" cy="237744"/>
+            <a:off x="6301588" y="1901952"/>
+            <a:ext cx="2282114" cy="320040"/>
           </a:xfrm>
           <a:prstGeom prst="rect">
             <a:avLst/>
@@ -16885,14 +16962,14 @@
               <a:buNone/>
             </a:pPr>
             <a:r>
-              <a:rPr lang="en-US" sz="950" b="1" dirty="0">
-                <a:solidFill>
-                  <a:srgbClr val="0F1B2D"/>
-                </a:solidFill>
-              </a:rPr>
-              <a:t>Satellite Verification</a:t>
-            </a:r>
-            <a:endParaRPr lang="en-US" sz="950" dirty="0"/>
+              <a:rPr lang="en-US" sz="1500" b="1" dirty="0">
+                <a:solidFill>
+                  <a:srgbClr val="E8722C"/>
+                </a:solidFill>
+              </a:rPr>
+              <a:t>Respond</a:t>
+            </a:r>
+            <a:endParaRPr lang="en-US" sz="1500" dirty="0"/>
           </a:p>
         </p:txBody>
       </p:sp>
@@ -16904,8 +16981,8 @@
         </p:nvSpPr>
         <p:spPr>
           <a:xfrm>
-            <a:off x="6283300" y="2377440"/>
-            <a:ext cx="2318690" cy="246888"/>
+            <a:off x="6301588" y="2286000"/>
+            <a:ext cx="2282114" cy="3337560"/>
           </a:xfrm>
           <a:prstGeom prst="rect">
             <a:avLst/>
@@ -16917,18 +16994,184 @@
           <a:bodyPr wrap="square" lIns="0" tIns="0" rIns="0" bIns="0" rtlCol="0" anchor="t"/>
           <a:lstStyle/>
           <a:p>
-            <a:pPr indent="0" marL="0">
-              <a:buNone/>
-            </a:pPr>
-            <a:r>
-              <a:rPr lang="en-US" sz="750" dirty="0">
-                <a:solidFill>
-                  <a:srgbClr val="6B7684"/>
-                </a:solidFill>
-              </a:rPr>
-              <a:t>Sentinel-1 SAR cross-validation via Google Earth Engine</a:t>
-            </a:r>
-            <a:endParaRPr lang="en-US" sz="750" dirty="0"/>
+            <a:pPr marL="342900" indent="-342900">
+              <a:spcAft>
+                <a:spcPts val="400"/>
+              </a:spcAft>
+              <a:buSzPct val="100000"/>
+              <a:buChar char="✓"/>
+            </a:pPr>
+            <a:r>
+              <a:rPr lang="en-US" sz="830" dirty="0">
+                <a:solidFill>
+                  <a:srgbClr val="3A4452"/>
+                </a:solidFill>
+              </a:rPr>
+              <a:t>Interactive Mapbox GL live map with real-time incident markers</a:t>
+            </a:r>
+            <a:endParaRPr lang="en-US" sz="830" dirty="0"/>
+          </a:p>
+          <a:p>
+            <a:pPr marL="342900" indent="-342900">
+              <a:spcAft>
+                <a:spcPts val="400"/>
+              </a:spcAft>
+              <a:buSzPct val="100000"/>
+              <a:buChar char="✓"/>
+            </a:pPr>
+            <a:r>
+              <a:rPr lang="en-US" sz="830" dirty="0">
+                <a:solidFill>
+                  <a:srgbClr val="3A4452"/>
+                </a:solidFill>
+              </a:rPr>
+              <a:t>Live multi-hazard incident dashboard — map + detail panel</a:t>
+            </a:r>
+            <a:endParaRPr lang="en-US" sz="830" dirty="0"/>
+          </a:p>
+          <a:p>
+            <a:pPr marL="342900" indent="-342900">
+              <a:spcAft>
+                <a:spcPts val="400"/>
+              </a:spcAft>
+              <a:buSzPct val="100000"/>
+              <a:buChar char="✓"/>
+            </a:pPr>
+            <a:r>
+              <a:rPr lang="en-US" sz="830" dirty="0">
+                <a:solidFill>
+                  <a:srgbClr val="3A4452"/>
+                </a:solidFill>
+              </a:rPr>
+              <a:t>Real-time WebSocket updates across the dashboard</a:t>
+            </a:r>
+            <a:endParaRPr lang="en-US" sz="830" dirty="0"/>
+          </a:p>
+          <a:p>
+            <a:pPr marL="342900" indent="-342900">
+              <a:spcAft>
+                <a:spcPts val="400"/>
+              </a:spcAft>
+              <a:buSzPct val="100000"/>
+              <a:buChar char="✓"/>
+            </a:pPr>
+            <a:r>
+              <a:rPr lang="en-US" sz="830" dirty="0">
+                <a:solidFill>
+                  <a:srgbClr val="3A4452"/>
+                </a:solidFill>
+              </a:rPr>
+              <a:t>Gemini 2.5 Flash decision support with confidence scoring</a:t>
+            </a:r>
+            <a:endParaRPr lang="en-US" sz="830" dirty="0"/>
+          </a:p>
+          <a:p>
+            <a:pPr marL="342900" indent="-342900">
+              <a:spcAft>
+                <a:spcPts val="400"/>
+              </a:spcAft>
+              <a:buSzPct val="100000"/>
+              <a:buChar char="✓"/>
+            </a:pPr>
+            <a:r>
+              <a:rPr lang="en-US" sz="830" dirty="0">
+                <a:solidFill>
+                  <a:srgbClr val="3A4452"/>
+                </a:solidFill>
+              </a:rPr>
+              <a:t>Satellite cross-validation — Sentinel-1 SAR via Google Earth Engine</a:t>
+            </a:r>
+            <a:endParaRPr lang="en-US" sz="830" dirty="0"/>
+          </a:p>
+          <a:p>
+            <a:pPr marL="342900" indent="-342900">
+              <a:spcAft>
+                <a:spcPts val="400"/>
+              </a:spcAft>
+              <a:buSzPct val="100000"/>
+              <a:buChar char="✓"/>
+            </a:pPr>
+            <a:r>
+              <a:rPr lang="en-US" sz="830" dirty="0">
+                <a:solidFill>
+                  <a:srgbClr val="3A4452"/>
+                </a:solidFill>
+              </a:rPr>
+              <a:t>Evacuation-route pre-calculation — OSRM + geodesic fallback</a:t>
+            </a:r>
+            <a:endParaRPr lang="en-US" sz="830" dirty="0"/>
+          </a:p>
+          <a:p>
+            <a:pPr marL="342900" indent="-342900">
+              <a:spcAft>
+                <a:spcPts val="400"/>
+              </a:spcAft>
+              <a:buSzPct val="100000"/>
+              <a:buChar char="✓"/>
+            </a:pPr>
+            <a:r>
+              <a:rPr lang="en-US" sz="830" dirty="0">
+                <a:solidFill>
+                  <a:srgbClr val="3A4452"/>
+                </a:solidFill>
+              </a:rPr>
+              <a:t>Audience-tailored email alerts — farmers, hospitals, NGOs, municipal corps</a:t>
+            </a:r>
+            <a:endParaRPr lang="en-US" sz="830" dirty="0"/>
+          </a:p>
+          <a:p>
+            <a:pPr marL="342900" indent="-342900">
+              <a:spcAft>
+                <a:spcPts val="400"/>
+              </a:spcAft>
+              <a:buSzPct val="100000"/>
+              <a:buChar char="✓"/>
+            </a:pPr>
+            <a:r>
+              <a:rPr lang="en-US" sz="830" dirty="0">
+                <a:solidFill>
+                  <a:srgbClr val="3A4452"/>
+                </a:solidFill>
+              </a:rPr>
+              <a:t>Decision-lineage logging for every AI output</a:t>
+            </a:r>
+            <a:endParaRPr lang="en-US" sz="830" dirty="0"/>
+          </a:p>
+          <a:p>
+            <a:pPr marL="342900" indent="-342900">
+              <a:spcAft>
+                <a:spcPts val="400"/>
+              </a:spcAft>
+              <a:buSzPct val="100000"/>
+              <a:buChar char="✓"/>
+            </a:pPr>
+            <a:r>
+              <a:rPr lang="en-US" sz="830" dirty="0">
+                <a:solidFill>
+                  <a:srgbClr val="3A4452"/>
+                </a:solidFill>
+              </a:rPr>
+              <a:t>Multi-source live ingestion — 6 APIs (NASA EONET, USGS, NOAA, GDACS, OpenWeatherMap, OSM/Overpass)</a:t>
+            </a:r>
+            <a:endParaRPr lang="en-US" sz="830" dirty="0"/>
+          </a:p>
+          <a:p>
+            <a:pPr marL="342900" indent="-342900">
+              <a:spcAft>
+                <a:spcPts val="400"/>
+              </a:spcAft>
+              <a:buSzPct val="100000"/>
+              <a:buChar char="✓"/>
+            </a:pPr>
+            <a:r>
+              <a:rPr lang="en-US" sz="830" dirty="0">
+                <a:solidFill>
+                  <a:srgbClr val="3A4452"/>
+                </a:solidFill>
+              </a:rPr>
+              <a:t>Multi-language UI (vue-i18n)</a:t>
+            </a:r>
+            <a:endParaRPr lang="en-US" sz="830" dirty="0"/>
           </a:p>
         </p:txBody>
       </p:sp>
@@ -16941,41 +17184,34 @@
         <p:spPr>
           <a:xfrm>
             <a:off x="8858021" y="1737360"/>
-            <a:ext cx="2556434" cy="896112"/>
-          </a:xfrm>
-          <a:prstGeom prst="roundRect">
-            <a:avLst>
-              <a:gd name="adj" fmla="val 7143"/>
-            </a:avLst>
+            <a:ext cx="2556434" cy="54864"/>
+          </a:xfrm>
+          <a:prstGeom prst="rect">
+            <a:avLst/>
+          </a:prstGeom>
+          <a:solidFill>
+            <a:srgbClr val="5B6472"/>
+          </a:solidFill>
+          <a:ln/>
+        </p:spPr>
+      </p:sp>
+      <p:sp>
+        <p:nvSpPr>
+          <p:cNvPr id="21" name="Shape 18"/>
+          <p:cNvSpPr/>
+          <p:nvPr/>
+        </p:nvSpPr>
+        <p:spPr>
+          <a:xfrm>
+            <a:off x="8858021" y="1792224"/>
+            <a:ext cx="2556434" cy="3968496"/>
+          </a:xfrm>
+          <a:prstGeom prst="rect">
+            <a:avLst/>
           </a:prstGeom>
           <a:solidFill>
             <a:srgbClr val="FFFFFF"/>
           </a:solidFill>
-          <a:ln w="9525">
-            <a:solidFill>
-              <a:srgbClr val="E2E1D6"/>
-            </a:solidFill>
-            <a:prstDash val="solid"/>
-          </a:ln>
-        </p:spPr>
-      </p:sp>
-      <p:sp>
-        <p:nvSpPr>
-          <p:cNvPr id="21" name="Shape 18"/>
-          <p:cNvSpPr/>
-          <p:nvPr/>
-        </p:nvSpPr>
-        <p:spPr>
-          <a:xfrm>
-            <a:off x="8976893" y="1856232"/>
-            <a:ext cx="237744" cy="237744"/>
-          </a:xfrm>
-          <a:prstGeom prst="ellipse">
-            <a:avLst/>
-          </a:prstGeom>
-          <a:solidFill>
-            <a:srgbClr val="0E7490"/>
-          </a:solidFill>
           <a:ln/>
         </p:spPr>
       </p:sp>
@@ -16987,8 +17223,8 @@
         </p:nvSpPr>
         <p:spPr>
           <a:xfrm>
-            <a:off x="8976893" y="2139696"/>
-            <a:ext cx="2318690" cy="237744"/>
+            <a:off x="8995181" y="1901952"/>
+            <a:ext cx="2282114" cy="320040"/>
           </a:xfrm>
           <a:prstGeom prst="rect">
             <a:avLst/>
@@ -17004,14 +17240,14 @@
               <a:buNone/>
             </a:pPr>
             <a:r>
-              <a:rPr lang="en-US" sz="950" b="1" dirty="0">
-                <a:solidFill>
-                  <a:srgbClr val="0F1B2D"/>
-                </a:solidFill>
-              </a:rPr>
-              <a:t>Decision Lineage</a:t>
-            </a:r>
-            <a:endParaRPr lang="en-US" sz="950" dirty="0"/>
+              <a:rPr lang="en-US" sz="1500" b="1" dirty="0">
+                <a:solidFill>
+                  <a:srgbClr val="5B6472"/>
+                </a:solidFill>
+              </a:rPr>
+              <a:t>Recover</a:t>
+            </a:r>
+            <a:endParaRPr lang="en-US" sz="1500" dirty="0"/>
           </a:p>
         </p:txBody>
       </p:sp>
@@ -17023,8 +17259,8 @@
         </p:nvSpPr>
         <p:spPr>
           <a:xfrm>
-            <a:off x="8976893" y="2377440"/>
-            <a:ext cx="2318690" cy="246888"/>
+            <a:off x="8995181" y="2286000"/>
+            <a:ext cx="2282114" cy="3337560"/>
           </a:xfrm>
           <a:prstGeom prst="rect">
             <a:avLst/>
@@ -17036,1095 +17272,46 @@
           <a:bodyPr wrap="square" lIns="0" tIns="0" rIns="0" bIns="0" rtlCol="0" anchor="t"/>
           <a:lstStyle/>
           <a:p>
-            <a:pPr indent="0" marL="0">
-              <a:buNone/>
-            </a:pPr>
-            <a:r>
-              <a:rPr lang="en-US" sz="750" dirty="0">
-                <a:solidFill>
-                  <a:srgbClr val="6B7684"/>
-                </a:solidFill>
-              </a:rPr>
-              <a:t>Every AI output logged as a timestamped, auditable record</a:t>
-            </a:r>
-            <a:endParaRPr lang="en-US" sz="750" dirty="0"/>
-          </a:p>
-        </p:txBody>
-      </p:sp>
-      <p:sp>
-        <p:nvSpPr>
-          <p:cNvPr id="24" name="Shape 21"/>
-          <p:cNvSpPr/>
-          <p:nvPr/>
-        </p:nvSpPr>
-        <p:spPr>
-          <a:xfrm>
-            <a:off x="777240" y="2724912"/>
-            <a:ext cx="2556434" cy="896112"/>
-          </a:xfrm>
-          <a:prstGeom prst="roundRect">
-            <a:avLst>
-              <a:gd name="adj" fmla="val 7143"/>
-            </a:avLst>
-          </a:prstGeom>
-          <a:solidFill>
-            <a:srgbClr val="FFFFFF"/>
-          </a:solidFill>
-          <a:ln w="9525">
-            <a:solidFill>
-              <a:srgbClr val="E2E1D6"/>
-            </a:solidFill>
-            <a:prstDash val="solid"/>
-          </a:ln>
-        </p:spPr>
-      </p:sp>
-      <p:sp>
-        <p:nvSpPr>
-          <p:cNvPr id="25" name="Shape 22"/>
-          <p:cNvSpPr/>
-          <p:nvPr/>
-        </p:nvSpPr>
-        <p:spPr>
-          <a:xfrm>
-            <a:off x="896112" y="2843784"/>
-            <a:ext cx="237744" cy="237744"/>
-          </a:xfrm>
-          <a:prstGeom prst="ellipse">
-            <a:avLst/>
-          </a:prstGeom>
-          <a:solidFill>
-            <a:srgbClr val="0E7490"/>
-          </a:solidFill>
-          <a:ln/>
-        </p:spPr>
-      </p:sp>
-      <p:sp>
-        <p:nvSpPr>
-          <p:cNvPr id="26" name="Text 23"/>
-          <p:cNvSpPr txBox="1"/>
-          <p:nvPr/>
-        </p:nvSpPr>
-        <p:spPr>
-          <a:xfrm>
-            <a:off x="896112" y="3127248"/>
-            <a:ext cx="2318690" cy="237744"/>
-          </a:xfrm>
-          <a:prstGeom prst="rect">
-            <a:avLst/>
-          </a:prstGeom>
-          <a:noFill/>
-          <a:ln/>
-        </p:spPr>
-        <p:txBody>
-          <a:bodyPr wrap="square" lIns="0" tIns="0" rIns="0" bIns="0" rtlCol="0" anchor="ctr"/>
-          <a:lstStyle/>
-          <a:p>
-            <a:pPr indent="0" marL="0">
-              <a:buNone/>
-            </a:pPr>
-            <a:r>
-              <a:rPr lang="en-US" sz="950" b="1" dirty="0">
-                <a:solidFill>
-                  <a:srgbClr val="0F1B2D"/>
-                </a:solidFill>
-              </a:rPr>
-              <a:t>Source Of Truth</a:t>
-            </a:r>
-            <a:endParaRPr lang="en-US" sz="950" dirty="0"/>
-          </a:p>
-        </p:txBody>
-      </p:sp>
-      <p:sp>
-        <p:nvSpPr>
-          <p:cNvPr id="27" name="Text 24"/>
-          <p:cNvSpPr txBox="1"/>
-          <p:nvPr/>
-        </p:nvSpPr>
-        <p:spPr>
-          <a:xfrm>
-            <a:off x="896112" y="3364992"/>
-            <a:ext cx="2318690" cy="246888"/>
-          </a:xfrm>
-          <a:prstGeom prst="rect">
-            <a:avLst/>
-          </a:prstGeom>
-          <a:noFill/>
-          <a:ln/>
-        </p:spPr>
-        <p:txBody>
-          <a:bodyPr wrap="square" lIns="0" tIns="0" rIns="0" bIns="0" rtlCol="0" anchor="t"/>
-          <a:lstStyle/>
-          <a:p>
-            <a:pPr indent="0" marL="0">
-              <a:buNone/>
-            </a:pPr>
-            <a:r>
-              <a:rPr lang="en-US" sz="750" dirty="0">
-                <a:solidFill>
-                  <a:srgbClr val="6B7684"/>
-                </a:solidFill>
-              </a:rPr>
-              <a:t>4-layer data lineage — raw -&gt; validated -&gt; enriched -&gt; stored — tracked per incident, with its own audit tab in the UI</a:t>
-            </a:r>
-            <a:endParaRPr lang="en-US" sz="750" dirty="0"/>
-          </a:p>
-        </p:txBody>
-      </p:sp>
-      <p:sp>
-        <p:nvSpPr>
-          <p:cNvPr id="28" name="Shape 25"/>
-          <p:cNvSpPr/>
-          <p:nvPr/>
-        </p:nvSpPr>
-        <p:spPr>
-          <a:xfrm>
-            <a:off x="3470834" y="2724912"/>
-            <a:ext cx="2556434" cy="896112"/>
-          </a:xfrm>
-          <a:prstGeom prst="roundRect">
-            <a:avLst>
-              <a:gd name="adj" fmla="val 7143"/>
-            </a:avLst>
-          </a:prstGeom>
-          <a:solidFill>
-            <a:srgbClr val="FFFFFF"/>
-          </a:solidFill>
-          <a:ln w="9525">
-            <a:solidFill>
-              <a:srgbClr val="E2E1D6"/>
-            </a:solidFill>
-            <a:prstDash val="solid"/>
-          </a:ln>
-        </p:spPr>
-      </p:sp>
-      <p:sp>
-        <p:nvSpPr>
-          <p:cNvPr id="29" name="Shape 26"/>
-          <p:cNvSpPr/>
-          <p:nvPr/>
-        </p:nvSpPr>
-        <p:spPr>
-          <a:xfrm>
-            <a:off x="3589706" y="2843784"/>
-            <a:ext cx="237744" cy="237744"/>
-          </a:xfrm>
-          <a:prstGeom prst="ellipse">
-            <a:avLst/>
-          </a:prstGeom>
-          <a:solidFill>
-            <a:srgbClr val="E8722C"/>
-          </a:solidFill>
-          <a:ln/>
-        </p:spPr>
-      </p:sp>
-      <p:sp>
-        <p:nvSpPr>
-          <p:cNvPr id="30" name="Text 27"/>
-          <p:cNvSpPr txBox="1"/>
-          <p:nvPr/>
-        </p:nvSpPr>
-        <p:spPr>
-          <a:xfrm>
-            <a:off x="3589706" y="3127248"/>
-            <a:ext cx="2318690" cy="237744"/>
-          </a:xfrm>
-          <a:prstGeom prst="rect">
-            <a:avLst/>
-          </a:prstGeom>
-          <a:noFill/>
-          <a:ln/>
-        </p:spPr>
-        <p:txBody>
-          <a:bodyPr wrap="square" lIns="0" tIns="0" rIns="0" bIns="0" rtlCol="0" anchor="ctr"/>
-          <a:lstStyle/>
-          <a:p>
-            <a:pPr indent="0" marL="0">
-              <a:buNone/>
-            </a:pPr>
-            <a:r>
-              <a:rPr lang="en-US" sz="950" b="1" dirty="0">
-                <a:solidFill>
-                  <a:srgbClr val="0F1B2D"/>
-                </a:solidFill>
-              </a:rPr>
-              <a:t>7-Day Risk Forecasting</a:t>
-            </a:r>
-            <a:endParaRPr lang="en-US" sz="950" dirty="0"/>
-          </a:p>
-        </p:txBody>
-      </p:sp>
-      <p:sp>
-        <p:nvSpPr>
-          <p:cNvPr id="31" name="Text 28"/>
-          <p:cNvSpPr txBox="1"/>
-          <p:nvPr/>
-        </p:nvSpPr>
-        <p:spPr>
-          <a:xfrm>
-            <a:off x="3589706" y="3364992"/>
-            <a:ext cx="2318690" cy="246888"/>
-          </a:xfrm>
-          <a:prstGeom prst="rect">
-            <a:avLst/>
-          </a:prstGeom>
-          <a:noFill/>
-          <a:ln/>
-        </p:spPr>
-        <p:txBody>
-          <a:bodyPr wrap="square" lIns="0" tIns="0" rIns="0" bIns="0" rtlCol="0" anchor="t"/>
-          <a:lstStyle/>
-          <a:p>
-            <a:pPr indent="0" marL="0">
-              <a:buNone/>
-            </a:pPr>
-            <a:r>
-              <a:rPr lang="en-US" sz="750" dirty="0">
-                <a:solidFill>
-                  <a:srgbClr val="6B7684"/>
-                </a:solidFill>
-              </a:rPr>
-              <a:t>Rolling forecasts across 8 cities, updated continuously</a:t>
-            </a:r>
-            <a:endParaRPr lang="en-US" sz="750" dirty="0"/>
-          </a:p>
-        </p:txBody>
-      </p:sp>
-      <p:sp>
-        <p:nvSpPr>
-          <p:cNvPr id="32" name="Shape 29"/>
-          <p:cNvSpPr/>
-          <p:nvPr/>
-        </p:nvSpPr>
-        <p:spPr>
-          <a:xfrm>
-            <a:off x="6164428" y="2724912"/>
-            <a:ext cx="2556434" cy="896112"/>
-          </a:xfrm>
-          <a:prstGeom prst="roundRect">
-            <a:avLst>
-              <a:gd name="adj" fmla="val 7143"/>
-            </a:avLst>
-          </a:prstGeom>
-          <a:solidFill>
-            <a:srgbClr val="FFFFFF"/>
-          </a:solidFill>
-          <a:ln w="9525">
-            <a:solidFill>
-              <a:srgbClr val="E2E1D6"/>
-            </a:solidFill>
-            <a:prstDash val="solid"/>
-          </a:ln>
-        </p:spPr>
-      </p:sp>
-      <p:sp>
-        <p:nvSpPr>
-          <p:cNvPr id="33" name="Shape 30"/>
-          <p:cNvSpPr/>
-          <p:nvPr/>
-        </p:nvSpPr>
-        <p:spPr>
-          <a:xfrm>
-            <a:off x="6283300" y="2843784"/>
-            <a:ext cx="237744" cy="237744"/>
-          </a:xfrm>
-          <a:prstGeom prst="ellipse">
-            <a:avLst/>
-          </a:prstGeom>
-          <a:solidFill>
-            <a:srgbClr val="E8722C"/>
-          </a:solidFill>
-          <a:ln/>
-        </p:spPr>
-      </p:sp>
-      <p:sp>
-        <p:nvSpPr>
-          <p:cNvPr id="34" name="Text 31"/>
-          <p:cNvSpPr txBox="1"/>
-          <p:nvPr/>
-        </p:nvSpPr>
-        <p:spPr>
-          <a:xfrm>
-            <a:off x="6283300" y="3127248"/>
-            <a:ext cx="2318690" cy="237744"/>
-          </a:xfrm>
-          <a:prstGeom prst="rect">
-            <a:avLst/>
-          </a:prstGeom>
-          <a:noFill/>
-          <a:ln/>
-        </p:spPr>
-        <p:txBody>
-          <a:bodyPr wrap="square" lIns="0" tIns="0" rIns="0" bIns="0" rtlCol="0" anchor="ctr"/>
-          <a:lstStyle/>
-          <a:p>
-            <a:pPr indent="0" marL="0">
-              <a:buNone/>
-            </a:pPr>
-            <a:r>
-              <a:rPr lang="en-US" sz="950" b="1" dirty="0">
-                <a:solidFill>
-                  <a:srgbClr val="0F1B2D"/>
-                </a:solidFill>
-              </a:rPr>
-              <a:t>Risk-Escalation Timeline</a:t>
-            </a:r>
-            <a:endParaRPr lang="en-US" sz="950" dirty="0"/>
-          </a:p>
-        </p:txBody>
-      </p:sp>
-      <p:sp>
-        <p:nvSpPr>
-          <p:cNvPr id="35" name="Text 32"/>
-          <p:cNvSpPr txBox="1"/>
-          <p:nvPr/>
-        </p:nvSpPr>
-        <p:spPr>
-          <a:xfrm>
-            <a:off x="6283300" y="3364992"/>
-            <a:ext cx="2318690" cy="246888"/>
-          </a:xfrm>
-          <a:prstGeom prst="rect">
-            <a:avLst/>
-          </a:prstGeom>
-          <a:noFill/>
-          <a:ln/>
-        </p:spPr>
-        <p:txBody>
-          <a:bodyPr wrap="square" lIns="0" tIns="0" rIns="0" bIns="0" rtlCol="0" anchor="t"/>
-          <a:lstStyle/>
-          <a:p>
-            <a:pPr indent="0" marL="0">
-              <a:buNone/>
-            </a:pPr>
-            <a:r>
-              <a:rPr lang="en-US" sz="750" dirty="0">
-                <a:solidFill>
-                  <a:srgbClr val="6B7684"/>
-                </a:solidFill>
-              </a:rPr>
-              <a:t>AI-generated, phase-by-phase escalation outlook</a:t>
-            </a:r>
-            <a:endParaRPr lang="en-US" sz="750" dirty="0"/>
-          </a:p>
-        </p:txBody>
-      </p:sp>
-      <p:sp>
-        <p:nvSpPr>
-          <p:cNvPr id="36" name="Shape 33"/>
-          <p:cNvSpPr/>
-          <p:nvPr/>
-        </p:nvSpPr>
-        <p:spPr>
-          <a:xfrm>
-            <a:off x="8858021" y="2724912"/>
-            <a:ext cx="2556434" cy="896112"/>
-          </a:xfrm>
-          <a:prstGeom prst="roundRect">
-            <a:avLst>
-              <a:gd name="adj" fmla="val 7143"/>
-            </a:avLst>
-          </a:prstGeom>
-          <a:solidFill>
-            <a:srgbClr val="FFFFFF"/>
-          </a:solidFill>
-          <a:ln w="9525">
-            <a:solidFill>
-              <a:srgbClr val="E2E1D6"/>
-            </a:solidFill>
-            <a:prstDash val="solid"/>
-          </a:ln>
-        </p:spPr>
-      </p:sp>
-      <p:sp>
-        <p:nvSpPr>
-          <p:cNvPr id="37" name="Shape 34"/>
-          <p:cNvSpPr/>
-          <p:nvPr/>
-        </p:nvSpPr>
-        <p:spPr>
-          <a:xfrm>
-            <a:off x="8976893" y="2843784"/>
-            <a:ext cx="237744" cy="237744"/>
-          </a:xfrm>
-          <a:prstGeom prst="ellipse">
-            <a:avLst/>
-          </a:prstGeom>
-          <a:solidFill>
-            <a:srgbClr val="E8722C"/>
-          </a:solidFill>
-          <a:ln/>
-        </p:spPr>
-      </p:sp>
-      <p:sp>
-        <p:nvSpPr>
-          <p:cNvPr id="38" name="Text 35"/>
-          <p:cNvSpPr txBox="1"/>
-          <p:nvPr/>
-        </p:nvSpPr>
-        <p:spPr>
-          <a:xfrm>
-            <a:off x="8976893" y="3127248"/>
-            <a:ext cx="2318690" cy="237744"/>
-          </a:xfrm>
-          <a:prstGeom prst="rect">
-            <a:avLst/>
-          </a:prstGeom>
-          <a:noFill/>
-          <a:ln/>
-        </p:spPr>
-        <p:txBody>
-          <a:bodyPr wrap="square" lIns="0" tIns="0" rIns="0" bIns="0" rtlCol="0" anchor="ctr"/>
-          <a:lstStyle/>
-          <a:p>
-            <a:pPr indent="0" marL="0">
-              <a:buNone/>
-            </a:pPr>
-            <a:r>
-              <a:rPr lang="en-US" sz="950" b="1" dirty="0">
-                <a:solidFill>
-                  <a:srgbClr val="0F1B2D"/>
-                </a:solidFill>
-              </a:rPr>
-              <a:t>Preparedness Checklists</a:t>
-            </a:r>
-            <a:endParaRPr lang="en-US" sz="950" dirty="0"/>
-          </a:p>
-        </p:txBody>
-      </p:sp>
-      <p:sp>
-        <p:nvSpPr>
-          <p:cNvPr id="39" name="Text 36"/>
-          <p:cNvSpPr txBox="1"/>
-          <p:nvPr/>
-        </p:nvSpPr>
-        <p:spPr>
-          <a:xfrm>
-            <a:off x="8976893" y="3364992"/>
-            <a:ext cx="2318690" cy="246888"/>
-          </a:xfrm>
-          <a:prstGeom prst="rect">
-            <a:avLst/>
-          </a:prstGeom>
-          <a:noFill/>
-          <a:ln/>
-        </p:spPr>
-        <p:txBody>
-          <a:bodyPr wrap="square" lIns="0" tIns="0" rIns="0" bIns="0" rtlCol="0" anchor="t"/>
-          <a:lstStyle/>
-          <a:p>
-            <a:pPr indent="0" marL="0">
-              <a:buNone/>
-            </a:pPr>
-            <a:r>
-              <a:rPr lang="en-US" sz="750" dirty="0">
-                <a:solidFill>
-                  <a:srgbClr val="6B7684"/>
-                </a:solidFill>
-              </a:rPr>
-              <a:t>Auto-generated per agency, ready before an event escalates</a:t>
-            </a:r>
-            <a:endParaRPr lang="en-US" sz="750" dirty="0"/>
-          </a:p>
-        </p:txBody>
-      </p:sp>
-      <p:sp>
-        <p:nvSpPr>
-          <p:cNvPr id="40" name="Shape 37"/>
-          <p:cNvSpPr/>
-          <p:nvPr/>
-        </p:nvSpPr>
-        <p:spPr>
-          <a:xfrm>
-            <a:off x="777240" y="3712464"/>
-            <a:ext cx="2556434" cy="896112"/>
-          </a:xfrm>
-          <a:prstGeom prst="roundRect">
-            <a:avLst>
-              <a:gd name="adj" fmla="val 7143"/>
-            </a:avLst>
-          </a:prstGeom>
-          <a:solidFill>
-            <a:srgbClr val="FFFFFF"/>
-          </a:solidFill>
-          <a:ln w="9525">
-            <a:solidFill>
-              <a:srgbClr val="E2E1D6"/>
-            </a:solidFill>
-            <a:prstDash val="solid"/>
-          </a:ln>
-        </p:spPr>
-      </p:sp>
-      <p:sp>
-        <p:nvSpPr>
-          <p:cNvPr id="41" name="Shape 38"/>
-          <p:cNvSpPr/>
-          <p:nvPr/>
-        </p:nvSpPr>
-        <p:spPr>
-          <a:xfrm>
-            <a:off x="896112" y="3831336"/>
-            <a:ext cx="237744" cy="237744"/>
-          </a:xfrm>
-          <a:prstGeom prst="ellipse">
-            <a:avLst/>
-          </a:prstGeom>
-          <a:solidFill>
-            <a:srgbClr val="E8722C"/>
-          </a:solidFill>
-          <a:ln/>
-        </p:spPr>
-      </p:sp>
-      <p:sp>
-        <p:nvSpPr>
-          <p:cNvPr id="42" name="Text 39"/>
-          <p:cNvSpPr txBox="1"/>
-          <p:nvPr/>
-        </p:nvSpPr>
-        <p:spPr>
-          <a:xfrm>
-            <a:off x="896112" y="4114800"/>
-            <a:ext cx="2318690" cy="237744"/>
-          </a:xfrm>
-          <a:prstGeom prst="rect">
-            <a:avLst/>
-          </a:prstGeom>
-          <a:noFill/>
-          <a:ln/>
-        </p:spPr>
-        <p:txBody>
-          <a:bodyPr wrap="square" lIns="0" tIns="0" rIns="0" bIns="0" rtlCol="0" anchor="ctr"/>
-          <a:lstStyle/>
-          <a:p>
-            <a:pPr indent="0" marL="0">
-              <a:buNone/>
-            </a:pPr>
-            <a:r>
-              <a:rPr lang="en-US" sz="950" b="1" dirty="0">
-                <a:solidFill>
-                  <a:srgbClr val="0F1B2D"/>
-                </a:solidFill>
-              </a:rPr>
-              <a:t>Agency Alert Drafting</a:t>
-            </a:r>
-            <a:endParaRPr lang="en-US" sz="950" dirty="0"/>
-          </a:p>
-        </p:txBody>
-      </p:sp>
-      <p:sp>
-        <p:nvSpPr>
-          <p:cNvPr id="43" name="Text 40"/>
-          <p:cNvSpPr txBox="1"/>
-          <p:nvPr/>
-        </p:nvSpPr>
-        <p:spPr>
-          <a:xfrm>
-            <a:off x="896112" y="4352544"/>
-            <a:ext cx="2318690" cy="246888"/>
-          </a:xfrm>
-          <a:prstGeom prst="rect">
-            <a:avLst/>
-          </a:prstGeom>
-          <a:noFill/>
-          <a:ln/>
-        </p:spPr>
-        <p:txBody>
-          <a:bodyPr wrap="square" lIns="0" tIns="0" rIns="0" bIns="0" rtlCol="0" anchor="t"/>
-          <a:lstStyle/>
-          <a:p>
-            <a:pPr indent="0" marL="0">
-              <a:buNone/>
-            </a:pPr>
-            <a:r>
-              <a:rPr lang="en-US" sz="750" dirty="0">
-                <a:solidFill>
-                  <a:srgbClr val="6B7684"/>
-                </a:solidFill>
-              </a:rPr>
-              <a:t>Automated first-draft alerts, ready for review and send</a:t>
-            </a:r>
-            <a:endParaRPr lang="en-US" sz="750" dirty="0"/>
-          </a:p>
-        </p:txBody>
-      </p:sp>
-      <p:sp>
-        <p:nvSpPr>
-          <p:cNvPr id="44" name="Shape 41"/>
-          <p:cNvSpPr/>
-          <p:nvPr/>
-        </p:nvSpPr>
-        <p:spPr>
-          <a:xfrm>
-            <a:off x="3470834" y="3712464"/>
-            <a:ext cx="2556434" cy="896112"/>
-          </a:xfrm>
-          <a:prstGeom prst="roundRect">
-            <a:avLst>
-              <a:gd name="adj" fmla="val 7143"/>
-            </a:avLst>
-          </a:prstGeom>
-          <a:solidFill>
-            <a:srgbClr val="FFFFFF"/>
-          </a:solidFill>
-          <a:ln w="9525">
-            <a:solidFill>
-              <a:srgbClr val="E2E1D6"/>
-            </a:solidFill>
-            <a:prstDash val="solid"/>
-          </a:ln>
-        </p:spPr>
-      </p:sp>
-      <p:sp>
-        <p:nvSpPr>
-          <p:cNvPr id="45" name="Shape 42"/>
-          <p:cNvSpPr/>
-          <p:nvPr/>
-        </p:nvSpPr>
-        <p:spPr>
-          <a:xfrm>
-            <a:off x="3589706" y="3831336"/>
-            <a:ext cx="237744" cy="237744"/>
-          </a:xfrm>
-          <a:prstGeom prst="ellipse">
-            <a:avLst/>
-          </a:prstGeom>
-          <a:solidFill>
-            <a:srgbClr val="5B6472"/>
-          </a:solidFill>
-          <a:ln/>
-        </p:spPr>
-      </p:sp>
-      <p:sp>
-        <p:nvSpPr>
-          <p:cNvPr id="46" name="Text 43"/>
-          <p:cNvSpPr txBox="1"/>
-          <p:nvPr/>
-        </p:nvSpPr>
-        <p:spPr>
-          <a:xfrm>
-            <a:off x="3589706" y="4114800"/>
-            <a:ext cx="2318690" cy="237744"/>
-          </a:xfrm>
-          <a:prstGeom prst="rect">
-            <a:avLst/>
-          </a:prstGeom>
-          <a:noFill/>
-          <a:ln/>
-        </p:spPr>
-        <p:txBody>
-          <a:bodyPr wrap="square" lIns="0" tIns="0" rIns="0" bIns="0" rtlCol="0" anchor="ctr"/>
-          <a:lstStyle/>
-          <a:p>
-            <a:pPr indent="0" marL="0">
-              <a:buNone/>
-            </a:pPr>
-            <a:r>
-              <a:rPr lang="en-US" sz="950" b="1" dirty="0">
-                <a:solidFill>
-                  <a:srgbClr val="0F1B2D"/>
-                </a:solidFill>
-              </a:rPr>
-              <a:t>Live Incident Dashboard</a:t>
-            </a:r>
-            <a:endParaRPr lang="en-US" sz="950" dirty="0"/>
-          </a:p>
-        </p:txBody>
-      </p:sp>
-      <p:sp>
-        <p:nvSpPr>
-          <p:cNvPr id="47" name="Text 44"/>
-          <p:cNvSpPr txBox="1"/>
-          <p:nvPr/>
-        </p:nvSpPr>
-        <p:spPr>
-          <a:xfrm>
-            <a:off x="3589706" y="4352544"/>
-            <a:ext cx="2318690" cy="246888"/>
-          </a:xfrm>
-          <a:prstGeom prst="rect">
-            <a:avLst/>
-          </a:prstGeom>
-          <a:noFill/>
-          <a:ln/>
-        </p:spPr>
-        <p:txBody>
-          <a:bodyPr wrap="square" lIns="0" tIns="0" rIns="0" bIns="0" rtlCol="0" anchor="t"/>
-          <a:lstStyle/>
-          <a:p>
-            <a:pPr indent="0" marL="0">
-              <a:buNone/>
-            </a:pPr>
-            <a:r>
-              <a:rPr lang="en-US" sz="750" dirty="0">
-                <a:solidFill>
-                  <a:srgbClr val="6B7684"/>
-                </a:solidFill>
-              </a:rPr>
-              <a:t>Multi-hazard map + detail panel, WebSocket-live</a:t>
-            </a:r>
-            <a:endParaRPr lang="en-US" sz="750" dirty="0"/>
-          </a:p>
-        </p:txBody>
-      </p:sp>
-      <p:sp>
-        <p:nvSpPr>
-          <p:cNvPr id="48" name="Shape 45"/>
-          <p:cNvSpPr/>
-          <p:nvPr/>
-        </p:nvSpPr>
-        <p:spPr>
-          <a:xfrm>
-            <a:off x="6164428" y="3712464"/>
-            <a:ext cx="2556434" cy="896112"/>
-          </a:xfrm>
-          <a:prstGeom prst="roundRect">
-            <a:avLst>
-              <a:gd name="adj" fmla="val 7143"/>
-            </a:avLst>
-          </a:prstGeom>
-          <a:solidFill>
-            <a:srgbClr val="FFFFFF"/>
-          </a:solidFill>
-          <a:ln w="9525">
-            <a:solidFill>
-              <a:srgbClr val="E2E1D6"/>
-            </a:solidFill>
-            <a:prstDash val="solid"/>
-          </a:ln>
-        </p:spPr>
-      </p:sp>
-      <p:sp>
-        <p:nvSpPr>
-          <p:cNvPr id="49" name="Shape 46"/>
-          <p:cNvSpPr/>
-          <p:nvPr/>
-        </p:nvSpPr>
-        <p:spPr>
-          <a:xfrm>
-            <a:off x="6283300" y="3831336"/>
-            <a:ext cx="237744" cy="237744"/>
-          </a:xfrm>
-          <a:prstGeom prst="ellipse">
-            <a:avLst/>
-          </a:prstGeom>
-          <a:solidFill>
-            <a:srgbClr val="5B6472"/>
-          </a:solidFill>
-          <a:ln/>
-        </p:spPr>
-      </p:sp>
-      <p:sp>
-        <p:nvSpPr>
-          <p:cNvPr id="50" name="Text 47"/>
-          <p:cNvSpPr txBox="1"/>
-          <p:nvPr/>
-        </p:nvSpPr>
-        <p:spPr>
-          <a:xfrm>
-            <a:off x="6283300" y="4114800"/>
-            <a:ext cx="2318690" cy="237744"/>
-          </a:xfrm>
-          <a:prstGeom prst="rect">
-            <a:avLst/>
-          </a:prstGeom>
-          <a:noFill/>
-          <a:ln/>
-        </p:spPr>
-        <p:txBody>
-          <a:bodyPr wrap="square" lIns="0" tIns="0" rIns="0" bIns="0" rtlCol="0" anchor="ctr"/>
-          <a:lstStyle/>
-          <a:p>
-            <a:pPr indent="0" marL="0">
-              <a:buNone/>
-            </a:pPr>
-            <a:r>
-              <a:rPr lang="en-US" sz="950" b="1" dirty="0">
-                <a:solidFill>
-                  <a:srgbClr val="0F1B2D"/>
-                </a:solidFill>
-              </a:rPr>
-              <a:t>Evacuation Routing</a:t>
-            </a:r>
-            <a:endParaRPr lang="en-US" sz="950" dirty="0"/>
-          </a:p>
-        </p:txBody>
-      </p:sp>
-      <p:sp>
-        <p:nvSpPr>
-          <p:cNvPr id="51" name="Text 48"/>
-          <p:cNvSpPr txBox="1"/>
-          <p:nvPr/>
-        </p:nvSpPr>
-        <p:spPr>
-          <a:xfrm>
-            <a:off x="6283300" y="4352544"/>
-            <a:ext cx="2318690" cy="246888"/>
-          </a:xfrm>
-          <a:prstGeom prst="rect">
-            <a:avLst/>
-          </a:prstGeom>
-          <a:noFill/>
-          <a:ln/>
-        </p:spPr>
-        <p:txBody>
-          <a:bodyPr wrap="square" lIns="0" tIns="0" rIns="0" bIns="0" rtlCol="0" anchor="t"/>
-          <a:lstStyle/>
-          <a:p>
-            <a:pPr indent="0" marL="0">
-              <a:buNone/>
-            </a:pPr>
-            <a:r>
-              <a:rPr lang="en-US" sz="750" dirty="0">
-                <a:solidFill>
-                  <a:srgbClr val="6B7684"/>
-                </a:solidFill>
-              </a:rPr>
-              <a:t>OSRM road-network routing with automatic geodesic fallback</a:t>
-            </a:r>
-            <a:endParaRPr lang="en-US" sz="750" dirty="0"/>
-          </a:p>
-        </p:txBody>
-      </p:sp>
-      <p:sp>
-        <p:nvSpPr>
-          <p:cNvPr id="52" name="Shape 49"/>
-          <p:cNvSpPr/>
-          <p:nvPr/>
-        </p:nvSpPr>
-        <p:spPr>
-          <a:xfrm>
-            <a:off x="8858021" y="3712464"/>
-            <a:ext cx="2556434" cy="896112"/>
-          </a:xfrm>
-          <a:prstGeom prst="roundRect">
-            <a:avLst>
-              <a:gd name="adj" fmla="val 7143"/>
-            </a:avLst>
-          </a:prstGeom>
-          <a:solidFill>
-            <a:srgbClr val="FFFFFF"/>
-          </a:solidFill>
-          <a:ln w="9525">
-            <a:solidFill>
-              <a:srgbClr val="E2E1D6"/>
-            </a:solidFill>
-            <a:prstDash val="solid"/>
-          </a:ln>
-        </p:spPr>
-      </p:sp>
-      <p:sp>
-        <p:nvSpPr>
-          <p:cNvPr id="53" name="Shape 50"/>
-          <p:cNvSpPr/>
-          <p:nvPr/>
-        </p:nvSpPr>
-        <p:spPr>
-          <a:xfrm>
-            <a:off x="8976893" y="3831336"/>
-            <a:ext cx="237744" cy="237744"/>
-          </a:xfrm>
-          <a:prstGeom prst="ellipse">
-            <a:avLst/>
-          </a:prstGeom>
-          <a:solidFill>
-            <a:srgbClr val="5B6472"/>
-          </a:solidFill>
-          <a:ln/>
-        </p:spPr>
-      </p:sp>
-      <p:sp>
-        <p:nvSpPr>
-          <p:cNvPr id="54" name="Text 51"/>
-          <p:cNvSpPr txBox="1"/>
-          <p:nvPr/>
-        </p:nvSpPr>
-        <p:spPr>
-          <a:xfrm>
-            <a:off x="8976893" y="4114800"/>
-            <a:ext cx="2318690" cy="237744"/>
-          </a:xfrm>
-          <a:prstGeom prst="rect">
-            <a:avLst/>
-          </a:prstGeom>
-          <a:noFill/>
-          <a:ln/>
-        </p:spPr>
-        <p:txBody>
-          <a:bodyPr wrap="square" lIns="0" tIns="0" rIns="0" bIns="0" rtlCol="0" anchor="ctr"/>
-          <a:lstStyle/>
-          <a:p>
-            <a:pPr indent="0" marL="0">
-              <a:buNone/>
-            </a:pPr>
-            <a:r>
-              <a:rPr lang="en-US" sz="950" b="1" dirty="0">
-                <a:solidFill>
-                  <a:srgbClr val="0F1B2D"/>
-                </a:solidFill>
-              </a:rPr>
-              <a:t>Audience-Tailored Alerts</a:t>
-            </a:r>
-            <a:endParaRPr lang="en-US" sz="950" dirty="0"/>
-          </a:p>
-        </p:txBody>
-      </p:sp>
-      <p:sp>
-        <p:nvSpPr>
-          <p:cNvPr id="55" name="Text 52"/>
-          <p:cNvSpPr txBox="1"/>
-          <p:nvPr/>
-        </p:nvSpPr>
-        <p:spPr>
-          <a:xfrm>
-            <a:off x="8976893" y="4352544"/>
-            <a:ext cx="2318690" cy="246888"/>
-          </a:xfrm>
-          <a:prstGeom prst="rect">
-            <a:avLst/>
-          </a:prstGeom>
-          <a:noFill/>
-          <a:ln/>
-        </p:spPr>
-        <p:txBody>
-          <a:bodyPr wrap="square" lIns="0" tIns="0" rIns="0" bIns="0" rtlCol="0" anchor="t"/>
-          <a:lstStyle/>
-          <a:p>
-            <a:pPr indent="0" marL="0">
-              <a:buNone/>
-            </a:pPr>
-            <a:r>
-              <a:rPr lang="en-US" sz="750" dirty="0">
-                <a:solidFill>
-                  <a:srgbClr val="6B7684"/>
-                </a:solidFill>
-              </a:rPr>
-              <a:t>Role-based email dispatch — farmers, hospitals, NGOs, municipal corps</a:t>
-            </a:r>
-            <a:endParaRPr lang="en-US" sz="750" dirty="0"/>
-          </a:p>
-        </p:txBody>
-      </p:sp>
-      <p:sp>
-        <p:nvSpPr>
-          <p:cNvPr id="56" name="Shape 53"/>
-          <p:cNvSpPr/>
-          <p:nvPr/>
-        </p:nvSpPr>
-        <p:spPr>
-          <a:xfrm>
-            <a:off x="777240" y="4700016"/>
-            <a:ext cx="2556434" cy="896112"/>
-          </a:xfrm>
-          <a:prstGeom prst="roundRect">
-            <a:avLst>
-              <a:gd name="adj" fmla="val 7143"/>
-            </a:avLst>
-          </a:prstGeom>
-          <a:solidFill>
-            <a:srgbClr val="FFFFFF"/>
-          </a:solidFill>
-          <a:ln w="9525">
-            <a:solidFill>
-              <a:srgbClr val="E2E1D6"/>
-            </a:solidFill>
-            <a:prstDash val="solid"/>
-          </a:ln>
-        </p:spPr>
-      </p:sp>
-      <p:sp>
-        <p:nvSpPr>
-          <p:cNvPr id="57" name="Shape 54"/>
-          <p:cNvSpPr/>
-          <p:nvPr/>
-        </p:nvSpPr>
-        <p:spPr>
-          <a:xfrm>
-            <a:off x="896112" y="4818888"/>
-            <a:ext cx="237744" cy="237744"/>
-          </a:xfrm>
-          <a:prstGeom prst="ellipse">
-            <a:avLst/>
-          </a:prstGeom>
-          <a:solidFill>
-            <a:srgbClr val="5B6472"/>
-          </a:solidFill>
-          <a:ln/>
-        </p:spPr>
-      </p:sp>
-      <p:sp>
-        <p:nvSpPr>
-          <p:cNvPr id="58" name="Text 55"/>
-          <p:cNvSpPr txBox="1"/>
-          <p:nvPr/>
-        </p:nvSpPr>
-        <p:spPr>
-          <a:xfrm>
-            <a:off x="896112" y="5102352"/>
-            <a:ext cx="2318690" cy="237744"/>
-          </a:xfrm>
-          <a:prstGeom prst="rect">
-            <a:avLst/>
-          </a:prstGeom>
-          <a:noFill/>
-          <a:ln/>
-        </p:spPr>
-        <p:txBody>
-          <a:bodyPr wrap="square" lIns="0" tIns="0" rIns="0" bIns="0" rtlCol="0" anchor="ctr"/>
-          <a:lstStyle/>
-          <a:p>
-            <a:pPr indent="0" marL="0">
-              <a:buNone/>
-            </a:pPr>
-            <a:r>
-              <a:rPr lang="en-US" sz="950" b="1" dirty="0">
-                <a:solidFill>
-                  <a:srgbClr val="0F1B2D"/>
-                </a:solidFill>
-              </a:rPr>
-              <a:t>Multi-Language UI</a:t>
-            </a:r>
-            <a:endParaRPr lang="en-US" sz="950" dirty="0"/>
-          </a:p>
-        </p:txBody>
-      </p:sp>
-      <p:sp>
-        <p:nvSpPr>
-          <p:cNvPr id="59" name="Text 56"/>
-          <p:cNvSpPr txBox="1"/>
-          <p:nvPr/>
-        </p:nvSpPr>
-        <p:spPr>
-          <a:xfrm>
-            <a:off x="896112" y="5340096"/>
-            <a:ext cx="2318690" cy="246888"/>
-          </a:xfrm>
-          <a:prstGeom prst="rect">
-            <a:avLst/>
-          </a:prstGeom>
-          <a:noFill/>
-          <a:ln/>
-        </p:spPr>
-        <p:txBody>
-          <a:bodyPr wrap="square" lIns="0" tIns="0" rIns="0" bIns="0" rtlCol="0" anchor="t"/>
-          <a:lstStyle/>
-          <a:p>
-            <a:pPr indent="0" marL="0">
-              <a:buNone/>
-            </a:pPr>
-            <a:r>
-              <a:rPr lang="en-US" sz="750" dirty="0">
-                <a:solidFill>
-                  <a:srgbClr val="6B7684"/>
-                </a:solidFill>
-              </a:rPr>
-              <a:t>vue-i18n across the dashboard, with interactive Mapbox GL mapping</a:t>
-            </a:r>
-            <a:endParaRPr lang="en-US" sz="750" dirty="0"/>
-          </a:p>
-        </p:txBody>
-      </p:sp>
-      <p:sp>
-        <p:nvSpPr>
-          <p:cNvPr id="60" name="Text 57"/>
+            <a:pPr marL="342900" indent="-342900">
+              <a:spcAft>
+                <a:spcPts val="800"/>
+              </a:spcAft>
+              <a:buSzPct val="100000"/>
+              <a:buChar char="✓"/>
+            </a:pPr>
+            <a:r>
+              <a:rPr lang="en-US" sz="1050" dirty="0">
+                <a:solidFill>
+                  <a:srgbClr val="3A4452"/>
+                </a:solidFill>
+              </a:rPr>
+              <a:t>Before/after satellite damage assessment</a:t>
+            </a:r>
+            <a:endParaRPr lang="en-US" sz="1050" dirty="0"/>
+          </a:p>
+          <a:p>
+            <a:pPr marL="342900" indent="-342900">
+              <a:spcAft>
+                <a:spcPts val="800"/>
+              </a:spcAft>
+              <a:buSzPct val="100000"/>
+              <a:buChar char="✓"/>
+            </a:pPr>
+            <a:r>
+              <a:rPr lang="en-US" sz="1050" dirty="0">
+                <a:solidFill>
+                  <a:srgbClr val="3A4452"/>
+                </a:solidFill>
+              </a:rPr>
+              <a:t>Recovery-milestone tracking once an incident stabilizes</a:t>
+            </a:r>
+            <a:endParaRPr lang="en-US" sz="1050" dirty="0"/>
+          </a:p>
+        </p:txBody>
+      </p:sp>
+      <p:sp>
+        <p:nvSpPr>
+          <p:cNvPr id="24" name="Text 21"/>
           <p:cNvSpPr txBox="1"/>
           <p:nvPr/>
         </p:nvSpPr>

--- a/docs/PPT/TerraGrid_AI_Builder_Cup_Submission_copilot_terragrid.pptx
+++ b/docs/PPT/TerraGrid_AI_Builder_Cup_Submission_copilot_terragrid.pptx
@@ -21,9 +21,10 @@
     <p:sldId id="269" r:id="rId15"/>
     <p:sldId id="270" r:id="rId16"/>
     <p:sldId id="271" r:id="rId17"/>
+    <p:sldId id="272" r:id="rId18"/>
   </p:sldIdLst>
   <p:notesMasterIdLst>
-    <p:notesMasterId r:id="rId18"/>
+    <p:notesMasterId r:id="rId19"/>
   </p:notesMasterIdLst>
   <p:sldSz cx="12191695" cy="6858000"/>
   <p:notesSz cx="6858000" cy="12191695"/>
@@ -1157,6 +1158,94 @@
             <a:fld id="{F7021451-1387-4CA6-816F-3879F97B5CBC}" type="slidenum">
               <a:rPr lang="en-US"/>
               <a:t>16</a:t>
+            </a:fld>
+            <a:endParaRPr lang="en-US"/>
+          </a:p>
+        </p:txBody>
+      </p:sp>
+    </p:spTree>
+    <p:extLst>
+      <p:ext uri="{BB962C8B-B14F-4D97-AF65-F5344CB8AC3E}">
+        <p14:creationId xmlns:p14="http://schemas.microsoft.com/office/powerpoint/2010/main" val="1024086991"/>
+      </p:ext>
+    </p:extLst>
+  </p:cSld>
+  <p:clrMapOvr>
+    <a:masterClrMapping/>
+  </p:clrMapOvr>
+</p:notes>
+</file>
+
+<file path=ppt/notesSlides/notesSlide17.xml><?xml version="1.0" encoding="utf-8"?>
+<p:notes xmlns:a="http://schemas.openxmlformats.org/drawingml/2006/main" xmlns:r="http://schemas.openxmlformats.org/officeDocument/2006/relationships" xmlns:p="http://schemas.openxmlformats.org/presentationml/2006/main">
+  <p:cSld>
+    <p:spTree>
+      <p:nvGrpSpPr>
+        <p:cNvPr id="1" name=""/>
+        <p:cNvGrpSpPr/>
+        <p:nvPr/>
+      </p:nvGrpSpPr>
+      <p:grpSpPr>
+        <a:xfrm>
+          <a:off x="0" y="0"/>
+          <a:ext cx="0" cy="0"/>
+          <a:chOff x="0" y="0"/>
+          <a:chExt cx="0" cy="0"/>
+        </a:xfrm>
+      </p:grpSpPr>
+      <p:sp>
+        <p:nvSpPr>
+          <p:cNvPr id="2" name="Slide Image Placeholder 1"/>
+          <p:cNvSpPr>
+            <a:spLocks noGrp="1" noRot="1" noChangeAspect="1"/>
+          </p:cNvSpPr>
+          <p:nvPr>
+            <p:ph type="sldImg"/>
+          </p:nvPr>
+        </p:nvSpPr>
+        <p:spPr/>
+      </p:sp>
+      <p:sp>
+        <p:nvSpPr>
+          <p:cNvPr id="3" name="Notes Placeholder 2"/>
+          <p:cNvSpPr>
+            <a:spLocks noGrp="1"/>
+          </p:cNvSpPr>
+          <p:nvPr>
+            <p:ph type="body" idx="1"/>
+          </p:nvPr>
+        </p:nvSpPr>
+        <p:spPr/>
+        <p:txBody>
+          <a:bodyPr/>
+          <a:lstStyle/>
+          <a:p>
+            <a:r>
+              <a:rPr lang="en-US" dirty="0"/>
+              <a:t/>
+            </a:r>
+            <a:endParaRPr lang="en-US" dirty="0"/>
+          </a:p>
+        </p:txBody>
+      </p:sp>
+      <p:sp>
+        <p:nvSpPr>
+          <p:cNvPr id="4" name="Slide Number Placeholder 3"/>
+          <p:cNvSpPr>
+            <a:spLocks noGrp="1"/>
+          </p:cNvSpPr>
+          <p:nvPr>
+            <p:ph type="sldNum" sz="quarter" idx="10"/>
+          </p:nvPr>
+        </p:nvSpPr>
+        <p:spPr/>
+        <p:txBody>
+          <a:bodyPr/>
+          <a:lstStyle/>
+          <a:p>
+            <a:fld id="{F7021451-1387-4CA6-816F-3879F97B5CBC}" type="slidenum">
+              <a:rPr lang="en-US"/>
+              <a:t>17</a:t>
             </a:fld>
             <a:endParaRPr lang="en-US"/>
           </a:p>
@@ -2845,7 +2934,7 @@
     <p:bg>
       <p:bgPr>
         <a:solidFill>
-          <a:srgbClr val="F7F7F2"/>
+          <a:srgbClr val="0F1B2D"/>
         </a:solidFill>
       </p:bgPr>
     </p:bg>
@@ -2914,7 +3003,7 @@
             <a:r>
               <a:rPr lang="en-US" sz="1100" dirty="0">
                 <a:solidFill>
-                  <a:srgbClr val="9AA3B0"/>
+                  <a:srgbClr val="8A93A3"/>
                 </a:solidFill>
                 <a:latin typeface="Calibri" pitchFamily="34" charset="0"/>
                 <a:ea typeface="Calibri" pitchFamily="34" charset="-122"/>
@@ -2953,13 +3042,13 @@
             <a:r>
               <a:rPr lang="en-US" sz="1100" dirty="0">
                 <a:solidFill>
-                  <a:srgbClr val="9AA3B0"/>
+                  <a:srgbClr val="8A93A3"/>
                 </a:solidFill>
                 <a:latin typeface="Calibri" pitchFamily="34" charset="0"/>
                 <a:ea typeface="Calibri" pitchFamily="34" charset="-122"/>
                 <a:cs typeface="Calibri" pitchFamily="34" charset="-120"/>
               </a:rPr>
-              <a:t>10 / 16</a:t>
+              <a:t>10 / 17</a:t>
             </a:r>
             <a:endParaRPr lang="en-US" sz="1100" dirty="0"/>
           </a:p>
@@ -3018,7 +3107,7 @@
                 <a:ea typeface="Calibri" pitchFamily="34" charset="-122"/>
                 <a:cs typeface="Calibri" pitchFamily="34" charset="-120"/>
               </a:rPr>
-              <a:t>TECHNOLOGIES</a:t>
+              <a:t>ARCHITECTURE DIAGRAM</a:t>
             </a:r>
             <a:endParaRPr lang="en-US" sz="1300" dirty="0"/>
           </a:p>
@@ -3033,7 +3122,7 @@
         <p:spPr>
           <a:xfrm>
             <a:off x="777240" y="1188720"/>
-            <a:ext cx="10637215" cy="548640"/>
+            <a:ext cx="10637215" cy="365760"/>
           </a:xfrm>
           <a:prstGeom prst="rect">
             <a:avLst/>
@@ -3045,21 +3134,21 @@
           <a:bodyPr wrap="square" lIns="0" tIns="0" rIns="0" bIns="0" rtlCol="0" anchor="ctr"/>
           <a:lstStyle/>
           <a:p>
-            <a:pPr indent="0" marL="0">
-              <a:buNone/>
-            </a:pPr>
-            <a:r>
-              <a:rPr lang="en-US" sz="2600" b="1" dirty="0">
-                <a:solidFill>
-                  <a:srgbClr val="0F1B2D"/>
+            <a:pPr algn="ctr" indent="0" marL="0">
+              <a:buNone/>
+            </a:pPr>
+            <a:r>
+              <a:rPr lang="en-US" sz="2000" b="1" dirty="0">
+                <a:solidFill>
+                  <a:srgbClr val="F3F4F2"/>
                 </a:solidFill>
                 <a:latin typeface="Cambria" pitchFamily="34" charset="0"/>
                 <a:ea typeface="Cambria" pitchFamily="34" charset="-122"/>
                 <a:cs typeface="Cambria" pitchFamily="34" charset="-120"/>
               </a:rPr>
-              <a:t>The Stack, Verified Against The Codebase</a:t>
-            </a:r>
-            <a:endParaRPr lang="en-US" sz="2600" dirty="0"/>
+              <a:t>System Architecture, As Deployed</a:t>
+            </a:r>
+            <a:endParaRPr lang="en-US" sz="2000" dirty="0"/>
           </a:p>
         </p:txBody>
       </p:sp>
@@ -3071,909 +3160,43 @@
         </p:nvSpPr>
         <p:spPr>
           <a:xfrm>
-            <a:off x="777240" y="1874520"/>
-            <a:ext cx="3423818" cy="1554480"/>
+            <a:off x="777240" y="1691640"/>
+            <a:ext cx="10637215" cy="4480560"/>
           </a:xfrm>
           <a:prstGeom prst="roundRect">
             <a:avLst>
-              <a:gd name="adj" fmla="val 4706"/>
+              <a:gd name="adj" fmla="val 1633"/>
             </a:avLst>
           </a:prstGeom>
           <a:solidFill>
-            <a:srgbClr val="FFFFFF"/>
+            <a:srgbClr val="F7F7F2"/>
           </a:solidFill>
-          <a:ln w="9525">
-            <a:solidFill>
-              <a:srgbClr val="E2E1D6"/>
-            </a:solidFill>
-            <a:prstDash val="solid"/>
-          </a:ln>
-        </p:spPr>
-      </p:sp>
-      <p:sp>
-        <p:nvSpPr>
-          <p:cNvPr id="9" name="Text 6"/>
-          <p:cNvSpPr txBox="1"/>
-          <p:nvPr/>
-        </p:nvSpPr>
-        <p:spPr>
-          <a:xfrm>
-            <a:off x="960120" y="2039112"/>
-            <a:ext cx="3058058" cy="365760"/>
-          </a:xfrm>
-          <a:prstGeom prst="rect">
-            <a:avLst/>
-          </a:prstGeom>
-          <a:noFill/>
-          <a:ln/>
-        </p:spPr>
-        <p:txBody>
-          <a:bodyPr wrap="square" lIns="0" tIns="0" rIns="0" bIns="0" rtlCol="0" anchor="ctr"/>
-          <a:lstStyle/>
-          <a:p>
-            <a:pPr indent="0" marL="0">
-              <a:buNone/>
-            </a:pPr>
-            <a:r>
-              <a:rPr lang="en-US" sz="1250" b="1" dirty="0">
-                <a:solidFill>
-                  <a:srgbClr val="0E7490"/>
-                </a:solidFill>
-                <a:latin typeface="Calibri" pitchFamily="34" charset="0"/>
-                <a:ea typeface="Calibri" pitchFamily="34" charset="-122"/>
-                <a:cs typeface="Calibri" pitchFamily="34" charset="-120"/>
-              </a:rPr>
-              <a:t>Frontend</a:t>
-            </a:r>
-            <a:endParaRPr lang="en-US" sz="1250" dirty="0"/>
-          </a:p>
-        </p:txBody>
-      </p:sp>
-      <p:sp>
-        <p:nvSpPr>
-          <p:cNvPr id="10" name="Text 7"/>
-          <p:cNvSpPr txBox="1"/>
-          <p:nvPr/>
-        </p:nvSpPr>
-        <p:spPr>
-          <a:xfrm>
-            <a:off x="960120" y="2423160"/>
-            <a:ext cx="3058058" cy="868680"/>
-          </a:xfrm>
-          <a:prstGeom prst="rect">
-            <a:avLst/>
-          </a:prstGeom>
-          <a:noFill/>
-          <a:ln/>
-        </p:spPr>
-        <p:txBody>
-          <a:bodyPr wrap="square" lIns="0" tIns="0" rIns="0" bIns="0" rtlCol="0" anchor="t"/>
-          <a:lstStyle/>
-          <a:p>
-            <a:pPr indent="0" marL="0">
-              <a:buNone/>
-            </a:pPr>
-            <a:r>
-              <a:rPr lang="en-US" sz="1050" dirty="0">
-                <a:solidFill>
-                  <a:srgbClr val="6B7684"/>
-                </a:solidFill>
-                <a:latin typeface="Calibri" pitchFamily="34" charset="0"/>
-                <a:ea typeface="Calibri" pitchFamily="34" charset="-122"/>
-                <a:cs typeface="Calibri" pitchFamily="34" charset="-120"/>
-              </a:rPr>
-              <a:t>Vue 3 + Vite · Pinia · Vue Router</a:t>
-            </a:r>
-            <a:endParaRPr lang="en-US" sz="1050" dirty="0"/>
-          </a:p>
-          <a:p>
-            <a:pPr indent="0" marL="0">
-              <a:buNone/>
-            </a:pPr>
-            <a:r>
-              <a:rPr lang="en-US" sz="1050" dirty="0">
-                <a:solidFill>
-                  <a:srgbClr val="6B7684"/>
-                </a:solidFill>
-                <a:latin typeface="Calibri" pitchFamily="34" charset="0"/>
-                <a:ea typeface="Calibri" pitchFamily="34" charset="-122"/>
-                <a:cs typeface="Calibri" pitchFamily="34" charset="-120"/>
-              </a:rPr>
-              <a:t>Mapbox GL JS (live map)</a:t>
-            </a:r>
-            <a:endParaRPr lang="en-US" sz="1050" dirty="0"/>
-          </a:p>
-          <a:p>
-            <a:pPr indent="0" marL="0">
-              <a:buNone/>
-            </a:pPr>
-            <a:r>
-              <a:rPr lang="en-US" sz="1050" dirty="0">
-                <a:solidFill>
-                  <a:srgbClr val="6B7684"/>
-                </a:solidFill>
-                <a:latin typeface="Calibri" pitchFamily="34" charset="0"/>
-                <a:ea typeface="Calibri" pitchFamily="34" charset="-122"/>
-                <a:cs typeface="Calibri" pitchFamily="34" charset="-120"/>
-              </a:rPr>
-              <a:t>WebSocket live updates · vue-i18n</a:t>
-            </a:r>
-            <a:endParaRPr lang="en-US" sz="1050" dirty="0"/>
-          </a:p>
-        </p:txBody>
-      </p:sp>
-      <p:sp>
-        <p:nvSpPr>
-          <p:cNvPr id="11" name="Shape 8"/>
-          <p:cNvSpPr/>
-          <p:nvPr/>
-        </p:nvSpPr>
-        <p:spPr>
-          <a:xfrm>
-            <a:off x="4383938" y="1874520"/>
-            <a:ext cx="3423818" cy="1554480"/>
-          </a:xfrm>
-          <a:prstGeom prst="roundRect">
-            <a:avLst>
-              <a:gd name="adj" fmla="val 4706"/>
-            </a:avLst>
-          </a:prstGeom>
-          <a:solidFill>
-            <a:srgbClr val="FFFFFF"/>
-          </a:solidFill>
-          <a:ln w="9525">
-            <a:solidFill>
-              <a:srgbClr val="E2E1D6"/>
-            </a:solidFill>
-            <a:prstDash val="solid"/>
-          </a:ln>
-        </p:spPr>
-      </p:sp>
-      <p:sp>
-        <p:nvSpPr>
-          <p:cNvPr id="12" name="Text 9"/>
-          <p:cNvSpPr txBox="1"/>
-          <p:nvPr/>
-        </p:nvSpPr>
-        <p:spPr>
-          <a:xfrm>
-            <a:off x="4566818" y="2039112"/>
-            <a:ext cx="3058058" cy="365760"/>
-          </a:xfrm>
-          <a:prstGeom prst="rect">
-            <a:avLst/>
-          </a:prstGeom>
-          <a:noFill/>
-          <a:ln/>
-        </p:spPr>
-        <p:txBody>
-          <a:bodyPr wrap="square" lIns="0" tIns="0" rIns="0" bIns="0" rtlCol="0" anchor="ctr"/>
-          <a:lstStyle/>
-          <a:p>
-            <a:pPr indent="0" marL="0">
-              <a:buNone/>
-            </a:pPr>
-            <a:r>
-              <a:rPr lang="en-US" sz="1250" b="1" dirty="0">
-                <a:solidFill>
-                  <a:srgbClr val="0E7490"/>
-                </a:solidFill>
-                <a:latin typeface="Calibri" pitchFamily="34" charset="0"/>
-                <a:ea typeface="Calibri" pitchFamily="34" charset="-122"/>
-                <a:cs typeface="Calibri" pitchFamily="34" charset="-120"/>
-              </a:rPr>
-              <a:t>Backend</a:t>
-            </a:r>
-            <a:endParaRPr lang="en-US" sz="1250" dirty="0"/>
-          </a:p>
-        </p:txBody>
-      </p:sp>
-      <p:sp>
-        <p:nvSpPr>
-          <p:cNvPr id="13" name="Text 10"/>
-          <p:cNvSpPr txBox="1"/>
-          <p:nvPr/>
-        </p:nvSpPr>
-        <p:spPr>
-          <a:xfrm>
-            <a:off x="4566818" y="2423160"/>
-            <a:ext cx="3058058" cy="868680"/>
-          </a:xfrm>
-          <a:prstGeom prst="rect">
-            <a:avLst/>
-          </a:prstGeom>
-          <a:noFill/>
-          <a:ln/>
-        </p:spPr>
-        <p:txBody>
-          <a:bodyPr wrap="square" lIns="0" tIns="0" rIns="0" bIns="0" rtlCol="0" anchor="t"/>
-          <a:lstStyle/>
-          <a:p>
-            <a:pPr indent="0" marL="0">
-              <a:buNone/>
-            </a:pPr>
-            <a:r>
-              <a:rPr lang="en-US" sz="1050" dirty="0">
-                <a:solidFill>
-                  <a:srgbClr val="6B7684"/>
-                </a:solidFill>
-                <a:latin typeface="Calibri" pitchFamily="34" charset="0"/>
-                <a:ea typeface="Calibri" pitchFamily="34" charset="-122"/>
-                <a:cs typeface="Calibri" pitchFamily="34" charset="-120"/>
-              </a:rPr>
-              <a:t>FastAPI (Python 3.13)</a:t>
-            </a:r>
-            <a:endParaRPr lang="en-US" sz="1050" dirty="0"/>
-          </a:p>
-          <a:p>
-            <a:pPr indent="0" marL="0">
-              <a:buNone/>
-            </a:pPr>
-            <a:r>
-              <a:rPr lang="en-US" sz="1050" dirty="0">
-                <a:solidFill>
-                  <a:srgbClr val="6B7684"/>
-                </a:solidFill>
-                <a:latin typeface="Calibri" pitchFamily="34" charset="0"/>
-                <a:ea typeface="Calibri" pitchFamily="34" charset="-122"/>
-                <a:cs typeface="Calibri" pitchFamily="34" charset="-120"/>
-              </a:rPr>
-              <a:t>PostgreSQL — SQLAlchemy + Alembic</a:t>
-            </a:r>
-            <a:endParaRPr lang="en-US" sz="1050" dirty="0"/>
-          </a:p>
-          <a:p>
-            <a:pPr indent="0" marL="0">
-              <a:buNone/>
-            </a:pPr>
-            <a:r>
-              <a:rPr lang="en-US" sz="1050" dirty="0">
-                <a:solidFill>
-                  <a:srgbClr val="6B7684"/>
-                </a:solidFill>
-                <a:latin typeface="Calibri" pitchFamily="34" charset="0"/>
-                <a:ea typeface="Calibri" pitchFamily="34" charset="-122"/>
-                <a:cs typeface="Calibri" pitchFamily="34" charset="-120"/>
-              </a:rPr>
-              <a:t>APScheduler · WebSocket server</a:t>
-            </a:r>
-            <a:endParaRPr lang="en-US" sz="1050" dirty="0"/>
-          </a:p>
-          <a:p>
-            <a:pPr indent="0" marL="0">
-              <a:buNone/>
-            </a:pPr>
-            <a:r>
-              <a:rPr lang="en-US" sz="1050" dirty="0">
-                <a:solidFill>
-                  <a:srgbClr val="6B7684"/>
-                </a:solidFill>
-                <a:latin typeface="Calibri" pitchFamily="34" charset="0"/>
-                <a:ea typeface="Calibri" pitchFamily="34" charset="-122"/>
-                <a:cs typeface="Calibri" pitchFamily="34" charset="-120"/>
-              </a:rPr>
-              <a:t>Source of Truth — 4-layer data lineage (raw -&gt; validated -&gt; enriched -&gt; stored)</a:t>
-            </a:r>
-            <a:endParaRPr lang="en-US" sz="1050" dirty="0"/>
-          </a:p>
-        </p:txBody>
-      </p:sp>
-      <p:sp>
-        <p:nvSpPr>
-          <p:cNvPr id="14" name="Shape 11"/>
-          <p:cNvSpPr/>
-          <p:nvPr/>
-        </p:nvSpPr>
-        <p:spPr>
-          <a:xfrm>
-            <a:off x="7990637" y="1874520"/>
-            <a:ext cx="3423818" cy="1554480"/>
-          </a:xfrm>
-          <a:prstGeom prst="roundRect">
-            <a:avLst>
-              <a:gd name="adj" fmla="val 4706"/>
-            </a:avLst>
-          </a:prstGeom>
-          <a:solidFill>
-            <a:srgbClr val="FFFFFF"/>
-          </a:solidFill>
-          <a:ln w="9525">
-            <a:solidFill>
-              <a:srgbClr val="E2E1D6"/>
-            </a:solidFill>
-            <a:prstDash val="solid"/>
-          </a:ln>
-        </p:spPr>
-      </p:sp>
-      <p:sp>
-        <p:nvSpPr>
-          <p:cNvPr id="15" name="Text 12"/>
-          <p:cNvSpPr txBox="1"/>
-          <p:nvPr/>
-        </p:nvSpPr>
-        <p:spPr>
-          <a:xfrm>
-            <a:off x="8173517" y="2039112"/>
-            <a:ext cx="3058058" cy="365760"/>
-          </a:xfrm>
-          <a:prstGeom prst="rect">
-            <a:avLst/>
-          </a:prstGeom>
-          <a:noFill/>
-          <a:ln/>
-        </p:spPr>
-        <p:txBody>
-          <a:bodyPr wrap="square" lIns="0" tIns="0" rIns="0" bIns="0" rtlCol="0" anchor="ctr"/>
-          <a:lstStyle/>
-          <a:p>
-            <a:pPr indent="0" marL="0">
-              <a:buNone/>
-            </a:pPr>
-            <a:r>
-              <a:rPr lang="en-US" sz="1250" b="1" dirty="0">
-                <a:solidFill>
-                  <a:srgbClr val="E8722C"/>
-                </a:solidFill>
-                <a:latin typeface="Calibri" pitchFamily="34" charset="0"/>
-                <a:ea typeface="Calibri" pitchFamily="34" charset="-122"/>
-                <a:cs typeface="Calibri" pitchFamily="34" charset="-120"/>
-              </a:rPr>
-              <a:t>AI Layer — Google Cloud</a:t>
-            </a:r>
-            <a:endParaRPr lang="en-US" sz="1250" dirty="0"/>
-          </a:p>
-        </p:txBody>
-      </p:sp>
-      <p:sp>
-        <p:nvSpPr>
-          <p:cNvPr id="16" name="Text 13"/>
-          <p:cNvSpPr txBox="1"/>
-          <p:nvPr/>
-        </p:nvSpPr>
-        <p:spPr>
-          <a:xfrm>
-            <a:off x="8173517" y="2423160"/>
-            <a:ext cx="3058058" cy="868680"/>
-          </a:xfrm>
-          <a:prstGeom prst="rect">
-            <a:avLst/>
-          </a:prstGeom>
-          <a:noFill/>
-          <a:ln/>
-        </p:spPr>
-        <p:txBody>
-          <a:bodyPr wrap="square" lIns="0" tIns="0" rIns="0" bIns="0" rtlCol="0" anchor="t"/>
-          <a:lstStyle/>
-          <a:p>
-            <a:pPr indent="0" marL="0">
-              <a:buNone/>
-            </a:pPr>
-            <a:r>
-              <a:rPr lang="en-US" sz="1050" dirty="0">
-                <a:solidFill>
-                  <a:srgbClr val="6B7684"/>
-                </a:solidFill>
-                <a:latin typeface="Calibri" pitchFamily="34" charset="0"/>
-                <a:ea typeface="Calibri" pitchFamily="34" charset="-122"/>
-                <a:cs typeface="Calibri" pitchFamily="34" charset="-120"/>
-              </a:rPr>
-              <a:t>Vertex AI — Gemini 2.5 Flash</a:t>
-            </a:r>
-            <a:endParaRPr lang="en-US" sz="1050" dirty="0"/>
-          </a:p>
-          <a:p>
-            <a:pPr indent="0" marL="0">
-              <a:buNone/>
-            </a:pPr>
-            <a:r>
-              <a:rPr lang="en-US" sz="1050" dirty="0">
-                <a:solidFill>
-                  <a:srgbClr val="6B7684"/>
-                </a:solidFill>
-                <a:latin typeface="Calibri" pitchFamily="34" charset="0"/>
-                <a:ea typeface="Calibri" pitchFamily="34" charset="-122"/>
-                <a:cs typeface="Calibri" pitchFamily="34" charset="-120"/>
-              </a:rPr>
-              <a:t>Decision support, risk analysis, alert drafting</a:t>
-            </a:r>
-            <a:endParaRPr lang="en-US" sz="1050" dirty="0"/>
-          </a:p>
-          <a:p>
-            <a:pPr indent="0" marL="0">
-              <a:buNone/>
-            </a:pPr>
-            <a:r>
-              <a:rPr lang="en-US" sz="1050" dirty="0">
-                <a:solidFill>
-                  <a:srgbClr val="6B7684"/>
-                </a:solidFill>
-                <a:latin typeface="Calibri" pitchFamily="34" charset="0"/>
-                <a:ea typeface="Calibri" pitchFamily="34" charset="-122"/>
-                <a:cs typeface="Calibri" pitchFamily="34" charset="-120"/>
-              </a:rPr>
-              <a:t>Google Earth Engine — Sentinel-1 SAR flood detection</a:t>
-            </a:r>
-            <a:endParaRPr lang="en-US" sz="1050" dirty="0"/>
-          </a:p>
-        </p:txBody>
-      </p:sp>
-      <p:sp>
-        <p:nvSpPr>
-          <p:cNvPr id="17" name="Shape 14"/>
-          <p:cNvSpPr/>
-          <p:nvPr/>
-        </p:nvSpPr>
-        <p:spPr>
-          <a:xfrm>
-            <a:off x="777240" y="3566160"/>
-            <a:ext cx="3423818" cy="1554480"/>
-          </a:xfrm>
-          <a:prstGeom prst="roundRect">
-            <a:avLst>
-              <a:gd name="adj" fmla="val 4706"/>
-            </a:avLst>
-          </a:prstGeom>
-          <a:solidFill>
-            <a:srgbClr val="FFFFFF"/>
-          </a:solidFill>
-          <a:ln w="9525">
-            <a:solidFill>
-              <a:srgbClr val="E2E1D6"/>
-            </a:solidFill>
-            <a:prstDash val="solid"/>
-          </a:ln>
-        </p:spPr>
-      </p:sp>
-      <p:sp>
-        <p:nvSpPr>
-          <p:cNvPr id="18" name="Text 15"/>
-          <p:cNvSpPr txBox="1"/>
-          <p:nvPr/>
-        </p:nvSpPr>
-        <p:spPr>
-          <a:xfrm>
-            <a:off x="960120" y="3730752"/>
-            <a:ext cx="3058058" cy="365760"/>
-          </a:xfrm>
-          <a:prstGeom prst="rect">
-            <a:avLst/>
-          </a:prstGeom>
-          <a:noFill/>
-          <a:ln/>
-        </p:spPr>
-        <p:txBody>
-          <a:bodyPr wrap="square" lIns="0" tIns="0" rIns="0" bIns="0" rtlCol="0" anchor="ctr"/>
-          <a:lstStyle/>
-          <a:p>
-            <a:pPr indent="0" marL="0">
-              <a:buNone/>
-            </a:pPr>
-            <a:r>
-              <a:rPr lang="en-US" sz="1250" b="1" dirty="0">
-                <a:solidFill>
-                  <a:srgbClr val="E8722C"/>
-                </a:solidFill>
-                <a:latin typeface="Calibri" pitchFamily="34" charset="0"/>
-                <a:ea typeface="Calibri" pitchFamily="34" charset="-122"/>
-                <a:cs typeface="Calibri" pitchFamily="34" charset="-120"/>
-              </a:rPr>
-              <a:t>Evacuation Routing</a:t>
-            </a:r>
-            <a:endParaRPr lang="en-US" sz="1250" dirty="0"/>
-          </a:p>
-        </p:txBody>
-      </p:sp>
-      <p:sp>
-        <p:nvSpPr>
-          <p:cNvPr id="19" name="Text 16"/>
-          <p:cNvSpPr txBox="1"/>
-          <p:nvPr/>
-        </p:nvSpPr>
-        <p:spPr>
-          <a:xfrm>
-            <a:off x="960120" y="4114800"/>
-            <a:ext cx="3058058" cy="868680"/>
-          </a:xfrm>
-          <a:prstGeom prst="rect">
-            <a:avLst/>
-          </a:prstGeom>
-          <a:noFill/>
-          <a:ln/>
-        </p:spPr>
-        <p:txBody>
-          <a:bodyPr wrap="square" lIns="0" tIns="0" rIns="0" bIns="0" rtlCol="0" anchor="t"/>
-          <a:lstStyle/>
-          <a:p>
-            <a:pPr indent="0" marL="0">
-              <a:buNone/>
-            </a:pPr>
-            <a:r>
-              <a:rPr lang="en-US" sz="1050" dirty="0">
-                <a:solidFill>
-                  <a:srgbClr val="6B7684"/>
-                </a:solidFill>
-                <a:latin typeface="Calibri" pitchFamily="34" charset="0"/>
-                <a:ea typeface="Calibri" pitchFamily="34" charset="-122"/>
-                <a:cs typeface="Calibri" pitchFamily="34" charset="-120"/>
-              </a:rPr>
-              <a:t>OSRM road-network routing</a:t>
-            </a:r>
-            <a:endParaRPr lang="en-US" sz="1050" dirty="0"/>
-          </a:p>
-          <a:p>
-            <a:pPr indent="0" marL="0">
-              <a:buNone/>
-            </a:pPr>
-            <a:r>
-              <a:rPr lang="en-US" sz="1050" dirty="0">
-                <a:solidFill>
-                  <a:srgbClr val="6B7684"/>
-                </a:solidFill>
-                <a:latin typeface="Calibri" pitchFamily="34" charset="0"/>
-                <a:ea typeface="Calibri" pitchFamily="34" charset="-122"/>
-                <a:cs typeface="Calibri" pitchFamily="34" charset="-120"/>
-              </a:rPr>
-              <a:t>Automatic geodesic-distance fallback on failure</a:t>
-            </a:r>
-            <a:endParaRPr lang="en-US" sz="1050" dirty="0"/>
-          </a:p>
-        </p:txBody>
-      </p:sp>
-      <p:sp>
-        <p:nvSpPr>
-          <p:cNvPr id="20" name="Shape 17"/>
-          <p:cNvSpPr/>
-          <p:nvPr/>
-        </p:nvSpPr>
-        <p:spPr>
-          <a:xfrm>
-            <a:off x="4383938" y="3566160"/>
-            <a:ext cx="3423818" cy="1554480"/>
-          </a:xfrm>
-          <a:prstGeom prst="roundRect">
-            <a:avLst>
-              <a:gd name="adj" fmla="val 4706"/>
-            </a:avLst>
-          </a:prstGeom>
-          <a:solidFill>
-            <a:srgbClr val="FFFFFF"/>
-          </a:solidFill>
-          <a:ln w="9525">
-            <a:solidFill>
-              <a:srgbClr val="E2E1D6"/>
-            </a:solidFill>
-            <a:prstDash val="solid"/>
-          </a:ln>
-        </p:spPr>
-      </p:sp>
-      <p:sp>
-        <p:nvSpPr>
-          <p:cNvPr id="21" name="Text 18"/>
-          <p:cNvSpPr txBox="1"/>
-          <p:nvPr/>
-        </p:nvSpPr>
-        <p:spPr>
-          <a:xfrm>
-            <a:off x="4566818" y="3730752"/>
-            <a:ext cx="3058058" cy="365760"/>
-          </a:xfrm>
-          <a:prstGeom prst="rect">
-            <a:avLst/>
-          </a:prstGeom>
-          <a:noFill/>
-          <a:ln/>
-        </p:spPr>
-        <p:txBody>
-          <a:bodyPr wrap="square" lIns="0" tIns="0" rIns="0" bIns="0" rtlCol="0" anchor="ctr"/>
-          <a:lstStyle/>
-          <a:p>
-            <a:pPr indent="0" marL="0">
-              <a:buNone/>
-            </a:pPr>
-            <a:r>
-              <a:rPr lang="en-US" sz="1250" b="1" dirty="0">
-                <a:solidFill>
-                  <a:srgbClr val="E8722C"/>
-                </a:solidFill>
-                <a:latin typeface="Calibri" pitchFamily="34" charset="0"/>
-                <a:ea typeface="Calibri" pitchFamily="34" charset="-122"/>
-                <a:cs typeface="Calibri" pitchFamily="34" charset="-120"/>
-              </a:rPr>
-              <a:t>Alerting</a:t>
-            </a:r>
-            <a:endParaRPr lang="en-US" sz="1250" dirty="0"/>
-          </a:p>
-        </p:txBody>
-      </p:sp>
-      <p:sp>
-        <p:nvSpPr>
-          <p:cNvPr id="22" name="Text 19"/>
-          <p:cNvSpPr txBox="1"/>
-          <p:nvPr/>
-        </p:nvSpPr>
-        <p:spPr>
-          <a:xfrm>
-            <a:off x="4566818" y="4114800"/>
-            <a:ext cx="3058058" cy="868680"/>
-          </a:xfrm>
-          <a:prstGeom prst="rect">
-            <a:avLst/>
-          </a:prstGeom>
-          <a:noFill/>
-          <a:ln/>
-        </p:spPr>
-        <p:txBody>
-          <a:bodyPr wrap="square" lIns="0" tIns="0" rIns="0" bIns="0" rtlCol="0" anchor="t"/>
-          <a:lstStyle/>
-          <a:p>
-            <a:pPr indent="0" marL="0">
-              <a:buNone/>
-            </a:pPr>
-            <a:r>
-              <a:rPr lang="en-US" sz="1050" dirty="0">
-                <a:solidFill>
-                  <a:srgbClr val="6B7684"/>
-                </a:solidFill>
-                <a:latin typeface="Calibri" pitchFamily="34" charset="0"/>
-                <a:ea typeface="Calibri" pitchFamily="34" charset="-122"/>
-                <a:cs typeface="Calibri" pitchFamily="34" charset="-120"/>
-              </a:rPr>
-              <a:t>Email — Gmail SMTP, per-audience templates</a:t>
-            </a:r>
-            <a:endParaRPr lang="en-US" sz="1050" dirty="0"/>
-          </a:p>
-          <a:p>
-            <a:pPr indent="0" marL="0">
-              <a:buNone/>
-            </a:pPr>
-            <a:r>
-              <a:rPr lang="en-US" sz="1050" dirty="0">
-                <a:solidFill>
-                  <a:srgbClr val="6B7684"/>
-                </a:solidFill>
-                <a:latin typeface="Calibri" pitchFamily="34" charset="0"/>
-                <a:ea typeface="Calibri" pitchFamily="34" charset="-122"/>
-                <a:cs typeface="Calibri" pitchFamily="34" charset="-120"/>
-              </a:rPr>
-              <a:t>WhatsApp (WAHA) built, self-hosted — not yet production-reliable</a:t>
-            </a:r>
-            <a:endParaRPr lang="en-US" sz="1050" dirty="0"/>
-          </a:p>
-        </p:txBody>
-      </p:sp>
-      <p:sp>
-        <p:nvSpPr>
-          <p:cNvPr id="23" name="Shape 20"/>
-          <p:cNvSpPr/>
-          <p:nvPr/>
-        </p:nvSpPr>
-        <p:spPr>
-          <a:xfrm>
-            <a:off x="7990637" y="3566160"/>
-            <a:ext cx="3423818" cy="1554480"/>
-          </a:xfrm>
-          <a:prstGeom prst="roundRect">
-            <a:avLst>
-              <a:gd name="adj" fmla="val 4706"/>
-            </a:avLst>
-          </a:prstGeom>
-          <a:solidFill>
-            <a:srgbClr val="FFFFFF"/>
-          </a:solidFill>
-          <a:ln w="9525">
-            <a:solidFill>
-              <a:srgbClr val="E2E1D6"/>
-            </a:solidFill>
-            <a:prstDash val="solid"/>
-          </a:ln>
-        </p:spPr>
-      </p:sp>
-      <p:sp>
-        <p:nvSpPr>
-          <p:cNvPr id="24" name="Text 21"/>
-          <p:cNvSpPr txBox="1"/>
-          <p:nvPr/>
-        </p:nvSpPr>
-        <p:spPr>
-          <a:xfrm>
-            <a:off x="8173517" y="3730752"/>
-            <a:ext cx="3058058" cy="365760"/>
-          </a:xfrm>
-          <a:prstGeom prst="rect">
-            <a:avLst/>
-          </a:prstGeom>
-          <a:noFill/>
-          <a:ln/>
-        </p:spPr>
-        <p:txBody>
-          <a:bodyPr wrap="square" lIns="0" tIns="0" rIns="0" bIns="0" rtlCol="0" anchor="ctr"/>
-          <a:lstStyle/>
-          <a:p>
-            <a:pPr indent="0" marL="0">
-              <a:buNone/>
-            </a:pPr>
-            <a:r>
-              <a:rPr lang="en-US" sz="1250" b="1" dirty="0">
-                <a:solidFill>
-                  <a:srgbClr val="5B6472"/>
-                </a:solidFill>
-                <a:latin typeface="Calibri" pitchFamily="34" charset="0"/>
-                <a:ea typeface="Calibri" pitchFamily="34" charset="-122"/>
-                <a:cs typeface="Calibri" pitchFamily="34" charset="-120"/>
-              </a:rPr>
-              <a:t>External Data (6 sources)</a:t>
-            </a:r>
-            <a:endParaRPr lang="en-US" sz="1250" dirty="0"/>
-          </a:p>
-        </p:txBody>
-      </p:sp>
-      <p:sp>
-        <p:nvSpPr>
-          <p:cNvPr id="25" name="Text 22"/>
-          <p:cNvSpPr txBox="1"/>
-          <p:nvPr/>
-        </p:nvSpPr>
-        <p:spPr>
-          <a:xfrm>
-            <a:off x="8173517" y="4114800"/>
-            <a:ext cx="3058058" cy="868680"/>
-          </a:xfrm>
-          <a:prstGeom prst="rect">
-            <a:avLst/>
-          </a:prstGeom>
-          <a:noFill/>
-          <a:ln/>
-        </p:spPr>
-        <p:txBody>
-          <a:bodyPr wrap="square" lIns="0" tIns="0" rIns="0" bIns="0" rtlCol="0" anchor="t"/>
-          <a:lstStyle/>
-          <a:p>
-            <a:pPr indent="0" marL="0">
-              <a:buNone/>
-            </a:pPr>
-            <a:r>
-              <a:rPr lang="en-US" sz="1050" dirty="0">
-                <a:solidFill>
-                  <a:srgbClr val="6B7684"/>
-                </a:solidFill>
-                <a:latin typeface="Calibri" pitchFamily="34" charset="0"/>
-                <a:ea typeface="Calibri" pitchFamily="34" charset="-122"/>
-                <a:cs typeface="Calibri" pitchFamily="34" charset="-120"/>
-              </a:rPr>
-              <a:t>NASA EONET · USGS · NOAA</a:t>
-            </a:r>
-            <a:endParaRPr lang="en-US" sz="1050" dirty="0"/>
-          </a:p>
-          <a:p>
-            <a:pPr indent="0" marL="0">
-              <a:buNone/>
-            </a:pPr>
-            <a:r>
-              <a:rPr lang="en-US" sz="1050" dirty="0">
-                <a:solidFill>
-                  <a:srgbClr val="6B7684"/>
-                </a:solidFill>
-                <a:latin typeface="Calibri" pitchFamily="34" charset="0"/>
-                <a:ea typeface="Calibri" pitchFamily="34" charset="-122"/>
-                <a:cs typeface="Calibri" pitchFamily="34" charset="-120"/>
-              </a:rPr>
-              <a:t>GDACS · OpenWeatherMap</a:t>
-            </a:r>
-            <a:endParaRPr lang="en-US" sz="1050" dirty="0"/>
-          </a:p>
-          <a:p>
-            <a:pPr indent="0" marL="0">
-              <a:buNone/>
-            </a:pPr>
-            <a:r>
-              <a:rPr lang="en-US" sz="1050" dirty="0">
-                <a:solidFill>
-                  <a:srgbClr val="6B7684"/>
-                </a:solidFill>
-                <a:latin typeface="Calibri" pitchFamily="34" charset="0"/>
-                <a:ea typeface="Calibri" pitchFamily="34" charset="-122"/>
-                <a:cs typeface="Calibri" pitchFamily="34" charset="-120"/>
-              </a:rPr>
-              <a:t>OpenStreetMap / Overpass</a:t>
-            </a:r>
-            <a:endParaRPr lang="en-US" sz="1050" dirty="0"/>
-          </a:p>
-        </p:txBody>
-      </p:sp>
-      <p:sp>
-        <p:nvSpPr>
-          <p:cNvPr id="26" name="Shape 23"/>
-          <p:cNvSpPr/>
-          <p:nvPr/>
-        </p:nvSpPr>
-        <p:spPr>
-          <a:xfrm>
-            <a:off x="777240" y="5349240"/>
-            <a:ext cx="10637215" cy="868680"/>
-          </a:xfrm>
-          <a:prstGeom prst="roundRect">
-            <a:avLst>
-              <a:gd name="adj" fmla="val 7368"/>
-            </a:avLst>
-          </a:prstGeom>
-          <a:solidFill>
-            <a:srgbClr val="E9E7DC"/>
-          </a:solidFill>
-          <a:ln/>
-        </p:spPr>
-      </p:sp>
-      <p:sp>
-        <p:nvSpPr>
-          <p:cNvPr id="27" name="Text 24"/>
-          <p:cNvSpPr txBox="1"/>
-          <p:nvPr/>
-        </p:nvSpPr>
-        <p:spPr>
-          <a:xfrm>
-            <a:off x="960120" y="5440680"/>
-            <a:ext cx="5044288" cy="685800"/>
-          </a:xfrm>
-          <a:prstGeom prst="rect">
-            <a:avLst/>
-          </a:prstGeom>
-          <a:noFill/>
-          <a:ln/>
-        </p:spPr>
-        <p:txBody>
-          <a:bodyPr wrap="square" lIns="0" tIns="0" rIns="0" bIns="0" rtlCol="0" anchor="ctr"/>
-          <a:lstStyle/>
-          <a:p>
-            <a:pPr indent="0" marL="0">
-              <a:buNone/>
-            </a:pPr>
-            <a:r>
-              <a:rPr lang="en-US" sz="1000" dirty="0">
-                <a:solidFill>
-                  <a:srgbClr val="4A5568"/>
-                </a:solidFill>
-              </a:rPr>
-              <a:t>In the codebase but dormant/unreliable in this prototype: Redis (caching), Pub/Sub (messaging), OSM/Overpass (frequently times out, fails gracefully).</a:t>
-            </a:r>
-            <a:endParaRPr lang="en-US" sz="1000" dirty="0"/>
-          </a:p>
-        </p:txBody>
-      </p:sp>
-      <p:sp>
-        <p:nvSpPr>
-          <p:cNvPr id="28" name="Text 25"/>
-          <p:cNvSpPr txBox="1"/>
-          <p:nvPr/>
-        </p:nvSpPr>
-        <p:spPr>
-          <a:xfrm>
-            <a:off x="6187288" y="5440680"/>
-            <a:ext cx="5044288" cy="685800"/>
-          </a:xfrm>
-          <a:prstGeom prst="rect">
-            <a:avLst/>
-          </a:prstGeom>
-          <a:noFill/>
-          <a:ln/>
-        </p:spPr>
-        <p:txBody>
-          <a:bodyPr wrap="square" lIns="0" tIns="0" rIns="0" bIns="0" rtlCol="0" anchor="ctr"/>
-          <a:lstStyle/>
-          <a:p>
-            <a:pPr indent="0" marL="0">
-              <a:buNone/>
-            </a:pPr>
-            <a:r>
-              <a:rPr lang="en-US" sz="1000" dirty="0">
-                <a:solidFill>
-                  <a:srgbClr val="4A5568"/>
-                </a:solidFill>
-              </a:rPr>
-              <a:t>Deployment targets: Firebase Hosting (frontend) + Google Cloud Run (backend API) + Docker, CI via GitHub Actions — not yet deployed to production at submission time.</a:t>
-            </a:r>
-            <a:endParaRPr lang="en-US" sz="1000" dirty="0"/>
-          </a:p>
-        </p:txBody>
-      </p:sp>
+          <a:ln/>
+        </p:spPr>
+      </p:sp>
+      <p:pic>
+        <p:nvPicPr>
+          <p:cNvPr id="9" name="Image 1" descr="/home/claude/pptx-build/assets/d0fc448611146c1aa89d7aeca1c3ec3b.png">    </p:cNvPr>
+          <p:cNvPicPr>
+            <a:picLocks noChangeAspect="1"/>
+          </p:cNvPicPr>
+          <p:nvPr/>
+        </p:nvPicPr>
+        <p:blipFill>
+          <a:blip r:embed="rId2"/>
+          <a:srcRect l="0" r="0" t="0" b="0"/>
+          <a:stretch/>
+        </p:blipFill>
+        <p:spPr>
+          <a:xfrm>
+            <a:off x="914400" y="1828800"/>
+            <a:ext cx="10362895" cy="4206240"/>
+          </a:xfrm>
+          <a:prstGeom prst="rect">
+            <a:avLst/>
+          </a:prstGeom>
+        </p:spPr>
+      </p:pic>
     </p:spTree>
   </p:cSld>
   <p:clrMapOvr>
@@ -4102,7 +3325,7 @@
                 <a:ea typeface="Calibri" pitchFamily="34" charset="-122"/>
                 <a:cs typeface="Calibri" pitchFamily="34" charset="-120"/>
               </a:rPr>
-              <a:t>11 / 16</a:t>
+              <a:t>11 / 17</a:t>
             </a:r>
             <a:endParaRPr lang="en-US" sz="1100" dirty="0"/>
           </a:p>
@@ -4161,7 +3384,7 @@
                 <a:ea typeface="Calibri" pitchFamily="34" charset="-122"/>
                 <a:cs typeface="Calibri" pitchFamily="34" charset="-120"/>
               </a:rPr>
-              <a:t>ESTIMATED IMPLEMENTATION COST (OPTIONAL)</a:t>
+              <a:t>TECHNOLOGIES</a:t>
             </a:r>
             <a:endParaRPr lang="en-US" sz="1300" dirty="0"/>
           </a:p>
@@ -4200,6 +3423,1149 @@
                 <a:ea typeface="Cambria" pitchFamily="34" charset="-122"/>
                 <a:cs typeface="Cambria" pitchFamily="34" charset="-120"/>
               </a:rPr>
+              <a:t>The Stack, Verified Against The Codebase</a:t>
+            </a:r>
+            <a:endParaRPr lang="en-US" sz="2600" dirty="0"/>
+          </a:p>
+        </p:txBody>
+      </p:sp>
+      <p:sp>
+        <p:nvSpPr>
+          <p:cNvPr id="8" name="Shape 5"/>
+          <p:cNvSpPr/>
+          <p:nvPr/>
+        </p:nvSpPr>
+        <p:spPr>
+          <a:xfrm>
+            <a:off x="777240" y="1874520"/>
+            <a:ext cx="3423818" cy="1554480"/>
+          </a:xfrm>
+          <a:prstGeom prst="roundRect">
+            <a:avLst>
+              <a:gd name="adj" fmla="val 4706"/>
+            </a:avLst>
+          </a:prstGeom>
+          <a:solidFill>
+            <a:srgbClr val="FFFFFF"/>
+          </a:solidFill>
+          <a:ln w="9525">
+            <a:solidFill>
+              <a:srgbClr val="E2E1D6"/>
+            </a:solidFill>
+            <a:prstDash val="solid"/>
+          </a:ln>
+        </p:spPr>
+      </p:sp>
+      <p:sp>
+        <p:nvSpPr>
+          <p:cNvPr id="9" name="Text 6"/>
+          <p:cNvSpPr txBox="1"/>
+          <p:nvPr/>
+        </p:nvSpPr>
+        <p:spPr>
+          <a:xfrm>
+            <a:off x="960120" y="2039112"/>
+            <a:ext cx="3058058" cy="365760"/>
+          </a:xfrm>
+          <a:prstGeom prst="rect">
+            <a:avLst/>
+          </a:prstGeom>
+          <a:noFill/>
+          <a:ln/>
+        </p:spPr>
+        <p:txBody>
+          <a:bodyPr wrap="square" lIns="0" tIns="0" rIns="0" bIns="0" rtlCol="0" anchor="ctr"/>
+          <a:lstStyle/>
+          <a:p>
+            <a:pPr indent="0" marL="0">
+              <a:buNone/>
+            </a:pPr>
+            <a:r>
+              <a:rPr lang="en-US" sz="1250" b="1" dirty="0">
+                <a:solidFill>
+                  <a:srgbClr val="0E7490"/>
+                </a:solidFill>
+                <a:latin typeface="Calibri" pitchFamily="34" charset="0"/>
+                <a:ea typeface="Calibri" pitchFamily="34" charset="-122"/>
+                <a:cs typeface="Calibri" pitchFamily="34" charset="-120"/>
+              </a:rPr>
+              <a:t>Frontend</a:t>
+            </a:r>
+            <a:endParaRPr lang="en-US" sz="1250" dirty="0"/>
+          </a:p>
+        </p:txBody>
+      </p:sp>
+      <p:sp>
+        <p:nvSpPr>
+          <p:cNvPr id="10" name="Text 7"/>
+          <p:cNvSpPr txBox="1"/>
+          <p:nvPr/>
+        </p:nvSpPr>
+        <p:spPr>
+          <a:xfrm>
+            <a:off x="960120" y="2423160"/>
+            <a:ext cx="3058058" cy="868680"/>
+          </a:xfrm>
+          <a:prstGeom prst="rect">
+            <a:avLst/>
+          </a:prstGeom>
+          <a:noFill/>
+          <a:ln/>
+        </p:spPr>
+        <p:txBody>
+          <a:bodyPr wrap="square" lIns="0" tIns="0" rIns="0" bIns="0" rtlCol="0" anchor="t"/>
+          <a:lstStyle/>
+          <a:p>
+            <a:pPr indent="0" marL="0">
+              <a:buNone/>
+            </a:pPr>
+            <a:r>
+              <a:rPr lang="en-US" sz="1050" dirty="0">
+                <a:solidFill>
+                  <a:srgbClr val="6B7684"/>
+                </a:solidFill>
+                <a:latin typeface="Calibri" pitchFamily="34" charset="0"/>
+                <a:ea typeface="Calibri" pitchFamily="34" charset="-122"/>
+                <a:cs typeface="Calibri" pitchFamily="34" charset="-120"/>
+              </a:rPr>
+              <a:t>Vue 3 + Vite · Pinia · Vue Router</a:t>
+            </a:r>
+            <a:endParaRPr lang="en-US" sz="1050" dirty="0"/>
+          </a:p>
+          <a:p>
+            <a:pPr indent="0" marL="0">
+              <a:buNone/>
+            </a:pPr>
+            <a:r>
+              <a:rPr lang="en-US" sz="1050" dirty="0">
+                <a:solidFill>
+                  <a:srgbClr val="6B7684"/>
+                </a:solidFill>
+                <a:latin typeface="Calibri" pitchFamily="34" charset="0"/>
+                <a:ea typeface="Calibri" pitchFamily="34" charset="-122"/>
+                <a:cs typeface="Calibri" pitchFamily="34" charset="-120"/>
+              </a:rPr>
+              <a:t>Mapbox GL JS (live map)</a:t>
+            </a:r>
+            <a:endParaRPr lang="en-US" sz="1050" dirty="0"/>
+          </a:p>
+          <a:p>
+            <a:pPr indent="0" marL="0">
+              <a:buNone/>
+            </a:pPr>
+            <a:r>
+              <a:rPr lang="en-US" sz="1050" dirty="0">
+                <a:solidFill>
+                  <a:srgbClr val="6B7684"/>
+                </a:solidFill>
+                <a:latin typeface="Calibri" pitchFamily="34" charset="0"/>
+                <a:ea typeface="Calibri" pitchFamily="34" charset="-122"/>
+                <a:cs typeface="Calibri" pitchFamily="34" charset="-120"/>
+              </a:rPr>
+              <a:t>WebSocket live updates · vue-i18n</a:t>
+            </a:r>
+            <a:endParaRPr lang="en-US" sz="1050" dirty="0"/>
+          </a:p>
+        </p:txBody>
+      </p:sp>
+      <p:sp>
+        <p:nvSpPr>
+          <p:cNvPr id="11" name="Shape 8"/>
+          <p:cNvSpPr/>
+          <p:nvPr/>
+        </p:nvSpPr>
+        <p:spPr>
+          <a:xfrm>
+            <a:off x="4383938" y="1874520"/>
+            <a:ext cx="3423818" cy="1554480"/>
+          </a:xfrm>
+          <a:prstGeom prst="roundRect">
+            <a:avLst>
+              <a:gd name="adj" fmla="val 4706"/>
+            </a:avLst>
+          </a:prstGeom>
+          <a:solidFill>
+            <a:srgbClr val="FFFFFF"/>
+          </a:solidFill>
+          <a:ln w="9525">
+            <a:solidFill>
+              <a:srgbClr val="E2E1D6"/>
+            </a:solidFill>
+            <a:prstDash val="solid"/>
+          </a:ln>
+        </p:spPr>
+      </p:sp>
+      <p:sp>
+        <p:nvSpPr>
+          <p:cNvPr id="12" name="Text 9"/>
+          <p:cNvSpPr txBox="1"/>
+          <p:nvPr/>
+        </p:nvSpPr>
+        <p:spPr>
+          <a:xfrm>
+            <a:off x="4566818" y="2039112"/>
+            <a:ext cx="3058058" cy="365760"/>
+          </a:xfrm>
+          <a:prstGeom prst="rect">
+            <a:avLst/>
+          </a:prstGeom>
+          <a:noFill/>
+          <a:ln/>
+        </p:spPr>
+        <p:txBody>
+          <a:bodyPr wrap="square" lIns="0" tIns="0" rIns="0" bIns="0" rtlCol="0" anchor="ctr"/>
+          <a:lstStyle/>
+          <a:p>
+            <a:pPr indent="0" marL="0">
+              <a:buNone/>
+            </a:pPr>
+            <a:r>
+              <a:rPr lang="en-US" sz="1250" b="1" dirty="0">
+                <a:solidFill>
+                  <a:srgbClr val="0E7490"/>
+                </a:solidFill>
+                <a:latin typeface="Calibri" pitchFamily="34" charset="0"/>
+                <a:ea typeface="Calibri" pitchFamily="34" charset="-122"/>
+                <a:cs typeface="Calibri" pitchFamily="34" charset="-120"/>
+              </a:rPr>
+              <a:t>Backend</a:t>
+            </a:r>
+            <a:endParaRPr lang="en-US" sz="1250" dirty="0"/>
+          </a:p>
+        </p:txBody>
+      </p:sp>
+      <p:sp>
+        <p:nvSpPr>
+          <p:cNvPr id="13" name="Text 10"/>
+          <p:cNvSpPr txBox="1"/>
+          <p:nvPr/>
+        </p:nvSpPr>
+        <p:spPr>
+          <a:xfrm>
+            <a:off x="4566818" y="2423160"/>
+            <a:ext cx="3058058" cy="868680"/>
+          </a:xfrm>
+          <a:prstGeom prst="rect">
+            <a:avLst/>
+          </a:prstGeom>
+          <a:noFill/>
+          <a:ln/>
+        </p:spPr>
+        <p:txBody>
+          <a:bodyPr wrap="square" lIns="0" tIns="0" rIns="0" bIns="0" rtlCol="0" anchor="t"/>
+          <a:lstStyle/>
+          <a:p>
+            <a:pPr indent="0" marL="0">
+              <a:buNone/>
+            </a:pPr>
+            <a:r>
+              <a:rPr lang="en-US" sz="1050" dirty="0">
+                <a:solidFill>
+                  <a:srgbClr val="6B7684"/>
+                </a:solidFill>
+                <a:latin typeface="Calibri" pitchFamily="34" charset="0"/>
+                <a:ea typeface="Calibri" pitchFamily="34" charset="-122"/>
+                <a:cs typeface="Calibri" pitchFamily="34" charset="-120"/>
+              </a:rPr>
+              <a:t>FastAPI (Python 3.13)</a:t>
+            </a:r>
+            <a:endParaRPr lang="en-US" sz="1050" dirty="0"/>
+          </a:p>
+          <a:p>
+            <a:pPr indent="0" marL="0">
+              <a:buNone/>
+            </a:pPr>
+            <a:r>
+              <a:rPr lang="en-US" sz="1050" dirty="0">
+                <a:solidFill>
+                  <a:srgbClr val="6B7684"/>
+                </a:solidFill>
+                <a:latin typeface="Calibri" pitchFamily="34" charset="0"/>
+                <a:ea typeface="Calibri" pitchFamily="34" charset="-122"/>
+                <a:cs typeface="Calibri" pitchFamily="34" charset="-120"/>
+              </a:rPr>
+              <a:t>PostgreSQL — SQLAlchemy + Alembic</a:t>
+            </a:r>
+            <a:endParaRPr lang="en-US" sz="1050" dirty="0"/>
+          </a:p>
+          <a:p>
+            <a:pPr indent="0" marL="0">
+              <a:buNone/>
+            </a:pPr>
+            <a:r>
+              <a:rPr lang="en-US" sz="1050" dirty="0">
+                <a:solidFill>
+                  <a:srgbClr val="6B7684"/>
+                </a:solidFill>
+                <a:latin typeface="Calibri" pitchFamily="34" charset="0"/>
+                <a:ea typeface="Calibri" pitchFamily="34" charset="-122"/>
+                <a:cs typeface="Calibri" pitchFamily="34" charset="-120"/>
+              </a:rPr>
+              <a:t>APScheduler · WebSocket server</a:t>
+            </a:r>
+            <a:endParaRPr lang="en-US" sz="1050" dirty="0"/>
+          </a:p>
+          <a:p>
+            <a:pPr indent="0" marL="0">
+              <a:buNone/>
+            </a:pPr>
+            <a:r>
+              <a:rPr lang="en-US" sz="1050" dirty="0">
+                <a:solidFill>
+                  <a:srgbClr val="6B7684"/>
+                </a:solidFill>
+                <a:latin typeface="Calibri" pitchFamily="34" charset="0"/>
+                <a:ea typeface="Calibri" pitchFamily="34" charset="-122"/>
+                <a:cs typeface="Calibri" pitchFamily="34" charset="-120"/>
+              </a:rPr>
+              <a:t>Source of Truth — 4-layer data lineage (raw -&gt; validated -&gt; enriched -&gt; stored)</a:t>
+            </a:r>
+            <a:endParaRPr lang="en-US" sz="1050" dirty="0"/>
+          </a:p>
+        </p:txBody>
+      </p:sp>
+      <p:sp>
+        <p:nvSpPr>
+          <p:cNvPr id="14" name="Shape 11"/>
+          <p:cNvSpPr/>
+          <p:nvPr/>
+        </p:nvSpPr>
+        <p:spPr>
+          <a:xfrm>
+            <a:off x="7990637" y="1874520"/>
+            <a:ext cx="3423818" cy="1554480"/>
+          </a:xfrm>
+          <a:prstGeom prst="roundRect">
+            <a:avLst>
+              <a:gd name="adj" fmla="val 4706"/>
+            </a:avLst>
+          </a:prstGeom>
+          <a:solidFill>
+            <a:srgbClr val="FFFFFF"/>
+          </a:solidFill>
+          <a:ln w="9525">
+            <a:solidFill>
+              <a:srgbClr val="E2E1D6"/>
+            </a:solidFill>
+            <a:prstDash val="solid"/>
+          </a:ln>
+        </p:spPr>
+      </p:sp>
+      <p:sp>
+        <p:nvSpPr>
+          <p:cNvPr id="15" name="Text 12"/>
+          <p:cNvSpPr txBox="1"/>
+          <p:nvPr/>
+        </p:nvSpPr>
+        <p:spPr>
+          <a:xfrm>
+            <a:off x="8173517" y="2039112"/>
+            <a:ext cx="3058058" cy="365760"/>
+          </a:xfrm>
+          <a:prstGeom prst="rect">
+            <a:avLst/>
+          </a:prstGeom>
+          <a:noFill/>
+          <a:ln/>
+        </p:spPr>
+        <p:txBody>
+          <a:bodyPr wrap="square" lIns="0" tIns="0" rIns="0" bIns="0" rtlCol="0" anchor="ctr"/>
+          <a:lstStyle/>
+          <a:p>
+            <a:pPr indent="0" marL="0">
+              <a:buNone/>
+            </a:pPr>
+            <a:r>
+              <a:rPr lang="en-US" sz="1250" b="1" dirty="0">
+                <a:solidFill>
+                  <a:srgbClr val="E8722C"/>
+                </a:solidFill>
+                <a:latin typeface="Calibri" pitchFamily="34" charset="0"/>
+                <a:ea typeface="Calibri" pitchFamily="34" charset="-122"/>
+                <a:cs typeface="Calibri" pitchFamily="34" charset="-120"/>
+              </a:rPr>
+              <a:t>AI Layer — Google Cloud</a:t>
+            </a:r>
+            <a:endParaRPr lang="en-US" sz="1250" dirty="0"/>
+          </a:p>
+        </p:txBody>
+      </p:sp>
+      <p:sp>
+        <p:nvSpPr>
+          <p:cNvPr id="16" name="Text 13"/>
+          <p:cNvSpPr txBox="1"/>
+          <p:nvPr/>
+        </p:nvSpPr>
+        <p:spPr>
+          <a:xfrm>
+            <a:off x="8173517" y="2423160"/>
+            <a:ext cx="3058058" cy="868680"/>
+          </a:xfrm>
+          <a:prstGeom prst="rect">
+            <a:avLst/>
+          </a:prstGeom>
+          <a:noFill/>
+          <a:ln/>
+        </p:spPr>
+        <p:txBody>
+          <a:bodyPr wrap="square" lIns="0" tIns="0" rIns="0" bIns="0" rtlCol="0" anchor="t"/>
+          <a:lstStyle/>
+          <a:p>
+            <a:pPr indent="0" marL="0">
+              <a:buNone/>
+            </a:pPr>
+            <a:r>
+              <a:rPr lang="en-US" sz="1050" dirty="0">
+                <a:solidFill>
+                  <a:srgbClr val="6B7684"/>
+                </a:solidFill>
+                <a:latin typeface="Calibri" pitchFamily="34" charset="0"/>
+                <a:ea typeface="Calibri" pitchFamily="34" charset="-122"/>
+                <a:cs typeface="Calibri" pitchFamily="34" charset="-120"/>
+              </a:rPr>
+              <a:t>Vertex AI — Gemini 2.5 Flash</a:t>
+            </a:r>
+            <a:endParaRPr lang="en-US" sz="1050" dirty="0"/>
+          </a:p>
+          <a:p>
+            <a:pPr indent="0" marL="0">
+              <a:buNone/>
+            </a:pPr>
+            <a:r>
+              <a:rPr lang="en-US" sz="1050" dirty="0">
+                <a:solidFill>
+                  <a:srgbClr val="6B7684"/>
+                </a:solidFill>
+                <a:latin typeface="Calibri" pitchFamily="34" charset="0"/>
+                <a:ea typeface="Calibri" pitchFamily="34" charset="-122"/>
+                <a:cs typeface="Calibri" pitchFamily="34" charset="-120"/>
+              </a:rPr>
+              <a:t>Decision support, risk analysis, alert drafting</a:t>
+            </a:r>
+            <a:endParaRPr lang="en-US" sz="1050" dirty="0"/>
+          </a:p>
+          <a:p>
+            <a:pPr indent="0" marL="0">
+              <a:buNone/>
+            </a:pPr>
+            <a:r>
+              <a:rPr lang="en-US" sz="1050" dirty="0">
+                <a:solidFill>
+                  <a:srgbClr val="6B7684"/>
+                </a:solidFill>
+                <a:latin typeface="Calibri" pitchFamily="34" charset="0"/>
+                <a:ea typeface="Calibri" pitchFamily="34" charset="-122"/>
+                <a:cs typeface="Calibri" pitchFamily="34" charset="-120"/>
+              </a:rPr>
+              <a:t>Google Earth Engine — Sentinel-1 SAR flood detection</a:t>
+            </a:r>
+            <a:endParaRPr lang="en-US" sz="1050" dirty="0"/>
+          </a:p>
+        </p:txBody>
+      </p:sp>
+      <p:sp>
+        <p:nvSpPr>
+          <p:cNvPr id="17" name="Shape 14"/>
+          <p:cNvSpPr/>
+          <p:nvPr/>
+        </p:nvSpPr>
+        <p:spPr>
+          <a:xfrm>
+            <a:off x="777240" y="3566160"/>
+            <a:ext cx="3423818" cy="1554480"/>
+          </a:xfrm>
+          <a:prstGeom prst="roundRect">
+            <a:avLst>
+              <a:gd name="adj" fmla="val 4706"/>
+            </a:avLst>
+          </a:prstGeom>
+          <a:solidFill>
+            <a:srgbClr val="FFFFFF"/>
+          </a:solidFill>
+          <a:ln w="9525">
+            <a:solidFill>
+              <a:srgbClr val="E2E1D6"/>
+            </a:solidFill>
+            <a:prstDash val="solid"/>
+          </a:ln>
+        </p:spPr>
+      </p:sp>
+      <p:sp>
+        <p:nvSpPr>
+          <p:cNvPr id="18" name="Text 15"/>
+          <p:cNvSpPr txBox="1"/>
+          <p:nvPr/>
+        </p:nvSpPr>
+        <p:spPr>
+          <a:xfrm>
+            <a:off x="960120" y="3730752"/>
+            <a:ext cx="3058058" cy="365760"/>
+          </a:xfrm>
+          <a:prstGeom prst="rect">
+            <a:avLst/>
+          </a:prstGeom>
+          <a:noFill/>
+          <a:ln/>
+        </p:spPr>
+        <p:txBody>
+          <a:bodyPr wrap="square" lIns="0" tIns="0" rIns="0" bIns="0" rtlCol="0" anchor="ctr"/>
+          <a:lstStyle/>
+          <a:p>
+            <a:pPr indent="0" marL="0">
+              <a:buNone/>
+            </a:pPr>
+            <a:r>
+              <a:rPr lang="en-US" sz="1250" b="1" dirty="0">
+                <a:solidFill>
+                  <a:srgbClr val="E8722C"/>
+                </a:solidFill>
+                <a:latin typeface="Calibri" pitchFamily="34" charset="0"/>
+                <a:ea typeface="Calibri" pitchFamily="34" charset="-122"/>
+                <a:cs typeface="Calibri" pitchFamily="34" charset="-120"/>
+              </a:rPr>
+              <a:t>Evacuation Routing</a:t>
+            </a:r>
+            <a:endParaRPr lang="en-US" sz="1250" dirty="0"/>
+          </a:p>
+        </p:txBody>
+      </p:sp>
+      <p:sp>
+        <p:nvSpPr>
+          <p:cNvPr id="19" name="Text 16"/>
+          <p:cNvSpPr txBox="1"/>
+          <p:nvPr/>
+        </p:nvSpPr>
+        <p:spPr>
+          <a:xfrm>
+            <a:off x="960120" y="4114800"/>
+            <a:ext cx="3058058" cy="868680"/>
+          </a:xfrm>
+          <a:prstGeom prst="rect">
+            <a:avLst/>
+          </a:prstGeom>
+          <a:noFill/>
+          <a:ln/>
+        </p:spPr>
+        <p:txBody>
+          <a:bodyPr wrap="square" lIns="0" tIns="0" rIns="0" bIns="0" rtlCol="0" anchor="t"/>
+          <a:lstStyle/>
+          <a:p>
+            <a:pPr indent="0" marL="0">
+              <a:buNone/>
+            </a:pPr>
+            <a:r>
+              <a:rPr lang="en-US" sz="1050" dirty="0">
+                <a:solidFill>
+                  <a:srgbClr val="6B7684"/>
+                </a:solidFill>
+                <a:latin typeface="Calibri" pitchFamily="34" charset="0"/>
+                <a:ea typeface="Calibri" pitchFamily="34" charset="-122"/>
+                <a:cs typeface="Calibri" pitchFamily="34" charset="-120"/>
+              </a:rPr>
+              <a:t>OSRM road-network routing</a:t>
+            </a:r>
+            <a:endParaRPr lang="en-US" sz="1050" dirty="0"/>
+          </a:p>
+          <a:p>
+            <a:pPr indent="0" marL="0">
+              <a:buNone/>
+            </a:pPr>
+            <a:r>
+              <a:rPr lang="en-US" sz="1050" dirty="0">
+                <a:solidFill>
+                  <a:srgbClr val="6B7684"/>
+                </a:solidFill>
+                <a:latin typeface="Calibri" pitchFamily="34" charset="0"/>
+                <a:ea typeface="Calibri" pitchFamily="34" charset="-122"/>
+                <a:cs typeface="Calibri" pitchFamily="34" charset="-120"/>
+              </a:rPr>
+              <a:t>Automatic geodesic-distance fallback on failure</a:t>
+            </a:r>
+            <a:endParaRPr lang="en-US" sz="1050" dirty="0"/>
+          </a:p>
+        </p:txBody>
+      </p:sp>
+      <p:sp>
+        <p:nvSpPr>
+          <p:cNvPr id="20" name="Shape 17"/>
+          <p:cNvSpPr/>
+          <p:nvPr/>
+        </p:nvSpPr>
+        <p:spPr>
+          <a:xfrm>
+            <a:off x="4383938" y="3566160"/>
+            <a:ext cx="3423818" cy="1554480"/>
+          </a:xfrm>
+          <a:prstGeom prst="roundRect">
+            <a:avLst>
+              <a:gd name="adj" fmla="val 4706"/>
+            </a:avLst>
+          </a:prstGeom>
+          <a:solidFill>
+            <a:srgbClr val="FFFFFF"/>
+          </a:solidFill>
+          <a:ln w="9525">
+            <a:solidFill>
+              <a:srgbClr val="E2E1D6"/>
+            </a:solidFill>
+            <a:prstDash val="solid"/>
+          </a:ln>
+        </p:spPr>
+      </p:sp>
+      <p:sp>
+        <p:nvSpPr>
+          <p:cNvPr id="21" name="Text 18"/>
+          <p:cNvSpPr txBox="1"/>
+          <p:nvPr/>
+        </p:nvSpPr>
+        <p:spPr>
+          <a:xfrm>
+            <a:off x="4566818" y="3730752"/>
+            <a:ext cx="3058058" cy="365760"/>
+          </a:xfrm>
+          <a:prstGeom prst="rect">
+            <a:avLst/>
+          </a:prstGeom>
+          <a:noFill/>
+          <a:ln/>
+        </p:spPr>
+        <p:txBody>
+          <a:bodyPr wrap="square" lIns="0" tIns="0" rIns="0" bIns="0" rtlCol="0" anchor="ctr"/>
+          <a:lstStyle/>
+          <a:p>
+            <a:pPr indent="0" marL="0">
+              <a:buNone/>
+            </a:pPr>
+            <a:r>
+              <a:rPr lang="en-US" sz="1250" b="1" dirty="0">
+                <a:solidFill>
+                  <a:srgbClr val="E8722C"/>
+                </a:solidFill>
+                <a:latin typeface="Calibri" pitchFamily="34" charset="0"/>
+                <a:ea typeface="Calibri" pitchFamily="34" charset="-122"/>
+                <a:cs typeface="Calibri" pitchFamily="34" charset="-120"/>
+              </a:rPr>
+              <a:t>Alerting</a:t>
+            </a:r>
+            <a:endParaRPr lang="en-US" sz="1250" dirty="0"/>
+          </a:p>
+        </p:txBody>
+      </p:sp>
+      <p:sp>
+        <p:nvSpPr>
+          <p:cNvPr id="22" name="Text 19"/>
+          <p:cNvSpPr txBox="1"/>
+          <p:nvPr/>
+        </p:nvSpPr>
+        <p:spPr>
+          <a:xfrm>
+            <a:off x="4566818" y="4114800"/>
+            <a:ext cx="3058058" cy="868680"/>
+          </a:xfrm>
+          <a:prstGeom prst="rect">
+            <a:avLst/>
+          </a:prstGeom>
+          <a:noFill/>
+          <a:ln/>
+        </p:spPr>
+        <p:txBody>
+          <a:bodyPr wrap="square" lIns="0" tIns="0" rIns="0" bIns="0" rtlCol="0" anchor="t"/>
+          <a:lstStyle/>
+          <a:p>
+            <a:pPr indent="0" marL="0">
+              <a:buNone/>
+            </a:pPr>
+            <a:r>
+              <a:rPr lang="en-US" sz="1050" dirty="0">
+                <a:solidFill>
+                  <a:srgbClr val="6B7684"/>
+                </a:solidFill>
+                <a:latin typeface="Calibri" pitchFamily="34" charset="0"/>
+                <a:ea typeface="Calibri" pitchFamily="34" charset="-122"/>
+                <a:cs typeface="Calibri" pitchFamily="34" charset="-120"/>
+              </a:rPr>
+              <a:t>Email — Gmail SMTP, per-audience templates</a:t>
+            </a:r>
+            <a:endParaRPr lang="en-US" sz="1050" dirty="0"/>
+          </a:p>
+          <a:p>
+            <a:pPr indent="0" marL="0">
+              <a:buNone/>
+            </a:pPr>
+            <a:r>
+              <a:rPr lang="en-US" sz="1050" dirty="0">
+                <a:solidFill>
+                  <a:srgbClr val="6B7684"/>
+                </a:solidFill>
+                <a:latin typeface="Calibri" pitchFamily="34" charset="0"/>
+                <a:ea typeface="Calibri" pitchFamily="34" charset="-122"/>
+                <a:cs typeface="Calibri" pitchFamily="34" charset="-120"/>
+              </a:rPr>
+              <a:t>WhatsApp (WAHA) built, self-hosted — not yet production-reliable</a:t>
+            </a:r>
+            <a:endParaRPr lang="en-US" sz="1050" dirty="0"/>
+          </a:p>
+        </p:txBody>
+      </p:sp>
+      <p:sp>
+        <p:nvSpPr>
+          <p:cNvPr id="23" name="Shape 20"/>
+          <p:cNvSpPr/>
+          <p:nvPr/>
+        </p:nvSpPr>
+        <p:spPr>
+          <a:xfrm>
+            <a:off x="7990637" y="3566160"/>
+            <a:ext cx="3423818" cy="1554480"/>
+          </a:xfrm>
+          <a:prstGeom prst="roundRect">
+            <a:avLst>
+              <a:gd name="adj" fmla="val 4706"/>
+            </a:avLst>
+          </a:prstGeom>
+          <a:solidFill>
+            <a:srgbClr val="FFFFFF"/>
+          </a:solidFill>
+          <a:ln w="9525">
+            <a:solidFill>
+              <a:srgbClr val="E2E1D6"/>
+            </a:solidFill>
+            <a:prstDash val="solid"/>
+          </a:ln>
+        </p:spPr>
+      </p:sp>
+      <p:sp>
+        <p:nvSpPr>
+          <p:cNvPr id="24" name="Text 21"/>
+          <p:cNvSpPr txBox="1"/>
+          <p:nvPr/>
+        </p:nvSpPr>
+        <p:spPr>
+          <a:xfrm>
+            <a:off x="8173517" y="3730752"/>
+            <a:ext cx="3058058" cy="365760"/>
+          </a:xfrm>
+          <a:prstGeom prst="rect">
+            <a:avLst/>
+          </a:prstGeom>
+          <a:noFill/>
+          <a:ln/>
+        </p:spPr>
+        <p:txBody>
+          <a:bodyPr wrap="square" lIns="0" tIns="0" rIns="0" bIns="0" rtlCol="0" anchor="ctr"/>
+          <a:lstStyle/>
+          <a:p>
+            <a:pPr indent="0" marL="0">
+              <a:buNone/>
+            </a:pPr>
+            <a:r>
+              <a:rPr lang="en-US" sz="1250" b="1" dirty="0">
+                <a:solidFill>
+                  <a:srgbClr val="5B6472"/>
+                </a:solidFill>
+                <a:latin typeface="Calibri" pitchFamily="34" charset="0"/>
+                <a:ea typeface="Calibri" pitchFamily="34" charset="-122"/>
+                <a:cs typeface="Calibri" pitchFamily="34" charset="-120"/>
+              </a:rPr>
+              <a:t>External Data (6 sources)</a:t>
+            </a:r>
+            <a:endParaRPr lang="en-US" sz="1250" dirty="0"/>
+          </a:p>
+        </p:txBody>
+      </p:sp>
+      <p:sp>
+        <p:nvSpPr>
+          <p:cNvPr id="25" name="Text 22"/>
+          <p:cNvSpPr txBox="1"/>
+          <p:nvPr/>
+        </p:nvSpPr>
+        <p:spPr>
+          <a:xfrm>
+            <a:off x="8173517" y="4114800"/>
+            <a:ext cx="3058058" cy="868680"/>
+          </a:xfrm>
+          <a:prstGeom prst="rect">
+            <a:avLst/>
+          </a:prstGeom>
+          <a:noFill/>
+          <a:ln/>
+        </p:spPr>
+        <p:txBody>
+          <a:bodyPr wrap="square" lIns="0" tIns="0" rIns="0" bIns="0" rtlCol="0" anchor="t"/>
+          <a:lstStyle/>
+          <a:p>
+            <a:pPr indent="0" marL="0">
+              <a:buNone/>
+            </a:pPr>
+            <a:r>
+              <a:rPr lang="en-US" sz="1050" dirty="0">
+                <a:solidFill>
+                  <a:srgbClr val="6B7684"/>
+                </a:solidFill>
+                <a:latin typeface="Calibri" pitchFamily="34" charset="0"/>
+                <a:ea typeface="Calibri" pitchFamily="34" charset="-122"/>
+                <a:cs typeface="Calibri" pitchFamily="34" charset="-120"/>
+              </a:rPr>
+              <a:t>NASA EONET · USGS · NOAA</a:t>
+            </a:r>
+            <a:endParaRPr lang="en-US" sz="1050" dirty="0"/>
+          </a:p>
+          <a:p>
+            <a:pPr indent="0" marL="0">
+              <a:buNone/>
+            </a:pPr>
+            <a:r>
+              <a:rPr lang="en-US" sz="1050" dirty="0">
+                <a:solidFill>
+                  <a:srgbClr val="6B7684"/>
+                </a:solidFill>
+                <a:latin typeface="Calibri" pitchFamily="34" charset="0"/>
+                <a:ea typeface="Calibri" pitchFamily="34" charset="-122"/>
+                <a:cs typeface="Calibri" pitchFamily="34" charset="-120"/>
+              </a:rPr>
+              <a:t>GDACS · OpenWeatherMap</a:t>
+            </a:r>
+            <a:endParaRPr lang="en-US" sz="1050" dirty="0"/>
+          </a:p>
+          <a:p>
+            <a:pPr indent="0" marL="0">
+              <a:buNone/>
+            </a:pPr>
+            <a:r>
+              <a:rPr lang="en-US" sz="1050" dirty="0">
+                <a:solidFill>
+                  <a:srgbClr val="6B7684"/>
+                </a:solidFill>
+                <a:latin typeface="Calibri" pitchFamily="34" charset="0"/>
+                <a:ea typeface="Calibri" pitchFamily="34" charset="-122"/>
+                <a:cs typeface="Calibri" pitchFamily="34" charset="-120"/>
+              </a:rPr>
+              <a:t>OpenStreetMap / Overpass</a:t>
+            </a:r>
+            <a:endParaRPr lang="en-US" sz="1050" dirty="0"/>
+          </a:p>
+        </p:txBody>
+      </p:sp>
+      <p:sp>
+        <p:nvSpPr>
+          <p:cNvPr id="26" name="Shape 23"/>
+          <p:cNvSpPr/>
+          <p:nvPr/>
+        </p:nvSpPr>
+        <p:spPr>
+          <a:xfrm>
+            <a:off x="777240" y="5349240"/>
+            <a:ext cx="10637215" cy="868680"/>
+          </a:xfrm>
+          <a:prstGeom prst="roundRect">
+            <a:avLst>
+              <a:gd name="adj" fmla="val 7368"/>
+            </a:avLst>
+          </a:prstGeom>
+          <a:solidFill>
+            <a:srgbClr val="E9E7DC"/>
+          </a:solidFill>
+          <a:ln/>
+        </p:spPr>
+      </p:sp>
+      <p:sp>
+        <p:nvSpPr>
+          <p:cNvPr id="27" name="Text 24"/>
+          <p:cNvSpPr txBox="1"/>
+          <p:nvPr/>
+        </p:nvSpPr>
+        <p:spPr>
+          <a:xfrm>
+            <a:off x="960120" y="5440680"/>
+            <a:ext cx="5044288" cy="685800"/>
+          </a:xfrm>
+          <a:prstGeom prst="rect">
+            <a:avLst/>
+          </a:prstGeom>
+          <a:noFill/>
+          <a:ln/>
+        </p:spPr>
+        <p:txBody>
+          <a:bodyPr wrap="square" lIns="0" tIns="0" rIns="0" bIns="0" rtlCol="0" anchor="ctr"/>
+          <a:lstStyle/>
+          <a:p>
+            <a:pPr indent="0" marL="0">
+              <a:buNone/>
+            </a:pPr>
+            <a:r>
+              <a:rPr lang="en-US" sz="1000" dirty="0">
+                <a:solidFill>
+                  <a:srgbClr val="4A5568"/>
+                </a:solidFill>
+              </a:rPr>
+              <a:t>In the codebase but dormant/unreliable in this prototype: Redis (caching), Pub/Sub (messaging), OSM/Overpass (frequently times out, fails gracefully).</a:t>
+            </a:r>
+            <a:endParaRPr lang="en-US" sz="1000" dirty="0"/>
+          </a:p>
+        </p:txBody>
+      </p:sp>
+      <p:sp>
+        <p:nvSpPr>
+          <p:cNvPr id="28" name="Text 25"/>
+          <p:cNvSpPr txBox="1"/>
+          <p:nvPr/>
+        </p:nvSpPr>
+        <p:spPr>
+          <a:xfrm>
+            <a:off x="6187288" y="5440680"/>
+            <a:ext cx="5044288" cy="685800"/>
+          </a:xfrm>
+          <a:prstGeom prst="rect">
+            <a:avLst/>
+          </a:prstGeom>
+          <a:noFill/>
+          <a:ln/>
+        </p:spPr>
+        <p:txBody>
+          <a:bodyPr wrap="square" lIns="0" tIns="0" rIns="0" bIns="0" rtlCol="0" anchor="ctr"/>
+          <a:lstStyle/>
+          <a:p>
+            <a:pPr indent="0" marL="0">
+              <a:buNone/>
+            </a:pPr>
+            <a:r>
+              <a:rPr lang="en-US" sz="1000" dirty="0">
+                <a:solidFill>
+                  <a:srgbClr val="4A5568"/>
+                </a:solidFill>
+              </a:rPr>
+              <a:t>Deployment targets: Firebase Hosting (frontend) + Google Cloud Run (backend API) + Docker, CI via GitHub Actions — not yet deployed to production at submission time.</a:t>
+            </a:r>
+            <a:endParaRPr lang="en-US" sz="1000" dirty="0"/>
+          </a:p>
+        </p:txBody>
+      </p:sp>
+    </p:spTree>
+  </p:cSld>
+  <p:clrMapOvr>
+    <a:masterClrMapping/>
+  </p:clrMapOvr>
+</p:sld>
+</file>
+
+<file path=ppt/slides/slide12.xml><?xml version="1.0" encoding="utf-8"?>
+<p:sld xmlns:a="http://schemas.openxmlformats.org/drawingml/2006/main" xmlns:r="http://schemas.openxmlformats.org/officeDocument/2006/relationships" xmlns:p="http://schemas.openxmlformats.org/presentationml/2006/main">
+  <p:cSld name="Slide 12">
+    <p:bg>
+      <p:bgPr>
+        <a:solidFill>
+          <a:srgbClr val="F7F7F2"/>
+        </a:solidFill>
+      </p:bgPr>
+    </p:bg>
+    <p:spTree>
+      <p:nvGrpSpPr>
+        <p:cNvPr id="1" name=""/>
+        <p:cNvGrpSpPr/>
+        <p:nvPr/>
+      </p:nvGrpSpPr>
+      <p:grpSpPr>
+        <a:xfrm>
+          <a:off x="0" y="0"/>
+          <a:ext cx="0" cy="0"/>
+          <a:chOff x="0" y="0"/>
+          <a:chExt cx="0" cy="0"/>
+        </a:xfrm>
+      </p:grpSpPr>
+      <p:pic>
+        <p:nvPicPr>
+          <p:cNvPr id="2" name="Image 0" descr="/home/claude/pptx-build/assets/c88b78c3bb2f833f20cd0c678c1ff259.png">    </p:cNvPr>
+          <p:cNvPicPr>
+            <a:picLocks noChangeAspect="1"/>
+          </p:cNvPicPr>
+          <p:nvPr/>
+        </p:nvPicPr>
+        <p:blipFill>
+          <a:blip r:embed="rId1"/>
+          <a:stretch>
+            <a:fillRect/>
+          </a:stretch>
+        </p:blipFill>
+        <p:spPr>
+          <a:xfrm>
+            <a:off x="0" y="0"/>
+            <a:ext cx="12191695" cy="679433"/>
+          </a:xfrm>
+          <a:prstGeom prst="rect">
+            <a:avLst/>
+          </a:prstGeom>
+        </p:spPr>
+      </p:pic>
+      <p:sp>
+        <p:nvSpPr>
+          <p:cNvPr id="3" name="Text 0"/>
+          <p:cNvSpPr txBox="1"/>
+          <p:nvPr/>
+        </p:nvSpPr>
+        <p:spPr>
+          <a:xfrm>
+            <a:off x="777240" y="6400800"/>
+            <a:ext cx="5486400" cy="274320"/>
+          </a:xfrm>
+          <a:prstGeom prst="rect">
+            <a:avLst/>
+          </a:prstGeom>
+          <a:noFill/>
+          <a:ln/>
+        </p:spPr>
+        <p:txBody>
+          <a:bodyPr wrap="square" lIns="0" tIns="0" rIns="0" bIns="0" rtlCol="0" anchor="ctr"/>
+          <a:lstStyle/>
+          <a:p>
+            <a:pPr indent="0" marL="0">
+              <a:buNone/>
+            </a:pPr>
+            <a:r>
+              <a:rPr lang="en-US" sz="1100" dirty="0">
+                <a:solidFill>
+                  <a:srgbClr val="9AA3B0"/>
+                </a:solidFill>
+                <a:latin typeface="Calibri" pitchFamily="34" charset="0"/>
+                <a:ea typeface="Calibri" pitchFamily="34" charset="-122"/>
+                <a:cs typeface="Calibri" pitchFamily="34" charset="-120"/>
+              </a:rPr>
+              <a:t>TerraGrid — AI Builder Cup Submission</a:t>
+            </a:r>
+            <a:endParaRPr lang="en-US" sz="1100" dirty="0"/>
+          </a:p>
+        </p:txBody>
+      </p:sp>
+      <p:sp>
+        <p:nvSpPr>
+          <p:cNvPr id="4" name="Text 1"/>
+          <p:cNvSpPr txBox="1"/>
+          <p:nvPr/>
+        </p:nvSpPr>
+        <p:spPr>
+          <a:xfrm>
+            <a:off x="9585655" y="6400800"/>
+            <a:ext cx="1828800" cy="274320"/>
+          </a:xfrm>
+          <a:prstGeom prst="rect">
+            <a:avLst/>
+          </a:prstGeom>
+          <a:noFill/>
+          <a:ln/>
+        </p:spPr>
+        <p:txBody>
+          <a:bodyPr wrap="square" lIns="0" tIns="0" rIns="0" bIns="0" rtlCol="0" anchor="ctr"/>
+          <a:lstStyle/>
+          <a:p>
+            <a:pPr algn="r" indent="0" marL="0">
+              <a:buNone/>
+            </a:pPr>
+            <a:r>
+              <a:rPr lang="en-US" sz="1100" dirty="0">
+                <a:solidFill>
+                  <a:srgbClr val="9AA3B0"/>
+                </a:solidFill>
+                <a:latin typeface="Calibri" pitchFamily="34" charset="0"/>
+                <a:ea typeface="Calibri" pitchFamily="34" charset="-122"/>
+                <a:cs typeface="Calibri" pitchFamily="34" charset="-120"/>
+              </a:rPr>
+              <a:t>12 / 17</a:t>
+            </a:r>
+            <a:endParaRPr lang="en-US" sz="1100" dirty="0"/>
+          </a:p>
+        </p:txBody>
+      </p:sp>
+      <p:sp>
+        <p:nvSpPr>
+          <p:cNvPr id="5" name="Shape 2"/>
+          <p:cNvSpPr/>
+          <p:nvPr/>
+        </p:nvSpPr>
+        <p:spPr>
+          <a:xfrm>
+            <a:off x="0" y="6793992"/>
+            <a:ext cx="12191695" cy="64008"/>
+          </a:xfrm>
+          <a:prstGeom prst="rect">
+            <a:avLst/>
+          </a:prstGeom>
+          <a:solidFill>
+            <a:srgbClr val="000000"/>
+          </a:solidFill>
+          <a:ln/>
+        </p:spPr>
+      </p:sp>
+      <p:sp>
+        <p:nvSpPr>
+          <p:cNvPr id="6" name="Text 3"/>
+          <p:cNvSpPr txBox="1"/>
+          <p:nvPr/>
+        </p:nvSpPr>
+        <p:spPr>
+          <a:xfrm>
+            <a:off x="777240" y="914400"/>
+            <a:ext cx="10637215" cy="274320"/>
+          </a:xfrm>
+          <a:prstGeom prst="rect">
+            <a:avLst/>
+          </a:prstGeom>
+          <a:noFill/>
+          <a:ln/>
+        </p:spPr>
+        <p:txBody>
+          <a:bodyPr wrap="square" lIns="0" tIns="0" rIns="0" bIns="0" rtlCol="0" anchor="ctr"/>
+          <a:lstStyle/>
+          <a:p>
+            <a:pPr indent="0" marL="0">
+              <a:buNone/>
+            </a:pPr>
+            <a:r>
+              <a:rPr lang="en-US" sz="1300" b="1" spc="100" kern="0" dirty="0">
+                <a:solidFill>
+                  <a:srgbClr val="E8722C"/>
+                </a:solidFill>
+                <a:latin typeface="Calibri" pitchFamily="34" charset="0"/>
+                <a:ea typeface="Calibri" pitchFamily="34" charset="-122"/>
+                <a:cs typeface="Calibri" pitchFamily="34" charset="-120"/>
+              </a:rPr>
+              <a:t>ESTIMATED IMPLEMENTATION COST (OPTIONAL)</a:t>
+            </a:r>
+            <a:endParaRPr lang="en-US" sz="1300" dirty="0"/>
+          </a:p>
+        </p:txBody>
+      </p:sp>
+      <p:sp>
+        <p:nvSpPr>
+          <p:cNvPr id="7" name="Text 4"/>
+          <p:cNvSpPr txBox="1"/>
+          <p:nvPr/>
+        </p:nvSpPr>
+        <p:spPr>
+          <a:xfrm>
+            <a:off x="777240" y="1188720"/>
+            <a:ext cx="10637215" cy="548640"/>
+          </a:xfrm>
+          <a:prstGeom prst="rect">
+            <a:avLst/>
+          </a:prstGeom>
+          <a:noFill/>
+          <a:ln/>
+        </p:spPr>
+        <p:txBody>
+          <a:bodyPr wrap="square" lIns="0" tIns="0" rIns="0" bIns="0" rtlCol="0" anchor="ctr"/>
+          <a:lstStyle/>
+          <a:p>
+            <a:pPr indent="0" marL="0">
+              <a:buNone/>
+            </a:pPr>
+            <a:r>
+              <a:rPr lang="en-US" sz="2600" b="1" dirty="0">
+                <a:solidFill>
+                  <a:srgbClr val="0F1B2D"/>
+                </a:solidFill>
+                <a:latin typeface="Cambria" pitchFamily="34" charset="0"/>
+                <a:ea typeface="Cambria" pitchFamily="34" charset="-122"/>
+                <a:cs typeface="Cambria" pitchFamily="34" charset="-120"/>
+              </a:rPr>
               <a:t>Built Mostly On Free &amp; Open Tiers</a:t>
             </a:r>
             <a:endParaRPr lang="en-US" sz="2600" dirty="0"/>
@@ -4244,7 +4610,7 @@
       </p:sp>
       <p:graphicFrame>
         <p:nvGraphicFramePr>
-          <p:cNvPr id="12" name="Table 0"/>
+          <p:cNvPr id="13" name="Table 0"/>
           <p:cNvGraphicFramePr>
             <a:graphicFrameLocks noGrp="1"/>
           </p:cNvGraphicFramePr>
@@ -5353,9 +5719,9 @@
 </p:sld>
 </file>
 
-<file path=ppt/slides/slide12.xml><?xml version="1.0" encoding="utf-8"?>
+<file path=ppt/slides/slide13.xml><?xml version="1.0" encoding="utf-8"?>
 <p:sld xmlns:a="http://schemas.openxmlformats.org/drawingml/2006/main" xmlns:r="http://schemas.openxmlformats.org/officeDocument/2006/relationships" xmlns:p="http://schemas.openxmlformats.org/presentationml/2006/main">
-  <p:cSld name="Slide 12">
+  <p:cSld name="Slide 13">
     <p:bg>
       <p:bgPr>
         <a:solidFill>
@@ -5473,7 +5839,7 @@
                 <a:ea typeface="Calibri" pitchFamily="34" charset="-122"/>
                 <a:cs typeface="Calibri" pitchFamily="34" charset="-120"/>
               </a:rPr>
-              <a:t>12 / 16</a:t>
+              <a:t>13 / 17</a:t>
             </a:r>
             <a:endParaRPr lang="en-US" sz="1100" dirty="0"/>
           </a:p>
@@ -5978,9 +6344,9 @@
 </p:sld>
 </file>
 
-<file path=ppt/slides/slide13.xml><?xml version="1.0" encoding="utf-8"?>
+<file path=ppt/slides/slide14.xml><?xml version="1.0" encoding="utf-8"?>
 <p:sld xmlns:a="http://schemas.openxmlformats.org/drawingml/2006/main" xmlns:r="http://schemas.openxmlformats.org/officeDocument/2006/relationships" xmlns:p="http://schemas.openxmlformats.org/presentationml/2006/main">
-  <p:cSld name="Slide 13">
+  <p:cSld name="Slide 14">
     <p:bg>
       <p:bgPr>
         <a:solidFill>
@@ -6098,7 +6464,7 @@
                 <a:ea typeface="Calibri" pitchFamily="34" charset="-122"/>
                 <a:cs typeface="Calibri" pitchFamily="34" charset="-120"/>
               </a:rPr>
-              <a:t>13 / 16</a:t>
+              <a:t>14 / 17</a:t>
             </a:r>
             <a:endParaRPr lang="en-US" sz="1100" dirty="0"/>
           </a:p>
@@ -6578,9 +6944,9 @@
 </p:sld>
 </file>
 
-<file path=ppt/slides/slide14.xml><?xml version="1.0" encoding="utf-8"?>
+<file path=ppt/slides/slide15.xml><?xml version="1.0" encoding="utf-8"?>
 <p:sld xmlns:a="http://schemas.openxmlformats.org/drawingml/2006/main" xmlns:r="http://schemas.openxmlformats.org/officeDocument/2006/relationships" xmlns:p="http://schemas.openxmlformats.org/presentationml/2006/main">
-  <p:cSld name="Slide 14">
+  <p:cSld name="Slide 15">
     <p:bg>
       <p:bgPr>
         <a:solidFill>
@@ -6698,7 +7064,7 @@
                 <a:ea typeface="Calibri" pitchFamily="34" charset="-122"/>
                 <a:cs typeface="Calibri" pitchFamily="34" charset="-120"/>
               </a:rPr>
-              <a:t>14 / 16</a:t>
+              <a:t>15 / 17</a:t>
             </a:r>
             <a:endParaRPr lang="en-US" sz="1100" dirty="0"/>
           </a:p>
@@ -7576,9 +7942,9 @@
 </p:sld>
 </file>
 
-<file path=ppt/slides/slide15.xml><?xml version="1.0" encoding="utf-8"?>
+<file path=ppt/slides/slide16.xml><?xml version="1.0" encoding="utf-8"?>
 <p:sld xmlns:a="http://schemas.openxmlformats.org/drawingml/2006/main" xmlns:r="http://schemas.openxmlformats.org/officeDocument/2006/relationships" xmlns:p="http://schemas.openxmlformats.org/presentationml/2006/main">
-  <p:cSld name="Slide 15">
+  <p:cSld name="Slide 16">
     <p:bg>
       <p:bgPr>
         <a:solidFill>
@@ -7696,7 +8062,7 @@
                 <a:ea typeface="Calibri" pitchFamily="34" charset="-122"/>
                 <a:cs typeface="Calibri" pitchFamily="34" charset="-120"/>
               </a:rPr>
-              <a:t>15 / 16</a:t>
+              <a:t>16 / 17</a:t>
             </a:r>
             <a:endParaRPr lang="en-US" sz="1100" dirty="0"/>
           </a:p>
@@ -7838,7 +8204,7 @@
       </p:sp>
       <p:graphicFrame>
         <p:nvGraphicFramePr>
-          <p:cNvPr id="16" name="Table 0"/>
+          <p:cNvPr id="17" name="Table 0"/>
           <p:cNvGraphicFramePr>
             <a:graphicFrameLocks noGrp="1"/>
           </p:cNvGraphicFramePr>
@@ -9180,9 +9546,9 @@
 </p:sld>
 </file>
 
-<file path=ppt/slides/slide16.xml><?xml version="1.0" encoding="utf-8"?>
+<file path=ppt/slides/slide17.xml><?xml version="1.0" encoding="utf-8"?>
 <p:sld xmlns:a="http://schemas.openxmlformats.org/drawingml/2006/main" xmlns:r="http://schemas.openxmlformats.org/officeDocument/2006/relationships" xmlns:p="http://schemas.openxmlformats.org/presentationml/2006/main">
-  <p:cSld name="Slide 16">
+  <p:cSld name="Slide 17">
     <p:bg>
       <p:bgPr>
         <a:solidFill>
@@ -9300,7 +9666,7 @@
                 <a:ea typeface="Calibri" pitchFamily="34" charset="-122"/>
                 <a:cs typeface="Calibri" pitchFamily="34" charset="-120"/>
               </a:rPr>
-              <a:t>16 / 16</a:t>
+              <a:t>17 / 17</a:t>
             </a:r>
             <a:endParaRPr lang="en-US" sz="1100" dirty="0"/>
           </a:p>
@@ -9889,7 +10255,7 @@
                 <a:ea typeface="Calibri" pitchFamily="34" charset="-122"/>
                 <a:cs typeface="Calibri" pitchFamily="34" charset="-120"/>
               </a:rPr>
-              <a:t>02 / 16</a:t>
+              <a:t>02 / 17</a:t>
             </a:r>
             <a:endParaRPr lang="en-US" sz="1100" dirty="0"/>
           </a:p>
@@ -11182,7 +11548,7 @@
                 <a:ea typeface="Calibri" pitchFamily="34" charset="-122"/>
                 <a:cs typeface="Calibri" pitchFamily="34" charset="-120"/>
               </a:rPr>
-              <a:t>03 / 16</a:t>
+              <a:t>03 / 17</a:t>
             </a:r>
             <a:endParaRPr lang="en-US" sz="1100" dirty="0"/>
           </a:p>
@@ -12326,7 +12692,7 @@
                 <a:ea typeface="Calibri" pitchFamily="34" charset="-122"/>
                 <a:cs typeface="Calibri" pitchFamily="34" charset="-120"/>
               </a:rPr>
-              <a:t>04 / 16</a:t>
+              <a:t>04 / 17</a:t>
             </a:r>
             <a:endParaRPr lang="en-US" sz="1100" dirty="0"/>
           </a:p>
@@ -13972,7 +14338,7 @@
                 <a:ea typeface="Calibri" pitchFamily="34" charset="-122"/>
                 <a:cs typeface="Calibri" pitchFamily="34" charset="-120"/>
               </a:rPr>
-              <a:t>05 / 16</a:t>
+              <a:t>05 / 17</a:t>
             </a:r>
             <a:endParaRPr lang="en-US" sz="1100" dirty="0"/>
           </a:p>
@@ -14964,7 +15330,7 @@
                 <a:ea typeface="Calibri" pitchFamily="34" charset="-122"/>
                 <a:cs typeface="Calibri" pitchFamily="34" charset="-120"/>
               </a:rPr>
-              <a:t>06 / 16</a:t>
+              <a:t>06 / 17</a:t>
             </a:r>
             <a:endParaRPr lang="en-US" sz="1100" dirty="0"/>
           </a:p>
@@ -16471,7 +16837,7 @@
                 <a:ea typeface="Calibri" pitchFamily="34" charset="-122"/>
                 <a:cs typeface="Calibri" pitchFamily="34" charset="-120"/>
               </a:rPr>
-              <a:t>07 / 16</a:t>
+              <a:t>07 / 17</a:t>
             </a:r>
             <a:endParaRPr lang="en-US" sz="1100" dirty="0"/>
           </a:p>
@@ -16561,7 +16927,7 @@
               <a:buNone/>
             </a:pPr>
             <a:r>
-              <a:rPr lang="en-US" sz="2400" b="1" dirty="0">
+              <a:rPr lang="en-US" sz="2100" b="1" dirty="0">
                 <a:solidFill>
                   <a:srgbClr val="0F1B2D"/>
                 </a:solidFill>
@@ -16569,9 +16935,9 @@
                 <a:ea typeface="Cambria" pitchFamily="34" charset="-122"/>
                 <a:cs typeface="Cambria" pitchFamily="34" charset="-120"/>
               </a:rPr>
-              <a:t>Features Offered By The Solution</a:t>
-            </a:r>
-            <a:endParaRPr lang="en-US" sz="2400" dirty="0"/>
+              <a:t>Features Offered By The Solution — Across The 4-Phase Model</a:t>
+            </a:r>
+            <a:endParaRPr lang="en-US" sz="2100" dirty="0"/>
           </a:p>
         </p:txBody>
       </p:sp>
@@ -16583,37 +16949,60 @@
         </p:nvSpPr>
         <p:spPr>
           <a:xfrm>
-            <a:off x="777240" y="1737360"/>
-            <a:ext cx="2556434" cy="54864"/>
-          </a:xfrm>
-          <a:prstGeom prst="rect">
-            <a:avLst/>
-          </a:prstGeom>
-          <a:solidFill>
-            <a:srgbClr val="5B6472"/>
-          </a:solidFill>
-          <a:ln/>
-        </p:spPr>
-      </p:sp>
-      <p:sp>
-        <p:nvSpPr>
-          <p:cNvPr id="9" name="Shape 6"/>
-          <p:cNvSpPr/>
-          <p:nvPr/>
-        </p:nvSpPr>
-        <p:spPr>
-          <a:xfrm>
-            <a:off x="777240" y="1792224"/>
-            <a:ext cx="2556434" cy="3968496"/>
-          </a:xfrm>
-          <a:prstGeom prst="rect">
-            <a:avLst/>
+            <a:off x="777240" y="1691640"/>
+            <a:ext cx="2556434" cy="4114800"/>
+          </a:xfrm>
+          <a:prstGeom prst="roundRect">
+            <a:avLst>
+              <a:gd name="adj" fmla="val 2861"/>
+            </a:avLst>
           </a:prstGeom>
           <a:solidFill>
             <a:srgbClr val="FFFFFF"/>
           </a:solidFill>
-          <a:ln/>
-        </p:spPr>
+          <a:ln w="12700">
+            <a:solidFill>
+              <a:srgbClr val="C7CCD4"/>
+            </a:solidFill>
+            <a:prstDash val="dash"/>
+          </a:ln>
+        </p:spPr>
+      </p:sp>
+      <p:sp>
+        <p:nvSpPr>
+          <p:cNvPr id="9" name="Text 6"/>
+          <p:cNvSpPr txBox="1"/>
+          <p:nvPr/>
+        </p:nvSpPr>
+        <p:spPr>
+          <a:xfrm>
+            <a:off x="914400" y="1828800"/>
+            <a:ext cx="2282114" cy="274320"/>
+          </a:xfrm>
+          <a:prstGeom prst="rect">
+            <a:avLst/>
+          </a:prstGeom>
+          <a:noFill/>
+          <a:ln/>
+        </p:spPr>
+        <p:txBody>
+          <a:bodyPr wrap="square" lIns="0" tIns="0" rIns="0" bIns="0" rtlCol="0" anchor="ctr"/>
+          <a:lstStyle/>
+          <a:p>
+            <a:pPr indent="0" marL="0">
+              <a:buNone/>
+            </a:pPr>
+            <a:r>
+              <a:rPr lang="en-US" sz="1400" b="1" dirty="0">
+                <a:solidFill>
+                  <a:srgbClr val="5B6472"/>
+                </a:solidFill>
+              </a:rPr>
+              <a:t>Predict</a:t>
+            </a:r>
+            <a:endParaRPr lang="en-US" sz="1400" dirty="0"/>
+          </a:p>
+        </p:txBody>
       </p:sp>
       <p:sp>
         <p:nvSpPr>
@@ -16623,8 +17012,8 @@
         </p:nvSpPr>
         <p:spPr>
           <a:xfrm>
-            <a:off x="914400" y="1901952"/>
-            <a:ext cx="2282114" cy="320040"/>
+            <a:off x="914400" y="2103120"/>
+            <a:ext cx="2282114" cy="228600"/>
           </a:xfrm>
           <a:prstGeom prst="rect">
             <a:avLst/>
@@ -16640,14 +17029,14 @@
               <a:buNone/>
             </a:pPr>
             <a:r>
-              <a:rPr lang="en-US" sz="1500" b="1" dirty="0">
-                <a:solidFill>
-                  <a:srgbClr val="5B6472"/>
-                </a:solidFill>
-              </a:rPr>
-              <a:t>Predict</a:t>
-            </a:r>
-            <a:endParaRPr lang="en-US" sz="1500" dirty="0"/>
+              <a:rPr lang="en-US" sz="850" i="1" dirty="0">
+                <a:solidFill>
+                  <a:srgbClr val="8A93A3"/>
+                </a:solidFill>
+              </a:rPr>
+              <a:t>Designed, not yet built</a:t>
+            </a:r>
+            <a:endParaRPr lang="en-US" sz="850" dirty="0"/>
           </a:p>
         </p:txBody>
       </p:sp>
@@ -16659,8 +17048,8 @@
         </p:nvSpPr>
         <p:spPr>
           <a:xfrm>
-            <a:off x="914400" y="2286000"/>
-            <a:ext cx="2282114" cy="3337560"/>
+            <a:off x="914400" y="2423160"/>
+            <a:ext cx="2282114" cy="2743200"/>
           </a:xfrm>
           <a:prstGeom prst="rect">
             <a:avLst/>
@@ -16674,51 +17063,105 @@
           <a:p>
             <a:pPr marL="342900" indent="-342900">
               <a:spcAft>
-                <a:spcPts val="800"/>
+                <a:spcPts val="600"/>
               </a:spcAft>
               <a:buSzPct val="100000"/>
-              <a:buChar char="✓"/>
-            </a:pPr>
-            <a:r>
-              <a:rPr lang="en-US" sz="1050" dirty="0">
-                <a:solidFill>
-                  <a:srgbClr val="3A4452"/>
-                </a:solidFill>
-              </a:rPr>
-              <a:t>6-month early-warning signal from climate indicators — ENSO, seasonal rainfall outlook</a:t>
-            </a:r>
-            <a:endParaRPr lang="en-US" sz="1050" dirty="0"/>
+              <a:buChar char="○"/>
+            </a:pPr>
+            <a:r>
+              <a:rPr lang="en-US" sz="950" dirty="0">
+                <a:solidFill>
+                  <a:srgbClr val="5B6472"/>
+                </a:solidFill>
+              </a:rPr>
+              <a:t>Climate-signal dashboard — ENSO + seasonal rainfall outlook (NOAA, IMD)</a:t>
+            </a:r>
+            <a:endParaRPr lang="en-US" sz="950" dirty="0"/>
           </a:p>
           <a:p>
             <a:pPr marL="342900" indent="-342900">
               <a:spcAft>
-                <a:spcPts val="800"/>
+                <a:spcPts val="600"/>
               </a:spcAft>
               <a:buSzPct val="100000"/>
-              <a:buChar char="✓"/>
-            </a:pPr>
-            <a:r>
-              <a:rPr lang="en-US" sz="1050" dirty="0">
-                <a:solidFill>
-                  <a:srgbClr val="3A4452"/>
-                </a:solidFill>
-              </a:rPr>
-              <a:t>Surfaced on a climate-signal dashboard</a:t>
-            </a:r>
-            <a:endParaRPr lang="en-US" sz="1050" dirty="0"/>
-          </a:p>
-        </p:txBody>
-      </p:sp>
-      <p:sp>
-        <p:nvSpPr>
-          <p:cNvPr id="12" name="Shape 9"/>
+              <a:buChar char="○"/>
+            </a:pPr>
+            <a:r>
+              <a:rPr lang="en-US" sz="950" dirty="0">
+                <a:solidFill>
+                  <a:srgbClr val="5B6472"/>
+                </a:solidFill>
+              </a:rPr>
+              <a:t>Regional risk baseline per district</a:t>
+            </a:r>
+            <a:endParaRPr lang="en-US" sz="950" dirty="0"/>
+          </a:p>
+          <a:p>
+            <a:pPr marL="342900" indent="-342900">
+              <a:spcAft>
+                <a:spcPts val="600"/>
+              </a:spcAft>
+              <a:buSzPct val="100000"/>
+              <a:buChar char="○"/>
+            </a:pPr>
+            <a:r>
+              <a:rPr lang="en-US" sz="950" dirty="0">
+                <a:solidFill>
+                  <a:srgbClr val="5B6472"/>
+                </a:solidFill>
+              </a:rPr>
+              <a:t>Historical disaster database for pattern matching</a:t>
+            </a:r>
+            <a:endParaRPr lang="en-US" sz="950" dirty="0"/>
+          </a:p>
+        </p:txBody>
+      </p:sp>
+      <p:sp>
+        <p:nvSpPr>
+          <p:cNvPr id="12" name="Text 9"/>
+          <p:cNvSpPr txBox="1"/>
+          <p:nvPr/>
+        </p:nvSpPr>
+        <p:spPr>
+          <a:xfrm>
+            <a:off x="914400" y="5440680"/>
+            <a:ext cx="2282114" cy="274320"/>
+          </a:xfrm>
+          <a:prstGeom prst="rect">
+            <a:avLst/>
+          </a:prstGeom>
+          <a:noFill/>
+          <a:ln/>
+        </p:spPr>
+        <p:txBody>
+          <a:bodyPr wrap="square" lIns="0" tIns="0" rIns="0" bIns="0" rtlCol="0" anchor="ctr"/>
+          <a:lstStyle/>
+          <a:p>
+            <a:pPr indent="0" marL="0">
+              <a:buNone/>
+            </a:pPr>
+            <a:r>
+              <a:rPr lang="en-US" sz="850" dirty="0">
+                <a:solidFill>
+                  <a:srgbClr val="8A93A3"/>
+                </a:solidFill>
+              </a:rPr>
+              <a:t>8 items scoped — see Future Development</a:t>
+            </a:r>
+            <a:endParaRPr lang="en-US" sz="850" dirty="0"/>
+          </a:p>
+        </p:txBody>
+      </p:sp>
+      <p:sp>
+        <p:nvSpPr>
+          <p:cNvPr id="13" name="Shape 10"/>
           <p:cNvSpPr/>
           <p:nvPr/>
         </p:nvSpPr>
         <p:spPr>
           <a:xfrm>
-            <a:off x="3470834" y="1737360"/>
-            <a:ext cx="2556434" cy="54864"/>
+            <a:off x="3470834" y="1691640"/>
+            <a:ext cx="3195542" cy="54864"/>
           </a:xfrm>
           <a:prstGeom prst="rect">
             <a:avLst/>
@@ -16731,14 +17174,14 @@
       </p:sp>
       <p:sp>
         <p:nvSpPr>
-          <p:cNvPr id="13" name="Shape 10"/>
+          <p:cNvPr id="14" name="Shape 11"/>
           <p:cNvSpPr/>
           <p:nvPr/>
         </p:nvSpPr>
         <p:spPr>
           <a:xfrm>
-            <a:off x="3470834" y="1792224"/>
-            <a:ext cx="2556434" cy="3968496"/>
+            <a:off x="3470834" y="1746504"/>
+            <a:ext cx="3195542" cy="4059936"/>
           </a:xfrm>
           <a:prstGeom prst="rect">
             <a:avLst/>
@@ -16751,14 +17194,14 @@
       </p:sp>
       <p:sp>
         <p:nvSpPr>
-          <p:cNvPr id="14" name="Text 11"/>
-          <p:cNvSpPr txBox="1"/>
-          <p:nvPr/>
-        </p:nvSpPr>
-        <p:spPr>
-          <a:xfrm>
-            <a:off x="3607994" y="1901952"/>
-            <a:ext cx="2282114" cy="320040"/>
+          <p:cNvPr id="15" name="Text 12"/>
+          <p:cNvSpPr txBox="1"/>
+          <p:nvPr/>
+        </p:nvSpPr>
+        <p:spPr>
+          <a:xfrm>
+            <a:off x="3607994" y="1856232"/>
+            <a:ext cx="2921222" cy="274320"/>
           </a:xfrm>
           <a:prstGeom prst="rect">
             <a:avLst/>
@@ -16774,215 +17217,27 @@
               <a:buNone/>
             </a:pPr>
             <a:r>
-              <a:rPr lang="en-US" sz="1500" b="1" dirty="0">
+              <a:rPr lang="en-US" sz="1400" b="1" dirty="0">
                 <a:solidFill>
                   <a:srgbClr val="0E7490"/>
                 </a:solidFill>
               </a:rPr>
               <a:t>Prepare</a:t>
             </a:r>
-            <a:endParaRPr lang="en-US" sz="1500" dirty="0"/>
-          </a:p>
-        </p:txBody>
-      </p:sp>
-      <p:sp>
-        <p:nvSpPr>
-          <p:cNvPr id="15" name="Text 12"/>
-          <p:cNvSpPr txBox="1"/>
-          <p:nvPr/>
-        </p:nvSpPr>
-        <p:spPr>
-          <a:xfrm>
-            <a:off x="3607994" y="2286000"/>
-            <a:ext cx="2282114" cy="3337560"/>
-          </a:xfrm>
-          <a:prstGeom prst="rect">
-            <a:avLst/>
-          </a:prstGeom>
-          <a:noFill/>
-          <a:ln/>
-        </p:spPr>
-        <p:txBody>
-          <a:bodyPr wrap="square" lIns="0" tIns="0" rIns="0" bIns="0" rtlCol="0" anchor="t"/>
-          <a:lstStyle/>
-          <a:p>
-            <a:pPr marL="342900" indent="-342900">
-              <a:spcAft>
-                <a:spcPts val="800"/>
-              </a:spcAft>
-              <a:buSzPct val="100000"/>
-              <a:buChar char="✓"/>
-            </a:pPr>
-            <a:r>
-              <a:rPr lang="en-US" sz="1050" dirty="0">
-                <a:solidFill>
-                  <a:srgbClr val="3A4452"/>
-                </a:solidFill>
-              </a:rPr>
-              <a:t>7-day risk forecasting across 8 cities</a:t>
-            </a:r>
-            <a:endParaRPr lang="en-US" sz="1050" dirty="0"/>
-          </a:p>
-          <a:p>
-            <a:pPr marL="342900" indent="-342900">
-              <a:spcAft>
-                <a:spcPts val="800"/>
-              </a:spcAft>
-              <a:buSzPct val="100000"/>
-              <a:buChar char="✓"/>
-            </a:pPr>
-            <a:r>
-              <a:rPr lang="en-US" sz="1050" dirty="0">
-                <a:solidFill>
-                  <a:srgbClr val="3A4452"/>
-                </a:solidFill>
-              </a:rPr>
-              <a:t>AI-generated risk-escalation timeline</a:t>
-            </a:r>
-            <a:endParaRPr lang="en-US" sz="1050" dirty="0"/>
-          </a:p>
-          <a:p>
-            <a:pPr marL="342900" indent="-342900">
-              <a:spcAft>
-                <a:spcPts val="800"/>
-              </a:spcAft>
-              <a:buSzPct val="100000"/>
-              <a:buChar char="✓"/>
-            </a:pPr>
-            <a:r>
-              <a:rPr lang="en-US" sz="1050" dirty="0">
-                <a:solidFill>
-                  <a:srgbClr val="3A4452"/>
-                </a:solidFill>
-              </a:rPr>
-              <a:t>Preparedness checklists, auto-generated per agency</a:t>
-            </a:r>
-            <a:endParaRPr lang="en-US" sz="1050" dirty="0"/>
-          </a:p>
-          <a:p>
-            <a:pPr marL="342900" indent="-342900">
-              <a:spcAft>
-                <a:spcPts val="800"/>
-              </a:spcAft>
-              <a:buSzPct val="100000"/>
-              <a:buChar char="✓"/>
-            </a:pPr>
-            <a:r>
-              <a:rPr lang="en-US" sz="1050" dirty="0">
-                <a:solidFill>
-                  <a:srgbClr val="3A4452"/>
-                </a:solidFill>
-              </a:rPr>
-              <a:t>Automated agency alert drafting</a:t>
-            </a:r>
-            <a:endParaRPr lang="en-US" sz="1050" dirty="0"/>
-          </a:p>
-          <a:p>
-            <a:pPr marL="342900" indent="-342900">
-              <a:spcAft>
-                <a:spcPts val="800"/>
-              </a:spcAft>
-              <a:buSzPct val="100000"/>
-              <a:buChar char="✓"/>
-            </a:pPr>
-            <a:r>
-              <a:rPr lang="en-US" sz="1050" dirty="0">
-                <a:solidFill>
-                  <a:srgbClr val="3A4452"/>
-                </a:solidFill>
-              </a:rPr>
-              <a:t>Source of Truth — 4-layer data lineage per incident</a:t>
-            </a:r>
-            <a:endParaRPr lang="en-US" sz="1050" dirty="0"/>
-          </a:p>
-        </p:txBody>
-      </p:sp>
-      <p:sp>
-        <p:nvSpPr>
-          <p:cNvPr id="16" name="Shape 13"/>
-          <p:cNvSpPr/>
-          <p:nvPr/>
-        </p:nvSpPr>
-        <p:spPr>
-          <a:xfrm>
-            <a:off x="6164428" y="1737360"/>
-            <a:ext cx="2556434" cy="54864"/>
-          </a:xfrm>
-          <a:prstGeom prst="rect">
-            <a:avLst/>
-          </a:prstGeom>
-          <a:solidFill>
-            <a:srgbClr val="E8722C"/>
-          </a:solidFill>
-          <a:ln/>
-        </p:spPr>
-      </p:sp>
-      <p:sp>
-        <p:nvSpPr>
-          <p:cNvPr id="17" name="Shape 14"/>
-          <p:cNvSpPr/>
-          <p:nvPr/>
-        </p:nvSpPr>
-        <p:spPr>
-          <a:xfrm>
-            <a:off x="6164428" y="1792224"/>
-            <a:ext cx="2556434" cy="3968496"/>
-          </a:xfrm>
-          <a:prstGeom prst="rect">
-            <a:avLst/>
-          </a:prstGeom>
-          <a:solidFill>
-            <a:srgbClr val="FFFFFF"/>
-          </a:solidFill>
-          <a:ln/>
-        </p:spPr>
-      </p:sp>
-      <p:sp>
-        <p:nvSpPr>
-          <p:cNvPr id="18" name="Text 15"/>
-          <p:cNvSpPr txBox="1"/>
-          <p:nvPr/>
-        </p:nvSpPr>
-        <p:spPr>
-          <a:xfrm>
-            <a:off x="6301588" y="1901952"/>
-            <a:ext cx="2282114" cy="320040"/>
-          </a:xfrm>
-          <a:prstGeom prst="rect">
-            <a:avLst/>
-          </a:prstGeom>
-          <a:noFill/>
-          <a:ln/>
-        </p:spPr>
-        <p:txBody>
-          <a:bodyPr wrap="square" lIns="0" tIns="0" rIns="0" bIns="0" rtlCol="0" anchor="ctr"/>
-          <a:lstStyle/>
-          <a:p>
-            <a:pPr indent="0" marL="0">
-              <a:buNone/>
-            </a:pPr>
-            <a:r>
-              <a:rPr lang="en-US" sz="1500" b="1" dirty="0">
-                <a:solidFill>
-                  <a:srgbClr val="E8722C"/>
-                </a:solidFill>
-              </a:rPr>
-              <a:t>Respond</a:t>
-            </a:r>
-            <a:endParaRPr lang="en-US" sz="1500" dirty="0"/>
-          </a:p>
-        </p:txBody>
-      </p:sp>
-      <p:sp>
-        <p:nvSpPr>
-          <p:cNvPr id="19" name="Text 16"/>
-          <p:cNvSpPr txBox="1"/>
-          <p:nvPr/>
-        </p:nvSpPr>
-        <p:spPr>
-          <a:xfrm>
-            <a:off x="6301588" y="2286000"/>
-            <a:ext cx="2282114" cy="3337560"/>
+            <a:endParaRPr lang="en-US" sz="1400" dirty="0"/>
+          </a:p>
+        </p:txBody>
+      </p:sp>
+      <p:sp>
+        <p:nvSpPr>
+          <p:cNvPr id="16" name="Text 13"/>
+          <p:cNvSpPr txBox="1"/>
+          <p:nvPr/>
+        </p:nvSpPr>
+        <p:spPr>
+          <a:xfrm>
+            <a:off x="3607994" y="2194560"/>
+            <a:ext cx="2921222" cy="3474720"/>
           </a:xfrm>
           <a:prstGeom prst="rect">
             <a:avLst/>
@@ -17002,14 +17257,14 @@
               <a:buChar char="✓"/>
             </a:pPr>
             <a:r>
-              <a:rPr lang="en-US" sz="830" dirty="0">
+              <a:rPr lang="en-US" sz="860" dirty="0">
                 <a:solidFill>
                   <a:srgbClr val="3A4452"/>
                 </a:solidFill>
               </a:rPr>
-              <a:t>Interactive Mapbox GL live map with real-time incident markers</a:t>
-            </a:r>
-            <a:endParaRPr lang="en-US" sz="830" dirty="0"/>
+              <a:t>7-day risk forecast across 8 cities (OpenWeatherMap)</a:t>
+            </a:r>
+            <a:endParaRPr lang="en-US" sz="860" dirty="0"/>
           </a:p>
           <a:p>
             <a:pPr marL="342900" indent="-342900">
@@ -17020,14 +17275,14 @@
               <a:buChar char="✓"/>
             </a:pPr>
             <a:r>
-              <a:rPr lang="en-US" sz="830" dirty="0">
+              <a:rPr lang="en-US" sz="860" dirty="0">
                 <a:solidFill>
                   <a:srgbClr val="3A4452"/>
                 </a:solidFill>
               </a:rPr>
-              <a:t>Live multi-hazard incident dashboard — map + detail panel</a:t>
-            </a:r>
-            <a:endParaRPr lang="en-US" sz="830" dirty="0"/>
+              <a:t>AI-generated risk-escalation timeline</a:t>
+            </a:r>
+            <a:endParaRPr lang="en-US" sz="860" dirty="0"/>
           </a:p>
           <a:p>
             <a:pPr marL="342900" indent="-342900">
@@ -17038,14 +17293,14 @@
               <a:buChar char="✓"/>
             </a:pPr>
             <a:r>
-              <a:rPr lang="en-US" sz="830" dirty="0">
+              <a:rPr lang="en-US" sz="860" dirty="0">
                 <a:solidFill>
                   <a:srgbClr val="3A4452"/>
                 </a:solidFill>
               </a:rPr>
-              <a:t>Real-time WebSocket updates across the dashboard</a:t>
-            </a:r>
-            <a:endParaRPr lang="en-US" sz="830" dirty="0"/>
+              <a:t>Gemini-drafted preparedness checklists per agency</a:t>
+            </a:r>
+            <a:endParaRPr lang="en-US" sz="860" dirty="0"/>
           </a:p>
           <a:p>
             <a:pPr marL="342900" indent="-342900">
@@ -17056,14 +17311,14 @@
               <a:buChar char="✓"/>
             </a:pPr>
             <a:r>
-              <a:rPr lang="en-US" sz="830" dirty="0">
+              <a:rPr lang="en-US" sz="860" dirty="0">
                 <a:solidFill>
                   <a:srgbClr val="3A4452"/>
                 </a:solidFill>
               </a:rPr>
-              <a:t>Gemini 2.5 Flash decision support with confidence scoring</a:t>
-            </a:r>
-            <a:endParaRPr lang="en-US" sz="830" dirty="0"/>
+              <a:t>Persistent checklist UI — progress, deadlines, agency filters</a:t>
+            </a:r>
+            <a:endParaRPr lang="en-US" sz="860" dirty="0"/>
           </a:p>
           <a:p>
             <a:pPr marL="342900" indent="-342900">
@@ -17074,14 +17329,14 @@
               <a:buChar char="✓"/>
             </a:pPr>
             <a:r>
-              <a:rPr lang="en-US" sz="830" dirty="0">
+              <a:rPr lang="en-US" sz="860" dirty="0">
                 <a:solidFill>
                   <a:srgbClr val="3A4452"/>
                 </a:solidFill>
               </a:rPr>
-              <a:t>Satellite cross-validation — Sentinel-1 SAR via Google Earth Engine</a:t>
-            </a:r>
-            <a:endParaRPr lang="en-US" sz="830" dirty="0"/>
+              <a:t>4 audience-tailored alert drafts per city — farmers, hospitals, NGOs, municipal corps</a:t>
+            </a:r>
+            <a:endParaRPr lang="en-US" sz="860" dirty="0"/>
           </a:p>
           <a:p>
             <a:pPr marL="342900" indent="-342900">
@@ -17092,14 +17347,14 @@
               <a:buChar char="✓"/>
             </a:pPr>
             <a:r>
-              <a:rPr lang="en-US" sz="830" dirty="0">
+              <a:rPr lang="en-US" sz="860" dirty="0">
                 <a:solidFill>
                   <a:srgbClr val="3A4452"/>
                 </a:solidFill>
               </a:rPr>
-              <a:t>Evacuation-route pre-calculation — OSRM + geodesic fallback</a:t>
-            </a:r>
-            <a:endParaRPr lang="en-US" sz="830" dirty="0"/>
+              <a:t>Manual alert dispatch — WhatsApp (WAHA) + email</a:t>
+            </a:r>
+            <a:endParaRPr lang="en-US" sz="860" dirty="0"/>
           </a:p>
           <a:p>
             <a:pPr marL="342900" indent="-342900">
@@ -17110,14 +17365,14 @@
               <a:buChar char="✓"/>
             </a:pPr>
             <a:r>
-              <a:rPr lang="en-US" sz="830" dirty="0">
+              <a:rPr lang="en-US" sz="860" dirty="0">
                 <a:solidFill>
                   <a:srgbClr val="3A4452"/>
                 </a:solidFill>
               </a:rPr>
-              <a:t>Audience-tailored email alerts — farmers, hospitals, NGOs, municipal corps</a:t>
-            </a:r>
-            <a:endParaRPr lang="en-US" sz="830" dirty="0"/>
+              <a:t>Confidence-based alerting — real agreement-ratio math, not a fabricated score</a:t>
+            </a:r>
+            <a:endParaRPr lang="en-US" sz="860" dirty="0"/>
           </a:p>
           <a:p>
             <a:pPr marL="342900" indent="-342900">
@@ -17128,14 +17383,14 @@
               <a:buChar char="✓"/>
             </a:pPr>
             <a:r>
-              <a:rPr lang="en-US" sz="830" dirty="0">
+              <a:rPr lang="en-US" sz="860" dirty="0">
                 <a:solidFill>
                   <a:srgbClr val="3A4452"/>
                 </a:solidFill>
               </a:rPr>
-              <a:t>Decision-lineage logging for every AI output</a:t>
-            </a:r>
-            <a:endParaRPr lang="en-US" sz="830" dirty="0"/>
+              <a:t>Proactive evacuation-route pre-calculation (OSRM)</a:t>
+            </a:r>
+            <a:endParaRPr lang="en-US" sz="860" dirty="0"/>
           </a:p>
           <a:p>
             <a:pPr marL="342900" indent="-342900">
@@ -17146,85 +17401,314 @@
               <a:buChar char="✓"/>
             </a:pPr>
             <a:r>
-              <a:rPr lang="en-US" sz="830" dirty="0">
+              <a:rPr lang="en-US" sz="860" dirty="0">
                 <a:solidFill>
                   <a:srgbClr val="3A4452"/>
                 </a:solidFill>
               </a:rPr>
-              <a:t>Multi-source live ingestion — 6 APIs (NASA EONET, USGS, NOAA, GDACS, OpenWeatherMap, OSM/Overpass)</a:t>
-            </a:r>
-            <a:endParaRPr lang="en-US" sz="830" dirty="0"/>
-          </a:p>
+              <a:t>Source of Truth — forecast data-integrity audit (freshness, completeness, sufficiency)</a:t>
+            </a:r>
+            <a:endParaRPr lang="en-US" sz="860" dirty="0"/>
+          </a:p>
+        </p:txBody>
+      </p:sp>
+      <p:sp>
+        <p:nvSpPr>
+          <p:cNvPr id="17" name="Shape 14"/>
+          <p:cNvSpPr/>
+          <p:nvPr/>
+        </p:nvSpPr>
+        <p:spPr>
+          <a:xfrm>
+            <a:off x="6803536" y="1691640"/>
+            <a:ext cx="2812077" cy="54864"/>
+          </a:xfrm>
+          <a:prstGeom prst="rect">
+            <a:avLst/>
+          </a:prstGeom>
+          <a:solidFill>
+            <a:srgbClr val="E8722C"/>
+          </a:solidFill>
+          <a:ln/>
+        </p:spPr>
+      </p:sp>
+      <p:sp>
+        <p:nvSpPr>
+          <p:cNvPr id="18" name="Shape 15"/>
+          <p:cNvSpPr/>
+          <p:nvPr/>
+        </p:nvSpPr>
+        <p:spPr>
+          <a:xfrm>
+            <a:off x="6803536" y="1746504"/>
+            <a:ext cx="2812077" cy="4059936"/>
+          </a:xfrm>
+          <a:prstGeom prst="rect">
+            <a:avLst/>
+          </a:prstGeom>
+          <a:solidFill>
+            <a:srgbClr val="FFFFFF"/>
+          </a:solidFill>
+          <a:ln/>
+        </p:spPr>
+      </p:sp>
+      <p:sp>
+        <p:nvSpPr>
+          <p:cNvPr id="19" name="Text 16"/>
+          <p:cNvSpPr txBox="1"/>
+          <p:nvPr/>
+        </p:nvSpPr>
+        <p:spPr>
+          <a:xfrm>
+            <a:off x="6940696" y="1856232"/>
+            <a:ext cx="2537757" cy="274320"/>
+          </a:xfrm>
+          <a:prstGeom prst="rect">
+            <a:avLst/>
+          </a:prstGeom>
+          <a:noFill/>
+          <a:ln/>
+        </p:spPr>
+        <p:txBody>
+          <a:bodyPr wrap="square" lIns="0" tIns="0" rIns="0" bIns="0" rtlCol="0" anchor="ctr"/>
+          <a:lstStyle/>
+          <a:p>
+            <a:pPr indent="0" marL="0">
+              <a:buNone/>
+            </a:pPr>
+            <a:r>
+              <a:rPr lang="en-US" sz="1400" b="1" dirty="0">
+                <a:solidFill>
+                  <a:srgbClr val="E8722C"/>
+                </a:solidFill>
+              </a:rPr>
+              <a:t>Respond</a:t>
+            </a:r>
+            <a:endParaRPr lang="en-US" sz="1400" dirty="0"/>
+          </a:p>
+        </p:txBody>
+      </p:sp>
+      <p:sp>
+        <p:nvSpPr>
+          <p:cNvPr id="20" name="Text 17"/>
+          <p:cNvSpPr txBox="1"/>
+          <p:nvPr/>
+        </p:nvSpPr>
+        <p:spPr>
+          <a:xfrm>
+            <a:off x="6940696" y="2130552"/>
+            <a:ext cx="2537757" cy="228600"/>
+          </a:xfrm>
+          <a:prstGeom prst="rect">
+            <a:avLst/>
+          </a:prstGeom>
+          <a:noFill/>
+          <a:ln/>
+        </p:spPr>
+        <p:txBody>
+          <a:bodyPr wrap="square" lIns="0" tIns="0" rIns="0" bIns="0" rtlCol="0" anchor="ctr"/>
+          <a:lstStyle/>
+          <a:p>
+            <a:pPr indent="0" marL="0">
+              <a:buNone/>
+            </a:pPr>
+            <a:r>
+              <a:rPr lang="en-US" sz="850" i="1" dirty="0">
+                <a:solidFill>
+                  <a:srgbClr val="C77A3E"/>
+                </a:solidFill>
+              </a:rPr>
+              <a:t>16 capabilities — full list next slide →</a:t>
+            </a:r>
+            <a:endParaRPr lang="en-US" sz="850" dirty="0"/>
+          </a:p>
+        </p:txBody>
+      </p:sp>
+      <p:sp>
+        <p:nvSpPr>
+          <p:cNvPr id="21" name="Text 18"/>
+          <p:cNvSpPr txBox="1"/>
+          <p:nvPr/>
+        </p:nvSpPr>
+        <p:spPr>
+          <a:xfrm>
+            <a:off x="6940696" y="2441448"/>
+            <a:ext cx="2537757" cy="2606040"/>
+          </a:xfrm>
+          <a:prstGeom prst="rect">
+            <a:avLst/>
+          </a:prstGeom>
+          <a:noFill/>
+          <a:ln/>
+        </p:spPr>
+        <p:txBody>
+          <a:bodyPr wrap="square" lIns="0" tIns="0" rIns="0" bIns="0" rtlCol="0" anchor="t"/>
+          <a:lstStyle/>
           <a:p>
             <a:pPr marL="342900" indent="-342900">
               <a:spcAft>
-                <a:spcPts val="400"/>
+                <a:spcPts val="500"/>
               </a:spcAft>
               <a:buSzPct val="100000"/>
               <a:buChar char="✓"/>
             </a:pPr>
             <a:r>
-              <a:rPr lang="en-US" sz="830" dirty="0">
+              <a:rPr lang="en-US" sz="860" dirty="0">
                 <a:solidFill>
                   <a:srgbClr val="3A4452"/>
                 </a:solidFill>
               </a:rPr>
-              <a:t>Multi-language UI (vue-i18n)</a:t>
-            </a:r>
-            <a:endParaRPr lang="en-US" sz="830" dirty="0"/>
-          </a:p>
-        </p:txBody>
-      </p:sp>
-      <p:sp>
-        <p:nvSpPr>
-          <p:cNvPr id="20" name="Shape 17"/>
+              <a:t>Interactive live incident map, Mapbox GL, with evacuation zones</a:t>
+            </a:r>
+            <a:endParaRPr lang="en-US" sz="860" dirty="0"/>
+          </a:p>
+          <a:p>
+            <a:pPr marL="342900" indent="-342900">
+              <a:spcAft>
+                <a:spcPts val="500"/>
+              </a:spcAft>
+              <a:buSzPct val="100000"/>
+              <a:buChar char="✓"/>
+            </a:pPr>
+            <a:r>
+              <a:rPr lang="en-US" sz="860" dirty="0">
+                <a:solidFill>
+                  <a:srgbClr val="3A4452"/>
+                </a:solidFill>
+              </a:rPr>
+              <a:t>Gemini 2.5 Flash decision support with confidence scoring</a:t>
+            </a:r>
+            <a:endParaRPr lang="en-US" sz="860" dirty="0"/>
+          </a:p>
+          <a:p>
+            <a:pPr marL="342900" indent="-342900">
+              <a:spcAft>
+                <a:spcPts val="500"/>
+              </a:spcAft>
+              <a:buSzPct val="100000"/>
+              <a:buChar char="✓"/>
+            </a:pPr>
+            <a:r>
+              <a:rPr lang="en-US" sz="860" dirty="0">
+                <a:solidFill>
+                  <a:srgbClr val="3A4452"/>
+                </a:solidFill>
+              </a:rPr>
+              <a:t>Source of Truth — full incident data lineage, every AI output logged</a:t>
+            </a:r>
+            <a:endParaRPr lang="en-US" sz="860" dirty="0"/>
+          </a:p>
+          <a:p>
+            <a:pPr marL="342900" indent="-342900">
+              <a:spcAft>
+                <a:spcPts val="500"/>
+              </a:spcAft>
+              <a:buSzPct val="100000"/>
+              <a:buChar char="✓"/>
+            </a:pPr>
+            <a:r>
+              <a:rPr lang="en-US" sz="860" dirty="0">
+                <a:solidFill>
+                  <a:srgbClr val="3A4452"/>
+                </a:solidFill>
+              </a:rPr>
+              <a:t>Deterministic cascade &amp; resource optimizer (Hamilton apportionment)</a:t>
+            </a:r>
+            <a:endParaRPr lang="en-US" sz="860" dirty="0"/>
+          </a:p>
+          <a:p>
+            <a:pPr marL="342900" indent="-342900">
+              <a:spcAft>
+                <a:spcPts val="500"/>
+              </a:spcAft>
+              <a:buSzPct val="100000"/>
+              <a:buChar char="✓"/>
+            </a:pPr>
+            <a:r>
+              <a:rPr lang="en-US" sz="860" dirty="0">
+                <a:solidFill>
+                  <a:srgbClr val="3A4452"/>
+                </a:solidFill>
+              </a:rPr>
+              <a:t>Satellite image + Sentinel-1 SAR cross-validation</a:t>
+            </a:r>
+            <a:endParaRPr lang="en-US" sz="860" dirty="0"/>
+          </a:p>
+        </p:txBody>
+      </p:sp>
+      <p:sp>
+        <p:nvSpPr>
+          <p:cNvPr id="22" name="Text 19"/>
+          <p:cNvSpPr txBox="1"/>
+          <p:nvPr/>
+        </p:nvSpPr>
+        <p:spPr>
+          <a:xfrm>
+            <a:off x="6940696" y="5303520"/>
+            <a:ext cx="2537757" cy="411480"/>
+          </a:xfrm>
+          <a:prstGeom prst="rect">
+            <a:avLst/>
+          </a:prstGeom>
+          <a:noFill/>
+          <a:ln/>
+        </p:spPr>
+        <p:txBody>
+          <a:bodyPr wrap="square" lIns="0" tIns="0" rIns="0" bIns="0" rtlCol="0" anchor="ctr"/>
+          <a:lstStyle/>
+          <a:p>
+            <a:pPr indent="0" marL="0">
+              <a:buNone/>
+            </a:pPr>
+            <a:r>
+              <a:rPr lang="en-US" sz="800" dirty="0">
+                <a:solidFill>
+                  <a:srgbClr val="C77A3E"/>
+                </a:solidFill>
+              </a:rPr>
+              <a:t>+11 more capabilities, including evacuation routing, phased response timeline, and causal-chain explanation</a:t>
+            </a:r>
+            <a:endParaRPr lang="en-US" sz="800" dirty="0"/>
+          </a:p>
+        </p:txBody>
+      </p:sp>
+      <p:sp>
+        <p:nvSpPr>
+          <p:cNvPr id="23" name="Shape 20"/>
           <p:cNvSpPr/>
           <p:nvPr/>
         </p:nvSpPr>
         <p:spPr>
           <a:xfrm>
-            <a:off x="8858021" y="1737360"/>
-            <a:ext cx="2556434" cy="54864"/>
-          </a:xfrm>
-          <a:prstGeom prst="rect">
-            <a:avLst/>
-          </a:prstGeom>
-          <a:solidFill>
-            <a:srgbClr val="5B6472"/>
-          </a:solidFill>
-          <a:ln/>
-        </p:spPr>
-      </p:sp>
-      <p:sp>
-        <p:nvSpPr>
-          <p:cNvPr id="21" name="Shape 18"/>
-          <p:cNvSpPr/>
-          <p:nvPr/>
-        </p:nvSpPr>
-        <p:spPr>
-          <a:xfrm>
-            <a:off x="8858021" y="1792224"/>
-            <a:ext cx="2556434" cy="3968496"/>
-          </a:xfrm>
-          <a:prstGeom prst="rect">
-            <a:avLst/>
+            <a:off x="9752773" y="1691640"/>
+            <a:ext cx="2556434" cy="4114800"/>
+          </a:xfrm>
+          <a:prstGeom prst="roundRect">
+            <a:avLst>
+              <a:gd name="adj" fmla="val 2861"/>
+            </a:avLst>
           </a:prstGeom>
           <a:solidFill>
             <a:srgbClr val="FFFFFF"/>
           </a:solidFill>
-          <a:ln/>
-        </p:spPr>
-      </p:sp>
-      <p:sp>
-        <p:nvSpPr>
-          <p:cNvPr id="22" name="Text 19"/>
-          <p:cNvSpPr txBox="1"/>
-          <p:nvPr/>
-        </p:nvSpPr>
-        <p:spPr>
-          <a:xfrm>
-            <a:off x="8995181" y="1901952"/>
-            <a:ext cx="2282114" cy="320040"/>
+          <a:ln w="12700">
+            <a:solidFill>
+              <a:srgbClr val="C7CCD4"/>
+            </a:solidFill>
+            <a:prstDash val="dash"/>
+          </a:ln>
+        </p:spPr>
+      </p:sp>
+      <p:sp>
+        <p:nvSpPr>
+          <p:cNvPr id="24" name="Text 21"/>
+          <p:cNvSpPr txBox="1"/>
+          <p:nvPr/>
+        </p:nvSpPr>
+        <p:spPr>
+          <a:xfrm>
+            <a:off x="9889933" y="1828800"/>
+            <a:ext cx="2282114" cy="274320"/>
           </a:xfrm>
           <a:prstGeom prst="rect">
             <a:avLst/>
@@ -17240,27 +17724,63 @@
               <a:buNone/>
             </a:pPr>
             <a:r>
-              <a:rPr lang="en-US" sz="1500" b="1" dirty="0">
+              <a:rPr lang="en-US" sz="1400" b="1" dirty="0">
                 <a:solidFill>
                   <a:srgbClr val="5B6472"/>
                 </a:solidFill>
               </a:rPr>
               <a:t>Recover</a:t>
             </a:r>
-            <a:endParaRPr lang="en-US" sz="1500" dirty="0"/>
-          </a:p>
-        </p:txBody>
-      </p:sp>
-      <p:sp>
-        <p:nvSpPr>
-          <p:cNvPr id="23" name="Text 20"/>
-          <p:cNvSpPr txBox="1"/>
-          <p:nvPr/>
-        </p:nvSpPr>
-        <p:spPr>
-          <a:xfrm>
-            <a:off x="8995181" y="2286000"/>
-            <a:ext cx="2282114" cy="3337560"/>
+            <a:endParaRPr lang="en-US" sz="1400" dirty="0"/>
+          </a:p>
+        </p:txBody>
+      </p:sp>
+      <p:sp>
+        <p:nvSpPr>
+          <p:cNvPr id="25" name="Text 22"/>
+          <p:cNvSpPr txBox="1"/>
+          <p:nvPr/>
+        </p:nvSpPr>
+        <p:spPr>
+          <a:xfrm>
+            <a:off x="9889933" y="2103120"/>
+            <a:ext cx="2282114" cy="228600"/>
+          </a:xfrm>
+          <a:prstGeom prst="rect">
+            <a:avLst/>
+          </a:prstGeom>
+          <a:noFill/>
+          <a:ln/>
+        </p:spPr>
+        <p:txBody>
+          <a:bodyPr wrap="square" lIns="0" tIns="0" rIns="0" bIns="0" rtlCol="0" anchor="ctr"/>
+          <a:lstStyle/>
+          <a:p>
+            <a:pPr indent="0" marL="0">
+              <a:buNone/>
+            </a:pPr>
+            <a:r>
+              <a:rPr lang="en-US" sz="850" i="1" dirty="0">
+                <a:solidFill>
+                  <a:srgbClr val="8A93A3"/>
+                </a:solidFill>
+              </a:rPr>
+              <a:t>Designed, not yet built</a:t>
+            </a:r>
+            <a:endParaRPr lang="en-US" sz="850" dirty="0"/>
+          </a:p>
+        </p:txBody>
+      </p:sp>
+      <p:sp>
+        <p:nvSpPr>
+          <p:cNvPr id="26" name="Text 23"/>
+          <p:cNvSpPr txBox="1"/>
+          <p:nvPr/>
+        </p:nvSpPr>
+        <p:spPr>
+          <a:xfrm>
+            <a:off x="9889933" y="2423160"/>
+            <a:ext cx="2282114" cy="2743200"/>
           </a:xfrm>
           <a:prstGeom prst="rect">
             <a:avLst/>
@@ -17274,44 +17794,98 @@
           <a:p>
             <a:pPr marL="342900" indent="-342900">
               <a:spcAft>
-                <a:spcPts val="800"/>
+                <a:spcPts val="600"/>
               </a:spcAft>
               <a:buSzPct val="100000"/>
-              <a:buChar char="✓"/>
-            </a:pPr>
-            <a:r>
-              <a:rPr lang="en-US" sz="1050" dirty="0">
-                <a:solidFill>
-                  <a:srgbClr val="3A4452"/>
-                </a:solidFill>
-              </a:rPr>
-              <a:t>Before/after satellite damage assessment</a:t>
-            </a:r>
-            <a:endParaRPr lang="en-US" sz="1050" dirty="0"/>
+              <a:buChar char="○"/>
+            </a:pPr>
+            <a:r>
+              <a:rPr lang="en-US" sz="950" dirty="0">
+                <a:solidFill>
+                  <a:srgbClr val="5B6472"/>
+                </a:solidFill>
+              </a:rPr>
+              <a:t>Before/after satellite damage comparison</a:t>
+            </a:r>
+            <a:endParaRPr lang="en-US" sz="950" dirty="0"/>
           </a:p>
           <a:p>
             <a:pPr marL="342900" indent="-342900">
               <a:spcAft>
-                <a:spcPts val="800"/>
+                <a:spcPts val="600"/>
               </a:spcAft>
               <a:buSzPct val="100000"/>
-              <a:buChar char="✓"/>
-            </a:pPr>
-            <a:r>
-              <a:rPr lang="en-US" sz="1050" dirty="0">
-                <a:solidFill>
-                  <a:srgbClr val="3A4452"/>
-                </a:solidFill>
-              </a:rPr>
-              <a:t>Recovery-milestone tracking once an incident stabilizes</a:t>
-            </a:r>
-            <a:endParaRPr lang="en-US" sz="1050" dirty="0"/>
-          </a:p>
-        </p:txBody>
-      </p:sp>
-      <p:sp>
-        <p:nvSpPr>
-          <p:cNvPr id="24" name="Text 21"/>
+              <a:buChar char="○"/>
+            </a:pPr>
+            <a:r>
+              <a:rPr lang="en-US" sz="950" dirty="0">
+                <a:solidFill>
+                  <a:srgbClr val="5B6472"/>
+                </a:solidFill>
+              </a:rPr>
+              <a:t>Damage mapping + recovery priority sequencing</a:t>
+            </a:r>
+            <a:endParaRPr lang="en-US" sz="950" dirty="0"/>
+          </a:p>
+          <a:p>
+            <a:pPr marL="342900" indent="-342900">
+              <a:spcAft>
+                <a:spcPts val="600"/>
+              </a:spcAft>
+              <a:buSzPct val="100000"/>
+              <a:buChar char="○"/>
+            </a:pPr>
+            <a:r>
+              <a:rPr lang="en-US" sz="950" dirty="0">
+                <a:solidFill>
+                  <a:srgbClr val="5B6472"/>
+                </a:solidFill>
+              </a:rPr>
+              <a:t>Resource &amp; cost estimation for rebuilding</a:t>
+            </a:r>
+            <a:endParaRPr lang="en-US" sz="950" dirty="0"/>
+          </a:p>
+        </p:txBody>
+      </p:sp>
+      <p:sp>
+        <p:nvSpPr>
+          <p:cNvPr id="27" name="Text 24"/>
+          <p:cNvSpPr txBox="1"/>
+          <p:nvPr/>
+        </p:nvSpPr>
+        <p:spPr>
+          <a:xfrm>
+            <a:off x="9889933" y="5440680"/>
+            <a:ext cx="2282114" cy="274320"/>
+          </a:xfrm>
+          <a:prstGeom prst="rect">
+            <a:avLst/>
+          </a:prstGeom>
+          <a:noFill/>
+          <a:ln/>
+        </p:spPr>
+        <p:txBody>
+          <a:bodyPr wrap="square" lIns="0" tIns="0" rIns="0" bIns="0" rtlCol="0" anchor="ctr"/>
+          <a:lstStyle/>
+          <a:p>
+            <a:pPr indent="0" marL="0">
+              <a:buNone/>
+            </a:pPr>
+            <a:r>
+              <a:rPr lang="en-US" sz="850" dirty="0">
+                <a:solidFill>
+                  <a:srgbClr val="8A93A3"/>
+                </a:solidFill>
+              </a:rPr>
+              <a:t>12 items scoped — see Future Development</a:t>
+            </a:r>
+            <a:endParaRPr lang="en-US" sz="850" dirty="0"/>
+          </a:p>
+        </p:txBody>
+      </p:sp>
+      <p:sp>
+        <p:nvSpPr>
+          <p:cNvPr id="28" name="Text 25"/>
           <p:cNvSpPr txBox="1"/>
           <p:nvPr/>
         </p:nvSpPr>
@@ -17334,14 +17908,14 @@
               <a:buNone/>
             </a:pPr>
             <a:r>
-              <a:rPr lang="en-US" sz="1000" i="1" dirty="0">
+              <a:rPr lang="en-US" sz="950" i="1" dirty="0">
                 <a:solidFill>
                   <a:srgbClr val="8A8470"/>
                 </a:solidFill>
               </a:rPr>
-              <a:t>WhatsApp (WAHA) alerting is built and self-hosted but not yet production-reliable; SMS is in progress — both stay off this list until confirmed.</a:t>
-            </a:r>
-            <a:endParaRPr lang="en-US" sz="1000" dirty="0"/>
+              <a:t>Predict and Recover are part of the 4-phase design (see The 4-Phase Model) but have no functionality built yet — only Prepare and Respond are shipped today.</a:t>
+            </a:r>
+            <a:endParaRPr lang="en-US" sz="950" dirty="0"/>
           </a:p>
         </p:txBody>
       </p:sp>
@@ -17359,7 +17933,7 @@
     <p:bg>
       <p:bgPr>
         <a:solidFill>
-          <a:srgbClr val="0F1B2D"/>
+          <a:srgbClr val="F7F7F2"/>
         </a:solidFill>
       </p:bgPr>
     </p:bg>
@@ -17428,7 +18002,7 @@
             <a:r>
               <a:rPr lang="en-US" sz="1100" dirty="0">
                 <a:solidFill>
-                  <a:srgbClr val="8A93A3"/>
+                  <a:srgbClr val="9AA3B0"/>
                 </a:solidFill>
                 <a:latin typeface="Calibri" pitchFamily="34" charset="0"/>
                 <a:ea typeface="Calibri" pitchFamily="34" charset="-122"/>
@@ -17467,13 +18041,13 @@
             <a:r>
               <a:rPr lang="en-US" sz="1100" dirty="0">
                 <a:solidFill>
-                  <a:srgbClr val="8A93A3"/>
+                  <a:srgbClr val="9AA3B0"/>
                 </a:solidFill>
                 <a:latin typeface="Calibri" pitchFamily="34" charset="0"/>
                 <a:ea typeface="Calibri" pitchFamily="34" charset="-122"/>
                 <a:cs typeface="Calibri" pitchFamily="34" charset="-120"/>
               </a:rPr>
-              <a:t>08 / 16</a:t>
+              <a:t>08 / 17</a:t>
             </a:r>
             <a:endParaRPr lang="en-US" sz="1100" dirty="0"/>
           </a:p>
@@ -17532,7 +18106,7 @@
                 <a:ea typeface="Calibri" pitchFamily="34" charset="-122"/>
                 <a:cs typeface="Calibri" pitchFamily="34" charset="-120"/>
               </a:rPr>
-              <a:t>PROCESS FLOW DIAGRAM</a:t>
+              <a:t>FEATURES — RESPOND PHASE</a:t>
             </a:r>
             <a:endParaRPr lang="en-US" sz="1300" dirty="0"/>
           </a:p>
@@ -17547,7 +18121,7 @@
         <p:spPr>
           <a:xfrm>
             <a:off x="777240" y="1188720"/>
-            <a:ext cx="10637215" cy="365760"/>
+            <a:ext cx="10637215" cy="548640"/>
           </a:xfrm>
           <a:prstGeom prst="rect">
             <a:avLst/>
@@ -17559,21 +18133,21 @@
           <a:bodyPr wrap="square" lIns="0" tIns="0" rIns="0" bIns="0" rtlCol="0" anchor="ctr"/>
           <a:lstStyle/>
           <a:p>
-            <a:pPr algn="ctr" indent="0" marL="0">
-              <a:buNone/>
-            </a:pPr>
-            <a:r>
-              <a:rPr lang="en-US" sz="2000" b="1" dirty="0">
-                <a:solidFill>
-                  <a:srgbClr val="F3F4F2"/>
+            <a:pPr indent="0" marL="0">
+              <a:buNone/>
+            </a:pPr>
+            <a:r>
+              <a:rPr lang="en-US" sz="2100" b="1" dirty="0">
+                <a:solidFill>
+                  <a:srgbClr val="0F1B2D"/>
                 </a:solidFill>
                 <a:latin typeface="Cambria" pitchFamily="34" charset="0"/>
                 <a:ea typeface="Cambria" pitchFamily="34" charset="-122"/>
                 <a:cs typeface="Cambria" pitchFamily="34" charset="-120"/>
               </a:rPr>
-              <a:t>The Full Disaster Lifecycle, As Built</a:t>
-            </a:r>
-            <a:endParaRPr lang="en-US" sz="2000" dirty="0"/>
+              <a:t>16 Capabilities, Live Today — The Respond Phase In Detail</a:t>
+            </a:r>
+            <a:endParaRPr lang="en-US" sz="2100" dirty="0"/>
           </a:p>
         </p:txBody>
       </p:sp>
@@ -17586,42 +18160,1921 @@
         <p:spPr>
           <a:xfrm>
             <a:off x="777240" y="1691640"/>
-            <a:ext cx="10637215" cy="4480560"/>
-          </a:xfrm>
-          <a:prstGeom prst="roundRect">
-            <a:avLst>
-              <a:gd name="adj" fmla="val 1633"/>
-            </a:avLst>
+            <a:ext cx="2563292" cy="41148"/>
+          </a:xfrm>
+          <a:prstGeom prst="rect">
+            <a:avLst/>
           </a:prstGeom>
           <a:solidFill>
-            <a:srgbClr val="F7F7F2"/>
+            <a:srgbClr val="E8722C"/>
           </a:solidFill>
           <a:ln/>
         </p:spPr>
       </p:sp>
-      <p:pic>
-        <p:nvPicPr>
-          <p:cNvPr id="9" name="Image 1" descr="/home/claude/pptx-build/assets/efc5ace416bee97a84d8a2941dfa8329.png">    </p:cNvPr>
-          <p:cNvPicPr>
-            <a:picLocks noChangeAspect="1"/>
-          </p:cNvPicPr>
-          <p:nvPr/>
-        </p:nvPicPr>
-        <p:blipFill>
-          <a:blip r:embed="rId2"/>
-          <a:srcRect l="0" r="0" t="0" b="0"/>
-          <a:stretch/>
-        </p:blipFill>
-        <p:spPr>
-          <a:xfrm>
-            <a:off x="914400" y="1828800"/>
-            <a:ext cx="10362895" cy="4206240"/>
-          </a:xfrm>
-          <a:prstGeom prst="rect">
-            <a:avLst/>
-          </a:prstGeom>
-        </p:spPr>
-      </p:pic>
+      <p:sp>
+        <p:nvSpPr>
+          <p:cNvPr id="9" name="Shape 6"/>
+          <p:cNvSpPr/>
+          <p:nvPr/>
+        </p:nvSpPr>
+        <p:spPr>
+          <a:xfrm>
+            <a:off x="777240" y="1732788"/>
+            <a:ext cx="2563292" cy="880110"/>
+          </a:xfrm>
+          <a:prstGeom prst="rect">
+            <a:avLst/>
+          </a:prstGeom>
+          <a:solidFill>
+            <a:srgbClr val="FFFFFF"/>
+          </a:solidFill>
+          <a:ln/>
+        </p:spPr>
+      </p:sp>
+      <p:sp>
+        <p:nvSpPr>
+          <p:cNvPr id="10" name="Text 7"/>
+          <p:cNvSpPr txBox="1"/>
+          <p:nvPr/>
+        </p:nvSpPr>
+        <p:spPr>
+          <a:xfrm>
+            <a:off x="886968" y="1810512"/>
+            <a:ext cx="2343836" cy="365760"/>
+          </a:xfrm>
+          <a:prstGeom prst="rect">
+            <a:avLst/>
+          </a:prstGeom>
+          <a:noFill/>
+          <a:ln/>
+        </p:spPr>
+        <p:txBody>
+          <a:bodyPr wrap="square" lIns="0" tIns="0" rIns="0" bIns="0" rtlCol="0" anchor="t"/>
+          <a:lstStyle/>
+          <a:p>
+            <a:pPr indent="0" marL="0">
+              <a:buNone/>
+            </a:pPr>
+            <a:r>
+              <a:rPr lang="en-US" sz="1050" b="1" dirty="0">
+                <a:solidFill>
+                  <a:srgbClr val="0F1B2D"/>
+                </a:solidFill>
+                <a:latin typeface="Calibri" pitchFamily="34" charset="0"/>
+                <a:ea typeface="Calibri" pitchFamily="34" charset="-122"/>
+                <a:cs typeface="Calibri" pitchFamily="34" charset="-120"/>
+              </a:rPr>
+              <a:t>Multi-Source Live Ingestion</a:t>
+            </a:r>
+            <a:endParaRPr lang="en-US" sz="1050" dirty="0"/>
+          </a:p>
+        </p:txBody>
+      </p:sp>
+      <p:sp>
+        <p:nvSpPr>
+          <p:cNvPr id="11" name="Text 8"/>
+          <p:cNvSpPr txBox="1"/>
+          <p:nvPr/>
+        </p:nvSpPr>
+        <p:spPr>
+          <a:xfrm>
+            <a:off x="886968" y="2148840"/>
+            <a:ext cx="2343836" cy="372618"/>
+          </a:xfrm>
+          <a:prstGeom prst="rect">
+            <a:avLst/>
+          </a:prstGeom>
+          <a:noFill/>
+          <a:ln/>
+        </p:spPr>
+        <p:txBody>
+          <a:bodyPr wrap="square" lIns="0" tIns="0" rIns="0" bIns="0" rtlCol="0" anchor="t"/>
+          <a:lstStyle/>
+          <a:p>
+            <a:pPr indent="0" marL="0">
+              <a:buNone/>
+            </a:pPr>
+            <a:r>
+              <a:rPr lang="en-US" sz="830" dirty="0">
+                <a:solidFill>
+                  <a:srgbClr val="6B7684"/>
+                </a:solidFill>
+                <a:latin typeface="Calibri" pitchFamily="34" charset="0"/>
+                <a:ea typeface="Calibri" pitchFamily="34" charset="-122"/>
+                <a:cs typeface="Calibri" pitchFamily="34" charset="-120"/>
+              </a:rPr>
+              <a:t>6 APIs fused — NASA EONET, USGS, NOAA, GDACS, OpenWeatherMap, OSM/Overpass</a:t>
+            </a:r>
+            <a:endParaRPr lang="en-US" sz="830" dirty="0"/>
+          </a:p>
+        </p:txBody>
+      </p:sp>
+      <p:sp>
+        <p:nvSpPr>
+          <p:cNvPr id="12" name="Shape 9"/>
+          <p:cNvSpPr/>
+          <p:nvPr/>
+        </p:nvSpPr>
+        <p:spPr>
+          <a:xfrm>
+            <a:off x="3468548" y="1691640"/>
+            <a:ext cx="2563292" cy="41148"/>
+          </a:xfrm>
+          <a:prstGeom prst="rect">
+            <a:avLst/>
+          </a:prstGeom>
+          <a:solidFill>
+            <a:srgbClr val="E8722C"/>
+          </a:solidFill>
+          <a:ln/>
+        </p:spPr>
+      </p:sp>
+      <p:sp>
+        <p:nvSpPr>
+          <p:cNvPr id="13" name="Shape 10"/>
+          <p:cNvSpPr/>
+          <p:nvPr/>
+        </p:nvSpPr>
+        <p:spPr>
+          <a:xfrm>
+            <a:off x="3468548" y="1732788"/>
+            <a:ext cx="2563292" cy="880110"/>
+          </a:xfrm>
+          <a:prstGeom prst="rect">
+            <a:avLst/>
+          </a:prstGeom>
+          <a:solidFill>
+            <a:srgbClr val="FFFFFF"/>
+          </a:solidFill>
+          <a:ln/>
+        </p:spPr>
+      </p:sp>
+      <p:sp>
+        <p:nvSpPr>
+          <p:cNvPr id="14" name="Text 11"/>
+          <p:cNvSpPr txBox="1"/>
+          <p:nvPr/>
+        </p:nvSpPr>
+        <p:spPr>
+          <a:xfrm>
+            <a:off x="3578276" y="1810512"/>
+            <a:ext cx="2343836" cy="365760"/>
+          </a:xfrm>
+          <a:prstGeom prst="rect">
+            <a:avLst/>
+          </a:prstGeom>
+          <a:noFill/>
+          <a:ln/>
+        </p:spPr>
+        <p:txBody>
+          <a:bodyPr wrap="square" lIns="0" tIns="0" rIns="0" bIns="0" rtlCol="0" anchor="t"/>
+          <a:lstStyle/>
+          <a:p>
+            <a:pPr indent="0" marL="0">
+              <a:buNone/>
+            </a:pPr>
+            <a:r>
+              <a:rPr lang="en-US" sz="1050" b="1" dirty="0">
+                <a:solidFill>
+                  <a:srgbClr val="0F1B2D"/>
+                </a:solidFill>
+                <a:latin typeface="Calibri" pitchFamily="34" charset="0"/>
+                <a:ea typeface="Calibri" pitchFamily="34" charset="-122"/>
+                <a:cs typeface="Calibri" pitchFamily="34" charset="-120"/>
+              </a:rPr>
+              <a:t>Gemini 2.5 Flash Decision Support</a:t>
+            </a:r>
+            <a:endParaRPr lang="en-US" sz="1050" dirty="0"/>
+          </a:p>
+        </p:txBody>
+      </p:sp>
+      <p:sp>
+        <p:nvSpPr>
+          <p:cNvPr id="15" name="Text 12"/>
+          <p:cNvSpPr txBox="1"/>
+          <p:nvPr/>
+        </p:nvSpPr>
+        <p:spPr>
+          <a:xfrm>
+            <a:off x="3578276" y="2148840"/>
+            <a:ext cx="2343836" cy="372618"/>
+          </a:xfrm>
+          <a:prstGeom prst="rect">
+            <a:avLst/>
+          </a:prstGeom>
+          <a:noFill/>
+          <a:ln/>
+        </p:spPr>
+        <p:txBody>
+          <a:bodyPr wrap="square" lIns="0" tIns="0" rIns="0" bIns="0" rtlCol="0" anchor="t"/>
+          <a:lstStyle/>
+          <a:p>
+            <a:pPr indent="0" marL="0">
+              <a:buNone/>
+            </a:pPr>
+            <a:r>
+              <a:rPr lang="en-US" sz="830" dirty="0">
+                <a:solidFill>
+                  <a:srgbClr val="6B7684"/>
+                </a:solidFill>
+                <a:latin typeface="Calibri" pitchFamily="34" charset="0"/>
+                <a:ea typeface="Calibri" pitchFamily="34" charset="-122"/>
+                <a:cs typeface="Calibri" pitchFamily="34" charset="-120"/>
+              </a:rPr>
+              <a:t>Structured recommendations, resource deployment, tactical actions, confidence scoring</a:t>
+            </a:r>
+            <a:endParaRPr lang="en-US" sz="830" dirty="0"/>
+          </a:p>
+        </p:txBody>
+      </p:sp>
+      <p:sp>
+        <p:nvSpPr>
+          <p:cNvPr id="16" name="Shape 13"/>
+          <p:cNvSpPr/>
+          <p:nvPr/>
+        </p:nvSpPr>
+        <p:spPr>
+          <a:xfrm>
+            <a:off x="6159856" y="1691640"/>
+            <a:ext cx="2563292" cy="41148"/>
+          </a:xfrm>
+          <a:prstGeom prst="rect">
+            <a:avLst/>
+          </a:prstGeom>
+          <a:solidFill>
+            <a:srgbClr val="E8722C"/>
+          </a:solidFill>
+          <a:ln/>
+        </p:spPr>
+      </p:sp>
+      <p:sp>
+        <p:nvSpPr>
+          <p:cNvPr id="17" name="Shape 14"/>
+          <p:cNvSpPr/>
+          <p:nvPr/>
+        </p:nvSpPr>
+        <p:spPr>
+          <a:xfrm>
+            <a:off x="6159856" y="1732788"/>
+            <a:ext cx="2563292" cy="880110"/>
+          </a:xfrm>
+          <a:prstGeom prst="rect">
+            <a:avLst/>
+          </a:prstGeom>
+          <a:solidFill>
+            <a:srgbClr val="FFFFFF"/>
+          </a:solidFill>
+          <a:ln/>
+        </p:spPr>
+      </p:sp>
+      <p:sp>
+        <p:nvSpPr>
+          <p:cNvPr id="18" name="Text 15"/>
+          <p:cNvSpPr txBox="1"/>
+          <p:nvPr/>
+        </p:nvSpPr>
+        <p:spPr>
+          <a:xfrm>
+            <a:off x="6269584" y="1810512"/>
+            <a:ext cx="2343836" cy="365760"/>
+          </a:xfrm>
+          <a:prstGeom prst="rect">
+            <a:avLst/>
+          </a:prstGeom>
+          <a:noFill/>
+          <a:ln/>
+        </p:spPr>
+        <p:txBody>
+          <a:bodyPr wrap="square" lIns="0" tIns="0" rIns="0" bIns="0" rtlCol="0" anchor="t"/>
+          <a:lstStyle/>
+          <a:p>
+            <a:pPr indent="0" marL="0">
+              <a:buNone/>
+            </a:pPr>
+            <a:r>
+              <a:rPr lang="en-US" sz="1050" b="1" dirty="0">
+                <a:solidFill>
+                  <a:srgbClr val="0F1B2D"/>
+                </a:solidFill>
+                <a:latin typeface="Calibri" pitchFamily="34" charset="0"/>
+                <a:ea typeface="Calibri" pitchFamily="34" charset="-122"/>
+                <a:cs typeface="Calibri" pitchFamily="34" charset="-120"/>
+              </a:rPr>
+              <a:t>Interactive Live Incident Map</a:t>
+            </a:r>
+            <a:endParaRPr lang="en-US" sz="1050" dirty="0"/>
+          </a:p>
+        </p:txBody>
+      </p:sp>
+      <p:sp>
+        <p:nvSpPr>
+          <p:cNvPr id="19" name="Text 16"/>
+          <p:cNvSpPr txBox="1"/>
+          <p:nvPr/>
+        </p:nvSpPr>
+        <p:spPr>
+          <a:xfrm>
+            <a:off x="6269584" y="2148840"/>
+            <a:ext cx="2343836" cy="372618"/>
+          </a:xfrm>
+          <a:prstGeom prst="rect">
+            <a:avLst/>
+          </a:prstGeom>
+          <a:noFill/>
+          <a:ln/>
+        </p:spPr>
+        <p:txBody>
+          <a:bodyPr wrap="square" lIns="0" tIns="0" rIns="0" bIns="0" rtlCol="0" anchor="t"/>
+          <a:lstStyle/>
+          <a:p>
+            <a:pPr indent="0" marL="0">
+              <a:buNone/>
+            </a:pPr>
+            <a:r>
+              <a:rPr lang="en-US" sz="830" dirty="0">
+                <a:solidFill>
+                  <a:srgbClr val="6B7684"/>
+                </a:solidFill>
+                <a:latin typeface="Calibri" pitchFamily="34" charset="0"/>
+                <a:ea typeface="Calibri" pitchFamily="34" charset="-122"/>
+                <a:cs typeface="Calibri" pitchFamily="34" charset="-120"/>
+              </a:rPr>
+              <a:t>Mapbox GL real-time hazard boundaries, evacuation buffers, safe staging zones</a:t>
+            </a:r>
+            <a:endParaRPr lang="en-US" sz="830" dirty="0"/>
+          </a:p>
+        </p:txBody>
+      </p:sp>
+      <p:sp>
+        <p:nvSpPr>
+          <p:cNvPr id="20" name="Shape 17"/>
+          <p:cNvSpPr/>
+          <p:nvPr/>
+        </p:nvSpPr>
+        <p:spPr>
+          <a:xfrm>
+            <a:off x="8851163" y="1691640"/>
+            <a:ext cx="2563292" cy="41148"/>
+          </a:xfrm>
+          <a:prstGeom prst="rect">
+            <a:avLst/>
+          </a:prstGeom>
+          <a:solidFill>
+            <a:srgbClr val="E8722C"/>
+          </a:solidFill>
+          <a:ln/>
+        </p:spPr>
+      </p:sp>
+      <p:sp>
+        <p:nvSpPr>
+          <p:cNvPr id="21" name="Shape 18"/>
+          <p:cNvSpPr/>
+          <p:nvPr/>
+        </p:nvSpPr>
+        <p:spPr>
+          <a:xfrm>
+            <a:off x="8851163" y="1732788"/>
+            <a:ext cx="2563292" cy="880110"/>
+          </a:xfrm>
+          <a:prstGeom prst="rect">
+            <a:avLst/>
+          </a:prstGeom>
+          <a:solidFill>
+            <a:srgbClr val="FFFFFF"/>
+          </a:solidFill>
+          <a:ln/>
+        </p:spPr>
+      </p:sp>
+      <p:sp>
+        <p:nvSpPr>
+          <p:cNvPr id="22" name="Text 19"/>
+          <p:cNvSpPr txBox="1"/>
+          <p:nvPr/>
+        </p:nvSpPr>
+        <p:spPr>
+          <a:xfrm>
+            <a:off x="8960891" y="1810512"/>
+            <a:ext cx="2343836" cy="365760"/>
+          </a:xfrm>
+          <a:prstGeom prst="rect">
+            <a:avLst/>
+          </a:prstGeom>
+          <a:noFill/>
+          <a:ln/>
+        </p:spPr>
+        <p:txBody>
+          <a:bodyPr wrap="square" lIns="0" tIns="0" rIns="0" bIns="0" rtlCol="0" anchor="t"/>
+          <a:lstStyle/>
+          <a:p>
+            <a:pPr indent="0" marL="0">
+              <a:buNone/>
+            </a:pPr>
+            <a:r>
+              <a:rPr lang="en-US" sz="1050" b="1" dirty="0">
+                <a:solidFill>
+                  <a:srgbClr val="0F1B2D"/>
+                </a:solidFill>
+                <a:latin typeface="Calibri" pitchFamily="34" charset="0"/>
+                <a:ea typeface="Calibri" pitchFamily="34" charset="-122"/>
+                <a:cs typeface="Calibri" pitchFamily="34" charset="-120"/>
+              </a:rPr>
+              <a:t>Real-Time Alert Broadcasting</a:t>
+            </a:r>
+            <a:endParaRPr lang="en-US" sz="1050" dirty="0"/>
+          </a:p>
+        </p:txBody>
+      </p:sp>
+      <p:sp>
+        <p:nvSpPr>
+          <p:cNvPr id="23" name="Text 20"/>
+          <p:cNvSpPr txBox="1"/>
+          <p:nvPr/>
+        </p:nvSpPr>
+        <p:spPr>
+          <a:xfrm>
+            <a:off x="8960891" y="2148840"/>
+            <a:ext cx="2343836" cy="372618"/>
+          </a:xfrm>
+          <a:prstGeom prst="rect">
+            <a:avLst/>
+          </a:prstGeom>
+          <a:noFill/>
+          <a:ln/>
+        </p:spPr>
+        <p:txBody>
+          <a:bodyPr wrap="square" lIns="0" tIns="0" rIns="0" bIns="0" rtlCol="0" anchor="t"/>
+          <a:lstStyle/>
+          <a:p>
+            <a:pPr indent="0" marL="0">
+              <a:buNone/>
+            </a:pPr>
+            <a:r>
+              <a:rPr lang="en-US" sz="830" dirty="0">
+                <a:solidFill>
+                  <a:srgbClr val="6B7684"/>
+                </a:solidFill>
+                <a:latin typeface="Calibri" pitchFamily="34" charset="0"/>
+                <a:ea typeface="Calibri" pitchFamily="34" charset="-122"/>
+                <a:cs typeface="Calibri" pitchFamily="34" charset="-120"/>
+              </a:rPr>
+              <a:t>Audience-tailored email via Gmail SMTP + live WebSocket updates across the dashboard</a:t>
+            </a:r>
+            <a:endParaRPr lang="en-US" sz="830" dirty="0"/>
+          </a:p>
+        </p:txBody>
+      </p:sp>
+      <p:sp>
+        <p:nvSpPr>
+          <p:cNvPr id="24" name="Shape 21"/>
+          <p:cNvSpPr/>
+          <p:nvPr/>
+        </p:nvSpPr>
+        <p:spPr>
+          <a:xfrm>
+            <a:off x="777240" y="2740914"/>
+            <a:ext cx="2563292" cy="41148"/>
+          </a:xfrm>
+          <a:prstGeom prst="rect">
+            <a:avLst/>
+          </a:prstGeom>
+          <a:solidFill>
+            <a:srgbClr val="E8722C"/>
+          </a:solidFill>
+          <a:ln/>
+        </p:spPr>
+      </p:sp>
+      <p:sp>
+        <p:nvSpPr>
+          <p:cNvPr id="25" name="Shape 22"/>
+          <p:cNvSpPr/>
+          <p:nvPr/>
+        </p:nvSpPr>
+        <p:spPr>
+          <a:xfrm>
+            <a:off x="777240" y="2782062"/>
+            <a:ext cx="2563292" cy="880110"/>
+          </a:xfrm>
+          <a:prstGeom prst="rect">
+            <a:avLst/>
+          </a:prstGeom>
+          <a:solidFill>
+            <a:srgbClr val="FFFFFF"/>
+          </a:solidFill>
+          <a:ln/>
+        </p:spPr>
+      </p:sp>
+      <p:sp>
+        <p:nvSpPr>
+          <p:cNvPr id="26" name="Text 23"/>
+          <p:cNvSpPr txBox="1"/>
+          <p:nvPr/>
+        </p:nvSpPr>
+        <p:spPr>
+          <a:xfrm>
+            <a:off x="886968" y="2859786"/>
+            <a:ext cx="2343836" cy="365760"/>
+          </a:xfrm>
+          <a:prstGeom prst="rect">
+            <a:avLst/>
+          </a:prstGeom>
+          <a:noFill/>
+          <a:ln/>
+        </p:spPr>
+        <p:txBody>
+          <a:bodyPr wrap="square" lIns="0" tIns="0" rIns="0" bIns="0" rtlCol="0" anchor="t"/>
+          <a:lstStyle/>
+          <a:p>
+            <a:pPr indent="0" marL="0">
+              <a:buNone/>
+            </a:pPr>
+            <a:r>
+              <a:rPr lang="en-US" sz="1050" b="1" dirty="0">
+                <a:solidFill>
+                  <a:srgbClr val="0F1B2D"/>
+                </a:solidFill>
+                <a:latin typeface="Calibri" pitchFamily="34" charset="0"/>
+                <a:ea typeface="Calibri" pitchFamily="34" charset="-122"/>
+                <a:cs typeface="Calibri" pitchFamily="34" charset="-120"/>
+              </a:rPr>
+              <a:t>Historical Learning (RAG)</a:t>
+            </a:r>
+            <a:endParaRPr lang="en-US" sz="1050" dirty="0"/>
+          </a:p>
+        </p:txBody>
+      </p:sp>
+      <p:sp>
+        <p:nvSpPr>
+          <p:cNvPr id="27" name="Text 24"/>
+          <p:cNvSpPr txBox="1"/>
+          <p:nvPr/>
+        </p:nvSpPr>
+        <p:spPr>
+          <a:xfrm>
+            <a:off x="886968" y="3198114"/>
+            <a:ext cx="2343836" cy="372618"/>
+          </a:xfrm>
+          <a:prstGeom prst="rect">
+            <a:avLst/>
+          </a:prstGeom>
+          <a:noFill/>
+          <a:ln/>
+        </p:spPr>
+        <p:txBody>
+          <a:bodyPr wrap="square" lIns="0" tIns="0" rIns="0" bIns="0" rtlCol="0" anchor="t"/>
+          <a:lstStyle/>
+          <a:p>
+            <a:pPr indent="0" marL="0">
+              <a:buNone/>
+            </a:pPr>
+            <a:r>
+              <a:rPr lang="en-US" sz="830" dirty="0">
+                <a:solidFill>
+                  <a:srgbClr val="6B7684"/>
+                </a:solidFill>
+                <a:latin typeface="Calibri" pitchFamily="34" charset="0"/>
+                <a:ea typeface="Calibri" pitchFamily="34" charset="-122"/>
+                <a:cs typeface="Calibri" pitchFamily="34" charset="-120"/>
+              </a:rPr>
+              <a:t>Vertex AI embedding search matching telemetry to past incident precedents</a:t>
+            </a:r>
+            <a:endParaRPr lang="en-US" sz="830" dirty="0"/>
+          </a:p>
+        </p:txBody>
+      </p:sp>
+      <p:sp>
+        <p:nvSpPr>
+          <p:cNvPr id="28" name="Shape 25"/>
+          <p:cNvSpPr/>
+          <p:nvPr/>
+        </p:nvSpPr>
+        <p:spPr>
+          <a:xfrm>
+            <a:off x="3468548" y="2740914"/>
+            <a:ext cx="2563292" cy="41148"/>
+          </a:xfrm>
+          <a:prstGeom prst="rect">
+            <a:avLst/>
+          </a:prstGeom>
+          <a:solidFill>
+            <a:srgbClr val="E8722C"/>
+          </a:solidFill>
+          <a:ln/>
+        </p:spPr>
+      </p:sp>
+      <p:sp>
+        <p:nvSpPr>
+          <p:cNvPr id="29" name="Shape 26"/>
+          <p:cNvSpPr/>
+          <p:nvPr/>
+        </p:nvSpPr>
+        <p:spPr>
+          <a:xfrm>
+            <a:off x="3468548" y="2782062"/>
+            <a:ext cx="2563292" cy="880110"/>
+          </a:xfrm>
+          <a:prstGeom prst="rect">
+            <a:avLst/>
+          </a:prstGeom>
+          <a:solidFill>
+            <a:srgbClr val="FFFFFF"/>
+          </a:solidFill>
+          <a:ln/>
+        </p:spPr>
+      </p:sp>
+      <p:sp>
+        <p:nvSpPr>
+          <p:cNvPr id="30" name="Text 27"/>
+          <p:cNvSpPr txBox="1"/>
+          <p:nvPr/>
+        </p:nvSpPr>
+        <p:spPr>
+          <a:xfrm>
+            <a:off x="3578276" y="2859786"/>
+            <a:ext cx="2343836" cy="365760"/>
+          </a:xfrm>
+          <a:prstGeom prst="rect">
+            <a:avLst/>
+          </a:prstGeom>
+          <a:noFill/>
+          <a:ln/>
+        </p:spPr>
+        <p:txBody>
+          <a:bodyPr wrap="square" lIns="0" tIns="0" rIns="0" bIns="0" rtlCol="0" anchor="t"/>
+          <a:lstStyle/>
+          <a:p>
+            <a:pPr indent="0" marL="0">
+              <a:buNone/>
+            </a:pPr>
+            <a:r>
+              <a:rPr lang="en-US" sz="1050" b="1" dirty="0">
+                <a:solidFill>
+                  <a:srgbClr val="0F1B2D"/>
+                </a:solidFill>
+                <a:latin typeface="Calibri" pitchFamily="34" charset="0"/>
+                <a:ea typeface="Calibri" pitchFamily="34" charset="-122"/>
+                <a:cs typeface="Calibri" pitchFamily="34" charset="-120"/>
+              </a:rPr>
+              <a:t>Interactive 8-Tab Command Center</a:t>
+            </a:r>
+            <a:endParaRPr lang="en-US" sz="1050" dirty="0"/>
+          </a:p>
+        </p:txBody>
+      </p:sp>
+      <p:sp>
+        <p:nvSpPr>
+          <p:cNvPr id="31" name="Text 28"/>
+          <p:cNvSpPr txBox="1"/>
+          <p:nvPr/>
+        </p:nvSpPr>
+        <p:spPr>
+          <a:xfrm>
+            <a:off x="3578276" y="3198114"/>
+            <a:ext cx="2343836" cy="372618"/>
+          </a:xfrm>
+          <a:prstGeom prst="rect">
+            <a:avLst/>
+          </a:prstGeom>
+          <a:noFill/>
+          <a:ln/>
+        </p:spPr>
+        <p:txBody>
+          <a:bodyPr wrap="square" lIns="0" tIns="0" rIns="0" bIns="0" rtlCol="0" anchor="t"/>
+          <a:lstStyle/>
+          <a:p>
+            <a:pPr indent="0" marL="0">
+              <a:buNone/>
+            </a:pPr>
+            <a:r>
+              <a:rPr lang="en-US" sz="830" dirty="0">
+                <a:solidFill>
+                  <a:srgbClr val="6B7684"/>
+                </a:solidFill>
+                <a:latin typeface="Calibri" pitchFamily="34" charset="0"/>
+                <a:ea typeface="Calibri" pitchFamily="34" charset="-122"/>
+                <a:cs typeface="Calibri" pitchFamily="34" charset="-120"/>
+              </a:rPr>
+              <a:t>Dedicated operational workspace for every hazard type</a:t>
+            </a:r>
+            <a:endParaRPr lang="en-US" sz="830" dirty="0"/>
+          </a:p>
+        </p:txBody>
+      </p:sp>
+      <p:sp>
+        <p:nvSpPr>
+          <p:cNvPr id="32" name="Shape 29"/>
+          <p:cNvSpPr/>
+          <p:nvPr/>
+        </p:nvSpPr>
+        <p:spPr>
+          <a:xfrm>
+            <a:off x="6159856" y="2740914"/>
+            <a:ext cx="2563292" cy="41148"/>
+          </a:xfrm>
+          <a:prstGeom prst="rect">
+            <a:avLst/>
+          </a:prstGeom>
+          <a:solidFill>
+            <a:srgbClr val="E8722C"/>
+          </a:solidFill>
+          <a:ln/>
+        </p:spPr>
+      </p:sp>
+      <p:sp>
+        <p:nvSpPr>
+          <p:cNvPr id="33" name="Shape 30"/>
+          <p:cNvSpPr/>
+          <p:nvPr/>
+        </p:nvSpPr>
+        <p:spPr>
+          <a:xfrm>
+            <a:off x="6159856" y="2782062"/>
+            <a:ext cx="2563292" cy="880110"/>
+          </a:xfrm>
+          <a:prstGeom prst="rect">
+            <a:avLst/>
+          </a:prstGeom>
+          <a:solidFill>
+            <a:srgbClr val="FFFFFF"/>
+          </a:solidFill>
+          <a:ln/>
+        </p:spPr>
+      </p:sp>
+      <p:sp>
+        <p:nvSpPr>
+          <p:cNvPr id="34" name="Text 31"/>
+          <p:cNvSpPr txBox="1"/>
+          <p:nvPr/>
+        </p:nvSpPr>
+        <p:spPr>
+          <a:xfrm>
+            <a:off x="6269584" y="2859786"/>
+            <a:ext cx="2343836" cy="365760"/>
+          </a:xfrm>
+          <a:prstGeom prst="rect">
+            <a:avLst/>
+          </a:prstGeom>
+          <a:noFill/>
+          <a:ln/>
+        </p:spPr>
+        <p:txBody>
+          <a:bodyPr wrap="square" lIns="0" tIns="0" rIns="0" bIns="0" rtlCol="0" anchor="t"/>
+          <a:lstStyle/>
+          <a:p>
+            <a:pPr indent="0" marL="0">
+              <a:buNone/>
+            </a:pPr>
+            <a:r>
+              <a:rPr lang="en-US" sz="1050" b="1" dirty="0">
+                <a:solidFill>
+                  <a:srgbClr val="0F1B2D"/>
+                </a:solidFill>
+                <a:latin typeface="Calibri" pitchFamily="34" charset="0"/>
+                <a:ea typeface="Calibri" pitchFamily="34" charset="-122"/>
+                <a:cs typeface="Calibri" pitchFamily="34" charset="-120"/>
+              </a:rPr>
+              <a:t>Source of Truth (Data Lineage)</a:t>
+            </a:r>
+            <a:endParaRPr lang="en-US" sz="1050" dirty="0"/>
+          </a:p>
+        </p:txBody>
+      </p:sp>
+      <p:sp>
+        <p:nvSpPr>
+          <p:cNvPr id="35" name="Text 32"/>
+          <p:cNvSpPr txBox="1"/>
+          <p:nvPr/>
+        </p:nvSpPr>
+        <p:spPr>
+          <a:xfrm>
+            <a:off x="6269584" y="3198114"/>
+            <a:ext cx="2343836" cy="372618"/>
+          </a:xfrm>
+          <a:prstGeom prst="rect">
+            <a:avLst/>
+          </a:prstGeom>
+          <a:noFill/>
+          <a:ln/>
+        </p:spPr>
+        <p:txBody>
+          <a:bodyPr wrap="square" lIns="0" tIns="0" rIns="0" bIns="0" rtlCol="0" anchor="t"/>
+          <a:lstStyle/>
+          <a:p>
+            <a:pPr indent="0" marL="0">
+              <a:buNone/>
+            </a:pPr>
+            <a:r>
+              <a:rPr lang="en-US" sz="830" dirty="0">
+                <a:solidFill>
+                  <a:srgbClr val="6B7684"/>
+                </a:solidFill>
+                <a:latin typeface="Calibri" pitchFamily="34" charset="0"/>
+                <a:ea typeface="Calibri" pitchFamily="34" charset="-122"/>
+                <a:cs typeface="Calibri" pitchFamily="34" charset="-120"/>
+              </a:rPr>
+              <a:t>4-layer lineage — raw → validated → enriched → stored — every AI output logged</a:t>
+            </a:r>
+            <a:endParaRPr lang="en-US" sz="830" dirty="0"/>
+          </a:p>
+        </p:txBody>
+      </p:sp>
+      <p:sp>
+        <p:nvSpPr>
+          <p:cNvPr id="36" name="Shape 33"/>
+          <p:cNvSpPr/>
+          <p:nvPr/>
+        </p:nvSpPr>
+        <p:spPr>
+          <a:xfrm>
+            <a:off x="8851163" y="2740914"/>
+            <a:ext cx="2563292" cy="41148"/>
+          </a:xfrm>
+          <a:prstGeom prst="rect">
+            <a:avLst/>
+          </a:prstGeom>
+          <a:solidFill>
+            <a:srgbClr val="E8722C"/>
+          </a:solidFill>
+          <a:ln/>
+        </p:spPr>
+      </p:sp>
+      <p:sp>
+        <p:nvSpPr>
+          <p:cNvPr id="37" name="Shape 34"/>
+          <p:cNvSpPr/>
+          <p:nvPr/>
+        </p:nvSpPr>
+        <p:spPr>
+          <a:xfrm>
+            <a:off x="8851163" y="2782062"/>
+            <a:ext cx="2563292" cy="880110"/>
+          </a:xfrm>
+          <a:prstGeom prst="rect">
+            <a:avLst/>
+          </a:prstGeom>
+          <a:solidFill>
+            <a:srgbClr val="FFFFFF"/>
+          </a:solidFill>
+          <a:ln/>
+        </p:spPr>
+      </p:sp>
+      <p:sp>
+        <p:nvSpPr>
+          <p:cNvPr id="38" name="Text 35"/>
+          <p:cNvSpPr txBox="1"/>
+          <p:nvPr/>
+        </p:nvSpPr>
+        <p:spPr>
+          <a:xfrm>
+            <a:off x="8960891" y="2859786"/>
+            <a:ext cx="2343836" cy="365760"/>
+          </a:xfrm>
+          <a:prstGeom prst="rect">
+            <a:avLst/>
+          </a:prstGeom>
+          <a:noFill/>
+          <a:ln/>
+        </p:spPr>
+        <p:txBody>
+          <a:bodyPr wrap="square" lIns="0" tIns="0" rIns="0" bIns="0" rtlCol="0" anchor="t"/>
+          <a:lstStyle/>
+          <a:p>
+            <a:pPr indent="0" marL="0">
+              <a:buNone/>
+            </a:pPr>
+            <a:r>
+              <a:rPr lang="en-US" sz="1050" b="1" dirty="0">
+                <a:solidFill>
+                  <a:srgbClr val="0F1B2D"/>
+                </a:solidFill>
+                <a:latin typeface="Calibri" pitchFamily="34" charset="0"/>
+                <a:ea typeface="Calibri" pitchFamily="34" charset="-122"/>
+                <a:cs typeface="Calibri" pitchFamily="34" charset="-120"/>
+              </a:rPr>
+              <a:t>Cascade &amp; Resource Optimizer</a:t>
+            </a:r>
+            <a:endParaRPr lang="en-US" sz="1050" dirty="0"/>
+          </a:p>
+        </p:txBody>
+      </p:sp>
+      <p:sp>
+        <p:nvSpPr>
+          <p:cNvPr id="39" name="Text 36"/>
+          <p:cNvSpPr txBox="1"/>
+          <p:nvPr/>
+        </p:nvSpPr>
+        <p:spPr>
+          <a:xfrm>
+            <a:off x="8960891" y="3198114"/>
+            <a:ext cx="2343836" cy="372618"/>
+          </a:xfrm>
+          <a:prstGeom prst="rect">
+            <a:avLst/>
+          </a:prstGeom>
+          <a:noFill/>
+          <a:ln/>
+        </p:spPr>
+        <p:txBody>
+          <a:bodyPr wrap="square" lIns="0" tIns="0" rIns="0" bIns="0" rtlCol="0" anchor="t"/>
+          <a:lstStyle/>
+          <a:p>
+            <a:pPr indent="0" marL="0">
+              <a:buNone/>
+            </a:pPr>
+            <a:r>
+              <a:rPr lang="en-US" sz="830" dirty="0">
+                <a:solidFill>
+                  <a:srgbClr val="6B7684"/>
+                </a:solidFill>
+                <a:latin typeface="Calibri" pitchFamily="34" charset="0"/>
+                <a:ea typeface="Calibri" pitchFamily="34" charset="-122"/>
+                <a:cs typeface="Calibri" pitchFamily="34" charset="-120"/>
+              </a:rPr>
+              <a:t>Deterministic Hamilton-apportionment allocation — no AI guesswork or rounding drift</a:t>
+            </a:r>
+            <a:endParaRPr lang="en-US" sz="830" dirty="0"/>
+          </a:p>
+        </p:txBody>
+      </p:sp>
+      <p:sp>
+        <p:nvSpPr>
+          <p:cNvPr id="40" name="Shape 37"/>
+          <p:cNvSpPr/>
+          <p:nvPr/>
+        </p:nvSpPr>
+        <p:spPr>
+          <a:xfrm>
+            <a:off x="777240" y="3790188"/>
+            <a:ext cx="2563292" cy="41148"/>
+          </a:xfrm>
+          <a:prstGeom prst="rect">
+            <a:avLst/>
+          </a:prstGeom>
+          <a:solidFill>
+            <a:srgbClr val="E8722C"/>
+          </a:solidFill>
+          <a:ln/>
+        </p:spPr>
+      </p:sp>
+      <p:sp>
+        <p:nvSpPr>
+          <p:cNvPr id="41" name="Shape 38"/>
+          <p:cNvSpPr/>
+          <p:nvPr/>
+        </p:nvSpPr>
+        <p:spPr>
+          <a:xfrm>
+            <a:off x="777240" y="3831336"/>
+            <a:ext cx="2563292" cy="880110"/>
+          </a:xfrm>
+          <a:prstGeom prst="rect">
+            <a:avLst/>
+          </a:prstGeom>
+          <a:solidFill>
+            <a:srgbClr val="FFFFFF"/>
+          </a:solidFill>
+          <a:ln/>
+        </p:spPr>
+      </p:sp>
+      <p:sp>
+        <p:nvSpPr>
+          <p:cNvPr id="42" name="Text 39"/>
+          <p:cNvSpPr txBox="1"/>
+          <p:nvPr/>
+        </p:nvSpPr>
+        <p:spPr>
+          <a:xfrm>
+            <a:off x="886968" y="3909060"/>
+            <a:ext cx="2343836" cy="365760"/>
+          </a:xfrm>
+          <a:prstGeom prst="rect">
+            <a:avLst/>
+          </a:prstGeom>
+          <a:noFill/>
+          <a:ln/>
+        </p:spPr>
+        <p:txBody>
+          <a:bodyPr wrap="square" lIns="0" tIns="0" rIns="0" bIns="0" rtlCol="0" anchor="t"/>
+          <a:lstStyle/>
+          <a:p>
+            <a:pPr indent="0" marL="0">
+              <a:buNone/>
+            </a:pPr>
+            <a:r>
+              <a:rPr lang="en-US" sz="1050" b="1" dirty="0">
+                <a:solidFill>
+                  <a:srgbClr val="0F1B2D"/>
+                </a:solidFill>
+                <a:latin typeface="Calibri" pitchFamily="34" charset="0"/>
+                <a:ea typeface="Calibri" pitchFamily="34" charset="-122"/>
+                <a:cs typeface="Calibri" pitchFamily="34" charset="-120"/>
+              </a:rPr>
+              <a:t>Impact Scoring</a:t>
+            </a:r>
+            <a:endParaRPr lang="en-US" sz="1050" dirty="0"/>
+          </a:p>
+        </p:txBody>
+      </p:sp>
+      <p:sp>
+        <p:nvSpPr>
+          <p:cNvPr id="43" name="Text 40"/>
+          <p:cNvSpPr txBox="1"/>
+          <p:nvPr/>
+        </p:nvSpPr>
+        <p:spPr>
+          <a:xfrm>
+            <a:off x="886968" y="4247388"/>
+            <a:ext cx="2343836" cy="372618"/>
+          </a:xfrm>
+          <a:prstGeom prst="rect">
+            <a:avLst/>
+          </a:prstGeom>
+          <a:noFill/>
+          <a:ln/>
+        </p:spPr>
+        <p:txBody>
+          <a:bodyPr wrap="square" lIns="0" tIns="0" rIns="0" bIns="0" rtlCol="0" anchor="t"/>
+          <a:lstStyle/>
+          <a:p>
+            <a:pPr indent="0" marL="0">
+              <a:buNone/>
+            </a:pPr>
+            <a:r>
+              <a:rPr lang="en-US" sz="830" dirty="0">
+                <a:solidFill>
+                  <a:srgbClr val="6B7684"/>
+                </a:solidFill>
+                <a:latin typeface="Calibri" pitchFamily="34" charset="0"/>
+                <a:ea typeface="Calibri" pitchFamily="34" charset="-122"/>
+                <a:cs typeface="Calibri" pitchFamily="34" charset="-120"/>
+              </a:rPr>
+              <a:t>Hazard + Exposure + Vulnerability, quantified 0–100</a:t>
+            </a:r>
+            <a:endParaRPr lang="en-US" sz="830" dirty="0"/>
+          </a:p>
+        </p:txBody>
+      </p:sp>
+      <p:sp>
+        <p:nvSpPr>
+          <p:cNvPr id="44" name="Shape 41"/>
+          <p:cNvSpPr/>
+          <p:nvPr/>
+        </p:nvSpPr>
+        <p:spPr>
+          <a:xfrm>
+            <a:off x="3468548" y="3790188"/>
+            <a:ext cx="2563292" cy="41148"/>
+          </a:xfrm>
+          <a:prstGeom prst="rect">
+            <a:avLst/>
+          </a:prstGeom>
+          <a:solidFill>
+            <a:srgbClr val="E8722C"/>
+          </a:solidFill>
+          <a:ln/>
+        </p:spPr>
+      </p:sp>
+      <p:sp>
+        <p:nvSpPr>
+          <p:cNvPr id="45" name="Shape 42"/>
+          <p:cNvSpPr/>
+          <p:nvPr/>
+        </p:nvSpPr>
+        <p:spPr>
+          <a:xfrm>
+            <a:off x="3468548" y="3831336"/>
+            <a:ext cx="2563292" cy="880110"/>
+          </a:xfrm>
+          <a:prstGeom prst="rect">
+            <a:avLst/>
+          </a:prstGeom>
+          <a:solidFill>
+            <a:srgbClr val="FFFFFF"/>
+          </a:solidFill>
+          <a:ln/>
+        </p:spPr>
+      </p:sp>
+      <p:sp>
+        <p:nvSpPr>
+          <p:cNvPr id="46" name="Text 43"/>
+          <p:cNvSpPr txBox="1"/>
+          <p:nvPr/>
+        </p:nvSpPr>
+        <p:spPr>
+          <a:xfrm>
+            <a:off x="3578276" y="3909060"/>
+            <a:ext cx="2343836" cy="365760"/>
+          </a:xfrm>
+          <a:prstGeom prst="rect">
+            <a:avLst/>
+          </a:prstGeom>
+          <a:noFill/>
+          <a:ln/>
+        </p:spPr>
+        <p:txBody>
+          <a:bodyPr wrap="square" lIns="0" tIns="0" rIns="0" bIns="0" rtlCol="0" anchor="t"/>
+          <a:lstStyle/>
+          <a:p>
+            <a:pPr indent="0" marL="0">
+              <a:buNone/>
+            </a:pPr>
+            <a:r>
+              <a:rPr lang="en-US" sz="1050" b="1" dirty="0">
+                <a:solidFill>
+                  <a:srgbClr val="0F1B2D"/>
+                </a:solidFill>
+                <a:latin typeface="Calibri" pitchFamily="34" charset="0"/>
+                <a:ea typeface="Calibri" pitchFamily="34" charset="-122"/>
+                <a:cs typeface="Calibri" pitchFamily="34" charset="-120"/>
+              </a:rPr>
+              <a:t>Evacuation Route Finding</a:t>
+            </a:r>
+            <a:endParaRPr lang="en-US" sz="1050" dirty="0"/>
+          </a:p>
+        </p:txBody>
+      </p:sp>
+      <p:sp>
+        <p:nvSpPr>
+          <p:cNvPr id="47" name="Text 44"/>
+          <p:cNvSpPr txBox="1"/>
+          <p:nvPr/>
+        </p:nvSpPr>
+        <p:spPr>
+          <a:xfrm>
+            <a:off x="3578276" y="4247388"/>
+            <a:ext cx="2343836" cy="372618"/>
+          </a:xfrm>
+          <a:prstGeom prst="rect">
+            <a:avLst/>
+          </a:prstGeom>
+          <a:noFill/>
+          <a:ln/>
+        </p:spPr>
+        <p:txBody>
+          <a:bodyPr wrap="square" lIns="0" tIns="0" rIns="0" bIns="0" rtlCol="0" anchor="t"/>
+          <a:lstStyle/>
+          <a:p>
+            <a:pPr indent="0" marL="0">
+              <a:buNone/>
+            </a:pPr>
+            <a:r>
+              <a:rPr lang="en-US" sz="830" dirty="0">
+                <a:solidFill>
+                  <a:srgbClr val="6B7684"/>
+                </a:solidFill>
+                <a:latin typeface="Calibri" pitchFamily="34" charset="0"/>
+                <a:ea typeface="Calibri" pitchFamily="34" charset="-122"/>
+                <a:cs typeface="Calibri" pitchFamily="34" charset="-120"/>
+              </a:rPr>
+              <a:t>OSRM road-network pathfinding, with automatic geodesic fallback</a:t>
+            </a:r>
+            <a:endParaRPr lang="en-US" sz="830" dirty="0"/>
+          </a:p>
+        </p:txBody>
+      </p:sp>
+      <p:sp>
+        <p:nvSpPr>
+          <p:cNvPr id="48" name="Shape 45"/>
+          <p:cNvSpPr/>
+          <p:nvPr/>
+        </p:nvSpPr>
+        <p:spPr>
+          <a:xfrm>
+            <a:off x="6159856" y="3790188"/>
+            <a:ext cx="2563292" cy="41148"/>
+          </a:xfrm>
+          <a:prstGeom prst="rect">
+            <a:avLst/>
+          </a:prstGeom>
+          <a:solidFill>
+            <a:srgbClr val="E8722C"/>
+          </a:solidFill>
+          <a:ln/>
+        </p:spPr>
+      </p:sp>
+      <p:sp>
+        <p:nvSpPr>
+          <p:cNvPr id="49" name="Shape 46"/>
+          <p:cNvSpPr/>
+          <p:nvPr/>
+        </p:nvSpPr>
+        <p:spPr>
+          <a:xfrm>
+            <a:off x="6159856" y="3831336"/>
+            <a:ext cx="2563292" cy="880110"/>
+          </a:xfrm>
+          <a:prstGeom prst="rect">
+            <a:avLst/>
+          </a:prstGeom>
+          <a:solidFill>
+            <a:srgbClr val="FFFFFF"/>
+          </a:solidFill>
+          <a:ln/>
+        </p:spPr>
+      </p:sp>
+      <p:sp>
+        <p:nvSpPr>
+          <p:cNvPr id="50" name="Text 47"/>
+          <p:cNvSpPr txBox="1"/>
+          <p:nvPr/>
+        </p:nvSpPr>
+        <p:spPr>
+          <a:xfrm>
+            <a:off x="6269584" y="3909060"/>
+            <a:ext cx="2343836" cy="365760"/>
+          </a:xfrm>
+          <a:prstGeom prst="rect">
+            <a:avLst/>
+          </a:prstGeom>
+          <a:noFill/>
+          <a:ln/>
+        </p:spPr>
+        <p:txBody>
+          <a:bodyPr wrap="square" lIns="0" tIns="0" rIns="0" bIns="0" rtlCol="0" anchor="t"/>
+          <a:lstStyle/>
+          <a:p>
+            <a:pPr indent="0" marL="0">
+              <a:buNone/>
+            </a:pPr>
+            <a:r>
+              <a:rPr lang="en-US" sz="1050" b="1" dirty="0">
+                <a:solidFill>
+                  <a:srgbClr val="0F1B2D"/>
+                </a:solidFill>
+                <a:latin typeface="Calibri" pitchFamily="34" charset="0"/>
+                <a:ea typeface="Calibri" pitchFamily="34" charset="-122"/>
+                <a:cs typeface="Calibri" pitchFamily="34" charset="-120"/>
+              </a:rPr>
+              <a:t>Phased Response Timeline</a:t>
+            </a:r>
+            <a:endParaRPr lang="en-US" sz="1050" dirty="0"/>
+          </a:p>
+        </p:txBody>
+      </p:sp>
+      <p:sp>
+        <p:nvSpPr>
+          <p:cNvPr id="51" name="Text 48"/>
+          <p:cNvSpPr txBox="1"/>
+          <p:nvPr/>
+        </p:nvSpPr>
+        <p:spPr>
+          <a:xfrm>
+            <a:off x="6269584" y="4247388"/>
+            <a:ext cx="2343836" cy="372618"/>
+          </a:xfrm>
+          <a:prstGeom prst="rect">
+            <a:avLst/>
+          </a:prstGeom>
+          <a:noFill/>
+          <a:ln/>
+        </p:spPr>
+        <p:txBody>
+          <a:bodyPr wrap="square" lIns="0" tIns="0" rIns="0" bIns="0" rtlCol="0" anchor="t"/>
+          <a:lstStyle/>
+          <a:p>
+            <a:pPr indent="0" marL="0">
+              <a:buNone/>
+            </a:pPr>
+            <a:r>
+              <a:rPr lang="en-US" sz="830" dirty="0">
+                <a:solidFill>
+                  <a:srgbClr val="6B7684"/>
+                </a:solidFill>
+                <a:latin typeface="Calibri" pitchFamily="34" charset="0"/>
+                <a:ea typeface="Calibri" pitchFamily="34" charset="-122"/>
+                <a:cs typeface="Calibri" pitchFamily="34" charset="-120"/>
+              </a:rPr>
+              <a:t>Triage buckets — Immediate (0–2h), Urgent (2–6h), Sustained (6–12h)</a:t>
+            </a:r>
+            <a:endParaRPr lang="en-US" sz="830" dirty="0"/>
+          </a:p>
+        </p:txBody>
+      </p:sp>
+      <p:sp>
+        <p:nvSpPr>
+          <p:cNvPr id="52" name="Shape 49"/>
+          <p:cNvSpPr/>
+          <p:nvPr/>
+        </p:nvSpPr>
+        <p:spPr>
+          <a:xfrm>
+            <a:off x="8851163" y="3790188"/>
+            <a:ext cx="2563292" cy="41148"/>
+          </a:xfrm>
+          <a:prstGeom prst="rect">
+            <a:avLst/>
+          </a:prstGeom>
+          <a:solidFill>
+            <a:srgbClr val="E8722C"/>
+          </a:solidFill>
+          <a:ln/>
+        </p:spPr>
+      </p:sp>
+      <p:sp>
+        <p:nvSpPr>
+          <p:cNvPr id="53" name="Shape 50"/>
+          <p:cNvSpPr/>
+          <p:nvPr/>
+        </p:nvSpPr>
+        <p:spPr>
+          <a:xfrm>
+            <a:off x="8851163" y="3831336"/>
+            <a:ext cx="2563292" cy="880110"/>
+          </a:xfrm>
+          <a:prstGeom prst="rect">
+            <a:avLst/>
+          </a:prstGeom>
+          <a:solidFill>
+            <a:srgbClr val="FFFFFF"/>
+          </a:solidFill>
+          <a:ln/>
+        </p:spPr>
+      </p:sp>
+      <p:sp>
+        <p:nvSpPr>
+          <p:cNvPr id="54" name="Text 51"/>
+          <p:cNvSpPr txBox="1"/>
+          <p:nvPr/>
+        </p:nvSpPr>
+        <p:spPr>
+          <a:xfrm>
+            <a:off x="8960891" y="3909060"/>
+            <a:ext cx="2343836" cy="365760"/>
+          </a:xfrm>
+          <a:prstGeom prst="rect">
+            <a:avLst/>
+          </a:prstGeom>
+          <a:noFill/>
+          <a:ln/>
+        </p:spPr>
+        <p:txBody>
+          <a:bodyPr wrap="square" lIns="0" tIns="0" rIns="0" bIns="0" rtlCol="0" anchor="t"/>
+          <a:lstStyle/>
+          <a:p>
+            <a:pPr indent="0" marL="0">
+              <a:buNone/>
+            </a:pPr>
+            <a:r>
+              <a:rPr lang="en-US" sz="1050" b="1" dirty="0">
+                <a:solidFill>
+                  <a:srgbClr val="0F1B2D"/>
+                </a:solidFill>
+                <a:latin typeface="Calibri" pitchFamily="34" charset="0"/>
+                <a:ea typeface="Calibri" pitchFamily="34" charset="-122"/>
+                <a:cs typeface="Calibri" pitchFamily="34" charset="-120"/>
+              </a:rPr>
+              <a:t>Causal Chain Explanation</a:t>
+            </a:r>
+            <a:endParaRPr lang="en-US" sz="1050" dirty="0"/>
+          </a:p>
+        </p:txBody>
+      </p:sp>
+      <p:sp>
+        <p:nvSpPr>
+          <p:cNvPr id="55" name="Text 52"/>
+          <p:cNvSpPr txBox="1"/>
+          <p:nvPr/>
+        </p:nvSpPr>
+        <p:spPr>
+          <a:xfrm>
+            <a:off x="8960891" y="4247388"/>
+            <a:ext cx="2343836" cy="372618"/>
+          </a:xfrm>
+          <a:prstGeom prst="rect">
+            <a:avLst/>
+          </a:prstGeom>
+          <a:noFill/>
+          <a:ln/>
+        </p:spPr>
+        <p:txBody>
+          <a:bodyPr wrap="square" lIns="0" tIns="0" rIns="0" bIns="0" rtlCol="0" anchor="t"/>
+          <a:lstStyle/>
+          <a:p>
+            <a:pPr indent="0" marL="0">
+              <a:buNone/>
+            </a:pPr>
+            <a:r>
+              <a:rPr lang="en-US" sz="830" dirty="0">
+                <a:solidFill>
+                  <a:srgbClr val="6B7684"/>
+                </a:solidFill>
+                <a:latin typeface="Calibri" pitchFamily="34" charset="0"/>
+                <a:ea typeface="Calibri" pitchFamily="34" charset="-122"/>
+                <a:cs typeface="Calibri" pitchFamily="34" charset="-120"/>
+              </a:rPr>
+              <a:t>Visual flowchart — Trigger → Infrastructure → Result → Precedent</a:t>
+            </a:r>
+            <a:endParaRPr lang="en-US" sz="830" dirty="0"/>
+          </a:p>
+        </p:txBody>
+      </p:sp>
+      <p:sp>
+        <p:nvSpPr>
+          <p:cNvPr id="56" name="Shape 53"/>
+          <p:cNvSpPr/>
+          <p:nvPr/>
+        </p:nvSpPr>
+        <p:spPr>
+          <a:xfrm>
+            <a:off x="777240" y="4839462"/>
+            <a:ext cx="2563292" cy="41148"/>
+          </a:xfrm>
+          <a:prstGeom prst="rect">
+            <a:avLst/>
+          </a:prstGeom>
+          <a:solidFill>
+            <a:srgbClr val="5B6472"/>
+          </a:solidFill>
+          <a:ln/>
+        </p:spPr>
+      </p:sp>
+      <p:sp>
+        <p:nvSpPr>
+          <p:cNvPr id="57" name="Shape 54"/>
+          <p:cNvSpPr/>
+          <p:nvPr/>
+        </p:nvSpPr>
+        <p:spPr>
+          <a:xfrm>
+            <a:off x="777240" y="4880610"/>
+            <a:ext cx="2563292" cy="880110"/>
+          </a:xfrm>
+          <a:prstGeom prst="rect">
+            <a:avLst/>
+          </a:prstGeom>
+          <a:solidFill>
+            <a:srgbClr val="FFFFFF"/>
+          </a:solidFill>
+          <a:ln/>
+        </p:spPr>
+      </p:sp>
+      <p:sp>
+        <p:nvSpPr>
+          <p:cNvPr id="58" name="Text 55"/>
+          <p:cNvSpPr txBox="1"/>
+          <p:nvPr/>
+        </p:nvSpPr>
+        <p:spPr>
+          <a:xfrm>
+            <a:off x="886968" y="4958334"/>
+            <a:ext cx="2343836" cy="365760"/>
+          </a:xfrm>
+          <a:prstGeom prst="rect">
+            <a:avLst/>
+          </a:prstGeom>
+          <a:noFill/>
+          <a:ln/>
+        </p:spPr>
+        <p:txBody>
+          <a:bodyPr wrap="square" lIns="0" tIns="0" rIns="0" bIns="0" rtlCol="0" anchor="t"/>
+          <a:lstStyle/>
+          <a:p>
+            <a:pPr indent="0" marL="0">
+              <a:buNone/>
+            </a:pPr>
+            <a:r>
+              <a:rPr lang="en-US" sz="1050" b="1" dirty="0">
+                <a:solidFill>
+                  <a:srgbClr val="0F1B2D"/>
+                </a:solidFill>
+                <a:latin typeface="Calibri" pitchFamily="34" charset="0"/>
+                <a:ea typeface="Calibri" pitchFamily="34" charset="-122"/>
+                <a:cs typeface="Calibri" pitchFamily="34" charset="-120"/>
+              </a:rPr>
+              <a:t>Country-Aware Sovereign Routing</a:t>
+            </a:r>
+            <a:endParaRPr lang="en-US" sz="1050" dirty="0"/>
+          </a:p>
+        </p:txBody>
+      </p:sp>
+      <p:sp>
+        <p:nvSpPr>
+          <p:cNvPr id="59" name="Text 56"/>
+          <p:cNvSpPr txBox="1"/>
+          <p:nvPr/>
+        </p:nvSpPr>
+        <p:spPr>
+          <a:xfrm>
+            <a:off x="886968" y="5296662"/>
+            <a:ext cx="2343836" cy="372618"/>
+          </a:xfrm>
+          <a:prstGeom prst="rect">
+            <a:avLst/>
+          </a:prstGeom>
+          <a:noFill/>
+          <a:ln/>
+        </p:spPr>
+        <p:txBody>
+          <a:bodyPr wrap="square" lIns="0" tIns="0" rIns="0" bIns="0" rtlCol="0" anchor="t"/>
+          <a:lstStyle/>
+          <a:p>
+            <a:pPr indent="0" marL="0">
+              <a:buNone/>
+            </a:pPr>
+            <a:r>
+              <a:rPr lang="en-US" sz="830" dirty="0">
+                <a:solidFill>
+                  <a:srgbClr val="6B7684"/>
+                </a:solidFill>
+                <a:latin typeface="Calibri" pitchFamily="34" charset="0"/>
+                <a:ea typeface="Calibri" pitchFamily="34" charset="-122"/>
+                <a:cs typeface="Calibri" pitchFamily="34" charset="-120"/>
+              </a:rPr>
+              <a:t>IMD-first for India; global fallback active for other countries</a:t>
+            </a:r>
+            <a:endParaRPr lang="en-US" sz="830" dirty="0"/>
+          </a:p>
+        </p:txBody>
+      </p:sp>
+      <p:sp>
+        <p:nvSpPr>
+          <p:cNvPr id="60" name="Shape 57"/>
+          <p:cNvSpPr/>
+          <p:nvPr/>
+        </p:nvSpPr>
+        <p:spPr>
+          <a:xfrm>
+            <a:off x="3468548" y="4839462"/>
+            <a:ext cx="2563292" cy="41148"/>
+          </a:xfrm>
+          <a:prstGeom prst="rect">
+            <a:avLst/>
+          </a:prstGeom>
+          <a:solidFill>
+            <a:srgbClr val="E8722C"/>
+          </a:solidFill>
+          <a:ln/>
+        </p:spPr>
+      </p:sp>
+      <p:sp>
+        <p:nvSpPr>
+          <p:cNvPr id="61" name="Shape 58"/>
+          <p:cNvSpPr/>
+          <p:nvPr/>
+        </p:nvSpPr>
+        <p:spPr>
+          <a:xfrm>
+            <a:off x="3468548" y="4880610"/>
+            <a:ext cx="2563292" cy="880110"/>
+          </a:xfrm>
+          <a:prstGeom prst="rect">
+            <a:avLst/>
+          </a:prstGeom>
+          <a:solidFill>
+            <a:srgbClr val="FFFFFF"/>
+          </a:solidFill>
+          <a:ln/>
+        </p:spPr>
+      </p:sp>
+      <p:sp>
+        <p:nvSpPr>
+          <p:cNvPr id="62" name="Text 59"/>
+          <p:cNvSpPr txBox="1"/>
+          <p:nvPr/>
+        </p:nvSpPr>
+        <p:spPr>
+          <a:xfrm>
+            <a:off x="3578276" y="4958334"/>
+            <a:ext cx="2343836" cy="365760"/>
+          </a:xfrm>
+          <a:prstGeom prst="rect">
+            <a:avLst/>
+          </a:prstGeom>
+          <a:noFill/>
+          <a:ln/>
+        </p:spPr>
+        <p:txBody>
+          <a:bodyPr wrap="square" lIns="0" tIns="0" rIns="0" bIns="0" rtlCol="0" anchor="t"/>
+          <a:lstStyle/>
+          <a:p>
+            <a:pPr indent="0" marL="0">
+              <a:buNone/>
+            </a:pPr>
+            <a:r>
+              <a:rPr lang="en-US" sz="1050" b="1" dirty="0">
+                <a:solidFill>
+                  <a:srgbClr val="0F1B2D"/>
+                </a:solidFill>
+                <a:latin typeface="Calibri" pitchFamily="34" charset="0"/>
+                <a:ea typeface="Calibri" pitchFamily="34" charset="-122"/>
+                <a:cs typeface="Calibri" pitchFamily="34" charset="-120"/>
+              </a:rPr>
+              <a:t>Satellite Image Cross-Validation</a:t>
+            </a:r>
+            <a:endParaRPr lang="en-US" sz="1050" dirty="0"/>
+          </a:p>
+        </p:txBody>
+      </p:sp>
+      <p:sp>
+        <p:nvSpPr>
+          <p:cNvPr id="63" name="Text 60"/>
+          <p:cNvSpPr txBox="1"/>
+          <p:nvPr/>
+        </p:nvSpPr>
+        <p:spPr>
+          <a:xfrm>
+            <a:off x="3578276" y="5296662"/>
+            <a:ext cx="2343836" cy="372618"/>
+          </a:xfrm>
+          <a:prstGeom prst="rect">
+            <a:avLst/>
+          </a:prstGeom>
+          <a:noFill/>
+          <a:ln/>
+        </p:spPr>
+        <p:txBody>
+          <a:bodyPr wrap="square" lIns="0" tIns="0" rIns="0" bIns="0" rtlCol="0" anchor="t"/>
+          <a:lstStyle/>
+          <a:p>
+            <a:pPr indent="0" marL="0">
+              <a:buNone/>
+            </a:pPr>
+            <a:r>
+              <a:rPr lang="en-US" sz="830" dirty="0">
+                <a:solidFill>
+                  <a:srgbClr val="6B7684"/>
+                </a:solidFill>
+                <a:latin typeface="Calibri" pitchFamily="34" charset="0"/>
+                <a:ea typeface="Calibri" pitchFamily="34" charset="-122"/>
+                <a:cs typeface="Calibri" pitchFamily="34" charset="-120"/>
+              </a:rPr>
+              <a:t>Gemini multimodal check of a real satellite image against the reported event</a:t>
+            </a:r>
+            <a:endParaRPr lang="en-US" sz="830" dirty="0"/>
+          </a:p>
+        </p:txBody>
+      </p:sp>
+      <p:sp>
+        <p:nvSpPr>
+          <p:cNvPr id="64" name="Shape 61"/>
+          <p:cNvSpPr/>
+          <p:nvPr/>
+        </p:nvSpPr>
+        <p:spPr>
+          <a:xfrm>
+            <a:off x="6159856" y="4839462"/>
+            <a:ext cx="2563292" cy="41148"/>
+          </a:xfrm>
+          <a:prstGeom prst="rect">
+            <a:avLst/>
+          </a:prstGeom>
+          <a:solidFill>
+            <a:srgbClr val="E8722C"/>
+          </a:solidFill>
+          <a:ln/>
+        </p:spPr>
+      </p:sp>
+      <p:sp>
+        <p:nvSpPr>
+          <p:cNvPr id="65" name="Shape 62"/>
+          <p:cNvSpPr/>
+          <p:nvPr/>
+        </p:nvSpPr>
+        <p:spPr>
+          <a:xfrm>
+            <a:off x="6159856" y="4880610"/>
+            <a:ext cx="2563292" cy="880110"/>
+          </a:xfrm>
+          <a:prstGeom prst="rect">
+            <a:avLst/>
+          </a:prstGeom>
+          <a:solidFill>
+            <a:srgbClr val="FFFFFF"/>
+          </a:solidFill>
+          <a:ln/>
+        </p:spPr>
+      </p:sp>
+      <p:sp>
+        <p:nvSpPr>
+          <p:cNvPr id="66" name="Text 63"/>
+          <p:cNvSpPr txBox="1"/>
+          <p:nvPr/>
+        </p:nvSpPr>
+        <p:spPr>
+          <a:xfrm>
+            <a:off x="6269584" y="4958334"/>
+            <a:ext cx="2343836" cy="365760"/>
+          </a:xfrm>
+          <a:prstGeom prst="rect">
+            <a:avLst/>
+          </a:prstGeom>
+          <a:noFill/>
+          <a:ln/>
+        </p:spPr>
+        <p:txBody>
+          <a:bodyPr wrap="square" lIns="0" tIns="0" rIns="0" bIns="0" rtlCol="0" anchor="t"/>
+          <a:lstStyle/>
+          <a:p>
+            <a:pPr indent="0" marL="0">
+              <a:buNone/>
+            </a:pPr>
+            <a:r>
+              <a:rPr lang="en-US" sz="1050" b="1" dirty="0">
+                <a:solidFill>
+                  <a:srgbClr val="0F1B2D"/>
+                </a:solidFill>
+                <a:latin typeface="Calibri" pitchFamily="34" charset="0"/>
+                <a:ea typeface="Calibri" pitchFamily="34" charset="-122"/>
+                <a:cs typeface="Calibri" pitchFamily="34" charset="-120"/>
+              </a:rPr>
+              <a:t>Sentinel-1 SAR Flood Detection</a:t>
+            </a:r>
+            <a:endParaRPr lang="en-US" sz="1050" dirty="0"/>
+          </a:p>
+        </p:txBody>
+      </p:sp>
+      <p:sp>
+        <p:nvSpPr>
+          <p:cNvPr id="67" name="Text 64"/>
+          <p:cNvSpPr txBox="1"/>
+          <p:nvPr/>
+        </p:nvSpPr>
+        <p:spPr>
+          <a:xfrm>
+            <a:off x="6269584" y="5296662"/>
+            <a:ext cx="2343836" cy="372618"/>
+          </a:xfrm>
+          <a:prstGeom prst="rect">
+            <a:avLst/>
+          </a:prstGeom>
+          <a:noFill/>
+          <a:ln/>
+        </p:spPr>
+        <p:txBody>
+          <a:bodyPr wrap="square" lIns="0" tIns="0" rIns="0" bIns="0" rtlCol="0" anchor="t"/>
+          <a:lstStyle/>
+          <a:p>
+            <a:pPr indent="0" marL="0">
+              <a:buNone/>
+            </a:pPr>
+            <a:r>
+              <a:rPr lang="en-US" sz="830" dirty="0">
+                <a:solidFill>
+                  <a:srgbClr val="6B7684"/>
+                </a:solidFill>
+                <a:latin typeface="Calibri" pitchFamily="34" charset="0"/>
+                <a:ea typeface="Calibri" pitchFamily="34" charset="-122"/>
+                <a:cs typeface="Calibri" pitchFamily="34" charset="-120"/>
+              </a:rPr>
+              <a:t>Google Earth Engine port of the DeVries et al. (2020) SAR flood methodology</a:t>
+            </a:r>
+            <a:endParaRPr lang="en-US" sz="830" dirty="0"/>
+          </a:p>
+        </p:txBody>
+      </p:sp>
+      <p:sp>
+        <p:nvSpPr>
+          <p:cNvPr id="68" name="Shape 65"/>
+          <p:cNvSpPr/>
+          <p:nvPr/>
+        </p:nvSpPr>
+        <p:spPr>
+          <a:xfrm>
+            <a:off x="8851163" y="4839462"/>
+            <a:ext cx="2563292" cy="41148"/>
+          </a:xfrm>
+          <a:prstGeom prst="rect">
+            <a:avLst/>
+          </a:prstGeom>
+          <a:solidFill>
+            <a:srgbClr val="E8722C"/>
+          </a:solidFill>
+          <a:ln/>
+        </p:spPr>
+      </p:sp>
+      <p:sp>
+        <p:nvSpPr>
+          <p:cNvPr id="69" name="Shape 66"/>
+          <p:cNvSpPr/>
+          <p:nvPr/>
+        </p:nvSpPr>
+        <p:spPr>
+          <a:xfrm>
+            <a:off x="8851163" y="4880610"/>
+            <a:ext cx="2563292" cy="880110"/>
+          </a:xfrm>
+          <a:prstGeom prst="rect">
+            <a:avLst/>
+          </a:prstGeom>
+          <a:solidFill>
+            <a:srgbClr val="FFFFFF"/>
+          </a:solidFill>
+          <a:ln/>
+        </p:spPr>
+      </p:sp>
+      <p:sp>
+        <p:nvSpPr>
+          <p:cNvPr id="70" name="Text 67"/>
+          <p:cNvSpPr txBox="1"/>
+          <p:nvPr/>
+        </p:nvSpPr>
+        <p:spPr>
+          <a:xfrm>
+            <a:off x="8960891" y="4958334"/>
+            <a:ext cx="2343836" cy="365760"/>
+          </a:xfrm>
+          <a:prstGeom prst="rect">
+            <a:avLst/>
+          </a:prstGeom>
+          <a:noFill/>
+          <a:ln/>
+        </p:spPr>
+        <p:txBody>
+          <a:bodyPr wrap="square" lIns="0" tIns="0" rIns="0" bIns="0" rtlCol="0" anchor="t"/>
+          <a:lstStyle/>
+          <a:p>
+            <a:pPr indent="0" marL="0">
+              <a:buNone/>
+            </a:pPr>
+            <a:r>
+              <a:rPr lang="en-US" sz="1050" b="1" dirty="0">
+                <a:solidFill>
+                  <a:srgbClr val="0F1B2D"/>
+                </a:solidFill>
+                <a:latin typeface="Calibri" pitchFamily="34" charset="0"/>
+                <a:ea typeface="Calibri" pitchFamily="34" charset="-122"/>
+                <a:cs typeface="Calibri" pitchFamily="34" charset="-120"/>
+              </a:rPr>
+              <a:t>Multi-Language UI</a:t>
+            </a:r>
+            <a:endParaRPr lang="en-US" sz="1050" dirty="0"/>
+          </a:p>
+        </p:txBody>
+      </p:sp>
+      <p:sp>
+        <p:nvSpPr>
+          <p:cNvPr id="71" name="Text 68"/>
+          <p:cNvSpPr txBox="1"/>
+          <p:nvPr/>
+        </p:nvSpPr>
+        <p:spPr>
+          <a:xfrm>
+            <a:off x="8960891" y="5296662"/>
+            <a:ext cx="2343836" cy="372618"/>
+          </a:xfrm>
+          <a:prstGeom prst="rect">
+            <a:avLst/>
+          </a:prstGeom>
+          <a:noFill/>
+          <a:ln/>
+        </p:spPr>
+        <p:txBody>
+          <a:bodyPr wrap="square" lIns="0" tIns="0" rIns="0" bIns="0" rtlCol="0" anchor="t"/>
+          <a:lstStyle/>
+          <a:p>
+            <a:pPr indent="0" marL="0">
+              <a:buNone/>
+            </a:pPr>
+            <a:r>
+              <a:rPr lang="en-US" sz="830" dirty="0">
+                <a:solidFill>
+                  <a:srgbClr val="6B7684"/>
+                </a:solidFill>
+                <a:latin typeface="Calibri" pitchFamily="34" charset="0"/>
+                <a:ea typeface="Calibri" pitchFamily="34" charset="-122"/>
+                <a:cs typeface="Calibri" pitchFamily="34" charset="-120"/>
+              </a:rPr>
+              <a:t>vue-i18n across the full dashboard</a:t>
+            </a:r>
+            <a:endParaRPr lang="en-US" sz="830" dirty="0"/>
+          </a:p>
+        </p:txBody>
+      </p:sp>
+      <p:sp>
+        <p:nvSpPr>
+          <p:cNvPr id="72" name="Text 69"/>
+          <p:cNvSpPr txBox="1"/>
+          <p:nvPr/>
+        </p:nvSpPr>
+        <p:spPr>
+          <a:xfrm>
+            <a:off x="777240" y="5870448"/>
+            <a:ext cx="10637215" cy="411480"/>
+          </a:xfrm>
+          <a:prstGeom prst="rect">
+            <a:avLst/>
+          </a:prstGeom>
+          <a:noFill/>
+          <a:ln/>
+        </p:spPr>
+        <p:txBody>
+          <a:bodyPr wrap="square" lIns="0" tIns="0" rIns="0" bIns="0" rtlCol="0" anchor="ctr"/>
+          <a:lstStyle/>
+          <a:p>
+            <a:pPr indent="0" marL="0">
+              <a:buNone/>
+            </a:pPr>
+            <a:r>
+              <a:rPr lang="en-US" sz="900" i="1" dirty="0">
+                <a:solidFill>
+                  <a:srgbClr val="8A8470"/>
+                </a:solidFill>
+              </a:rPr>
+              <a:t>Gemini decision support, RAG, satellite cross-validation, and SAR flood detection all have their Google Cloud credentials verified live via a standalone test script; re-testing through the running backend is the next step before launch. WhatsApp (WAHA) and SMS are built but excluded from this list until production-reliable.</a:t>
+            </a:r>
+            <a:endParaRPr lang="en-US" sz="900" dirty="0"/>
+          </a:p>
+        </p:txBody>
+      </p:sp>
     </p:spTree>
   </p:cSld>
   <p:clrMapOvr>
@@ -17750,7 +20203,7 @@
                 <a:ea typeface="Calibri" pitchFamily="34" charset="-122"/>
                 <a:cs typeface="Calibri" pitchFamily="34" charset="-120"/>
               </a:rPr>
-              <a:t>09 / 16</a:t>
+              <a:t>09 / 17</a:t>
             </a:r>
             <a:endParaRPr lang="en-US" sz="1100" dirty="0"/>
           </a:p>
@@ -17809,7 +20262,7 @@
                 <a:ea typeface="Calibri" pitchFamily="34" charset="-122"/>
                 <a:cs typeface="Calibri" pitchFamily="34" charset="-120"/>
               </a:rPr>
-              <a:t>ARCHITECTURE DIAGRAM</a:t>
+              <a:t>PROCESS FLOW DIAGRAM</a:t>
             </a:r>
             <a:endParaRPr lang="en-US" sz="1300" dirty="0"/>
           </a:p>
@@ -17848,7 +20301,7 @@
                 <a:ea typeface="Cambria" pitchFamily="34" charset="-122"/>
                 <a:cs typeface="Cambria" pitchFamily="34" charset="-120"/>
               </a:rPr>
-              <a:t>System Architecture, As Deployed</a:t>
+              <a:t>The Full Disaster Lifecycle, As Built</a:t>
             </a:r>
             <a:endParaRPr lang="en-US" sz="2000" dirty="0"/>
           </a:p>
@@ -17878,7 +20331,7 @@
       </p:sp>
       <p:pic>
         <p:nvPicPr>
-          <p:cNvPr id="9" name="Image 1" descr="/home/claude/pptx-build/assets/d0fc448611146c1aa89d7aeca1c3ec3b.png">    </p:cNvPr>
+          <p:cNvPr id="9" name="Image 1" descr="/home/claude/pptx-build/assets/efc5ace416bee97a84d8a2941dfa8329.png">    </p:cNvPr>
           <p:cNvPicPr>
             <a:picLocks noChangeAspect="1"/>
           </p:cNvPicPr>

--- a/docs/PPT/TerraGrid_AI_Builder_Cup_Submission_copilot_terragrid.pptx
+++ b/docs/PPT/TerraGrid_AI_Builder_Cup_Submission_copilot_terragrid.pptx
@@ -21,10 +21,9 @@
     <p:sldId id="269" r:id="rId15"/>
     <p:sldId id="270" r:id="rId16"/>
     <p:sldId id="271" r:id="rId17"/>
-    <p:sldId id="272" r:id="rId18"/>
   </p:sldIdLst>
   <p:notesMasterIdLst>
-    <p:notesMasterId r:id="rId19"/>
+    <p:notesMasterId r:id="rId18"/>
   </p:notesMasterIdLst>
   <p:sldSz cx="12191695" cy="6858000"/>
   <p:notesSz cx="6858000" cy="12191695"/>
@@ -1158,94 +1157,6 @@
             <a:fld id="{F7021451-1387-4CA6-816F-3879F97B5CBC}" type="slidenum">
               <a:rPr lang="en-US"/>
               <a:t>16</a:t>
-            </a:fld>
-            <a:endParaRPr lang="en-US"/>
-          </a:p>
-        </p:txBody>
-      </p:sp>
-    </p:spTree>
-    <p:extLst>
-      <p:ext uri="{BB962C8B-B14F-4D97-AF65-F5344CB8AC3E}">
-        <p14:creationId xmlns:p14="http://schemas.microsoft.com/office/powerpoint/2010/main" val="1024086991"/>
-      </p:ext>
-    </p:extLst>
-  </p:cSld>
-  <p:clrMapOvr>
-    <a:masterClrMapping/>
-  </p:clrMapOvr>
-</p:notes>
-</file>
-
-<file path=ppt/notesSlides/notesSlide17.xml><?xml version="1.0" encoding="utf-8"?>
-<p:notes xmlns:a="http://schemas.openxmlformats.org/drawingml/2006/main" xmlns:r="http://schemas.openxmlformats.org/officeDocument/2006/relationships" xmlns:p="http://schemas.openxmlformats.org/presentationml/2006/main">
-  <p:cSld>
-    <p:spTree>
-      <p:nvGrpSpPr>
-        <p:cNvPr id="1" name=""/>
-        <p:cNvGrpSpPr/>
-        <p:nvPr/>
-      </p:nvGrpSpPr>
-      <p:grpSpPr>
-        <a:xfrm>
-          <a:off x="0" y="0"/>
-          <a:ext cx="0" cy="0"/>
-          <a:chOff x="0" y="0"/>
-          <a:chExt cx="0" cy="0"/>
-        </a:xfrm>
-      </p:grpSpPr>
-      <p:sp>
-        <p:nvSpPr>
-          <p:cNvPr id="2" name="Slide Image Placeholder 1"/>
-          <p:cNvSpPr>
-            <a:spLocks noGrp="1" noRot="1" noChangeAspect="1"/>
-          </p:cNvSpPr>
-          <p:nvPr>
-            <p:ph type="sldImg"/>
-          </p:nvPr>
-        </p:nvSpPr>
-        <p:spPr/>
-      </p:sp>
-      <p:sp>
-        <p:nvSpPr>
-          <p:cNvPr id="3" name="Notes Placeholder 2"/>
-          <p:cNvSpPr>
-            <a:spLocks noGrp="1"/>
-          </p:cNvSpPr>
-          <p:nvPr>
-            <p:ph type="body" idx="1"/>
-          </p:nvPr>
-        </p:nvSpPr>
-        <p:spPr/>
-        <p:txBody>
-          <a:bodyPr/>
-          <a:lstStyle/>
-          <a:p>
-            <a:r>
-              <a:rPr lang="en-US" dirty="0"/>
-              <a:t/>
-            </a:r>
-            <a:endParaRPr lang="en-US" dirty="0"/>
-          </a:p>
-        </p:txBody>
-      </p:sp>
-      <p:sp>
-        <p:nvSpPr>
-          <p:cNvPr id="4" name="Slide Number Placeholder 3"/>
-          <p:cNvSpPr>
-            <a:spLocks noGrp="1"/>
-          </p:cNvSpPr>
-          <p:nvPr>
-            <p:ph type="sldNum" sz="quarter" idx="10"/>
-          </p:nvPr>
-        </p:nvSpPr>
-        <p:spPr/>
-        <p:txBody>
-          <a:bodyPr/>
-          <a:lstStyle/>
-          <a:p>
-            <a:fld id="{F7021451-1387-4CA6-816F-3879F97B5CBC}" type="slidenum">
-              <a:rPr lang="en-US"/>
-              <a:t>17</a:t>
             </a:fld>
             <a:endParaRPr lang="en-US"/>
           </a:p>
@@ -2934,7 +2845,7 @@
     <p:bg>
       <p:bgPr>
         <a:solidFill>
-          <a:srgbClr val="0F1B2D"/>
+          <a:srgbClr val="F7F7F2"/>
         </a:solidFill>
       </p:bgPr>
     </p:bg>
@@ -3003,7 +2914,7 @@
             <a:r>
               <a:rPr lang="en-US" sz="1100" dirty="0">
                 <a:solidFill>
-                  <a:srgbClr val="8A93A3"/>
+                  <a:srgbClr val="9AA3B0"/>
                 </a:solidFill>
                 <a:latin typeface="Calibri" pitchFamily="34" charset="0"/>
                 <a:ea typeface="Calibri" pitchFamily="34" charset="-122"/>
@@ -3042,13 +2953,13 @@
             <a:r>
               <a:rPr lang="en-US" sz="1100" dirty="0">
                 <a:solidFill>
-                  <a:srgbClr val="8A93A3"/>
+                  <a:srgbClr val="9AA3B0"/>
                 </a:solidFill>
                 <a:latin typeface="Calibri" pitchFamily="34" charset="0"/>
                 <a:ea typeface="Calibri" pitchFamily="34" charset="-122"/>
                 <a:cs typeface="Calibri" pitchFamily="34" charset="-120"/>
               </a:rPr>
-              <a:t>10 / 17</a:t>
+              <a:t>10 / 16</a:t>
             </a:r>
             <a:endParaRPr lang="en-US" sz="1100" dirty="0"/>
           </a:p>
@@ -3107,7 +3018,7 @@
                 <a:ea typeface="Calibri" pitchFamily="34" charset="-122"/>
                 <a:cs typeface="Calibri" pitchFamily="34" charset="-120"/>
               </a:rPr>
-              <a:t>ARCHITECTURE DIAGRAM</a:t>
+              <a:t>TECHNOLOGIES</a:t>
             </a:r>
             <a:endParaRPr lang="en-US" sz="1300" dirty="0"/>
           </a:p>
@@ -3122,7 +3033,7 @@
         <p:spPr>
           <a:xfrm>
             <a:off x="777240" y="1188720"/>
-            <a:ext cx="10637215" cy="365760"/>
+            <a:ext cx="10637215" cy="548640"/>
           </a:xfrm>
           <a:prstGeom prst="rect">
             <a:avLst/>
@@ -3134,21 +3045,21 @@
           <a:bodyPr wrap="square" lIns="0" tIns="0" rIns="0" bIns="0" rtlCol="0" anchor="ctr"/>
           <a:lstStyle/>
           <a:p>
-            <a:pPr algn="ctr" indent="0" marL="0">
-              <a:buNone/>
-            </a:pPr>
-            <a:r>
-              <a:rPr lang="en-US" sz="2000" b="1" dirty="0">
-                <a:solidFill>
-                  <a:srgbClr val="F3F4F2"/>
+            <a:pPr indent="0" marL="0">
+              <a:buNone/>
+            </a:pPr>
+            <a:r>
+              <a:rPr lang="en-US" sz="2600" b="1" dirty="0">
+                <a:solidFill>
+                  <a:srgbClr val="0F1B2D"/>
                 </a:solidFill>
                 <a:latin typeface="Cambria" pitchFamily="34" charset="0"/>
                 <a:ea typeface="Cambria" pitchFamily="34" charset="-122"/>
                 <a:cs typeface="Cambria" pitchFamily="34" charset="-120"/>
               </a:rPr>
-              <a:t>System Architecture, As Deployed</a:t>
-            </a:r>
-            <a:endParaRPr lang="en-US" sz="2000" dirty="0"/>
+              <a:t>The Stack, Verified Against The Codebase</a:t>
+            </a:r>
+            <a:endParaRPr lang="en-US" sz="2600" dirty="0"/>
           </a:p>
         </p:txBody>
       </p:sp>
@@ -3160,43 +3071,909 @@
         </p:nvSpPr>
         <p:spPr>
           <a:xfrm>
-            <a:off x="777240" y="1691640"/>
-            <a:ext cx="10637215" cy="4480560"/>
+            <a:off x="777240" y="1874520"/>
+            <a:ext cx="3423818" cy="1554480"/>
           </a:xfrm>
           <a:prstGeom prst="roundRect">
             <a:avLst>
-              <a:gd name="adj" fmla="val 1633"/>
+              <a:gd name="adj" fmla="val 4706"/>
             </a:avLst>
           </a:prstGeom>
           <a:solidFill>
-            <a:srgbClr val="F7F7F2"/>
+            <a:srgbClr val="FFFFFF"/>
           </a:solidFill>
-          <a:ln/>
-        </p:spPr>
-      </p:sp>
-      <p:pic>
-        <p:nvPicPr>
-          <p:cNvPr id="9" name="Image 1" descr="/home/claude/pptx-build/assets/d0fc448611146c1aa89d7aeca1c3ec3b.png">    </p:cNvPr>
-          <p:cNvPicPr>
-            <a:picLocks noChangeAspect="1"/>
-          </p:cNvPicPr>
-          <p:nvPr/>
-        </p:nvPicPr>
-        <p:blipFill>
-          <a:blip r:embed="rId2"/>
-          <a:srcRect l="0" r="0" t="0" b="0"/>
-          <a:stretch/>
-        </p:blipFill>
-        <p:spPr>
-          <a:xfrm>
-            <a:off x="914400" y="1828800"/>
-            <a:ext cx="10362895" cy="4206240"/>
-          </a:xfrm>
-          <a:prstGeom prst="rect">
-            <a:avLst/>
-          </a:prstGeom>
-        </p:spPr>
-      </p:pic>
+          <a:ln w="9525">
+            <a:solidFill>
+              <a:srgbClr val="E2E1D6"/>
+            </a:solidFill>
+            <a:prstDash val="solid"/>
+          </a:ln>
+        </p:spPr>
+      </p:sp>
+      <p:sp>
+        <p:nvSpPr>
+          <p:cNvPr id="9" name="Text 6"/>
+          <p:cNvSpPr txBox="1"/>
+          <p:nvPr/>
+        </p:nvSpPr>
+        <p:spPr>
+          <a:xfrm>
+            <a:off x="960120" y="2039112"/>
+            <a:ext cx="3058058" cy="365760"/>
+          </a:xfrm>
+          <a:prstGeom prst="rect">
+            <a:avLst/>
+          </a:prstGeom>
+          <a:noFill/>
+          <a:ln/>
+        </p:spPr>
+        <p:txBody>
+          <a:bodyPr wrap="square" lIns="0" tIns="0" rIns="0" bIns="0" rtlCol="0" anchor="ctr"/>
+          <a:lstStyle/>
+          <a:p>
+            <a:pPr indent="0" marL="0">
+              <a:buNone/>
+            </a:pPr>
+            <a:r>
+              <a:rPr lang="en-US" sz="1250" b="1" dirty="0">
+                <a:solidFill>
+                  <a:srgbClr val="0E7490"/>
+                </a:solidFill>
+                <a:latin typeface="Calibri" pitchFamily="34" charset="0"/>
+                <a:ea typeface="Calibri" pitchFamily="34" charset="-122"/>
+                <a:cs typeface="Calibri" pitchFamily="34" charset="-120"/>
+              </a:rPr>
+              <a:t>Frontend</a:t>
+            </a:r>
+            <a:endParaRPr lang="en-US" sz="1250" dirty="0"/>
+          </a:p>
+        </p:txBody>
+      </p:sp>
+      <p:sp>
+        <p:nvSpPr>
+          <p:cNvPr id="10" name="Text 7"/>
+          <p:cNvSpPr txBox="1"/>
+          <p:nvPr/>
+        </p:nvSpPr>
+        <p:spPr>
+          <a:xfrm>
+            <a:off x="960120" y="2423160"/>
+            <a:ext cx="3058058" cy="868680"/>
+          </a:xfrm>
+          <a:prstGeom prst="rect">
+            <a:avLst/>
+          </a:prstGeom>
+          <a:noFill/>
+          <a:ln/>
+        </p:spPr>
+        <p:txBody>
+          <a:bodyPr wrap="square" lIns="0" tIns="0" rIns="0" bIns="0" rtlCol="0" anchor="t"/>
+          <a:lstStyle/>
+          <a:p>
+            <a:pPr indent="0" marL="0">
+              <a:buNone/>
+            </a:pPr>
+            <a:r>
+              <a:rPr lang="en-US" sz="1050" dirty="0">
+                <a:solidFill>
+                  <a:srgbClr val="6B7684"/>
+                </a:solidFill>
+                <a:latin typeface="Calibri" pitchFamily="34" charset="0"/>
+                <a:ea typeface="Calibri" pitchFamily="34" charset="-122"/>
+                <a:cs typeface="Calibri" pitchFamily="34" charset="-120"/>
+              </a:rPr>
+              <a:t>Vue 3 + Vite · Pinia · Vue Router</a:t>
+            </a:r>
+            <a:endParaRPr lang="en-US" sz="1050" dirty="0"/>
+          </a:p>
+          <a:p>
+            <a:pPr indent="0" marL="0">
+              <a:buNone/>
+            </a:pPr>
+            <a:r>
+              <a:rPr lang="en-US" sz="1050" dirty="0">
+                <a:solidFill>
+                  <a:srgbClr val="6B7684"/>
+                </a:solidFill>
+                <a:latin typeface="Calibri" pitchFamily="34" charset="0"/>
+                <a:ea typeface="Calibri" pitchFamily="34" charset="-122"/>
+                <a:cs typeface="Calibri" pitchFamily="34" charset="-120"/>
+              </a:rPr>
+              <a:t>Mapbox GL JS (live map)</a:t>
+            </a:r>
+            <a:endParaRPr lang="en-US" sz="1050" dirty="0"/>
+          </a:p>
+          <a:p>
+            <a:pPr indent="0" marL="0">
+              <a:buNone/>
+            </a:pPr>
+            <a:r>
+              <a:rPr lang="en-US" sz="1050" dirty="0">
+                <a:solidFill>
+                  <a:srgbClr val="6B7684"/>
+                </a:solidFill>
+                <a:latin typeface="Calibri" pitchFamily="34" charset="0"/>
+                <a:ea typeface="Calibri" pitchFamily="34" charset="-122"/>
+                <a:cs typeface="Calibri" pitchFamily="34" charset="-120"/>
+              </a:rPr>
+              <a:t>WebSocket live updates · vue-i18n</a:t>
+            </a:r>
+            <a:endParaRPr lang="en-US" sz="1050" dirty="0"/>
+          </a:p>
+        </p:txBody>
+      </p:sp>
+      <p:sp>
+        <p:nvSpPr>
+          <p:cNvPr id="11" name="Shape 8"/>
+          <p:cNvSpPr/>
+          <p:nvPr/>
+        </p:nvSpPr>
+        <p:spPr>
+          <a:xfrm>
+            <a:off x="4383938" y="1874520"/>
+            <a:ext cx="3423818" cy="1554480"/>
+          </a:xfrm>
+          <a:prstGeom prst="roundRect">
+            <a:avLst>
+              <a:gd name="adj" fmla="val 4706"/>
+            </a:avLst>
+          </a:prstGeom>
+          <a:solidFill>
+            <a:srgbClr val="FFFFFF"/>
+          </a:solidFill>
+          <a:ln w="9525">
+            <a:solidFill>
+              <a:srgbClr val="E2E1D6"/>
+            </a:solidFill>
+            <a:prstDash val="solid"/>
+          </a:ln>
+        </p:spPr>
+      </p:sp>
+      <p:sp>
+        <p:nvSpPr>
+          <p:cNvPr id="12" name="Text 9"/>
+          <p:cNvSpPr txBox="1"/>
+          <p:nvPr/>
+        </p:nvSpPr>
+        <p:spPr>
+          <a:xfrm>
+            <a:off x="4566818" y="2039112"/>
+            <a:ext cx="3058058" cy="365760"/>
+          </a:xfrm>
+          <a:prstGeom prst="rect">
+            <a:avLst/>
+          </a:prstGeom>
+          <a:noFill/>
+          <a:ln/>
+        </p:spPr>
+        <p:txBody>
+          <a:bodyPr wrap="square" lIns="0" tIns="0" rIns="0" bIns="0" rtlCol="0" anchor="ctr"/>
+          <a:lstStyle/>
+          <a:p>
+            <a:pPr indent="0" marL="0">
+              <a:buNone/>
+            </a:pPr>
+            <a:r>
+              <a:rPr lang="en-US" sz="1250" b="1" dirty="0">
+                <a:solidFill>
+                  <a:srgbClr val="0E7490"/>
+                </a:solidFill>
+                <a:latin typeface="Calibri" pitchFamily="34" charset="0"/>
+                <a:ea typeface="Calibri" pitchFamily="34" charset="-122"/>
+                <a:cs typeface="Calibri" pitchFamily="34" charset="-120"/>
+              </a:rPr>
+              <a:t>Backend</a:t>
+            </a:r>
+            <a:endParaRPr lang="en-US" sz="1250" dirty="0"/>
+          </a:p>
+        </p:txBody>
+      </p:sp>
+      <p:sp>
+        <p:nvSpPr>
+          <p:cNvPr id="13" name="Text 10"/>
+          <p:cNvSpPr txBox="1"/>
+          <p:nvPr/>
+        </p:nvSpPr>
+        <p:spPr>
+          <a:xfrm>
+            <a:off x="4566818" y="2423160"/>
+            <a:ext cx="3058058" cy="868680"/>
+          </a:xfrm>
+          <a:prstGeom prst="rect">
+            <a:avLst/>
+          </a:prstGeom>
+          <a:noFill/>
+          <a:ln/>
+        </p:spPr>
+        <p:txBody>
+          <a:bodyPr wrap="square" lIns="0" tIns="0" rIns="0" bIns="0" rtlCol="0" anchor="t"/>
+          <a:lstStyle/>
+          <a:p>
+            <a:pPr indent="0" marL="0">
+              <a:buNone/>
+            </a:pPr>
+            <a:r>
+              <a:rPr lang="en-US" sz="1050" dirty="0">
+                <a:solidFill>
+                  <a:srgbClr val="6B7684"/>
+                </a:solidFill>
+                <a:latin typeface="Calibri" pitchFamily="34" charset="0"/>
+                <a:ea typeface="Calibri" pitchFamily="34" charset="-122"/>
+                <a:cs typeface="Calibri" pitchFamily="34" charset="-120"/>
+              </a:rPr>
+              <a:t>FastAPI (Python 3.13)</a:t>
+            </a:r>
+            <a:endParaRPr lang="en-US" sz="1050" dirty="0"/>
+          </a:p>
+          <a:p>
+            <a:pPr indent="0" marL="0">
+              <a:buNone/>
+            </a:pPr>
+            <a:r>
+              <a:rPr lang="en-US" sz="1050" dirty="0">
+                <a:solidFill>
+                  <a:srgbClr val="6B7684"/>
+                </a:solidFill>
+                <a:latin typeface="Calibri" pitchFamily="34" charset="0"/>
+                <a:ea typeface="Calibri" pitchFamily="34" charset="-122"/>
+                <a:cs typeface="Calibri" pitchFamily="34" charset="-120"/>
+              </a:rPr>
+              <a:t>PostgreSQL — SQLAlchemy + Alembic</a:t>
+            </a:r>
+            <a:endParaRPr lang="en-US" sz="1050" dirty="0"/>
+          </a:p>
+          <a:p>
+            <a:pPr indent="0" marL="0">
+              <a:buNone/>
+            </a:pPr>
+            <a:r>
+              <a:rPr lang="en-US" sz="1050" dirty="0">
+                <a:solidFill>
+                  <a:srgbClr val="6B7684"/>
+                </a:solidFill>
+                <a:latin typeface="Calibri" pitchFamily="34" charset="0"/>
+                <a:ea typeface="Calibri" pitchFamily="34" charset="-122"/>
+                <a:cs typeface="Calibri" pitchFamily="34" charset="-120"/>
+              </a:rPr>
+              <a:t>APScheduler · WebSocket server</a:t>
+            </a:r>
+            <a:endParaRPr lang="en-US" sz="1050" dirty="0"/>
+          </a:p>
+          <a:p>
+            <a:pPr indent="0" marL="0">
+              <a:buNone/>
+            </a:pPr>
+            <a:r>
+              <a:rPr lang="en-US" sz="1050" dirty="0">
+                <a:solidFill>
+                  <a:srgbClr val="6B7684"/>
+                </a:solidFill>
+                <a:latin typeface="Calibri" pitchFamily="34" charset="0"/>
+                <a:ea typeface="Calibri" pitchFamily="34" charset="-122"/>
+                <a:cs typeface="Calibri" pitchFamily="34" charset="-120"/>
+              </a:rPr>
+              <a:t>Source of Truth — 4-layer data lineage (raw -&gt; validated -&gt; enriched -&gt; stored)</a:t>
+            </a:r>
+            <a:endParaRPr lang="en-US" sz="1050" dirty="0"/>
+          </a:p>
+        </p:txBody>
+      </p:sp>
+      <p:sp>
+        <p:nvSpPr>
+          <p:cNvPr id="14" name="Shape 11"/>
+          <p:cNvSpPr/>
+          <p:nvPr/>
+        </p:nvSpPr>
+        <p:spPr>
+          <a:xfrm>
+            <a:off x="7990637" y="1874520"/>
+            <a:ext cx="3423818" cy="1554480"/>
+          </a:xfrm>
+          <a:prstGeom prst="roundRect">
+            <a:avLst>
+              <a:gd name="adj" fmla="val 4706"/>
+            </a:avLst>
+          </a:prstGeom>
+          <a:solidFill>
+            <a:srgbClr val="FFFFFF"/>
+          </a:solidFill>
+          <a:ln w="9525">
+            <a:solidFill>
+              <a:srgbClr val="E2E1D6"/>
+            </a:solidFill>
+            <a:prstDash val="solid"/>
+          </a:ln>
+        </p:spPr>
+      </p:sp>
+      <p:sp>
+        <p:nvSpPr>
+          <p:cNvPr id="15" name="Text 12"/>
+          <p:cNvSpPr txBox="1"/>
+          <p:nvPr/>
+        </p:nvSpPr>
+        <p:spPr>
+          <a:xfrm>
+            <a:off x="8173517" y="2039112"/>
+            <a:ext cx="3058058" cy="365760"/>
+          </a:xfrm>
+          <a:prstGeom prst="rect">
+            <a:avLst/>
+          </a:prstGeom>
+          <a:noFill/>
+          <a:ln/>
+        </p:spPr>
+        <p:txBody>
+          <a:bodyPr wrap="square" lIns="0" tIns="0" rIns="0" bIns="0" rtlCol="0" anchor="ctr"/>
+          <a:lstStyle/>
+          <a:p>
+            <a:pPr indent="0" marL="0">
+              <a:buNone/>
+            </a:pPr>
+            <a:r>
+              <a:rPr lang="en-US" sz="1250" b="1" dirty="0">
+                <a:solidFill>
+                  <a:srgbClr val="E8722C"/>
+                </a:solidFill>
+                <a:latin typeface="Calibri" pitchFamily="34" charset="0"/>
+                <a:ea typeface="Calibri" pitchFamily="34" charset="-122"/>
+                <a:cs typeface="Calibri" pitchFamily="34" charset="-120"/>
+              </a:rPr>
+              <a:t>AI Layer — Google Cloud</a:t>
+            </a:r>
+            <a:endParaRPr lang="en-US" sz="1250" dirty="0"/>
+          </a:p>
+        </p:txBody>
+      </p:sp>
+      <p:sp>
+        <p:nvSpPr>
+          <p:cNvPr id="16" name="Text 13"/>
+          <p:cNvSpPr txBox="1"/>
+          <p:nvPr/>
+        </p:nvSpPr>
+        <p:spPr>
+          <a:xfrm>
+            <a:off x="8173517" y="2423160"/>
+            <a:ext cx="3058058" cy="868680"/>
+          </a:xfrm>
+          <a:prstGeom prst="rect">
+            <a:avLst/>
+          </a:prstGeom>
+          <a:noFill/>
+          <a:ln/>
+        </p:spPr>
+        <p:txBody>
+          <a:bodyPr wrap="square" lIns="0" tIns="0" rIns="0" bIns="0" rtlCol="0" anchor="t"/>
+          <a:lstStyle/>
+          <a:p>
+            <a:pPr indent="0" marL="0">
+              <a:buNone/>
+            </a:pPr>
+            <a:r>
+              <a:rPr lang="en-US" sz="1050" dirty="0">
+                <a:solidFill>
+                  <a:srgbClr val="6B7684"/>
+                </a:solidFill>
+                <a:latin typeface="Calibri" pitchFamily="34" charset="0"/>
+                <a:ea typeface="Calibri" pitchFamily="34" charset="-122"/>
+                <a:cs typeface="Calibri" pitchFamily="34" charset="-120"/>
+              </a:rPr>
+              <a:t>Vertex AI — Gemini 2.5 Flash</a:t>
+            </a:r>
+            <a:endParaRPr lang="en-US" sz="1050" dirty="0"/>
+          </a:p>
+          <a:p>
+            <a:pPr indent="0" marL="0">
+              <a:buNone/>
+            </a:pPr>
+            <a:r>
+              <a:rPr lang="en-US" sz="1050" dirty="0">
+                <a:solidFill>
+                  <a:srgbClr val="6B7684"/>
+                </a:solidFill>
+                <a:latin typeface="Calibri" pitchFamily="34" charset="0"/>
+                <a:ea typeface="Calibri" pitchFamily="34" charset="-122"/>
+                <a:cs typeface="Calibri" pitchFamily="34" charset="-120"/>
+              </a:rPr>
+              <a:t>Decision support, risk analysis, alert drafting</a:t>
+            </a:r>
+            <a:endParaRPr lang="en-US" sz="1050" dirty="0"/>
+          </a:p>
+          <a:p>
+            <a:pPr indent="0" marL="0">
+              <a:buNone/>
+            </a:pPr>
+            <a:r>
+              <a:rPr lang="en-US" sz="1050" dirty="0">
+                <a:solidFill>
+                  <a:srgbClr val="6B7684"/>
+                </a:solidFill>
+                <a:latin typeface="Calibri" pitchFamily="34" charset="0"/>
+                <a:ea typeface="Calibri" pitchFamily="34" charset="-122"/>
+                <a:cs typeface="Calibri" pitchFamily="34" charset="-120"/>
+              </a:rPr>
+              <a:t>Google Earth Engine — Sentinel-1 SAR flood detection</a:t>
+            </a:r>
+            <a:endParaRPr lang="en-US" sz="1050" dirty="0"/>
+          </a:p>
+        </p:txBody>
+      </p:sp>
+      <p:sp>
+        <p:nvSpPr>
+          <p:cNvPr id="17" name="Shape 14"/>
+          <p:cNvSpPr/>
+          <p:nvPr/>
+        </p:nvSpPr>
+        <p:spPr>
+          <a:xfrm>
+            <a:off x="777240" y="3566160"/>
+            <a:ext cx="3423818" cy="1554480"/>
+          </a:xfrm>
+          <a:prstGeom prst="roundRect">
+            <a:avLst>
+              <a:gd name="adj" fmla="val 4706"/>
+            </a:avLst>
+          </a:prstGeom>
+          <a:solidFill>
+            <a:srgbClr val="FFFFFF"/>
+          </a:solidFill>
+          <a:ln w="9525">
+            <a:solidFill>
+              <a:srgbClr val="E2E1D6"/>
+            </a:solidFill>
+            <a:prstDash val="solid"/>
+          </a:ln>
+        </p:spPr>
+      </p:sp>
+      <p:sp>
+        <p:nvSpPr>
+          <p:cNvPr id="18" name="Text 15"/>
+          <p:cNvSpPr txBox="1"/>
+          <p:nvPr/>
+        </p:nvSpPr>
+        <p:spPr>
+          <a:xfrm>
+            <a:off x="960120" y="3730752"/>
+            <a:ext cx="3058058" cy="365760"/>
+          </a:xfrm>
+          <a:prstGeom prst="rect">
+            <a:avLst/>
+          </a:prstGeom>
+          <a:noFill/>
+          <a:ln/>
+        </p:spPr>
+        <p:txBody>
+          <a:bodyPr wrap="square" lIns="0" tIns="0" rIns="0" bIns="0" rtlCol="0" anchor="ctr"/>
+          <a:lstStyle/>
+          <a:p>
+            <a:pPr indent="0" marL="0">
+              <a:buNone/>
+            </a:pPr>
+            <a:r>
+              <a:rPr lang="en-US" sz="1250" b="1" dirty="0">
+                <a:solidFill>
+                  <a:srgbClr val="E8722C"/>
+                </a:solidFill>
+                <a:latin typeface="Calibri" pitchFamily="34" charset="0"/>
+                <a:ea typeface="Calibri" pitchFamily="34" charset="-122"/>
+                <a:cs typeface="Calibri" pitchFamily="34" charset="-120"/>
+              </a:rPr>
+              <a:t>Evacuation Routing</a:t>
+            </a:r>
+            <a:endParaRPr lang="en-US" sz="1250" dirty="0"/>
+          </a:p>
+        </p:txBody>
+      </p:sp>
+      <p:sp>
+        <p:nvSpPr>
+          <p:cNvPr id="19" name="Text 16"/>
+          <p:cNvSpPr txBox="1"/>
+          <p:nvPr/>
+        </p:nvSpPr>
+        <p:spPr>
+          <a:xfrm>
+            <a:off x="960120" y="4114800"/>
+            <a:ext cx="3058058" cy="868680"/>
+          </a:xfrm>
+          <a:prstGeom prst="rect">
+            <a:avLst/>
+          </a:prstGeom>
+          <a:noFill/>
+          <a:ln/>
+        </p:spPr>
+        <p:txBody>
+          <a:bodyPr wrap="square" lIns="0" tIns="0" rIns="0" bIns="0" rtlCol="0" anchor="t"/>
+          <a:lstStyle/>
+          <a:p>
+            <a:pPr indent="0" marL="0">
+              <a:buNone/>
+            </a:pPr>
+            <a:r>
+              <a:rPr lang="en-US" sz="1050" dirty="0">
+                <a:solidFill>
+                  <a:srgbClr val="6B7684"/>
+                </a:solidFill>
+                <a:latin typeface="Calibri" pitchFamily="34" charset="0"/>
+                <a:ea typeface="Calibri" pitchFamily="34" charset="-122"/>
+                <a:cs typeface="Calibri" pitchFamily="34" charset="-120"/>
+              </a:rPr>
+              <a:t>OSRM road-network routing</a:t>
+            </a:r>
+            <a:endParaRPr lang="en-US" sz="1050" dirty="0"/>
+          </a:p>
+          <a:p>
+            <a:pPr indent="0" marL="0">
+              <a:buNone/>
+            </a:pPr>
+            <a:r>
+              <a:rPr lang="en-US" sz="1050" dirty="0">
+                <a:solidFill>
+                  <a:srgbClr val="6B7684"/>
+                </a:solidFill>
+                <a:latin typeface="Calibri" pitchFamily="34" charset="0"/>
+                <a:ea typeface="Calibri" pitchFamily="34" charset="-122"/>
+                <a:cs typeface="Calibri" pitchFamily="34" charset="-120"/>
+              </a:rPr>
+              <a:t>Automatic geodesic-distance fallback on failure</a:t>
+            </a:r>
+            <a:endParaRPr lang="en-US" sz="1050" dirty="0"/>
+          </a:p>
+        </p:txBody>
+      </p:sp>
+      <p:sp>
+        <p:nvSpPr>
+          <p:cNvPr id="20" name="Shape 17"/>
+          <p:cNvSpPr/>
+          <p:nvPr/>
+        </p:nvSpPr>
+        <p:spPr>
+          <a:xfrm>
+            <a:off x="4383938" y="3566160"/>
+            <a:ext cx="3423818" cy="1554480"/>
+          </a:xfrm>
+          <a:prstGeom prst="roundRect">
+            <a:avLst>
+              <a:gd name="adj" fmla="val 4706"/>
+            </a:avLst>
+          </a:prstGeom>
+          <a:solidFill>
+            <a:srgbClr val="FFFFFF"/>
+          </a:solidFill>
+          <a:ln w="9525">
+            <a:solidFill>
+              <a:srgbClr val="E2E1D6"/>
+            </a:solidFill>
+            <a:prstDash val="solid"/>
+          </a:ln>
+        </p:spPr>
+      </p:sp>
+      <p:sp>
+        <p:nvSpPr>
+          <p:cNvPr id="21" name="Text 18"/>
+          <p:cNvSpPr txBox="1"/>
+          <p:nvPr/>
+        </p:nvSpPr>
+        <p:spPr>
+          <a:xfrm>
+            <a:off x="4566818" y="3730752"/>
+            <a:ext cx="3058058" cy="365760"/>
+          </a:xfrm>
+          <a:prstGeom prst="rect">
+            <a:avLst/>
+          </a:prstGeom>
+          <a:noFill/>
+          <a:ln/>
+        </p:spPr>
+        <p:txBody>
+          <a:bodyPr wrap="square" lIns="0" tIns="0" rIns="0" bIns="0" rtlCol="0" anchor="ctr"/>
+          <a:lstStyle/>
+          <a:p>
+            <a:pPr indent="0" marL="0">
+              <a:buNone/>
+            </a:pPr>
+            <a:r>
+              <a:rPr lang="en-US" sz="1250" b="1" dirty="0">
+                <a:solidFill>
+                  <a:srgbClr val="E8722C"/>
+                </a:solidFill>
+                <a:latin typeface="Calibri" pitchFamily="34" charset="0"/>
+                <a:ea typeface="Calibri" pitchFamily="34" charset="-122"/>
+                <a:cs typeface="Calibri" pitchFamily="34" charset="-120"/>
+              </a:rPr>
+              <a:t>Alerting</a:t>
+            </a:r>
+            <a:endParaRPr lang="en-US" sz="1250" dirty="0"/>
+          </a:p>
+        </p:txBody>
+      </p:sp>
+      <p:sp>
+        <p:nvSpPr>
+          <p:cNvPr id="22" name="Text 19"/>
+          <p:cNvSpPr txBox="1"/>
+          <p:nvPr/>
+        </p:nvSpPr>
+        <p:spPr>
+          <a:xfrm>
+            <a:off x="4566818" y="4114800"/>
+            <a:ext cx="3058058" cy="868680"/>
+          </a:xfrm>
+          <a:prstGeom prst="rect">
+            <a:avLst/>
+          </a:prstGeom>
+          <a:noFill/>
+          <a:ln/>
+        </p:spPr>
+        <p:txBody>
+          <a:bodyPr wrap="square" lIns="0" tIns="0" rIns="0" bIns="0" rtlCol="0" anchor="t"/>
+          <a:lstStyle/>
+          <a:p>
+            <a:pPr indent="0" marL="0">
+              <a:buNone/>
+            </a:pPr>
+            <a:r>
+              <a:rPr lang="en-US" sz="1050" dirty="0">
+                <a:solidFill>
+                  <a:srgbClr val="6B7684"/>
+                </a:solidFill>
+                <a:latin typeface="Calibri" pitchFamily="34" charset="0"/>
+                <a:ea typeface="Calibri" pitchFamily="34" charset="-122"/>
+                <a:cs typeface="Calibri" pitchFamily="34" charset="-120"/>
+              </a:rPr>
+              <a:t>Email — Gmail SMTP, per-audience templates</a:t>
+            </a:r>
+            <a:endParaRPr lang="en-US" sz="1050" dirty="0"/>
+          </a:p>
+          <a:p>
+            <a:pPr indent="0" marL="0">
+              <a:buNone/>
+            </a:pPr>
+            <a:r>
+              <a:rPr lang="en-US" sz="1050" dirty="0">
+                <a:solidFill>
+                  <a:srgbClr val="6B7684"/>
+                </a:solidFill>
+                <a:latin typeface="Calibri" pitchFamily="34" charset="0"/>
+                <a:ea typeface="Calibri" pitchFamily="34" charset="-122"/>
+                <a:cs typeface="Calibri" pitchFamily="34" charset="-120"/>
+              </a:rPr>
+              <a:t>WhatsApp (WAHA) built, self-hosted — not yet production-reliable</a:t>
+            </a:r>
+            <a:endParaRPr lang="en-US" sz="1050" dirty="0"/>
+          </a:p>
+        </p:txBody>
+      </p:sp>
+      <p:sp>
+        <p:nvSpPr>
+          <p:cNvPr id="23" name="Shape 20"/>
+          <p:cNvSpPr/>
+          <p:nvPr/>
+        </p:nvSpPr>
+        <p:spPr>
+          <a:xfrm>
+            <a:off x="7990637" y="3566160"/>
+            <a:ext cx="3423818" cy="1554480"/>
+          </a:xfrm>
+          <a:prstGeom prst="roundRect">
+            <a:avLst>
+              <a:gd name="adj" fmla="val 4706"/>
+            </a:avLst>
+          </a:prstGeom>
+          <a:solidFill>
+            <a:srgbClr val="FFFFFF"/>
+          </a:solidFill>
+          <a:ln w="9525">
+            <a:solidFill>
+              <a:srgbClr val="E2E1D6"/>
+            </a:solidFill>
+            <a:prstDash val="solid"/>
+          </a:ln>
+        </p:spPr>
+      </p:sp>
+      <p:sp>
+        <p:nvSpPr>
+          <p:cNvPr id="24" name="Text 21"/>
+          <p:cNvSpPr txBox="1"/>
+          <p:nvPr/>
+        </p:nvSpPr>
+        <p:spPr>
+          <a:xfrm>
+            <a:off x="8173517" y="3730752"/>
+            <a:ext cx="3058058" cy="365760"/>
+          </a:xfrm>
+          <a:prstGeom prst="rect">
+            <a:avLst/>
+          </a:prstGeom>
+          <a:noFill/>
+          <a:ln/>
+        </p:spPr>
+        <p:txBody>
+          <a:bodyPr wrap="square" lIns="0" tIns="0" rIns="0" bIns="0" rtlCol="0" anchor="ctr"/>
+          <a:lstStyle/>
+          <a:p>
+            <a:pPr indent="0" marL="0">
+              <a:buNone/>
+            </a:pPr>
+            <a:r>
+              <a:rPr lang="en-US" sz="1250" b="1" dirty="0">
+                <a:solidFill>
+                  <a:srgbClr val="5B6472"/>
+                </a:solidFill>
+                <a:latin typeface="Calibri" pitchFamily="34" charset="0"/>
+                <a:ea typeface="Calibri" pitchFamily="34" charset="-122"/>
+                <a:cs typeface="Calibri" pitchFamily="34" charset="-120"/>
+              </a:rPr>
+              <a:t>External Data (6 sources)</a:t>
+            </a:r>
+            <a:endParaRPr lang="en-US" sz="1250" dirty="0"/>
+          </a:p>
+        </p:txBody>
+      </p:sp>
+      <p:sp>
+        <p:nvSpPr>
+          <p:cNvPr id="25" name="Text 22"/>
+          <p:cNvSpPr txBox="1"/>
+          <p:nvPr/>
+        </p:nvSpPr>
+        <p:spPr>
+          <a:xfrm>
+            <a:off x="8173517" y="4114800"/>
+            <a:ext cx="3058058" cy="868680"/>
+          </a:xfrm>
+          <a:prstGeom prst="rect">
+            <a:avLst/>
+          </a:prstGeom>
+          <a:noFill/>
+          <a:ln/>
+        </p:spPr>
+        <p:txBody>
+          <a:bodyPr wrap="square" lIns="0" tIns="0" rIns="0" bIns="0" rtlCol="0" anchor="t"/>
+          <a:lstStyle/>
+          <a:p>
+            <a:pPr indent="0" marL="0">
+              <a:buNone/>
+            </a:pPr>
+            <a:r>
+              <a:rPr lang="en-US" sz="1050" dirty="0">
+                <a:solidFill>
+                  <a:srgbClr val="6B7684"/>
+                </a:solidFill>
+                <a:latin typeface="Calibri" pitchFamily="34" charset="0"/>
+                <a:ea typeface="Calibri" pitchFamily="34" charset="-122"/>
+                <a:cs typeface="Calibri" pitchFamily="34" charset="-120"/>
+              </a:rPr>
+              <a:t>NASA EONET · USGS · NOAA</a:t>
+            </a:r>
+            <a:endParaRPr lang="en-US" sz="1050" dirty="0"/>
+          </a:p>
+          <a:p>
+            <a:pPr indent="0" marL="0">
+              <a:buNone/>
+            </a:pPr>
+            <a:r>
+              <a:rPr lang="en-US" sz="1050" dirty="0">
+                <a:solidFill>
+                  <a:srgbClr val="6B7684"/>
+                </a:solidFill>
+                <a:latin typeface="Calibri" pitchFamily="34" charset="0"/>
+                <a:ea typeface="Calibri" pitchFamily="34" charset="-122"/>
+                <a:cs typeface="Calibri" pitchFamily="34" charset="-120"/>
+              </a:rPr>
+              <a:t>GDACS · OpenWeatherMap</a:t>
+            </a:r>
+            <a:endParaRPr lang="en-US" sz="1050" dirty="0"/>
+          </a:p>
+          <a:p>
+            <a:pPr indent="0" marL="0">
+              <a:buNone/>
+            </a:pPr>
+            <a:r>
+              <a:rPr lang="en-US" sz="1050" dirty="0">
+                <a:solidFill>
+                  <a:srgbClr val="6B7684"/>
+                </a:solidFill>
+                <a:latin typeface="Calibri" pitchFamily="34" charset="0"/>
+                <a:ea typeface="Calibri" pitchFamily="34" charset="-122"/>
+                <a:cs typeface="Calibri" pitchFamily="34" charset="-120"/>
+              </a:rPr>
+              <a:t>OpenStreetMap / Overpass</a:t>
+            </a:r>
+            <a:endParaRPr lang="en-US" sz="1050" dirty="0"/>
+          </a:p>
+        </p:txBody>
+      </p:sp>
+      <p:sp>
+        <p:nvSpPr>
+          <p:cNvPr id="26" name="Shape 23"/>
+          <p:cNvSpPr/>
+          <p:nvPr/>
+        </p:nvSpPr>
+        <p:spPr>
+          <a:xfrm>
+            <a:off x="777240" y="5349240"/>
+            <a:ext cx="10637215" cy="868680"/>
+          </a:xfrm>
+          <a:prstGeom prst="roundRect">
+            <a:avLst>
+              <a:gd name="adj" fmla="val 7368"/>
+            </a:avLst>
+          </a:prstGeom>
+          <a:solidFill>
+            <a:srgbClr val="E9E7DC"/>
+          </a:solidFill>
+          <a:ln/>
+        </p:spPr>
+      </p:sp>
+      <p:sp>
+        <p:nvSpPr>
+          <p:cNvPr id="27" name="Text 24"/>
+          <p:cNvSpPr txBox="1"/>
+          <p:nvPr/>
+        </p:nvSpPr>
+        <p:spPr>
+          <a:xfrm>
+            <a:off x="960120" y="5440680"/>
+            <a:ext cx="5044288" cy="685800"/>
+          </a:xfrm>
+          <a:prstGeom prst="rect">
+            <a:avLst/>
+          </a:prstGeom>
+          <a:noFill/>
+          <a:ln/>
+        </p:spPr>
+        <p:txBody>
+          <a:bodyPr wrap="square" lIns="0" tIns="0" rIns="0" bIns="0" rtlCol="0" anchor="ctr"/>
+          <a:lstStyle/>
+          <a:p>
+            <a:pPr indent="0" marL="0">
+              <a:buNone/>
+            </a:pPr>
+            <a:r>
+              <a:rPr lang="en-US" sz="1000" dirty="0">
+                <a:solidFill>
+                  <a:srgbClr val="4A5568"/>
+                </a:solidFill>
+              </a:rPr>
+              <a:t>In the codebase but dormant/unreliable in this prototype: Redis (caching), Pub/Sub (messaging), OSM/Overpass (frequently times out, fails gracefully).</a:t>
+            </a:r>
+            <a:endParaRPr lang="en-US" sz="1000" dirty="0"/>
+          </a:p>
+        </p:txBody>
+      </p:sp>
+      <p:sp>
+        <p:nvSpPr>
+          <p:cNvPr id="28" name="Text 25"/>
+          <p:cNvSpPr txBox="1"/>
+          <p:nvPr/>
+        </p:nvSpPr>
+        <p:spPr>
+          <a:xfrm>
+            <a:off x="6187288" y="5440680"/>
+            <a:ext cx="5044288" cy="685800"/>
+          </a:xfrm>
+          <a:prstGeom prst="rect">
+            <a:avLst/>
+          </a:prstGeom>
+          <a:noFill/>
+          <a:ln/>
+        </p:spPr>
+        <p:txBody>
+          <a:bodyPr wrap="square" lIns="0" tIns="0" rIns="0" bIns="0" rtlCol="0" anchor="ctr"/>
+          <a:lstStyle/>
+          <a:p>
+            <a:pPr indent="0" marL="0">
+              <a:buNone/>
+            </a:pPr>
+            <a:r>
+              <a:rPr lang="en-US" sz="1000" dirty="0">
+                <a:solidFill>
+                  <a:srgbClr val="4A5568"/>
+                </a:solidFill>
+              </a:rPr>
+              <a:t>Deployment targets: Firebase Hosting (frontend) + Google Cloud Run (backend API) + Docker, CI via GitHub Actions — not yet deployed to production at submission time.</a:t>
+            </a:r>
+            <a:endParaRPr lang="en-US" sz="1000" dirty="0"/>
+          </a:p>
+        </p:txBody>
+      </p:sp>
     </p:spTree>
   </p:cSld>
   <p:clrMapOvr>
@@ -3325,7 +4102,7 @@
                 <a:ea typeface="Calibri" pitchFamily="34" charset="-122"/>
                 <a:cs typeface="Calibri" pitchFamily="34" charset="-120"/>
               </a:rPr>
-              <a:t>11 / 17</a:t>
+              <a:t>11 / 16</a:t>
             </a:r>
             <a:endParaRPr lang="en-US" sz="1100" dirty="0"/>
           </a:p>
@@ -3384,7 +4161,7 @@
                 <a:ea typeface="Calibri" pitchFamily="34" charset="-122"/>
                 <a:cs typeface="Calibri" pitchFamily="34" charset="-120"/>
               </a:rPr>
-              <a:t>TECHNOLOGIES</a:t>
+              <a:t>ESTIMATED IMPLEMENTATION COST (OPTIONAL)</a:t>
             </a:r>
             <a:endParaRPr lang="en-US" sz="1300" dirty="0"/>
           </a:p>
@@ -3423,1149 +4200,6 @@
                 <a:ea typeface="Cambria" pitchFamily="34" charset="-122"/>
                 <a:cs typeface="Cambria" pitchFamily="34" charset="-120"/>
               </a:rPr>
-              <a:t>The Stack, Verified Against The Codebase</a:t>
-            </a:r>
-            <a:endParaRPr lang="en-US" sz="2600" dirty="0"/>
-          </a:p>
-        </p:txBody>
-      </p:sp>
-      <p:sp>
-        <p:nvSpPr>
-          <p:cNvPr id="8" name="Shape 5"/>
-          <p:cNvSpPr/>
-          <p:nvPr/>
-        </p:nvSpPr>
-        <p:spPr>
-          <a:xfrm>
-            <a:off x="777240" y="1874520"/>
-            <a:ext cx="3423818" cy="1554480"/>
-          </a:xfrm>
-          <a:prstGeom prst="roundRect">
-            <a:avLst>
-              <a:gd name="adj" fmla="val 4706"/>
-            </a:avLst>
-          </a:prstGeom>
-          <a:solidFill>
-            <a:srgbClr val="FFFFFF"/>
-          </a:solidFill>
-          <a:ln w="9525">
-            <a:solidFill>
-              <a:srgbClr val="E2E1D6"/>
-            </a:solidFill>
-            <a:prstDash val="solid"/>
-          </a:ln>
-        </p:spPr>
-      </p:sp>
-      <p:sp>
-        <p:nvSpPr>
-          <p:cNvPr id="9" name="Text 6"/>
-          <p:cNvSpPr txBox="1"/>
-          <p:nvPr/>
-        </p:nvSpPr>
-        <p:spPr>
-          <a:xfrm>
-            <a:off x="960120" y="2039112"/>
-            <a:ext cx="3058058" cy="365760"/>
-          </a:xfrm>
-          <a:prstGeom prst="rect">
-            <a:avLst/>
-          </a:prstGeom>
-          <a:noFill/>
-          <a:ln/>
-        </p:spPr>
-        <p:txBody>
-          <a:bodyPr wrap="square" lIns="0" tIns="0" rIns="0" bIns="0" rtlCol="0" anchor="ctr"/>
-          <a:lstStyle/>
-          <a:p>
-            <a:pPr indent="0" marL="0">
-              <a:buNone/>
-            </a:pPr>
-            <a:r>
-              <a:rPr lang="en-US" sz="1250" b="1" dirty="0">
-                <a:solidFill>
-                  <a:srgbClr val="0E7490"/>
-                </a:solidFill>
-                <a:latin typeface="Calibri" pitchFamily="34" charset="0"/>
-                <a:ea typeface="Calibri" pitchFamily="34" charset="-122"/>
-                <a:cs typeface="Calibri" pitchFamily="34" charset="-120"/>
-              </a:rPr>
-              <a:t>Frontend</a:t>
-            </a:r>
-            <a:endParaRPr lang="en-US" sz="1250" dirty="0"/>
-          </a:p>
-        </p:txBody>
-      </p:sp>
-      <p:sp>
-        <p:nvSpPr>
-          <p:cNvPr id="10" name="Text 7"/>
-          <p:cNvSpPr txBox="1"/>
-          <p:nvPr/>
-        </p:nvSpPr>
-        <p:spPr>
-          <a:xfrm>
-            <a:off x="960120" y="2423160"/>
-            <a:ext cx="3058058" cy="868680"/>
-          </a:xfrm>
-          <a:prstGeom prst="rect">
-            <a:avLst/>
-          </a:prstGeom>
-          <a:noFill/>
-          <a:ln/>
-        </p:spPr>
-        <p:txBody>
-          <a:bodyPr wrap="square" lIns="0" tIns="0" rIns="0" bIns="0" rtlCol="0" anchor="t"/>
-          <a:lstStyle/>
-          <a:p>
-            <a:pPr indent="0" marL="0">
-              <a:buNone/>
-            </a:pPr>
-            <a:r>
-              <a:rPr lang="en-US" sz="1050" dirty="0">
-                <a:solidFill>
-                  <a:srgbClr val="6B7684"/>
-                </a:solidFill>
-                <a:latin typeface="Calibri" pitchFamily="34" charset="0"/>
-                <a:ea typeface="Calibri" pitchFamily="34" charset="-122"/>
-                <a:cs typeface="Calibri" pitchFamily="34" charset="-120"/>
-              </a:rPr>
-              <a:t>Vue 3 + Vite · Pinia · Vue Router</a:t>
-            </a:r>
-            <a:endParaRPr lang="en-US" sz="1050" dirty="0"/>
-          </a:p>
-          <a:p>
-            <a:pPr indent="0" marL="0">
-              <a:buNone/>
-            </a:pPr>
-            <a:r>
-              <a:rPr lang="en-US" sz="1050" dirty="0">
-                <a:solidFill>
-                  <a:srgbClr val="6B7684"/>
-                </a:solidFill>
-                <a:latin typeface="Calibri" pitchFamily="34" charset="0"/>
-                <a:ea typeface="Calibri" pitchFamily="34" charset="-122"/>
-                <a:cs typeface="Calibri" pitchFamily="34" charset="-120"/>
-              </a:rPr>
-              <a:t>Mapbox GL JS (live map)</a:t>
-            </a:r>
-            <a:endParaRPr lang="en-US" sz="1050" dirty="0"/>
-          </a:p>
-          <a:p>
-            <a:pPr indent="0" marL="0">
-              <a:buNone/>
-            </a:pPr>
-            <a:r>
-              <a:rPr lang="en-US" sz="1050" dirty="0">
-                <a:solidFill>
-                  <a:srgbClr val="6B7684"/>
-                </a:solidFill>
-                <a:latin typeface="Calibri" pitchFamily="34" charset="0"/>
-                <a:ea typeface="Calibri" pitchFamily="34" charset="-122"/>
-                <a:cs typeface="Calibri" pitchFamily="34" charset="-120"/>
-              </a:rPr>
-              <a:t>WebSocket live updates · vue-i18n</a:t>
-            </a:r>
-            <a:endParaRPr lang="en-US" sz="1050" dirty="0"/>
-          </a:p>
-        </p:txBody>
-      </p:sp>
-      <p:sp>
-        <p:nvSpPr>
-          <p:cNvPr id="11" name="Shape 8"/>
-          <p:cNvSpPr/>
-          <p:nvPr/>
-        </p:nvSpPr>
-        <p:spPr>
-          <a:xfrm>
-            <a:off x="4383938" y="1874520"/>
-            <a:ext cx="3423818" cy="1554480"/>
-          </a:xfrm>
-          <a:prstGeom prst="roundRect">
-            <a:avLst>
-              <a:gd name="adj" fmla="val 4706"/>
-            </a:avLst>
-          </a:prstGeom>
-          <a:solidFill>
-            <a:srgbClr val="FFFFFF"/>
-          </a:solidFill>
-          <a:ln w="9525">
-            <a:solidFill>
-              <a:srgbClr val="E2E1D6"/>
-            </a:solidFill>
-            <a:prstDash val="solid"/>
-          </a:ln>
-        </p:spPr>
-      </p:sp>
-      <p:sp>
-        <p:nvSpPr>
-          <p:cNvPr id="12" name="Text 9"/>
-          <p:cNvSpPr txBox="1"/>
-          <p:nvPr/>
-        </p:nvSpPr>
-        <p:spPr>
-          <a:xfrm>
-            <a:off x="4566818" y="2039112"/>
-            <a:ext cx="3058058" cy="365760"/>
-          </a:xfrm>
-          <a:prstGeom prst="rect">
-            <a:avLst/>
-          </a:prstGeom>
-          <a:noFill/>
-          <a:ln/>
-        </p:spPr>
-        <p:txBody>
-          <a:bodyPr wrap="square" lIns="0" tIns="0" rIns="0" bIns="0" rtlCol="0" anchor="ctr"/>
-          <a:lstStyle/>
-          <a:p>
-            <a:pPr indent="0" marL="0">
-              <a:buNone/>
-            </a:pPr>
-            <a:r>
-              <a:rPr lang="en-US" sz="1250" b="1" dirty="0">
-                <a:solidFill>
-                  <a:srgbClr val="0E7490"/>
-                </a:solidFill>
-                <a:latin typeface="Calibri" pitchFamily="34" charset="0"/>
-                <a:ea typeface="Calibri" pitchFamily="34" charset="-122"/>
-                <a:cs typeface="Calibri" pitchFamily="34" charset="-120"/>
-              </a:rPr>
-              <a:t>Backend</a:t>
-            </a:r>
-            <a:endParaRPr lang="en-US" sz="1250" dirty="0"/>
-          </a:p>
-        </p:txBody>
-      </p:sp>
-      <p:sp>
-        <p:nvSpPr>
-          <p:cNvPr id="13" name="Text 10"/>
-          <p:cNvSpPr txBox="1"/>
-          <p:nvPr/>
-        </p:nvSpPr>
-        <p:spPr>
-          <a:xfrm>
-            <a:off x="4566818" y="2423160"/>
-            <a:ext cx="3058058" cy="868680"/>
-          </a:xfrm>
-          <a:prstGeom prst="rect">
-            <a:avLst/>
-          </a:prstGeom>
-          <a:noFill/>
-          <a:ln/>
-        </p:spPr>
-        <p:txBody>
-          <a:bodyPr wrap="square" lIns="0" tIns="0" rIns="0" bIns="0" rtlCol="0" anchor="t"/>
-          <a:lstStyle/>
-          <a:p>
-            <a:pPr indent="0" marL="0">
-              <a:buNone/>
-            </a:pPr>
-            <a:r>
-              <a:rPr lang="en-US" sz="1050" dirty="0">
-                <a:solidFill>
-                  <a:srgbClr val="6B7684"/>
-                </a:solidFill>
-                <a:latin typeface="Calibri" pitchFamily="34" charset="0"/>
-                <a:ea typeface="Calibri" pitchFamily="34" charset="-122"/>
-                <a:cs typeface="Calibri" pitchFamily="34" charset="-120"/>
-              </a:rPr>
-              <a:t>FastAPI (Python 3.13)</a:t>
-            </a:r>
-            <a:endParaRPr lang="en-US" sz="1050" dirty="0"/>
-          </a:p>
-          <a:p>
-            <a:pPr indent="0" marL="0">
-              <a:buNone/>
-            </a:pPr>
-            <a:r>
-              <a:rPr lang="en-US" sz="1050" dirty="0">
-                <a:solidFill>
-                  <a:srgbClr val="6B7684"/>
-                </a:solidFill>
-                <a:latin typeface="Calibri" pitchFamily="34" charset="0"/>
-                <a:ea typeface="Calibri" pitchFamily="34" charset="-122"/>
-                <a:cs typeface="Calibri" pitchFamily="34" charset="-120"/>
-              </a:rPr>
-              <a:t>PostgreSQL — SQLAlchemy + Alembic</a:t>
-            </a:r>
-            <a:endParaRPr lang="en-US" sz="1050" dirty="0"/>
-          </a:p>
-          <a:p>
-            <a:pPr indent="0" marL="0">
-              <a:buNone/>
-            </a:pPr>
-            <a:r>
-              <a:rPr lang="en-US" sz="1050" dirty="0">
-                <a:solidFill>
-                  <a:srgbClr val="6B7684"/>
-                </a:solidFill>
-                <a:latin typeface="Calibri" pitchFamily="34" charset="0"/>
-                <a:ea typeface="Calibri" pitchFamily="34" charset="-122"/>
-                <a:cs typeface="Calibri" pitchFamily="34" charset="-120"/>
-              </a:rPr>
-              <a:t>APScheduler · WebSocket server</a:t>
-            </a:r>
-            <a:endParaRPr lang="en-US" sz="1050" dirty="0"/>
-          </a:p>
-          <a:p>
-            <a:pPr indent="0" marL="0">
-              <a:buNone/>
-            </a:pPr>
-            <a:r>
-              <a:rPr lang="en-US" sz="1050" dirty="0">
-                <a:solidFill>
-                  <a:srgbClr val="6B7684"/>
-                </a:solidFill>
-                <a:latin typeface="Calibri" pitchFamily="34" charset="0"/>
-                <a:ea typeface="Calibri" pitchFamily="34" charset="-122"/>
-                <a:cs typeface="Calibri" pitchFamily="34" charset="-120"/>
-              </a:rPr>
-              <a:t>Source of Truth — 4-layer data lineage (raw -&gt; validated -&gt; enriched -&gt; stored)</a:t>
-            </a:r>
-            <a:endParaRPr lang="en-US" sz="1050" dirty="0"/>
-          </a:p>
-        </p:txBody>
-      </p:sp>
-      <p:sp>
-        <p:nvSpPr>
-          <p:cNvPr id="14" name="Shape 11"/>
-          <p:cNvSpPr/>
-          <p:nvPr/>
-        </p:nvSpPr>
-        <p:spPr>
-          <a:xfrm>
-            <a:off x="7990637" y="1874520"/>
-            <a:ext cx="3423818" cy="1554480"/>
-          </a:xfrm>
-          <a:prstGeom prst="roundRect">
-            <a:avLst>
-              <a:gd name="adj" fmla="val 4706"/>
-            </a:avLst>
-          </a:prstGeom>
-          <a:solidFill>
-            <a:srgbClr val="FFFFFF"/>
-          </a:solidFill>
-          <a:ln w="9525">
-            <a:solidFill>
-              <a:srgbClr val="E2E1D6"/>
-            </a:solidFill>
-            <a:prstDash val="solid"/>
-          </a:ln>
-        </p:spPr>
-      </p:sp>
-      <p:sp>
-        <p:nvSpPr>
-          <p:cNvPr id="15" name="Text 12"/>
-          <p:cNvSpPr txBox="1"/>
-          <p:nvPr/>
-        </p:nvSpPr>
-        <p:spPr>
-          <a:xfrm>
-            <a:off x="8173517" y="2039112"/>
-            <a:ext cx="3058058" cy="365760"/>
-          </a:xfrm>
-          <a:prstGeom prst="rect">
-            <a:avLst/>
-          </a:prstGeom>
-          <a:noFill/>
-          <a:ln/>
-        </p:spPr>
-        <p:txBody>
-          <a:bodyPr wrap="square" lIns="0" tIns="0" rIns="0" bIns="0" rtlCol="0" anchor="ctr"/>
-          <a:lstStyle/>
-          <a:p>
-            <a:pPr indent="0" marL="0">
-              <a:buNone/>
-            </a:pPr>
-            <a:r>
-              <a:rPr lang="en-US" sz="1250" b="1" dirty="0">
-                <a:solidFill>
-                  <a:srgbClr val="E8722C"/>
-                </a:solidFill>
-                <a:latin typeface="Calibri" pitchFamily="34" charset="0"/>
-                <a:ea typeface="Calibri" pitchFamily="34" charset="-122"/>
-                <a:cs typeface="Calibri" pitchFamily="34" charset="-120"/>
-              </a:rPr>
-              <a:t>AI Layer — Google Cloud</a:t>
-            </a:r>
-            <a:endParaRPr lang="en-US" sz="1250" dirty="0"/>
-          </a:p>
-        </p:txBody>
-      </p:sp>
-      <p:sp>
-        <p:nvSpPr>
-          <p:cNvPr id="16" name="Text 13"/>
-          <p:cNvSpPr txBox="1"/>
-          <p:nvPr/>
-        </p:nvSpPr>
-        <p:spPr>
-          <a:xfrm>
-            <a:off x="8173517" y="2423160"/>
-            <a:ext cx="3058058" cy="868680"/>
-          </a:xfrm>
-          <a:prstGeom prst="rect">
-            <a:avLst/>
-          </a:prstGeom>
-          <a:noFill/>
-          <a:ln/>
-        </p:spPr>
-        <p:txBody>
-          <a:bodyPr wrap="square" lIns="0" tIns="0" rIns="0" bIns="0" rtlCol="0" anchor="t"/>
-          <a:lstStyle/>
-          <a:p>
-            <a:pPr indent="0" marL="0">
-              <a:buNone/>
-            </a:pPr>
-            <a:r>
-              <a:rPr lang="en-US" sz="1050" dirty="0">
-                <a:solidFill>
-                  <a:srgbClr val="6B7684"/>
-                </a:solidFill>
-                <a:latin typeface="Calibri" pitchFamily="34" charset="0"/>
-                <a:ea typeface="Calibri" pitchFamily="34" charset="-122"/>
-                <a:cs typeface="Calibri" pitchFamily="34" charset="-120"/>
-              </a:rPr>
-              <a:t>Vertex AI — Gemini 2.5 Flash</a:t>
-            </a:r>
-            <a:endParaRPr lang="en-US" sz="1050" dirty="0"/>
-          </a:p>
-          <a:p>
-            <a:pPr indent="0" marL="0">
-              <a:buNone/>
-            </a:pPr>
-            <a:r>
-              <a:rPr lang="en-US" sz="1050" dirty="0">
-                <a:solidFill>
-                  <a:srgbClr val="6B7684"/>
-                </a:solidFill>
-                <a:latin typeface="Calibri" pitchFamily="34" charset="0"/>
-                <a:ea typeface="Calibri" pitchFamily="34" charset="-122"/>
-                <a:cs typeface="Calibri" pitchFamily="34" charset="-120"/>
-              </a:rPr>
-              <a:t>Decision support, risk analysis, alert drafting</a:t>
-            </a:r>
-            <a:endParaRPr lang="en-US" sz="1050" dirty="0"/>
-          </a:p>
-          <a:p>
-            <a:pPr indent="0" marL="0">
-              <a:buNone/>
-            </a:pPr>
-            <a:r>
-              <a:rPr lang="en-US" sz="1050" dirty="0">
-                <a:solidFill>
-                  <a:srgbClr val="6B7684"/>
-                </a:solidFill>
-                <a:latin typeface="Calibri" pitchFamily="34" charset="0"/>
-                <a:ea typeface="Calibri" pitchFamily="34" charset="-122"/>
-                <a:cs typeface="Calibri" pitchFamily="34" charset="-120"/>
-              </a:rPr>
-              <a:t>Google Earth Engine — Sentinel-1 SAR flood detection</a:t>
-            </a:r>
-            <a:endParaRPr lang="en-US" sz="1050" dirty="0"/>
-          </a:p>
-        </p:txBody>
-      </p:sp>
-      <p:sp>
-        <p:nvSpPr>
-          <p:cNvPr id="17" name="Shape 14"/>
-          <p:cNvSpPr/>
-          <p:nvPr/>
-        </p:nvSpPr>
-        <p:spPr>
-          <a:xfrm>
-            <a:off x="777240" y="3566160"/>
-            <a:ext cx="3423818" cy="1554480"/>
-          </a:xfrm>
-          <a:prstGeom prst="roundRect">
-            <a:avLst>
-              <a:gd name="adj" fmla="val 4706"/>
-            </a:avLst>
-          </a:prstGeom>
-          <a:solidFill>
-            <a:srgbClr val="FFFFFF"/>
-          </a:solidFill>
-          <a:ln w="9525">
-            <a:solidFill>
-              <a:srgbClr val="E2E1D6"/>
-            </a:solidFill>
-            <a:prstDash val="solid"/>
-          </a:ln>
-        </p:spPr>
-      </p:sp>
-      <p:sp>
-        <p:nvSpPr>
-          <p:cNvPr id="18" name="Text 15"/>
-          <p:cNvSpPr txBox="1"/>
-          <p:nvPr/>
-        </p:nvSpPr>
-        <p:spPr>
-          <a:xfrm>
-            <a:off x="960120" y="3730752"/>
-            <a:ext cx="3058058" cy="365760"/>
-          </a:xfrm>
-          <a:prstGeom prst="rect">
-            <a:avLst/>
-          </a:prstGeom>
-          <a:noFill/>
-          <a:ln/>
-        </p:spPr>
-        <p:txBody>
-          <a:bodyPr wrap="square" lIns="0" tIns="0" rIns="0" bIns="0" rtlCol="0" anchor="ctr"/>
-          <a:lstStyle/>
-          <a:p>
-            <a:pPr indent="0" marL="0">
-              <a:buNone/>
-            </a:pPr>
-            <a:r>
-              <a:rPr lang="en-US" sz="1250" b="1" dirty="0">
-                <a:solidFill>
-                  <a:srgbClr val="E8722C"/>
-                </a:solidFill>
-                <a:latin typeface="Calibri" pitchFamily="34" charset="0"/>
-                <a:ea typeface="Calibri" pitchFamily="34" charset="-122"/>
-                <a:cs typeface="Calibri" pitchFamily="34" charset="-120"/>
-              </a:rPr>
-              <a:t>Evacuation Routing</a:t>
-            </a:r>
-            <a:endParaRPr lang="en-US" sz="1250" dirty="0"/>
-          </a:p>
-        </p:txBody>
-      </p:sp>
-      <p:sp>
-        <p:nvSpPr>
-          <p:cNvPr id="19" name="Text 16"/>
-          <p:cNvSpPr txBox="1"/>
-          <p:nvPr/>
-        </p:nvSpPr>
-        <p:spPr>
-          <a:xfrm>
-            <a:off x="960120" y="4114800"/>
-            <a:ext cx="3058058" cy="868680"/>
-          </a:xfrm>
-          <a:prstGeom prst="rect">
-            <a:avLst/>
-          </a:prstGeom>
-          <a:noFill/>
-          <a:ln/>
-        </p:spPr>
-        <p:txBody>
-          <a:bodyPr wrap="square" lIns="0" tIns="0" rIns="0" bIns="0" rtlCol="0" anchor="t"/>
-          <a:lstStyle/>
-          <a:p>
-            <a:pPr indent="0" marL="0">
-              <a:buNone/>
-            </a:pPr>
-            <a:r>
-              <a:rPr lang="en-US" sz="1050" dirty="0">
-                <a:solidFill>
-                  <a:srgbClr val="6B7684"/>
-                </a:solidFill>
-                <a:latin typeface="Calibri" pitchFamily="34" charset="0"/>
-                <a:ea typeface="Calibri" pitchFamily="34" charset="-122"/>
-                <a:cs typeface="Calibri" pitchFamily="34" charset="-120"/>
-              </a:rPr>
-              <a:t>OSRM road-network routing</a:t>
-            </a:r>
-            <a:endParaRPr lang="en-US" sz="1050" dirty="0"/>
-          </a:p>
-          <a:p>
-            <a:pPr indent="0" marL="0">
-              <a:buNone/>
-            </a:pPr>
-            <a:r>
-              <a:rPr lang="en-US" sz="1050" dirty="0">
-                <a:solidFill>
-                  <a:srgbClr val="6B7684"/>
-                </a:solidFill>
-                <a:latin typeface="Calibri" pitchFamily="34" charset="0"/>
-                <a:ea typeface="Calibri" pitchFamily="34" charset="-122"/>
-                <a:cs typeface="Calibri" pitchFamily="34" charset="-120"/>
-              </a:rPr>
-              <a:t>Automatic geodesic-distance fallback on failure</a:t>
-            </a:r>
-            <a:endParaRPr lang="en-US" sz="1050" dirty="0"/>
-          </a:p>
-        </p:txBody>
-      </p:sp>
-      <p:sp>
-        <p:nvSpPr>
-          <p:cNvPr id="20" name="Shape 17"/>
-          <p:cNvSpPr/>
-          <p:nvPr/>
-        </p:nvSpPr>
-        <p:spPr>
-          <a:xfrm>
-            <a:off x="4383938" y="3566160"/>
-            <a:ext cx="3423818" cy="1554480"/>
-          </a:xfrm>
-          <a:prstGeom prst="roundRect">
-            <a:avLst>
-              <a:gd name="adj" fmla="val 4706"/>
-            </a:avLst>
-          </a:prstGeom>
-          <a:solidFill>
-            <a:srgbClr val="FFFFFF"/>
-          </a:solidFill>
-          <a:ln w="9525">
-            <a:solidFill>
-              <a:srgbClr val="E2E1D6"/>
-            </a:solidFill>
-            <a:prstDash val="solid"/>
-          </a:ln>
-        </p:spPr>
-      </p:sp>
-      <p:sp>
-        <p:nvSpPr>
-          <p:cNvPr id="21" name="Text 18"/>
-          <p:cNvSpPr txBox="1"/>
-          <p:nvPr/>
-        </p:nvSpPr>
-        <p:spPr>
-          <a:xfrm>
-            <a:off x="4566818" y="3730752"/>
-            <a:ext cx="3058058" cy="365760"/>
-          </a:xfrm>
-          <a:prstGeom prst="rect">
-            <a:avLst/>
-          </a:prstGeom>
-          <a:noFill/>
-          <a:ln/>
-        </p:spPr>
-        <p:txBody>
-          <a:bodyPr wrap="square" lIns="0" tIns="0" rIns="0" bIns="0" rtlCol="0" anchor="ctr"/>
-          <a:lstStyle/>
-          <a:p>
-            <a:pPr indent="0" marL="0">
-              <a:buNone/>
-            </a:pPr>
-            <a:r>
-              <a:rPr lang="en-US" sz="1250" b="1" dirty="0">
-                <a:solidFill>
-                  <a:srgbClr val="E8722C"/>
-                </a:solidFill>
-                <a:latin typeface="Calibri" pitchFamily="34" charset="0"/>
-                <a:ea typeface="Calibri" pitchFamily="34" charset="-122"/>
-                <a:cs typeface="Calibri" pitchFamily="34" charset="-120"/>
-              </a:rPr>
-              <a:t>Alerting</a:t>
-            </a:r>
-            <a:endParaRPr lang="en-US" sz="1250" dirty="0"/>
-          </a:p>
-        </p:txBody>
-      </p:sp>
-      <p:sp>
-        <p:nvSpPr>
-          <p:cNvPr id="22" name="Text 19"/>
-          <p:cNvSpPr txBox="1"/>
-          <p:nvPr/>
-        </p:nvSpPr>
-        <p:spPr>
-          <a:xfrm>
-            <a:off x="4566818" y="4114800"/>
-            <a:ext cx="3058058" cy="868680"/>
-          </a:xfrm>
-          <a:prstGeom prst="rect">
-            <a:avLst/>
-          </a:prstGeom>
-          <a:noFill/>
-          <a:ln/>
-        </p:spPr>
-        <p:txBody>
-          <a:bodyPr wrap="square" lIns="0" tIns="0" rIns="0" bIns="0" rtlCol="0" anchor="t"/>
-          <a:lstStyle/>
-          <a:p>
-            <a:pPr indent="0" marL="0">
-              <a:buNone/>
-            </a:pPr>
-            <a:r>
-              <a:rPr lang="en-US" sz="1050" dirty="0">
-                <a:solidFill>
-                  <a:srgbClr val="6B7684"/>
-                </a:solidFill>
-                <a:latin typeface="Calibri" pitchFamily="34" charset="0"/>
-                <a:ea typeface="Calibri" pitchFamily="34" charset="-122"/>
-                <a:cs typeface="Calibri" pitchFamily="34" charset="-120"/>
-              </a:rPr>
-              <a:t>Email — Gmail SMTP, per-audience templates</a:t>
-            </a:r>
-            <a:endParaRPr lang="en-US" sz="1050" dirty="0"/>
-          </a:p>
-          <a:p>
-            <a:pPr indent="0" marL="0">
-              <a:buNone/>
-            </a:pPr>
-            <a:r>
-              <a:rPr lang="en-US" sz="1050" dirty="0">
-                <a:solidFill>
-                  <a:srgbClr val="6B7684"/>
-                </a:solidFill>
-                <a:latin typeface="Calibri" pitchFamily="34" charset="0"/>
-                <a:ea typeface="Calibri" pitchFamily="34" charset="-122"/>
-                <a:cs typeface="Calibri" pitchFamily="34" charset="-120"/>
-              </a:rPr>
-              <a:t>WhatsApp (WAHA) built, self-hosted — not yet production-reliable</a:t>
-            </a:r>
-            <a:endParaRPr lang="en-US" sz="1050" dirty="0"/>
-          </a:p>
-        </p:txBody>
-      </p:sp>
-      <p:sp>
-        <p:nvSpPr>
-          <p:cNvPr id="23" name="Shape 20"/>
-          <p:cNvSpPr/>
-          <p:nvPr/>
-        </p:nvSpPr>
-        <p:spPr>
-          <a:xfrm>
-            <a:off x="7990637" y="3566160"/>
-            <a:ext cx="3423818" cy="1554480"/>
-          </a:xfrm>
-          <a:prstGeom prst="roundRect">
-            <a:avLst>
-              <a:gd name="adj" fmla="val 4706"/>
-            </a:avLst>
-          </a:prstGeom>
-          <a:solidFill>
-            <a:srgbClr val="FFFFFF"/>
-          </a:solidFill>
-          <a:ln w="9525">
-            <a:solidFill>
-              <a:srgbClr val="E2E1D6"/>
-            </a:solidFill>
-            <a:prstDash val="solid"/>
-          </a:ln>
-        </p:spPr>
-      </p:sp>
-      <p:sp>
-        <p:nvSpPr>
-          <p:cNvPr id="24" name="Text 21"/>
-          <p:cNvSpPr txBox="1"/>
-          <p:nvPr/>
-        </p:nvSpPr>
-        <p:spPr>
-          <a:xfrm>
-            <a:off x="8173517" y="3730752"/>
-            <a:ext cx="3058058" cy="365760"/>
-          </a:xfrm>
-          <a:prstGeom prst="rect">
-            <a:avLst/>
-          </a:prstGeom>
-          <a:noFill/>
-          <a:ln/>
-        </p:spPr>
-        <p:txBody>
-          <a:bodyPr wrap="square" lIns="0" tIns="0" rIns="0" bIns="0" rtlCol="0" anchor="ctr"/>
-          <a:lstStyle/>
-          <a:p>
-            <a:pPr indent="0" marL="0">
-              <a:buNone/>
-            </a:pPr>
-            <a:r>
-              <a:rPr lang="en-US" sz="1250" b="1" dirty="0">
-                <a:solidFill>
-                  <a:srgbClr val="5B6472"/>
-                </a:solidFill>
-                <a:latin typeface="Calibri" pitchFamily="34" charset="0"/>
-                <a:ea typeface="Calibri" pitchFamily="34" charset="-122"/>
-                <a:cs typeface="Calibri" pitchFamily="34" charset="-120"/>
-              </a:rPr>
-              <a:t>External Data (6 sources)</a:t>
-            </a:r>
-            <a:endParaRPr lang="en-US" sz="1250" dirty="0"/>
-          </a:p>
-        </p:txBody>
-      </p:sp>
-      <p:sp>
-        <p:nvSpPr>
-          <p:cNvPr id="25" name="Text 22"/>
-          <p:cNvSpPr txBox="1"/>
-          <p:nvPr/>
-        </p:nvSpPr>
-        <p:spPr>
-          <a:xfrm>
-            <a:off x="8173517" y="4114800"/>
-            <a:ext cx="3058058" cy="868680"/>
-          </a:xfrm>
-          <a:prstGeom prst="rect">
-            <a:avLst/>
-          </a:prstGeom>
-          <a:noFill/>
-          <a:ln/>
-        </p:spPr>
-        <p:txBody>
-          <a:bodyPr wrap="square" lIns="0" tIns="0" rIns="0" bIns="0" rtlCol="0" anchor="t"/>
-          <a:lstStyle/>
-          <a:p>
-            <a:pPr indent="0" marL="0">
-              <a:buNone/>
-            </a:pPr>
-            <a:r>
-              <a:rPr lang="en-US" sz="1050" dirty="0">
-                <a:solidFill>
-                  <a:srgbClr val="6B7684"/>
-                </a:solidFill>
-                <a:latin typeface="Calibri" pitchFamily="34" charset="0"/>
-                <a:ea typeface="Calibri" pitchFamily="34" charset="-122"/>
-                <a:cs typeface="Calibri" pitchFamily="34" charset="-120"/>
-              </a:rPr>
-              <a:t>NASA EONET · USGS · NOAA</a:t>
-            </a:r>
-            <a:endParaRPr lang="en-US" sz="1050" dirty="0"/>
-          </a:p>
-          <a:p>
-            <a:pPr indent="0" marL="0">
-              <a:buNone/>
-            </a:pPr>
-            <a:r>
-              <a:rPr lang="en-US" sz="1050" dirty="0">
-                <a:solidFill>
-                  <a:srgbClr val="6B7684"/>
-                </a:solidFill>
-                <a:latin typeface="Calibri" pitchFamily="34" charset="0"/>
-                <a:ea typeface="Calibri" pitchFamily="34" charset="-122"/>
-                <a:cs typeface="Calibri" pitchFamily="34" charset="-120"/>
-              </a:rPr>
-              <a:t>GDACS · OpenWeatherMap</a:t>
-            </a:r>
-            <a:endParaRPr lang="en-US" sz="1050" dirty="0"/>
-          </a:p>
-          <a:p>
-            <a:pPr indent="0" marL="0">
-              <a:buNone/>
-            </a:pPr>
-            <a:r>
-              <a:rPr lang="en-US" sz="1050" dirty="0">
-                <a:solidFill>
-                  <a:srgbClr val="6B7684"/>
-                </a:solidFill>
-                <a:latin typeface="Calibri" pitchFamily="34" charset="0"/>
-                <a:ea typeface="Calibri" pitchFamily="34" charset="-122"/>
-                <a:cs typeface="Calibri" pitchFamily="34" charset="-120"/>
-              </a:rPr>
-              <a:t>OpenStreetMap / Overpass</a:t>
-            </a:r>
-            <a:endParaRPr lang="en-US" sz="1050" dirty="0"/>
-          </a:p>
-        </p:txBody>
-      </p:sp>
-      <p:sp>
-        <p:nvSpPr>
-          <p:cNvPr id="26" name="Shape 23"/>
-          <p:cNvSpPr/>
-          <p:nvPr/>
-        </p:nvSpPr>
-        <p:spPr>
-          <a:xfrm>
-            <a:off x="777240" y="5349240"/>
-            <a:ext cx="10637215" cy="868680"/>
-          </a:xfrm>
-          <a:prstGeom prst="roundRect">
-            <a:avLst>
-              <a:gd name="adj" fmla="val 7368"/>
-            </a:avLst>
-          </a:prstGeom>
-          <a:solidFill>
-            <a:srgbClr val="E9E7DC"/>
-          </a:solidFill>
-          <a:ln/>
-        </p:spPr>
-      </p:sp>
-      <p:sp>
-        <p:nvSpPr>
-          <p:cNvPr id="27" name="Text 24"/>
-          <p:cNvSpPr txBox="1"/>
-          <p:nvPr/>
-        </p:nvSpPr>
-        <p:spPr>
-          <a:xfrm>
-            <a:off x="960120" y="5440680"/>
-            <a:ext cx="5044288" cy="685800"/>
-          </a:xfrm>
-          <a:prstGeom prst="rect">
-            <a:avLst/>
-          </a:prstGeom>
-          <a:noFill/>
-          <a:ln/>
-        </p:spPr>
-        <p:txBody>
-          <a:bodyPr wrap="square" lIns="0" tIns="0" rIns="0" bIns="0" rtlCol="0" anchor="ctr"/>
-          <a:lstStyle/>
-          <a:p>
-            <a:pPr indent="0" marL="0">
-              <a:buNone/>
-            </a:pPr>
-            <a:r>
-              <a:rPr lang="en-US" sz="1000" dirty="0">
-                <a:solidFill>
-                  <a:srgbClr val="4A5568"/>
-                </a:solidFill>
-              </a:rPr>
-              <a:t>In the codebase but dormant/unreliable in this prototype: Redis (caching), Pub/Sub (messaging), OSM/Overpass (frequently times out, fails gracefully).</a:t>
-            </a:r>
-            <a:endParaRPr lang="en-US" sz="1000" dirty="0"/>
-          </a:p>
-        </p:txBody>
-      </p:sp>
-      <p:sp>
-        <p:nvSpPr>
-          <p:cNvPr id="28" name="Text 25"/>
-          <p:cNvSpPr txBox="1"/>
-          <p:nvPr/>
-        </p:nvSpPr>
-        <p:spPr>
-          <a:xfrm>
-            <a:off x="6187288" y="5440680"/>
-            <a:ext cx="5044288" cy="685800"/>
-          </a:xfrm>
-          <a:prstGeom prst="rect">
-            <a:avLst/>
-          </a:prstGeom>
-          <a:noFill/>
-          <a:ln/>
-        </p:spPr>
-        <p:txBody>
-          <a:bodyPr wrap="square" lIns="0" tIns="0" rIns="0" bIns="0" rtlCol="0" anchor="ctr"/>
-          <a:lstStyle/>
-          <a:p>
-            <a:pPr indent="0" marL="0">
-              <a:buNone/>
-            </a:pPr>
-            <a:r>
-              <a:rPr lang="en-US" sz="1000" dirty="0">
-                <a:solidFill>
-                  <a:srgbClr val="4A5568"/>
-                </a:solidFill>
-              </a:rPr>
-              <a:t>Deployment targets: Firebase Hosting (frontend) + Google Cloud Run (backend API) + Docker, CI via GitHub Actions — not yet deployed to production at submission time.</a:t>
-            </a:r>
-            <a:endParaRPr lang="en-US" sz="1000" dirty="0"/>
-          </a:p>
-        </p:txBody>
-      </p:sp>
-    </p:spTree>
-  </p:cSld>
-  <p:clrMapOvr>
-    <a:masterClrMapping/>
-  </p:clrMapOvr>
-</p:sld>
-</file>
-
-<file path=ppt/slides/slide12.xml><?xml version="1.0" encoding="utf-8"?>
-<p:sld xmlns:a="http://schemas.openxmlformats.org/drawingml/2006/main" xmlns:r="http://schemas.openxmlformats.org/officeDocument/2006/relationships" xmlns:p="http://schemas.openxmlformats.org/presentationml/2006/main">
-  <p:cSld name="Slide 12">
-    <p:bg>
-      <p:bgPr>
-        <a:solidFill>
-          <a:srgbClr val="F7F7F2"/>
-        </a:solidFill>
-      </p:bgPr>
-    </p:bg>
-    <p:spTree>
-      <p:nvGrpSpPr>
-        <p:cNvPr id="1" name=""/>
-        <p:cNvGrpSpPr/>
-        <p:nvPr/>
-      </p:nvGrpSpPr>
-      <p:grpSpPr>
-        <a:xfrm>
-          <a:off x="0" y="0"/>
-          <a:ext cx="0" cy="0"/>
-          <a:chOff x="0" y="0"/>
-          <a:chExt cx="0" cy="0"/>
-        </a:xfrm>
-      </p:grpSpPr>
-      <p:pic>
-        <p:nvPicPr>
-          <p:cNvPr id="2" name="Image 0" descr="/home/claude/pptx-build/assets/c88b78c3bb2f833f20cd0c678c1ff259.png">    </p:cNvPr>
-          <p:cNvPicPr>
-            <a:picLocks noChangeAspect="1"/>
-          </p:cNvPicPr>
-          <p:nvPr/>
-        </p:nvPicPr>
-        <p:blipFill>
-          <a:blip r:embed="rId1"/>
-          <a:stretch>
-            <a:fillRect/>
-          </a:stretch>
-        </p:blipFill>
-        <p:spPr>
-          <a:xfrm>
-            <a:off x="0" y="0"/>
-            <a:ext cx="12191695" cy="679433"/>
-          </a:xfrm>
-          <a:prstGeom prst="rect">
-            <a:avLst/>
-          </a:prstGeom>
-        </p:spPr>
-      </p:pic>
-      <p:sp>
-        <p:nvSpPr>
-          <p:cNvPr id="3" name="Text 0"/>
-          <p:cNvSpPr txBox="1"/>
-          <p:nvPr/>
-        </p:nvSpPr>
-        <p:spPr>
-          <a:xfrm>
-            <a:off x="777240" y="6400800"/>
-            <a:ext cx="5486400" cy="274320"/>
-          </a:xfrm>
-          <a:prstGeom prst="rect">
-            <a:avLst/>
-          </a:prstGeom>
-          <a:noFill/>
-          <a:ln/>
-        </p:spPr>
-        <p:txBody>
-          <a:bodyPr wrap="square" lIns="0" tIns="0" rIns="0" bIns="0" rtlCol="0" anchor="ctr"/>
-          <a:lstStyle/>
-          <a:p>
-            <a:pPr indent="0" marL="0">
-              <a:buNone/>
-            </a:pPr>
-            <a:r>
-              <a:rPr lang="en-US" sz="1100" dirty="0">
-                <a:solidFill>
-                  <a:srgbClr val="9AA3B0"/>
-                </a:solidFill>
-                <a:latin typeface="Calibri" pitchFamily="34" charset="0"/>
-                <a:ea typeface="Calibri" pitchFamily="34" charset="-122"/>
-                <a:cs typeface="Calibri" pitchFamily="34" charset="-120"/>
-              </a:rPr>
-              <a:t>TerraGrid — AI Builder Cup Submission</a:t>
-            </a:r>
-            <a:endParaRPr lang="en-US" sz="1100" dirty="0"/>
-          </a:p>
-        </p:txBody>
-      </p:sp>
-      <p:sp>
-        <p:nvSpPr>
-          <p:cNvPr id="4" name="Text 1"/>
-          <p:cNvSpPr txBox="1"/>
-          <p:nvPr/>
-        </p:nvSpPr>
-        <p:spPr>
-          <a:xfrm>
-            <a:off x="9585655" y="6400800"/>
-            <a:ext cx="1828800" cy="274320"/>
-          </a:xfrm>
-          <a:prstGeom prst="rect">
-            <a:avLst/>
-          </a:prstGeom>
-          <a:noFill/>
-          <a:ln/>
-        </p:spPr>
-        <p:txBody>
-          <a:bodyPr wrap="square" lIns="0" tIns="0" rIns="0" bIns="0" rtlCol="0" anchor="ctr"/>
-          <a:lstStyle/>
-          <a:p>
-            <a:pPr algn="r" indent="0" marL="0">
-              <a:buNone/>
-            </a:pPr>
-            <a:r>
-              <a:rPr lang="en-US" sz="1100" dirty="0">
-                <a:solidFill>
-                  <a:srgbClr val="9AA3B0"/>
-                </a:solidFill>
-                <a:latin typeface="Calibri" pitchFamily="34" charset="0"/>
-                <a:ea typeface="Calibri" pitchFamily="34" charset="-122"/>
-                <a:cs typeface="Calibri" pitchFamily="34" charset="-120"/>
-              </a:rPr>
-              <a:t>12 / 17</a:t>
-            </a:r>
-            <a:endParaRPr lang="en-US" sz="1100" dirty="0"/>
-          </a:p>
-        </p:txBody>
-      </p:sp>
-      <p:sp>
-        <p:nvSpPr>
-          <p:cNvPr id="5" name="Shape 2"/>
-          <p:cNvSpPr/>
-          <p:nvPr/>
-        </p:nvSpPr>
-        <p:spPr>
-          <a:xfrm>
-            <a:off x="0" y="6793992"/>
-            <a:ext cx="12191695" cy="64008"/>
-          </a:xfrm>
-          <a:prstGeom prst="rect">
-            <a:avLst/>
-          </a:prstGeom>
-          <a:solidFill>
-            <a:srgbClr val="000000"/>
-          </a:solidFill>
-          <a:ln/>
-        </p:spPr>
-      </p:sp>
-      <p:sp>
-        <p:nvSpPr>
-          <p:cNvPr id="6" name="Text 3"/>
-          <p:cNvSpPr txBox="1"/>
-          <p:nvPr/>
-        </p:nvSpPr>
-        <p:spPr>
-          <a:xfrm>
-            <a:off x="777240" y="914400"/>
-            <a:ext cx="10637215" cy="274320"/>
-          </a:xfrm>
-          <a:prstGeom prst="rect">
-            <a:avLst/>
-          </a:prstGeom>
-          <a:noFill/>
-          <a:ln/>
-        </p:spPr>
-        <p:txBody>
-          <a:bodyPr wrap="square" lIns="0" tIns="0" rIns="0" bIns="0" rtlCol="0" anchor="ctr"/>
-          <a:lstStyle/>
-          <a:p>
-            <a:pPr indent="0" marL="0">
-              <a:buNone/>
-            </a:pPr>
-            <a:r>
-              <a:rPr lang="en-US" sz="1300" b="1" spc="100" kern="0" dirty="0">
-                <a:solidFill>
-                  <a:srgbClr val="E8722C"/>
-                </a:solidFill>
-                <a:latin typeface="Calibri" pitchFamily="34" charset="0"/>
-                <a:ea typeface="Calibri" pitchFamily="34" charset="-122"/>
-                <a:cs typeface="Calibri" pitchFamily="34" charset="-120"/>
-              </a:rPr>
-              <a:t>ESTIMATED IMPLEMENTATION COST (OPTIONAL)</a:t>
-            </a:r>
-            <a:endParaRPr lang="en-US" sz="1300" dirty="0"/>
-          </a:p>
-        </p:txBody>
-      </p:sp>
-      <p:sp>
-        <p:nvSpPr>
-          <p:cNvPr id="7" name="Text 4"/>
-          <p:cNvSpPr txBox="1"/>
-          <p:nvPr/>
-        </p:nvSpPr>
-        <p:spPr>
-          <a:xfrm>
-            <a:off x="777240" y="1188720"/>
-            <a:ext cx="10637215" cy="548640"/>
-          </a:xfrm>
-          <a:prstGeom prst="rect">
-            <a:avLst/>
-          </a:prstGeom>
-          <a:noFill/>
-          <a:ln/>
-        </p:spPr>
-        <p:txBody>
-          <a:bodyPr wrap="square" lIns="0" tIns="0" rIns="0" bIns="0" rtlCol="0" anchor="ctr"/>
-          <a:lstStyle/>
-          <a:p>
-            <a:pPr indent="0" marL="0">
-              <a:buNone/>
-            </a:pPr>
-            <a:r>
-              <a:rPr lang="en-US" sz="2600" b="1" dirty="0">
-                <a:solidFill>
-                  <a:srgbClr val="0F1B2D"/>
-                </a:solidFill>
-                <a:latin typeface="Cambria" pitchFamily="34" charset="0"/>
-                <a:ea typeface="Cambria" pitchFamily="34" charset="-122"/>
-                <a:cs typeface="Cambria" pitchFamily="34" charset="-120"/>
-              </a:rPr>
               <a:t>Built Mostly On Free &amp; Open Tiers</a:t>
             </a:r>
             <a:endParaRPr lang="en-US" sz="2600" dirty="0"/>
@@ -4610,7 +4244,7 @@
       </p:sp>
       <p:graphicFrame>
         <p:nvGraphicFramePr>
-          <p:cNvPr id="13" name="Table 0"/>
+          <p:cNvPr id="12" name="Table 0"/>
           <p:cNvGraphicFramePr>
             <a:graphicFrameLocks noGrp="1"/>
           </p:cNvGraphicFramePr>
@@ -5719,9 +5353,9 @@
 </p:sld>
 </file>
 
-<file path=ppt/slides/slide13.xml><?xml version="1.0" encoding="utf-8"?>
+<file path=ppt/slides/slide12.xml><?xml version="1.0" encoding="utf-8"?>
 <p:sld xmlns:a="http://schemas.openxmlformats.org/drawingml/2006/main" xmlns:r="http://schemas.openxmlformats.org/officeDocument/2006/relationships" xmlns:p="http://schemas.openxmlformats.org/presentationml/2006/main">
-  <p:cSld name="Slide 13">
+  <p:cSld name="Slide 12">
     <p:bg>
       <p:bgPr>
         <a:solidFill>
@@ -5839,7 +5473,7 @@
                 <a:ea typeface="Calibri" pitchFamily="34" charset="-122"/>
                 <a:cs typeface="Calibri" pitchFamily="34" charset="-120"/>
               </a:rPr>
-              <a:t>13 / 17</a:t>
+              <a:t>12 / 16</a:t>
             </a:r>
             <a:endParaRPr lang="en-US" sz="1100" dirty="0"/>
           </a:p>
@@ -6344,9 +5978,9 @@
 </p:sld>
 </file>
 
-<file path=ppt/slides/slide14.xml><?xml version="1.0" encoding="utf-8"?>
+<file path=ppt/slides/slide13.xml><?xml version="1.0" encoding="utf-8"?>
 <p:sld xmlns:a="http://schemas.openxmlformats.org/drawingml/2006/main" xmlns:r="http://schemas.openxmlformats.org/officeDocument/2006/relationships" xmlns:p="http://schemas.openxmlformats.org/presentationml/2006/main">
-  <p:cSld name="Slide 14">
+  <p:cSld name="Slide 13">
     <p:bg>
       <p:bgPr>
         <a:solidFill>
@@ -6464,7 +6098,7 @@
                 <a:ea typeface="Calibri" pitchFamily="34" charset="-122"/>
                 <a:cs typeface="Calibri" pitchFamily="34" charset="-120"/>
               </a:rPr>
-              <a:t>14 / 17</a:t>
+              <a:t>13 / 16</a:t>
             </a:r>
             <a:endParaRPr lang="en-US" sz="1100" dirty="0"/>
           </a:p>
@@ -6944,9 +6578,9 @@
 </p:sld>
 </file>
 
-<file path=ppt/slides/slide15.xml><?xml version="1.0" encoding="utf-8"?>
+<file path=ppt/slides/slide14.xml><?xml version="1.0" encoding="utf-8"?>
 <p:sld xmlns:a="http://schemas.openxmlformats.org/drawingml/2006/main" xmlns:r="http://schemas.openxmlformats.org/officeDocument/2006/relationships" xmlns:p="http://schemas.openxmlformats.org/presentationml/2006/main">
-  <p:cSld name="Slide 15">
+  <p:cSld name="Slide 14">
     <p:bg>
       <p:bgPr>
         <a:solidFill>
@@ -7064,7 +6698,7 @@
                 <a:ea typeface="Calibri" pitchFamily="34" charset="-122"/>
                 <a:cs typeface="Calibri" pitchFamily="34" charset="-120"/>
               </a:rPr>
-              <a:t>15 / 17</a:t>
+              <a:t>14 / 16</a:t>
             </a:r>
             <a:endParaRPr lang="en-US" sz="1100" dirty="0"/>
           </a:p>
@@ -7942,9 +7576,9 @@
 </p:sld>
 </file>
 
-<file path=ppt/slides/slide16.xml><?xml version="1.0" encoding="utf-8"?>
+<file path=ppt/slides/slide15.xml><?xml version="1.0" encoding="utf-8"?>
 <p:sld xmlns:a="http://schemas.openxmlformats.org/drawingml/2006/main" xmlns:r="http://schemas.openxmlformats.org/officeDocument/2006/relationships" xmlns:p="http://schemas.openxmlformats.org/presentationml/2006/main">
-  <p:cSld name="Slide 16">
+  <p:cSld name="Slide 15">
     <p:bg>
       <p:bgPr>
         <a:solidFill>
@@ -8062,7 +7696,7 @@
                 <a:ea typeface="Calibri" pitchFamily="34" charset="-122"/>
                 <a:cs typeface="Calibri" pitchFamily="34" charset="-120"/>
               </a:rPr>
-              <a:t>16 / 17</a:t>
+              <a:t>15 / 16</a:t>
             </a:r>
             <a:endParaRPr lang="en-US" sz="1100" dirty="0"/>
           </a:p>
@@ -8204,7 +7838,7 @@
       </p:sp>
       <p:graphicFrame>
         <p:nvGraphicFramePr>
-          <p:cNvPr id="17" name="Table 0"/>
+          <p:cNvPr id="16" name="Table 0"/>
           <p:cNvGraphicFramePr>
             <a:graphicFrameLocks noGrp="1"/>
           </p:cNvGraphicFramePr>
@@ -9546,9 +9180,9 @@
 </p:sld>
 </file>
 
-<file path=ppt/slides/slide17.xml><?xml version="1.0" encoding="utf-8"?>
+<file path=ppt/slides/slide16.xml><?xml version="1.0" encoding="utf-8"?>
 <p:sld xmlns:a="http://schemas.openxmlformats.org/drawingml/2006/main" xmlns:r="http://schemas.openxmlformats.org/officeDocument/2006/relationships" xmlns:p="http://schemas.openxmlformats.org/presentationml/2006/main">
-  <p:cSld name="Slide 17">
+  <p:cSld name="Slide 16">
     <p:bg>
       <p:bgPr>
         <a:solidFill>
@@ -9666,7 +9300,7 @@
                 <a:ea typeface="Calibri" pitchFamily="34" charset="-122"/>
                 <a:cs typeface="Calibri" pitchFamily="34" charset="-120"/>
               </a:rPr>
-              <a:t>17 / 17</a:t>
+              <a:t>16 / 16</a:t>
             </a:r>
             <a:endParaRPr lang="en-US" sz="1100" dirty="0"/>
           </a:p>
@@ -10255,7 +9889,7 @@
                 <a:ea typeface="Calibri" pitchFamily="34" charset="-122"/>
                 <a:cs typeface="Calibri" pitchFamily="34" charset="-120"/>
               </a:rPr>
-              <a:t>02 / 17</a:t>
+              <a:t>02 / 16</a:t>
             </a:r>
             <a:endParaRPr lang="en-US" sz="1100" dirty="0"/>
           </a:p>
@@ -11548,7 +11182,7 @@
                 <a:ea typeface="Calibri" pitchFamily="34" charset="-122"/>
                 <a:cs typeface="Calibri" pitchFamily="34" charset="-120"/>
               </a:rPr>
-              <a:t>03 / 17</a:t>
+              <a:t>03 / 16</a:t>
             </a:r>
             <a:endParaRPr lang="en-US" sz="1100" dirty="0"/>
           </a:p>
@@ -12692,7 +12326,7 @@
                 <a:ea typeface="Calibri" pitchFamily="34" charset="-122"/>
                 <a:cs typeface="Calibri" pitchFamily="34" charset="-120"/>
               </a:rPr>
-              <a:t>04 / 17</a:t>
+              <a:t>04 / 16</a:t>
             </a:r>
             <a:endParaRPr lang="en-US" sz="1100" dirty="0"/>
           </a:p>
@@ -14338,7 +13972,7 @@
                 <a:ea typeface="Calibri" pitchFamily="34" charset="-122"/>
                 <a:cs typeface="Calibri" pitchFamily="34" charset="-120"/>
               </a:rPr>
-              <a:t>05 / 17</a:t>
+              <a:t>05 / 16</a:t>
             </a:r>
             <a:endParaRPr lang="en-US" sz="1100" dirty="0"/>
           </a:p>
@@ -15330,7 +14964,7 @@
                 <a:ea typeface="Calibri" pitchFamily="34" charset="-122"/>
                 <a:cs typeface="Calibri" pitchFamily="34" charset="-120"/>
               </a:rPr>
-              <a:t>06 / 17</a:t>
+              <a:t>06 / 16</a:t>
             </a:r>
             <a:endParaRPr lang="en-US" sz="1100" dirty="0"/>
           </a:p>
@@ -16837,7 +16471,7 @@
                 <a:ea typeface="Calibri" pitchFamily="34" charset="-122"/>
                 <a:cs typeface="Calibri" pitchFamily="34" charset="-120"/>
               </a:rPr>
-              <a:t>07 / 17</a:t>
+              <a:t>07 / 16</a:t>
             </a:r>
             <a:endParaRPr lang="en-US" sz="1100" dirty="0"/>
           </a:p>
@@ -16910,7 +16544,7 @@
         </p:nvSpPr>
         <p:spPr>
           <a:xfrm>
-            <a:off x="777240" y="1188720"/>
+            <a:off x="777240" y="1143000"/>
             <a:ext cx="10637215" cy="548640"/>
           </a:xfrm>
           <a:prstGeom prst="rect">
@@ -16927,7 +16561,7 @@
               <a:buNone/>
             </a:pPr>
             <a:r>
-              <a:rPr lang="en-US" sz="2100" b="1" dirty="0">
+              <a:rPr lang="en-US" sz="2000" b="1" dirty="0">
                 <a:solidFill>
                   <a:srgbClr val="0F1B2D"/>
                 </a:solidFill>
@@ -16937,7 +16571,7 @@
               </a:rPr>
               <a:t>Features Offered By The Solution — Across The 4-Phase Model</a:t>
             </a:r>
-            <a:endParaRPr lang="en-US" sz="2100" dirty="0"/>
+            <a:endParaRPr lang="en-US" sz="2000" dirty="0"/>
           </a:p>
         </p:txBody>
       </p:sp>
@@ -16949,12 +16583,12 @@
         </p:nvSpPr>
         <p:spPr>
           <a:xfrm>
-            <a:off x="777240" y="1691640"/>
-            <a:ext cx="2556434" cy="4114800"/>
+            <a:off x="777240" y="1600200"/>
+            <a:ext cx="2330265" cy="4297680"/>
           </a:xfrm>
           <a:prstGeom prst="roundRect">
             <a:avLst>
-              <a:gd name="adj" fmla="val 2861"/>
+              <a:gd name="adj" fmla="val 3139"/>
             </a:avLst>
           </a:prstGeom>
           <a:solidFill>
@@ -16976,8 +16610,8 @@
         </p:nvSpPr>
         <p:spPr>
           <a:xfrm>
-            <a:off x="914400" y="1828800"/>
-            <a:ext cx="2282114" cy="274320"/>
+            <a:off x="905256" y="1719072"/>
+            <a:ext cx="2074233" cy="274320"/>
           </a:xfrm>
           <a:prstGeom prst="rect">
             <a:avLst/>
@@ -16993,14 +16627,14 @@
               <a:buNone/>
             </a:pPr>
             <a:r>
-              <a:rPr lang="en-US" sz="1400" b="1" dirty="0">
+              <a:rPr lang="en-US" sz="1350" b="1" dirty="0">
                 <a:solidFill>
                   <a:srgbClr val="5B6472"/>
                 </a:solidFill>
               </a:rPr>
               <a:t>Predict</a:t>
             </a:r>
-            <a:endParaRPr lang="en-US" sz="1400" dirty="0"/>
+            <a:endParaRPr lang="en-US" sz="1350" dirty="0"/>
           </a:p>
         </p:txBody>
       </p:sp>
@@ -17012,8 +16646,8 @@
         </p:nvSpPr>
         <p:spPr>
           <a:xfrm>
-            <a:off x="914400" y="2103120"/>
-            <a:ext cx="2282114" cy="228600"/>
+            <a:off x="905256" y="1965960"/>
+            <a:ext cx="2074233" cy="201168"/>
           </a:xfrm>
           <a:prstGeom prst="rect">
             <a:avLst/>
@@ -17029,14 +16663,14 @@
               <a:buNone/>
             </a:pPr>
             <a:r>
-              <a:rPr lang="en-US" sz="850" i="1" dirty="0">
+              <a:rPr lang="en-US" sz="800" i="1" dirty="0">
                 <a:solidFill>
                   <a:srgbClr val="8A93A3"/>
                 </a:solidFill>
               </a:rPr>
               <a:t>Designed, not yet built</a:t>
             </a:r>
-            <a:endParaRPr lang="en-US" sz="850" dirty="0"/>
+            <a:endParaRPr lang="en-US" sz="800" dirty="0"/>
           </a:p>
         </p:txBody>
       </p:sp>
@@ -17048,8 +16682,8 @@
         </p:nvSpPr>
         <p:spPr>
           <a:xfrm>
-            <a:off x="914400" y="2423160"/>
-            <a:ext cx="2282114" cy="2743200"/>
+            <a:off x="905256" y="2258568"/>
+            <a:ext cx="2074233" cy="3063240"/>
           </a:xfrm>
           <a:prstGeom prst="rect">
             <a:avLst/>
@@ -17069,14 +16703,14 @@
               <a:buChar char="○"/>
             </a:pPr>
             <a:r>
-              <a:rPr lang="en-US" sz="950" dirty="0">
+              <a:rPr lang="en-US" sz="900" dirty="0">
                 <a:solidFill>
                   <a:srgbClr val="5B6472"/>
                 </a:solidFill>
               </a:rPr>
               <a:t>Climate-signal dashboard — ENSO + seasonal rainfall outlook (NOAA, IMD)</a:t>
             </a:r>
-            <a:endParaRPr lang="en-US" sz="950" dirty="0"/>
+            <a:endParaRPr lang="en-US" sz="900" dirty="0"/>
           </a:p>
           <a:p>
             <a:pPr marL="342900" indent="-342900">
@@ -17087,14 +16721,14 @@
               <a:buChar char="○"/>
             </a:pPr>
             <a:r>
-              <a:rPr lang="en-US" sz="950" dirty="0">
+              <a:rPr lang="en-US" sz="900" dirty="0">
                 <a:solidFill>
                   <a:srgbClr val="5B6472"/>
                 </a:solidFill>
               </a:rPr>
               <a:t>Regional risk baseline per district</a:t>
             </a:r>
-            <a:endParaRPr lang="en-US" sz="950" dirty="0"/>
+            <a:endParaRPr lang="en-US" sz="900" dirty="0"/>
           </a:p>
           <a:p>
             <a:pPr marL="342900" indent="-342900">
@@ -17105,14 +16739,14 @@
               <a:buChar char="○"/>
             </a:pPr>
             <a:r>
-              <a:rPr lang="en-US" sz="950" dirty="0">
+              <a:rPr lang="en-US" sz="900" dirty="0">
                 <a:solidFill>
                   <a:srgbClr val="5B6472"/>
                 </a:solidFill>
               </a:rPr>
               <a:t>Historical disaster database for pattern matching</a:t>
             </a:r>
-            <a:endParaRPr lang="en-US" sz="950" dirty="0"/>
+            <a:endParaRPr lang="en-US" sz="900" dirty="0"/>
           </a:p>
         </p:txBody>
       </p:sp>
@@ -17124,8 +16758,8 @@
         </p:nvSpPr>
         <p:spPr>
           <a:xfrm>
-            <a:off x="914400" y="5440680"/>
-            <a:ext cx="2282114" cy="274320"/>
+            <a:off x="905256" y="5577840"/>
+            <a:ext cx="2074233" cy="256032"/>
           </a:xfrm>
           <a:prstGeom prst="rect">
             <a:avLst/>
@@ -17141,14 +16775,14 @@
               <a:buNone/>
             </a:pPr>
             <a:r>
-              <a:rPr lang="en-US" sz="850" dirty="0">
+              <a:rPr lang="en-US" sz="780" dirty="0">
                 <a:solidFill>
                   <a:srgbClr val="8A93A3"/>
                 </a:solidFill>
               </a:rPr>
               <a:t>8 items scoped — see Future Development</a:t>
             </a:r>
-            <a:endParaRPr lang="en-US" sz="850" dirty="0"/>
+            <a:endParaRPr lang="en-US" sz="780" dirty="0"/>
           </a:p>
         </p:txBody>
       </p:sp>
@@ -17160,8 +16794,8 @@
         </p:nvSpPr>
         <p:spPr>
           <a:xfrm>
-            <a:off x="3470834" y="1691640"/>
-            <a:ext cx="3195542" cy="54864"/>
+            <a:off x="3235521" y="1600200"/>
+            <a:ext cx="2796318" cy="50292"/>
           </a:xfrm>
           <a:prstGeom prst="rect">
             <a:avLst/>
@@ -17180,8 +16814,8 @@
         </p:nvSpPr>
         <p:spPr>
           <a:xfrm>
-            <a:off x="3470834" y="1746504"/>
-            <a:ext cx="3195542" cy="4059936"/>
+            <a:off x="3235521" y="1650492"/>
+            <a:ext cx="2796318" cy="4247388"/>
           </a:xfrm>
           <a:prstGeom prst="rect">
             <a:avLst/>
@@ -17200,8 +16834,8 @@
         </p:nvSpPr>
         <p:spPr>
           <a:xfrm>
-            <a:off x="3607994" y="1856232"/>
-            <a:ext cx="2921222" cy="274320"/>
+            <a:off x="3363537" y="1737360"/>
+            <a:ext cx="2540286" cy="274320"/>
           </a:xfrm>
           <a:prstGeom prst="rect">
             <a:avLst/>
@@ -17217,14 +16851,14 @@
               <a:buNone/>
             </a:pPr>
             <a:r>
-              <a:rPr lang="en-US" sz="1400" b="1" dirty="0">
+              <a:rPr lang="en-US" sz="1350" b="1" dirty="0">
                 <a:solidFill>
                   <a:srgbClr val="0E7490"/>
                 </a:solidFill>
               </a:rPr>
               <a:t>Prepare</a:t>
             </a:r>
-            <a:endParaRPr lang="en-US" sz="1400" dirty="0"/>
+            <a:endParaRPr lang="en-US" sz="1350" dirty="0"/>
           </a:p>
         </p:txBody>
       </p:sp>
@@ -17236,8 +16870,8 @@
         </p:nvSpPr>
         <p:spPr>
           <a:xfrm>
-            <a:off x="3607994" y="2194560"/>
-            <a:ext cx="2921222" cy="3474720"/>
+            <a:off x="3363537" y="2057400"/>
+            <a:ext cx="2540286" cy="3703320"/>
           </a:xfrm>
           <a:prstGeom prst="rect">
             <a:avLst/>
@@ -17251,441 +16885,387 @@
           <a:p>
             <a:pPr marL="342900" indent="-342900">
               <a:spcAft>
-                <a:spcPts val="400"/>
+                <a:spcPts val="600"/>
               </a:spcAft>
               <a:buSzPct val="100000"/>
               <a:buChar char="✓"/>
             </a:pPr>
             <a:r>
-              <a:rPr lang="en-US" sz="860" dirty="0">
+              <a:rPr lang="en-US" sz="830" dirty="0">
                 <a:solidFill>
                   <a:srgbClr val="3A4452"/>
                 </a:solidFill>
               </a:rPr>
               <a:t>7-day risk forecast across 8 cities (OpenWeatherMap)</a:t>
             </a:r>
-            <a:endParaRPr lang="en-US" sz="860" dirty="0"/>
+            <a:endParaRPr lang="en-US" sz="830" dirty="0"/>
           </a:p>
           <a:p>
             <a:pPr marL="342900" indent="-342900">
               <a:spcAft>
-                <a:spcPts val="400"/>
+                <a:spcPts val="600"/>
               </a:spcAft>
               <a:buSzPct val="100000"/>
               <a:buChar char="✓"/>
             </a:pPr>
             <a:r>
-              <a:rPr lang="en-US" sz="860" dirty="0">
+              <a:rPr lang="en-US" sz="830" dirty="0">
                 <a:solidFill>
                   <a:srgbClr val="3A4452"/>
                 </a:solidFill>
               </a:rPr>
               <a:t>AI-generated risk-escalation timeline</a:t>
             </a:r>
-            <a:endParaRPr lang="en-US" sz="860" dirty="0"/>
+            <a:endParaRPr lang="en-US" sz="830" dirty="0"/>
           </a:p>
           <a:p>
             <a:pPr marL="342900" indent="-342900">
               <a:spcAft>
-                <a:spcPts val="400"/>
+                <a:spcPts val="600"/>
               </a:spcAft>
               <a:buSzPct val="100000"/>
               <a:buChar char="✓"/>
             </a:pPr>
             <a:r>
-              <a:rPr lang="en-US" sz="860" dirty="0">
+              <a:rPr lang="en-US" sz="830" dirty="0">
                 <a:solidFill>
                   <a:srgbClr val="3A4452"/>
                 </a:solidFill>
               </a:rPr>
               <a:t>Gemini-drafted preparedness checklists per agency</a:t>
             </a:r>
-            <a:endParaRPr lang="en-US" sz="860" dirty="0"/>
+            <a:endParaRPr lang="en-US" sz="830" dirty="0"/>
           </a:p>
           <a:p>
             <a:pPr marL="342900" indent="-342900">
               <a:spcAft>
-                <a:spcPts val="400"/>
+                <a:spcPts val="600"/>
               </a:spcAft>
               <a:buSzPct val="100000"/>
               <a:buChar char="✓"/>
             </a:pPr>
             <a:r>
-              <a:rPr lang="en-US" sz="860" dirty="0">
+              <a:rPr lang="en-US" sz="830" dirty="0">
                 <a:solidFill>
                   <a:srgbClr val="3A4452"/>
                 </a:solidFill>
               </a:rPr>
-              <a:t>Persistent checklist UI — progress, deadlines, agency filters</a:t>
-            </a:r>
-            <a:endParaRPr lang="en-US" sz="860" dirty="0"/>
+              <a:t>Audience-tailored alert drafts — farmers, hospitals, NGOs, municipal corps — dispatched via WhatsApp + email</a:t>
+            </a:r>
+            <a:endParaRPr lang="en-US" sz="830" dirty="0"/>
           </a:p>
           <a:p>
             <a:pPr marL="342900" indent="-342900">
               <a:spcAft>
-                <a:spcPts val="400"/>
+                <a:spcPts val="600"/>
               </a:spcAft>
               <a:buSzPct val="100000"/>
               <a:buChar char="✓"/>
             </a:pPr>
             <a:r>
-              <a:rPr lang="en-US" sz="860" dirty="0">
+              <a:rPr lang="en-US" sz="830" dirty="0">
                 <a:solidFill>
                   <a:srgbClr val="3A4452"/>
                 </a:solidFill>
               </a:rPr>
-              <a:t>4 audience-tailored alert drafts per city — farmers, hospitals, NGOs, municipal corps</a:t>
-            </a:r>
-            <a:endParaRPr lang="en-US" sz="860" dirty="0"/>
+              <a:t>Confidence-based alerting — real agreement-ratio math, not a fabricated score</a:t>
+            </a:r>
+            <a:endParaRPr lang="en-US" sz="830" dirty="0"/>
           </a:p>
           <a:p>
             <a:pPr marL="342900" indent="-342900">
               <a:spcAft>
-                <a:spcPts val="400"/>
+                <a:spcPts val="600"/>
               </a:spcAft>
               <a:buSzPct val="100000"/>
               <a:buChar char="✓"/>
             </a:pPr>
             <a:r>
-              <a:rPr lang="en-US" sz="860" dirty="0">
+              <a:rPr lang="en-US" sz="830" dirty="0">
                 <a:solidFill>
                   <a:srgbClr val="3A4452"/>
                 </a:solidFill>
               </a:rPr>
-              <a:t>Manual alert dispatch — WhatsApp (WAHA) + email</a:t>
-            </a:r>
-            <a:endParaRPr lang="en-US" sz="860" dirty="0"/>
+              <a:t>Proactive evacuation-route pre-calculation (OSRM)</a:t>
+            </a:r>
+            <a:endParaRPr lang="en-US" sz="830" dirty="0"/>
           </a:p>
           <a:p>
             <a:pPr marL="342900" indent="-342900">
               <a:spcAft>
-                <a:spcPts val="400"/>
+                <a:spcPts val="600"/>
               </a:spcAft>
               <a:buSzPct val="100000"/>
               <a:buChar char="✓"/>
             </a:pPr>
             <a:r>
-              <a:rPr lang="en-US" sz="860" dirty="0">
+              <a:rPr lang="en-US" sz="830" dirty="0">
                 <a:solidFill>
                   <a:srgbClr val="3A4452"/>
                 </a:solidFill>
               </a:rPr>
-              <a:t>Confidence-based alerting — real agreement-ratio math, not a fabricated score</a:t>
-            </a:r>
-            <a:endParaRPr lang="en-US" sz="860" dirty="0"/>
-          </a:p>
+              <a:t>Source of Truth — forecast data-integrity audit</a:t>
+            </a:r>
+            <a:endParaRPr lang="en-US" sz="830" dirty="0"/>
+          </a:p>
+        </p:txBody>
+      </p:sp>
+      <p:sp>
+        <p:nvSpPr>
+          <p:cNvPr id="17" name="Shape 14"/>
+          <p:cNvSpPr/>
+          <p:nvPr/>
+        </p:nvSpPr>
+        <p:spPr>
+          <a:xfrm>
+            <a:off x="6159856" y="1600200"/>
+            <a:ext cx="2796318" cy="50292"/>
+          </a:xfrm>
+          <a:prstGeom prst="rect">
+            <a:avLst/>
+          </a:prstGeom>
+          <a:solidFill>
+            <a:srgbClr val="E8722C"/>
+          </a:solidFill>
+          <a:ln/>
+        </p:spPr>
+      </p:sp>
+      <p:sp>
+        <p:nvSpPr>
+          <p:cNvPr id="18" name="Shape 15"/>
+          <p:cNvSpPr/>
+          <p:nvPr/>
+        </p:nvSpPr>
+        <p:spPr>
+          <a:xfrm>
+            <a:off x="6159856" y="1650492"/>
+            <a:ext cx="2796318" cy="4247388"/>
+          </a:xfrm>
+          <a:prstGeom prst="rect">
+            <a:avLst/>
+          </a:prstGeom>
+          <a:solidFill>
+            <a:srgbClr val="FFFFFF"/>
+          </a:solidFill>
+          <a:ln/>
+        </p:spPr>
+      </p:sp>
+      <p:sp>
+        <p:nvSpPr>
+          <p:cNvPr id="19" name="Text 16"/>
+          <p:cNvSpPr txBox="1"/>
+          <p:nvPr/>
+        </p:nvSpPr>
+        <p:spPr>
+          <a:xfrm>
+            <a:off x="6287872" y="1737360"/>
+            <a:ext cx="2540286" cy="274320"/>
+          </a:xfrm>
+          <a:prstGeom prst="rect">
+            <a:avLst/>
+          </a:prstGeom>
+          <a:noFill/>
+          <a:ln/>
+        </p:spPr>
+        <p:txBody>
+          <a:bodyPr wrap="square" lIns="0" tIns="0" rIns="0" bIns="0" rtlCol="0" anchor="ctr"/>
+          <a:lstStyle/>
+          <a:p>
+            <a:pPr indent="0" marL="0">
+              <a:buNone/>
+            </a:pPr>
+            <a:r>
+              <a:rPr lang="en-US" sz="1350" b="1" dirty="0">
+                <a:solidFill>
+                  <a:srgbClr val="E8722C"/>
+                </a:solidFill>
+              </a:rPr>
+              <a:t>Respond</a:t>
+            </a:r>
+            <a:endParaRPr lang="en-US" sz="1350" dirty="0"/>
+          </a:p>
+        </p:txBody>
+      </p:sp>
+      <p:sp>
+        <p:nvSpPr>
+          <p:cNvPr id="20" name="Text 17"/>
+          <p:cNvSpPr txBox="1"/>
+          <p:nvPr/>
+        </p:nvSpPr>
+        <p:spPr>
+          <a:xfrm>
+            <a:off x="6287872" y="2057400"/>
+            <a:ext cx="2540286" cy="3703320"/>
+          </a:xfrm>
+          <a:prstGeom prst="rect">
+            <a:avLst/>
+          </a:prstGeom>
+          <a:noFill/>
+          <a:ln/>
+        </p:spPr>
+        <p:txBody>
+          <a:bodyPr wrap="square" lIns="0" tIns="0" rIns="0" bIns="0" rtlCol="0" anchor="t"/>
+          <a:lstStyle/>
           <a:p>
             <a:pPr marL="342900" indent="-342900">
               <a:spcAft>
-                <a:spcPts val="400"/>
+                <a:spcPts val="600"/>
               </a:spcAft>
               <a:buSzPct val="100000"/>
               <a:buChar char="✓"/>
             </a:pPr>
             <a:r>
-              <a:rPr lang="en-US" sz="860" dirty="0">
+              <a:rPr lang="en-US" sz="830" dirty="0">
                 <a:solidFill>
                   <a:srgbClr val="3A4452"/>
                 </a:solidFill>
               </a:rPr>
-              <a:t>Proactive evacuation-route pre-calculation (OSRM)</a:t>
-            </a:r>
-            <a:endParaRPr lang="en-US" sz="860" dirty="0"/>
+              <a:t>Interactive live incident map — Mapbox GL, evacuation zones</a:t>
+            </a:r>
+            <a:endParaRPr lang="en-US" sz="830" dirty="0"/>
           </a:p>
           <a:p>
             <a:pPr marL="342900" indent="-342900">
               <a:spcAft>
-                <a:spcPts val="400"/>
+                <a:spcPts val="600"/>
               </a:spcAft>
               <a:buSzPct val="100000"/>
               <a:buChar char="✓"/>
             </a:pPr>
             <a:r>
-              <a:rPr lang="en-US" sz="860" dirty="0">
+              <a:rPr lang="en-US" sz="830" dirty="0">
                 <a:solidFill>
                   <a:srgbClr val="3A4452"/>
                 </a:solidFill>
               </a:rPr>
-              <a:t>Source of Truth — forecast data-integrity audit (freshness, completeness, sufficiency)</a:t>
-            </a:r>
-            <a:endParaRPr lang="en-US" sz="860" dirty="0"/>
-          </a:p>
-        </p:txBody>
-      </p:sp>
-      <p:sp>
-        <p:nvSpPr>
-          <p:cNvPr id="17" name="Shape 14"/>
-          <p:cNvSpPr/>
-          <p:nvPr/>
-        </p:nvSpPr>
-        <p:spPr>
-          <a:xfrm>
-            <a:off x="6803536" y="1691640"/>
-            <a:ext cx="2812077" cy="54864"/>
-          </a:xfrm>
-          <a:prstGeom prst="rect">
-            <a:avLst/>
-          </a:prstGeom>
-          <a:solidFill>
-            <a:srgbClr val="E8722C"/>
-          </a:solidFill>
-          <a:ln/>
-        </p:spPr>
-      </p:sp>
-      <p:sp>
-        <p:nvSpPr>
-          <p:cNvPr id="18" name="Shape 15"/>
-          <p:cNvSpPr/>
-          <p:nvPr/>
-        </p:nvSpPr>
-        <p:spPr>
-          <a:xfrm>
-            <a:off x="6803536" y="1746504"/>
-            <a:ext cx="2812077" cy="4059936"/>
-          </a:xfrm>
-          <a:prstGeom prst="rect">
-            <a:avLst/>
-          </a:prstGeom>
-          <a:solidFill>
-            <a:srgbClr val="FFFFFF"/>
-          </a:solidFill>
-          <a:ln/>
-        </p:spPr>
-      </p:sp>
-      <p:sp>
-        <p:nvSpPr>
-          <p:cNvPr id="19" name="Text 16"/>
-          <p:cNvSpPr txBox="1"/>
-          <p:nvPr/>
-        </p:nvSpPr>
-        <p:spPr>
-          <a:xfrm>
-            <a:off x="6940696" y="1856232"/>
-            <a:ext cx="2537757" cy="274320"/>
-          </a:xfrm>
-          <a:prstGeom prst="rect">
-            <a:avLst/>
-          </a:prstGeom>
-          <a:noFill/>
-          <a:ln/>
-        </p:spPr>
-        <p:txBody>
-          <a:bodyPr wrap="square" lIns="0" tIns="0" rIns="0" bIns="0" rtlCol="0" anchor="ctr"/>
-          <a:lstStyle/>
-          <a:p>
-            <a:pPr indent="0" marL="0">
-              <a:buNone/>
-            </a:pPr>
-            <a:r>
-              <a:rPr lang="en-US" sz="1400" b="1" dirty="0">
-                <a:solidFill>
-                  <a:srgbClr val="E8722C"/>
-                </a:solidFill>
-              </a:rPr>
-              <a:t>Respond</a:t>
-            </a:r>
-            <a:endParaRPr lang="en-US" sz="1400" dirty="0"/>
-          </a:p>
-        </p:txBody>
-      </p:sp>
-      <p:sp>
-        <p:nvSpPr>
-          <p:cNvPr id="20" name="Text 17"/>
-          <p:cNvSpPr txBox="1"/>
-          <p:nvPr/>
-        </p:nvSpPr>
-        <p:spPr>
-          <a:xfrm>
-            <a:off x="6940696" y="2130552"/>
-            <a:ext cx="2537757" cy="228600"/>
-          </a:xfrm>
-          <a:prstGeom prst="rect">
-            <a:avLst/>
-          </a:prstGeom>
-          <a:noFill/>
-          <a:ln/>
-        </p:spPr>
-        <p:txBody>
-          <a:bodyPr wrap="square" lIns="0" tIns="0" rIns="0" bIns="0" rtlCol="0" anchor="ctr"/>
-          <a:lstStyle/>
-          <a:p>
-            <a:pPr indent="0" marL="0">
-              <a:buNone/>
-            </a:pPr>
-            <a:r>
-              <a:rPr lang="en-US" sz="850" i="1" dirty="0">
-                <a:solidFill>
-                  <a:srgbClr val="C77A3E"/>
-                </a:solidFill>
-              </a:rPr>
-              <a:t>16 capabilities — full list next slide →</a:t>
-            </a:r>
-            <a:endParaRPr lang="en-US" sz="850" dirty="0"/>
-          </a:p>
-        </p:txBody>
-      </p:sp>
-      <p:sp>
-        <p:nvSpPr>
-          <p:cNvPr id="21" name="Text 18"/>
-          <p:cNvSpPr txBox="1"/>
-          <p:nvPr/>
-        </p:nvSpPr>
-        <p:spPr>
-          <a:xfrm>
-            <a:off x="6940696" y="2441448"/>
-            <a:ext cx="2537757" cy="2606040"/>
-          </a:xfrm>
-          <a:prstGeom prst="rect">
-            <a:avLst/>
-          </a:prstGeom>
-          <a:noFill/>
-          <a:ln/>
-        </p:spPr>
-        <p:txBody>
-          <a:bodyPr wrap="square" lIns="0" tIns="0" rIns="0" bIns="0" rtlCol="0" anchor="t"/>
-          <a:lstStyle/>
+              <a:t>Gemini 2.5 Flash decision support with confidence scoring</a:t>
+            </a:r>
+            <a:endParaRPr lang="en-US" sz="830" dirty="0"/>
+          </a:p>
           <a:p>
             <a:pPr marL="342900" indent="-342900">
               <a:spcAft>
-                <a:spcPts val="500"/>
+                <a:spcPts val="600"/>
               </a:spcAft>
               <a:buSzPct val="100000"/>
               <a:buChar char="✓"/>
             </a:pPr>
             <a:r>
-              <a:rPr lang="en-US" sz="860" dirty="0">
+              <a:rPr lang="en-US" sz="830" dirty="0">
                 <a:solidFill>
                   <a:srgbClr val="3A4452"/>
                 </a:solidFill>
               </a:rPr>
-              <a:t>Interactive live incident map, Mapbox GL, with evacuation zones</a:t>
-            </a:r>
-            <a:endParaRPr lang="en-US" sz="860" dirty="0"/>
+              <a:t>Source of Truth — full incident data lineage, every AI output logged</a:t>
+            </a:r>
+            <a:endParaRPr lang="en-US" sz="830" dirty="0"/>
           </a:p>
           <a:p>
             <a:pPr marL="342900" indent="-342900">
               <a:spcAft>
-                <a:spcPts val="500"/>
+                <a:spcPts val="600"/>
               </a:spcAft>
               <a:buSzPct val="100000"/>
               <a:buChar char="✓"/>
             </a:pPr>
             <a:r>
-              <a:rPr lang="en-US" sz="860" dirty="0">
+              <a:rPr lang="en-US" sz="830" dirty="0">
                 <a:solidFill>
                   <a:srgbClr val="3A4452"/>
                 </a:solidFill>
               </a:rPr>
-              <a:t>Gemini 2.5 Flash decision support with confidence scoring</a:t>
-            </a:r>
-            <a:endParaRPr lang="en-US" sz="860" dirty="0"/>
+              <a:t>Deterministic cascade &amp; resource optimizer (Hamilton apportionment, not AI-guessed)</a:t>
+            </a:r>
+            <a:endParaRPr lang="en-US" sz="830" dirty="0"/>
           </a:p>
           <a:p>
             <a:pPr marL="342900" indent="-342900">
               <a:spcAft>
-                <a:spcPts val="500"/>
+                <a:spcPts val="600"/>
               </a:spcAft>
               <a:buSzPct val="100000"/>
               <a:buChar char="✓"/>
             </a:pPr>
             <a:r>
-              <a:rPr lang="en-US" sz="860" dirty="0">
+              <a:rPr lang="en-US" sz="830" dirty="0">
                 <a:solidFill>
                   <a:srgbClr val="3A4452"/>
                 </a:solidFill>
               </a:rPr>
-              <a:t>Source of Truth — full incident data lineage, every AI output logged</a:t>
-            </a:r>
-            <a:endParaRPr lang="en-US" sz="860" dirty="0"/>
+              <a:t>Satellite image + Sentinel-1 SAR cross-validation</a:t>
+            </a:r>
+            <a:endParaRPr lang="en-US" sz="830" dirty="0"/>
           </a:p>
           <a:p>
             <a:pPr marL="342900" indent="-342900">
               <a:spcAft>
-                <a:spcPts val="500"/>
+                <a:spcPts val="600"/>
               </a:spcAft>
               <a:buSzPct val="100000"/>
               <a:buChar char="✓"/>
             </a:pPr>
             <a:r>
-              <a:rPr lang="en-US" sz="860" dirty="0">
+              <a:rPr lang="en-US" sz="830" dirty="0">
                 <a:solidFill>
                   <a:srgbClr val="3A4452"/>
                 </a:solidFill>
               </a:rPr>
-              <a:t>Deterministic cascade &amp; resource optimizer (Hamilton apportionment)</a:t>
-            </a:r>
-            <a:endParaRPr lang="en-US" sz="860" dirty="0"/>
+              <a:t>Impact scoring — Hazard + Exposure + Vulnerability (0–100)</a:t>
+            </a:r>
+            <a:endParaRPr lang="en-US" sz="830" dirty="0"/>
           </a:p>
           <a:p>
             <a:pPr marL="342900" indent="-342900">
               <a:spcAft>
-                <a:spcPts val="500"/>
+                <a:spcPts val="600"/>
               </a:spcAft>
               <a:buSzPct val="100000"/>
               <a:buChar char="✓"/>
             </a:pPr>
             <a:r>
-              <a:rPr lang="en-US" sz="860" dirty="0">
+              <a:rPr lang="en-US" sz="830" dirty="0">
                 <a:solidFill>
                   <a:srgbClr val="3A4452"/>
                 </a:solidFill>
               </a:rPr>
-              <a:t>Satellite image + Sentinel-1 SAR cross-validation</a:t>
-            </a:r>
-            <a:endParaRPr lang="en-US" sz="860" dirty="0"/>
-          </a:p>
-        </p:txBody>
-      </p:sp>
-      <p:sp>
-        <p:nvSpPr>
-          <p:cNvPr id="22" name="Text 19"/>
-          <p:cNvSpPr txBox="1"/>
-          <p:nvPr/>
-        </p:nvSpPr>
-        <p:spPr>
-          <a:xfrm>
-            <a:off x="6940696" y="5303520"/>
-            <a:ext cx="2537757" cy="411480"/>
-          </a:xfrm>
-          <a:prstGeom prst="rect">
-            <a:avLst/>
-          </a:prstGeom>
-          <a:noFill/>
-          <a:ln/>
-        </p:spPr>
-        <p:txBody>
-          <a:bodyPr wrap="square" lIns="0" tIns="0" rIns="0" bIns="0" rtlCol="0" anchor="ctr"/>
-          <a:lstStyle/>
-          <a:p>
-            <a:pPr indent="0" marL="0">
-              <a:buNone/>
-            </a:pPr>
-            <a:r>
-              <a:rPr lang="en-US" sz="800" dirty="0">
-                <a:solidFill>
-                  <a:srgbClr val="C77A3E"/>
-                </a:solidFill>
-              </a:rPr>
-              <a:t>+11 more capabilities, including evacuation routing, phased response timeline, and causal-chain explanation</a:t>
-            </a:r>
-            <a:endParaRPr lang="en-US" sz="800" dirty="0"/>
-          </a:p>
-        </p:txBody>
-      </p:sp>
-      <p:sp>
-        <p:nvSpPr>
-          <p:cNvPr id="23" name="Shape 20"/>
+              <a:t>Phased response timeline — Immediate / Urgent / Sustained</a:t>
+            </a:r>
+            <a:endParaRPr lang="en-US" sz="830" dirty="0"/>
+          </a:p>
+          <a:p>
+            <a:pPr marL="342900" indent="-342900">
+              <a:spcAft>
+                <a:spcPts val="600"/>
+              </a:spcAft>
+              <a:buSzPct val="100000"/>
+              <a:buChar char="✓"/>
+            </a:pPr>
+            <a:r>
+              <a:rPr lang="en-US" sz="830" dirty="0">
+                <a:solidFill>
+                  <a:srgbClr val="3A4452"/>
+                </a:solidFill>
+              </a:rPr>
+              <a:t>Causal chain explanation flowchart</a:t>
+            </a:r>
+            <a:endParaRPr lang="en-US" sz="830" dirty="0"/>
+          </a:p>
+        </p:txBody>
+      </p:sp>
+      <p:sp>
+        <p:nvSpPr>
+          <p:cNvPr id="21" name="Shape 18"/>
           <p:cNvSpPr/>
           <p:nvPr/>
         </p:nvSpPr>
         <p:spPr>
           <a:xfrm>
-            <a:off x="9752773" y="1691640"/>
-            <a:ext cx="2556434" cy="4114800"/>
+            <a:off x="9084190" y="1600200"/>
+            <a:ext cx="2330265" cy="4297680"/>
           </a:xfrm>
           <a:prstGeom prst="roundRect">
             <a:avLst>
-              <a:gd name="adj" fmla="val 2861"/>
+              <a:gd name="adj" fmla="val 3139"/>
             </a:avLst>
           </a:prstGeom>
           <a:solidFill>
@@ -17701,86 +17281,86 @@
       </p:sp>
       <p:sp>
         <p:nvSpPr>
+          <p:cNvPr id="22" name="Text 19"/>
+          <p:cNvSpPr txBox="1"/>
+          <p:nvPr/>
+        </p:nvSpPr>
+        <p:spPr>
+          <a:xfrm>
+            <a:off x="9212206" y="1719072"/>
+            <a:ext cx="2074233" cy="274320"/>
+          </a:xfrm>
+          <a:prstGeom prst="rect">
+            <a:avLst/>
+          </a:prstGeom>
+          <a:noFill/>
+          <a:ln/>
+        </p:spPr>
+        <p:txBody>
+          <a:bodyPr wrap="square" lIns="0" tIns="0" rIns="0" bIns="0" rtlCol="0" anchor="ctr"/>
+          <a:lstStyle/>
+          <a:p>
+            <a:pPr indent="0" marL="0">
+              <a:buNone/>
+            </a:pPr>
+            <a:r>
+              <a:rPr lang="en-US" sz="1350" b="1" dirty="0">
+                <a:solidFill>
+                  <a:srgbClr val="5B6472"/>
+                </a:solidFill>
+              </a:rPr>
+              <a:t>Recover</a:t>
+            </a:r>
+            <a:endParaRPr lang="en-US" sz="1350" dirty="0"/>
+          </a:p>
+        </p:txBody>
+      </p:sp>
+      <p:sp>
+        <p:nvSpPr>
+          <p:cNvPr id="23" name="Text 20"/>
+          <p:cNvSpPr txBox="1"/>
+          <p:nvPr/>
+        </p:nvSpPr>
+        <p:spPr>
+          <a:xfrm>
+            <a:off x="9212206" y="1965960"/>
+            <a:ext cx="2074233" cy="201168"/>
+          </a:xfrm>
+          <a:prstGeom prst="rect">
+            <a:avLst/>
+          </a:prstGeom>
+          <a:noFill/>
+          <a:ln/>
+        </p:spPr>
+        <p:txBody>
+          <a:bodyPr wrap="square" lIns="0" tIns="0" rIns="0" bIns="0" rtlCol="0" anchor="ctr"/>
+          <a:lstStyle/>
+          <a:p>
+            <a:pPr indent="0" marL="0">
+              <a:buNone/>
+            </a:pPr>
+            <a:r>
+              <a:rPr lang="en-US" sz="800" i="1" dirty="0">
+                <a:solidFill>
+                  <a:srgbClr val="8A93A3"/>
+                </a:solidFill>
+              </a:rPr>
+              <a:t>Designed, not yet built</a:t>
+            </a:r>
+            <a:endParaRPr lang="en-US" sz="800" dirty="0"/>
+          </a:p>
+        </p:txBody>
+      </p:sp>
+      <p:sp>
+        <p:nvSpPr>
           <p:cNvPr id="24" name="Text 21"/>
           <p:cNvSpPr txBox="1"/>
           <p:nvPr/>
         </p:nvSpPr>
         <p:spPr>
           <a:xfrm>
-            <a:off x="9889933" y="1828800"/>
-            <a:ext cx="2282114" cy="274320"/>
-          </a:xfrm>
-          <a:prstGeom prst="rect">
-            <a:avLst/>
-          </a:prstGeom>
-          <a:noFill/>
-          <a:ln/>
-        </p:spPr>
-        <p:txBody>
-          <a:bodyPr wrap="square" lIns="0" tIns="0" rIns="0" bIns="0" rtlCol="0" anchor="ctr"/>
-          <a:lstStyle/>
-          <a:p>
-            <a:pPr indent="0" marL="0">
-              <a:buNone/>
-            </a:pPr>
-            <a:r>
-              <a:rPr lang="en-US" sz="1400" b="1" dirty="0">
-                <a:solidFill>
-                  <a:srgbClr val="5B6472"/>
-                </a:solidFill>
-              </a:rPr>
-              <a:t>Recover</a:t>
-            </a:r>
-            <a:endParaRPr lang="en-US" sz="1400" dirty="0"/>
-          </a:p>
-        </p:txBody>
-      </p:sp>
-      <p:sp>
-        <p:nvSpPr>
-          <p:cNvPr id="25" name="Text 22"/>
-          <p:cNvSpPr txBox="1"/>
-          <p:nvPr/>
-        </p:nvSpPr>
-        <p:spPr>
-          <a:xfrm>
-            <a:off x="9889933" y="2103120"/>
-            <a:ext cx="2282114" cy="228600"/>
-          </a:xfrm>
-          <a:prstGeom prst="rect">
-            <a:avLst/>
-          </a:prstGeom>
-          <a:noFill/>
-          <a:ln/>
-        </p:spPr>
-        <p:txBody>
-          <a:bodyPr wrap="square" lIns="0" tIns="0" rIns="0" bIns="0" rtlCol="0" anchor="ctr"/>
-          <a:lstStyle/>
-          <a:p>
-            <a:pPr indent="0" marL="0">
-              <a:buNone/>
-            </a:pPr>
-            <a:r>
-              <a:rPr lang="en-US" sz="850" i="1" dirty="0">
-                <a:solidFill>
-                  <a:srgbClr val="8A93A3"/>
-                </a:solidFill>
-              </a:rPr>
-              <a:t>Designed, not yet built</a:t>
-            </a:r>
-            <a:endParaRPr lang="en-US" sz="850" dirty="0"/>
-          </a:p>
-        </p:txBody>
-      </p:sp>
-      <p:sp>
-        <p:nvSpPr>
-          <p:cNvPr id="26" name="Text 23"/>
-          <p:cNvSpPr txBox="1"/>
-          <p:nvPr/>
-        </p:nvSpPr>
-        <p:spPr>
-          <a:xfrm>
-            <a:off x="9889933" y="2423160"/>
-            <a:ext cx="2282114" cy="2743200"/>
+            <a:off x="9212206" y="2258568"/>
+            <a:ext cx="2074233" cy="3063240"/>
           </a:xfrm>
           <a:prstGeom prst="rect">
             <a:avLst/>
@@ -17800,14 +17380,14 @@
               <a:buChar char="○"/>
             </a:pPr>
             <a:r>
-              <a:rPr lang="en-US" sz="950" dirty="0">
+              <a:rPr lang="en-US" sz="900" dirty="0">
                 <a:solidFill>
                   <a:srgbClr val="5B6472"/>
                 </a:solidFill>
               </a:rPr>
               <a:t>Before/after satellite damage comparison</a:t>
             </a:r>
-            <a:endParaRPr lang="en-US" sz="950" dirty="0"/>
+            <a:endParaRPr lang="en-US" sz="900" dirty="0"/>
           </a:p>
           <a:p>
             <a:pPr marL="342900" indent="-342900">
@@ -17818,14 +17398,14 @@
               <a:buChar char="○"/>
             </a:pPr>
             <a:r>
-              <a:rPr lang="en-US" sz="950" dirty="0">
+              <a:rPr lang="en-US" sz="900" dirty="0">
                 <a:solidFill>
                   <a:srgbClr val="5B6472"/>
                 </a:solidFill>
               </a:rPr>
               <a:t>Damage mapping + recovery priority sequencing</a:t>
             </a:r>
-            <a:endParaRPr lang="en-US" sz="950" dirty="0"/>
+            <a:endParaRPr lang="en-US" sz="900" dirty="0"/>
           </a:p>
           <a:p>
             <a:pPr marL="342900" indent="-342900">
@@ -17836,27 +17416,27 @@
               <a:buChar char="○"/>
             </a:pPr>
             <a:r>
-              <a:rPr lang="en-US" sz="950" dirty="0">
+              <a:rPr lang="en-US" sz="900" dirty="0">
                 <a:solidFill>
                   <a:srgbClr val="5B6472"/>
                 </a:solidFill>
               </a:rPr>
               <a:t>Resource &amp; cost estimation for rebuilding</a:t>
             </a:r>
-            <a:endParaRPr lang="en-US" sz="950" dirty="0"/>
-          </a:p>
-        </p:txBody>
-      </p:sp>
-      <p:sp>
-        <p:nvSpPr>
-          <p:cNvPr id="27" name="Text 24"/>
-          <p:cNvSpPr txBox="1"/>
-          <p:nvPr/>
-        </p:nvSpPr>
-        <p:spPr>
-          <a:xfrm>
-            <a:off x="9889933" y="5440680"/>
-            <a:ext cx="2282114" cy="274320"/>
+            <a:endParaRPr lang="en-US" sz="900" dirty="0"/>
+          </a:p>
+        </p:txBody>
+      </p:sp>
+      <p:sp>
+        <p:nvSpPr>
+          <p:cNvPr id="25" name="Text 22"/>
+          <p:cNvSpPr txBox="1"/>
+          <p:nvPr/>
+        </p:nvSpPr>
+        <p:spPr>
+          <a:xfrm>
+            <a:off x="9212206" y="5577840"/>
+            <a:ext cx="2074233" cy="256032"/>
           </a:xfrm>
           <a:prstGeom prst="rect">
             <a:avLst/>
@@ -17872,27 +17452,27 @@
               <a:buNone/>
             </a:pPr>
             <a:r>
-              <a:rPr lang="en-US" sz="850" dirty="0">
+              <a:rPr lang="en-US" sz="780" dirty="0">
                 <a:solidFill>
                   <a:srgbClr val="8A93A3"/>
                 </a:solidFill>
               </a:rPr>
               <a:t>12 items scoped — see Future Development</a:t>
             </a:r>
-            <a:endParaRPr lang="en-US" sz="850" dirty="0"/>
-          </a:p>
-        </p:txBody>
-      </p:sp>
-      <p:sp>
-        <p:nvSpPr>
-          <p:cNvPr id="28" name="Text 25"/>
-          <p:cNvSpPr txBox="1"/>
-          <p:nvPr/>
-        </p:nvSpPr>
-        <p:spPr>
-          <a:xfrm>
-            <a:off x="777240" y="5897880"/>
-            <a:ext cx="10637215" cy="365760"/>
+            <a:endParaRPr lang="en-US" sz="780" dirty="0"/>
+          </a:p>
+        </p:txBody>
+      </p:sp>
+      <p:sp>
+        <p:nvSpPr>
+          <p:cNvPr id="26" name="Text 23"/>
+          <p:cNvSpPr txBox="1"/>
+          <p:nvPr/>
+        </p:nvSpPr>
+        <p:spPr>
+          <a:xfrm>
+            <a:off x="777240" y="5989320"/>
+            <a:ext cx="10637215" cy="384048"/>
           </a:xfrm>
           <a:prstGeom prst="rect">
             <a:avLst/>
@@ -17908,14 +17488,14 @@
               <a:buNone/>
             </a:pPr>
             <a:r>
-              <a:rPr lang="en-US" sz="950" i="1" dirty="0">
+              <a:rPr lang="en-US" sz="880" i="1" dirty="0">
                 <a:solidFill>
                   <a:srgbClr val="8A8470"/>
                 </a:solidFill>
               </a:rPr>
-              <a:t>Predict and Recover are part of the 4-phase design (see The 4-Phase Model) but have no functionality built yet — only Prepare and Respond are shipped today.</a:t>
-            </a:r>
-            <a:endParaRPr lang="en-US" sz="950" dirty="0"/>
+              <a:t>Also built and running across every phase, shown live in the demo rather than listed per phase: 6-API live data fusion, real-time WebSocket updates, multi-language UI (vue-i18n). Predict and Recover have no functionality built yet — only Prepare and Respond are shipped today.</a:t>
+            </a:r>
+            <a:endParaRPr lang="en-US" sz="880" dirty="0"/>
           </a:p>
         </p:txBody>
       </p:sp>
@@ -17933,7 +17513,7 @@
     <p:bg>
       <p:bgPr>
         <a:solidFill>
-          <a:srgbClr val="F7F7F2"/>
+          <a:srgbClr val="0F1B2D"/>
         </a:solidFill>
       </p:bgPr>
     </p:bg>
@@ -18002,7 +17582,7 @@
             <a:r>
               <a:rPr lang="en-US" sz="1100" dirty="0">
                 <a:solidFill>
-                  <a:srgbClr val="9AA3B0"/>
+                  <a:srgbClr val="8A93A3"/>
                 </a:solidFill>
                 <a:latin typeface="Calibri" pitchFamily="34" charset="0"/>
                 <a:ea typeface="Calibri" pitchFamily="34" charset="-122"/>
@@ -18041,13 +17621,13 @@
             <a:r>
               <a:rPr lang="en-US" sz="1100" dirty="0">
                 <a:solidFill>
-                  <a:srgbClr val="9AA3B0"/>
+                  <a:srgbClr val="8A93A3"/>
                 </a:solidFill>
                 <a:latin typeface="Calibri" pitchFamily="34" charset="0"/>
                 <a:ea typeface="Calibri" pitchFamily="34" charset="-122"/>
                 <a:cs typeface="Calibri" pitchFamily="34" charset="-120"/>
               </a:rPr>
-              <a:t>08 / 17</a:t>
+              <a:t>08 / 16</a:t>
             </a:r>
             <a:endParaRPr lang="en-US" sz="1100" dirty="0"/>
           </a:p>
@@ -18106,7 +17686,7 @@
                 <a:ea typeface="Calibri" pitchFamily="34" charset="-122"/>
                 <a:cs typeface="Calibri" pitchFamily="34" charset="-120"/>
               </a:rPr>
-              <a:t>FEATURES — RESPOND PHASE</a:t>
+              <a:t>PROCESS FLOW DIAGRAM</a:t>
             </a:r>
             <a:endParaRPr lang="en-US" sz="1300" dirty="0"/>
           </a:p>
@@ -18121,7 +17701,7 @@
         <p:spPr>
           <a:xfrm>
             <a:off x="777240" y="1188720"/>
-            <a:ext cx="10637215" cy="548640"/>
+            <a:ext cx="10637215" cy="365760"/>
           </a:xfrm>
           <a:prstGeom prst="rect">
             <a:avLst/>
@@ -18133,21 +17713,21 @@
           <a:bodyPr wrap="square" lIns="0" tIns="0" rIns="0" bIns="0" rtlCol="0" anchor="ctr"/>
           <a:lstStyle/>
           <a:p>
-            <a:pPr indent="0" marL="0">
-              <a:buNone/>
-            </a:pPr>
-            <a:r>
-              <a:rPr lang="en-US" sz="2100" b="1" dirty="0">
-                <a:solidFill>
-                  <a:srgbClr val="0F1B2D"/>
+            <a:pPr algn="ctr" indent="0" marL="0">
+              <a:buNone/>
+            </a:pPr>
+            <a:r>
+              <a:rPr lang="en-US" sz="2000" b="1" dirty="0">
+                <a:solidFill>
+                  <a:srgbClr val="F3F4F2"/>
                 </a:solidFill>
                 <a:latin typeface="Cambria" pitchFamily="34" charset="0"/>
                 <a:ea typeface="Cambria" pitchFamily="34" charset="-122"/>
                 <a:cs typeface="Cambria" pitchFamily="34" charset="-120"/>
               </a:rPr>
-              <a:t>16 Capabilities, Live Today — The Respond Phase In Detail</a:t>
-            </a:r>
-            <a:endParaRPr lang="en-US" sz="2100" dirty="0"/>
+              <a:t>The Full Disaster Lifecycle, As Built</a:t>
+            </a:r>
+            <a:endParaRPr lang="en-US" sz="2000" dirty="0"/>
           </a:p>
         </p:txBody>
       </p:sp>
@@ -18160,1921 +17740,42 @@
         <p:spPr>
           <a:xfrm>
             <a:off x="777240" y="1691640"/>
-            <a:ext cx="2563292" cy="41148"/>
-          </a:xfrm>
-          <a:prstGeom prst="rect">
-            <a:avLst/>
+            <a:ext cx="10637215" cy="4480560"/>
+          </a:xfrm>
+          <a:prstGeom prst="roundRect">
+            <a:avLst>
+              <a:gd name="adj" fmla="val 1633"/>
+            </a:avLst>
           </a:prstGeom>
           <a:solidFill>
-            <a:srgbClr val="E8722C"/>
+            <a:srgbClr val="F7F7F2"/>
           </a:solidFill>
           <a:ln/>
         </p:spPr>
       </p:sp>
-      <p:sp>
-        <p:nvSpPr>
-          <p:cNvPr id="9" name="Shape 6"/>
-          <p:cNvSpPr/>
-          <p:nvPr/>
-        </p:nvSpPr>
-        <p:spPr>
-          <a:xfrm>
-            <a:off x="777240" y="1732788"/>
-            <a:ext cx="2563292" cy="880110"/>
-          </a:xfrm>
-          <a:prstGeom prst="rect">
-            <a:avLst/>
-          </a:prstGeom>
-          <a:solidFill>
-            <a:srgbClr val="FFFFFF"/>
-          </a:solidFill>
-          <a:ln/>
-        </p:spPr>
-      </p:sp>
-      <p:sp>
-        <p:nvSpPr>
-          <p:cNvPr id="10" name="Text 7"/>
-          <p:cNvSpPr txBox="1"/>
-          <p:nvPr/>
-        </p:nvSpPr>
-        <p:spPr>
-          <a:xfrm>
-            <a:off x="886968" y="1810512"/>
-            <a:ext cx="2343836" cy="365760"/>
-          </a:xfrm>
-          <a:prstGeom prst="rect">
-            <a:avLst/>
-          </a:prstGeom>
-          <a:noFill/>
-          <a:ln/>
-        </p:spPr>
-        <p:txBody>
-          <a:bodyPr wrap="square" lIns="0" tIns="0" rIns="0" bIns="0" rtlCol="0" anchor="t"/>
-          <a:lstStyle/>
-          <a:p>
-            <a:pPr indent="0" marL="0">
-              <a:buNone/>
-            </a:pPr>
-            <a:r>
-              <a:rPr lang="en-US" sz="1050" b="1" dirty="0">
-                <a:solidFill>
-                  <a:srgbClr val="0F1B2D"/>
-                </a:solidFill>
-                <a:latin typeface="Calibri" pitchFamily="34" charset="0"/>
-                <a:ea typeface="Calibri" pitchFamily="34" charset="-122"/>
-                <a:cs typeface="Calibri" pitchFamily="34" charset="-120"/>
-              </a:rPr>
-              <a:t>Multi-Source Live Ingestion</a:t>
-            </a:r>
-            <a:endParaRPr lang="en-US" sz="1050" dirty="0"/>
-          </a:p>
-        </p:txBody>
-      </p:sp>
-      <p:sp>
-        <p:nvSpPr>
-          <p:cNvPr id="11" name="Text 8"/>
-          <p:cNvSpPr txBox="1"/>
-          <p:nvPr/>
-        </p:nvSpPr>
-        <p:spPr>
-          <a:xfrm>
-            <a:off x="886968" y="2148840"/>
-            <a:ext cx="2343836" cy="372618"/>
-          </a:xfrm>
-          <a:prstGeom prst="rect">
-            <a:avLst/>
-          </a:prstGeom>
-          <a:noFill/>
-          <a:ln/>
-        </p:spPr>
-        <p:txBody>
-          <a:bodyPr wrap="square" lIns="0" tIns="0" rIns="0" bIns="0" rtlCol="0" anchor="t"/>
-          <a:lstStyle/>
-          <a:p>
-            <a:pPr indent="0" marL="0">
-              <a:buNone/>
-            </a:pPr>
-            <a:r>
-              <a:rPr lang="en-US" sz="830" dirty="0">
-                <a:solidFill>
-                  <a:srgbClr val="6B7684"/>
-                </a:solidFill>
-                <a:latin typeface="Calibri" pitchFamily="34" charset="0"/>
-                <a:ea typeface="Calibri" pitchFamily="34" charset="-122"/>
-                <a:cs typeface="Calibri" pitchFamily="34" charset="-120"/>
-              </a:rPr>
-              <a:t>6 APIs fused — NASA EONET, USGS, NOAA, GDACS, OpenWeatherMap, OSM/Overpass</a:t>
-            </a:r>
-            <a:endParaRPr lang="en-US" sz="830" dirty="0"/>
-          </a:p>
-        </p:txBody>
-      </p:sp>
-      <p:sp>
-        <p:nvSpPr>
-          <p:cNvPr id="12" name="Shape 9"/>
-          <p:cNvSpPr/>
-          <p:nvPr/>
-        </p:nvSpPr>
-        <p:spPr>
-          <a:xfrm>
-            <a:off x="3468548" y="1691640"/>
-            <a:ext cx="2563292" cy="41148"/>
-          </a:xfrm>
-          <a:prstGeom prst="rect">
-            <a:avLst/>
-          </a:prstGeom>
-          <a:solidFill>
-            <a:srgbClr val="E8722C"/>
-          </a:solidFill>
-          <a:ln/>
-        </p:spPr>
-      </p:sp>
-      <p:sp>
-        <p:nvSpPr>
-          <p:cNvPr id="13" name="Shape 10"/>
-          <p:cNvSpPr/>
-          <p:nvPr/>
-        </p:nvSpPr>
-        <p:spPr>
-          <a:xfrm>
-            <a:off x="3468548" y="1732788"/>
-            <a:ext cx="2563292" cy="880110"/>
-          </a:xfrm>
-          <a:prstGeom prst="rect">
-            <a:avLst/>
-          </a:prstGeom>
-          <a:solidFill>
-            <a:srgbClr val="FFFFFF"/>
-          </a:solidFill>
-          <a:ln/>
-        </p:spPr>
-      </p:sp>
-      <p:sp>
-        <p:nvSpPr>
-          <p:cNvPr id="14" name="Text 11"/>
-          <p:cNvSpPr txBox="1"/>
-          <p:nvPr/>
-        </p:nvSpPr>
-        <p:spPr>
-          <a:xfrm>
-            <a:off x="3578276" y="1810512"/>
-            <a:ext cx="2343836" cy="365760"/>
-          </a:xfrm>
-          <a:prstGeom prst="rect">
-            <a:avLst/>
-          </a:prstGeom>
-          <a:noFill/>
-          <a:ln/>
-        </p:spPr>
-        <p:txBody>
-          <a:bodyPr wrap="square" lIns="0" tIns="0" rIns="0" bIns="0" rtlCol="0" anchor="t"/>
-          <a:lstStyle/>
-          <a:p>
-            <a:pPr indent="0" marL="0">
-              <a:buNone/>
-            </a:pPr>
-            <a:r>
-              <a:rPr lang="en-US" sz="1050" b="1" dirty="0">
-                <a:solidFill>
-                  <a:srgbClr val="0F1B2D"/>
-                </a:solidFill>
-                <a:latin typeface="Calibri" pitchFamily="34" charset="0"/>
-                <a:ea typeface="Calibri" pitchFamily="34" charset="-122"/>
-                <a:cs typeface="Calibri" pitchFamily="34" charset="-120"/>
-              </a:rPr>
-              <a:t>Gemini 2.5 Flash Decision Support</a:t>
-            </a:r>
-            <a:endParaRPr lang="en-US" sz="1050" dirty="0"/>
-          </a:p>
-        </p:txBody>
-      </p:sp>
-      <p:sp>
-        <p:nvSpPr>
-          <p:cNvPr id="15" name="Text 12"/>
-          <p:cNvSpPr txBox="1"/>
-          <p:nvPr/>
-        </p:nvSpPr>
-        <p:spPr>
-          <a:xfrm>
-            <a:off x="3578276" y="2148840"/>
-            <a:ext cx="2343836" cy="372618"/>
-          </a:xfrm>
-          <a:prstGeom prst="rect">
-            <a:avLst/>
-          </a:prstGeom>
-          <a:noFill/>
-          <a:ln/>
-        </p:spPr>
-        <p:txBody>
-          <a:bodyPr wrap="square" lIns="0" tIns="0" rIns="0" bIns="0" rtlCol="0" anchor="t"/>
-          <a:lstStyle/>
-          <a:p>
-            <a:pPr indent="0" marL="0">
-              <a:buNone/>
-            </a:pPr>
-            <a:r>
-              <a:rPr lang="en-US" sz="830" dirty="0">
-                <a:solidFill>
-                  <a:srgbClr val="6B7684"/>
-                </a:solidFill>
-                <a:latin typeface="Calibri" pitchFamily="34" charset="0"/>
-                <a:ea typeface="Calibri" pitchFamily="34" charset="-122"/>
-                <a:cs typeface="Calibri" pitchFamily="34" charset="-120"/>
-              </a:rPr>
-              <a:t>Structured recommendations, resource deployment, tactical actions, confidence scoring</a:t>
-            </a:r>
-            <a:endParaRPr lang="en-US" sz="830" dirty="0"/>
-          </a:p>
-        </p:txBody>
-      </p:sp>
-      <p:sp>
-        <p:nvSpPr>
-          <p:cNvPr id="16" name="Shape 13"/>
-          <p:cNvSpPr/>
-          <p:nvPr/>
-        </p:nvSpPr>
-        <p:spPr>
-          <a:xfrm>
-            <a:off x="6159856" y="1691640"/>
-            <a:ext cx="2563292" cy="41148"/>
-          </a:xfrm>
-          <a:prstGeom prst="rect">
-            <a:avLst/>
-          </a:prstGeom>
-          <a:solidFill>
-            <a:srgbClr val="E8722C"/>
-          </a:solidFill>
-          <a:ln/>
-        </p:spPr>
-      </p:sp>
-      <p:sp>
-        <p:nvSpPr>
-          <p:cNvPr id="17" name="Shape 14"/>
-          <p:cNvSpPr/>
-          <p:nvPr/>
-        </p:nvSpPr>
-        <p:spPr>
-          <a:xfrm>
-            <a:off x="6159856" y="1732788"/>
-            <a:ext cx="2563292" cy="880110"/>
-          </a:xfrm>
-          <a:prstGeom prst="rect">
-            <a:avLst/>
-          </a:prstGeom>
-          <a:solidFill>
-            <a:srgbClr val="FFFFFF"/>
-          </a:solidFill>
-          <a:ln/>
-        </p:spPr>
-      </p:sp>
-      <p:sp>
-        <p:nvSpPr>
-          <p:cNvPr id="18" name="Text 15"/>
-          <p:cNvSpPr txBox="1"/>
-          <p:nvPr/>
-        </p:nvSpPr>
-        <p:spPr>
-          <a:xfrm>
-            <a:off x="6269584" y="1810512"/>
-            <a:ext cx="2343836" cy="365760"/>
-          </a:xfrm>
-          <a:prstGeom prst="rect">
-            <a:avLst/>
-          </a:prstGeom>
-          <a:noFill/>
-          <a:ln/>
-        </p:spPr>
-        <p:txBody>
-          <a:bodyPr wrap="square" lIns="0" tIns="0" rIns="0" bIns="0" rtlCol="0" anchor="t"/>
-          <a:lstStyle/>
-          <a:p>
-            <a:pPr indent="0" marL="0">
-              <a:buNone/>
-            </a:pPr>
-            <a:r>
-              <a:rPr lang="en-US" sz="1050" b="1" dirty="0">
-                <a:solidFill>
-                  <a:srgbClr val="0F1B2D"/>
-                </a:solidFill>
-                <a:latin typeface="Calibri" pitchFamily="34" charset="0"/>
-                <a:ea typeface="Calibri" pitchFamily="34" charset="-122"/>
-                <a:cs typeface="Calibri" pitchFamily="34" charset="-120"/>
-              </a:rPr>
-              <a:t>Interactive Live Incident Map</a:t>
-            </a:r>
-            <a:endParaRPr lang="en-US" sz="1050" dirty="0"/>
-          </a:p>
-        </p:txBody>
-      </p:sp>
-      <p:sp>
-        <p:nvSpPr>
-          <p:cNvPr id="19" name="Text 16"/>
-          <p:cNvSpPr txBox="1"/>
-          <p:nvPr/>
-        </p:nvSpPr>
-        <p:spPr>
-          <a:xfrm>
-            <a:off x="6269584" y="2148840"/>
-            <a:ext cx="2343836" cy="372618"/>
-          </a:xfrm>
-          <a:prstGeom prst="rect">
-            <a:avLst/>
-          </a:prstGeom>
-          <a:noFill/>
-          <a:ln/>
-        </p:spPr>
-        <p:txBody>
-          <a:bodyPr wrap="square" lIns="0" tIns="0" rIns="0" bIns="0" rtlCol="0" anchor="t"/>
-          <a:lstStyle/>
-          <a:p>
-            <a:pPr indent="0" marL="0">
-              <a:buNone/>
-            </a:pPr>
-            <a:r>
-              <a:rPr lang="en-US" sz="830" dirty="0">
-                <a:solidFill>
-                  <a:srgbClr val="6B7684"/>
-                </a:solidFill>
-                <a:latin typeface="Calibri" pitchFamily="34" charset="0"/>
-                <a:ea typeface="Calibri" pitchFamily="34" charset="-122"/>
-                <a:cs typeface="Calibri" pitchFamily="34" charset="-120"/>
-              </a:rPr>
-              <a:t>Mapbox GL real-time hazard boundaries, evacuation buffers, safe staging zones</a:t>
-            </a:r>
-            <a:endParaRPr lang="en-US" sz="830" dirty="0"/>
-          </a:p>
-        </p:txBody>
-      </p:sp>
-      <p:sp>
-        <p:nvSpPr>
-          <p:cNvPr id="20" name="Shape 17"/>
-          <p:cNvSpPr/>
-          <p:nvPr/>
-        </p:nvSpPr>
-        <p:spPr>
-          <a:xfrm>
-            <a:off x="8851163" y="1691640"/>
-            <a:ext cx="2563292" cy="41148"/>
-          </a:xfrm>
-          <a:prstGeom prst="rect">
-            <a:avLst/>
-          </a:prstGeom>
-          <a:solidFill>
-            <a:srgbClr val="E8722C"/>
-          </a:solidFill>
-          <a:ln/>
-        </p:spPr>
-      </p:sp>
-      <p:sp>
-        <p:nvSpPr>
-          <p:cNvPr id="21" name="Shape 18"/>
-          <p:cNvSpPr/>
-          <p:nvPr/>
-        </p:nvSpPr>
-        <p:spPr>
-          <a:xfrm>
-            <a:off x="8851163" y="1732788"/>
-            <a:ext cx="2563292" cy="880110"/>
-          </a:xfrm>
-          <a:prstGeom prst="rect">
-            <a:avLst/>
-          </a:prstGeom>
-          <a:solidFill>
-            <a:srgbClr val="FFFFFF"/>
-          </a:solidFill>
-          <a:ln/>
-        </p:spPr>
-      </p:sp>
-      <p:sp>
-        <p:nvSpPr>
-          <p:cNvPr id="22" name="Text 19"/>
-          <p:cNvSpPr txBox="1"/>
-          <p:nvPr/>
-        </p:nvSpPr>
-        <p:spPr>
-          <a:xfrm>
-            <a:off x="8960891" y="1810512"/>
-            <a:ext cx="2343836" cy="365760"/>
-          </a:xfrm>
-          <a:prstGeom prst="rect">
-            <a:avLst/>
-          </a:prstGeom>
-          <a:noFill/>
-          <a:ln/>
-        </p:spPr>
-        <p:txBody>
-          <a:bodyPr wrap="square" lIns="0" tIns="0" rIns="0" bIns="0" rtlCol="0" anchor="t"/>
-          <a:lstStyle/>
-          <a:p>
-            <a:pPr indent="0" marL="0">
-              <a:buNone/>
-            </a:pPr>
-            <a:r>
-              <a:rPr lang="en-US" sz="1050" b="1" dirty="0">
-                <a:solidFill>
-                  <a:srgbClr val="0F1B2D"/>
-                </a:solidFill>
-                <a:latin typeface="Calibri" pitchFamily="34" charset="0"/>
-                <a:ea typeface="Calibri" pitchFamily="34" charset="-122"/>
-                <a:cs typeface="Calibri" pitchFamily="34" charset="-120"/>
-              </a:rPr>
-              <a:t>Real-Time Alert Broadcasting</a:t>
-            </a:r>
-            <a:endParaRPr lang="en-US" sz="1050" dirty="0"/>
-          </a:p>
-        </p:txBody>
-      </p:sp>
-      <p:sp>
-        <p:nvSpPr>
-          <p:cNvPr id="23" name="Text 20"/>
-          <p:cNvSpPr txBox="1"/>
-          <p:nvPr/>
-        </p:nvSpPr>
-        <p:spPr>
-          <a:xfrm>
-            <a:off x="8960891" y="2148840"/>
-            <a:ext cx="2343836" cy="372618"/>
-          </a:xfrm>
-          <a:prstGeom prst="rect">
-            <a:avLst/>
-          </a:prstGeom>
-          <a:noFill/>
-          <a:ln/>
-        </p:spPr>
-        <p:txBody>
-          <a:bodyPr wrap="square" lIns="0" tIns="0" rIns="0" bIns="0" rtlCol="0" anchor="t"/>
-          <a:lstStyle/>
-          <a:p>
-            <a:pPr indent="0" marL="0">
-              <a:buNone/>
-            </a:pPr>
-            <a:r>
-              <a:rPr lang="en-US" sz="830" dirty="0">
-                <a:solidFill>
-                  <a:srgbClr val="6B7684"/>
-                </a:solidFill>
-                <a:latin typeface="Calibri" pitchFamily="34" charset="0"/>
-                <a:ea typeface="Calibri" pitchFamily="34" charset="-122"/>
-                <a:cs typeface="Calibri" pitchFamily="34" charset="-120"/>
-              </a:rPr>
-              <a:t>Audience-tailored email via Gmail SMTP + live WebSocket updates across the dashboard</a:t>
-            </a:r>
-            <a:endParaRPr lang="en-US" sz="830" dirty="0"/>
-          </a:p>
-        </p:txBody>
-      </p:sp>
-      <p:sp>
-        <p:nvSpPr>
-          <p:cNvPr id="24" name="Shape 21"/>
-          <p:cNvSpPr/>
-          <p:nvPr/>
-        </p:nvSpPr>
-        <p:spPr>
-          <a:xfrm>
-            <a:off x="777240" y="2740914"/>
-            <a:ext cx="2563292" cy="41148"/>
-          </a:xfrm>
-          <a:prstGeom prst="rect">
-            <a:avLst/>
-          </a:prstGeom>
-          <a:solidFill>
-            <a:srgbClr val="E8722C"/>
-          </a:solidFill>
-          <a:ln/>
-        </p:spPr>
-      </p:sp>
-      <p:sp>
-        <p:nvSpPr>
-          <p:cNvPr id="25" name="Shape 22"/>
-          <p:cNvSpPr/>
-          <p:nvPr/>
-        </p:nvSpPr>
-        <p:spPr>
-          <a:xfrm>
-            <a:off x="777240" y="2782062"/>
-            <a:ext cx="2563292" cy="880110"/>
-          </a:xfrm>
-          <a:prstGeom prst="rect">
-            <a:avLst/>
-          </a:prstGeom>
-          <a:solidFill>
-            <a:srgbClr val="FFFFFF"/>
-          </a:solidFill>
-          <a:ln/>
-        </p:spPr>
-      </p:sp>
-      <p:sp>
-        <p:nvSpPr>
-          <p:cNvPr id="26" name="Text 23"/>
-          <p:cNvSpPr txBox="1"/>
-          <p:nvPr/>
-        </p:nvSpPr>
-        <p:spPr>
-          <a:xfrm>
-            <a:off x="886968" y="2859786"/>
-            <a:ext cx="2343836" cy="365760"/>
-          </a:xfrm>
-          <a:prstGeom prst="rect">
-            <a:avLst/>
-          </a:prstGeom>
-          <a:noFill/>
-          <a:ln/>
-        </p:spPr>
-        <p:txBody>
-          <a:bodyPr wrap="square" lIns="0" tIns="0" rIns="0" bIns="0" rtlCol="0" anchor="t"/>
-          <a:lstStyle/>
-          <a:p>
-            <a:pPr indent="0" marL="0">
-              <a:buNone/>
-            </a:pPr>
-            <a:r>
-              <a:rPr lang="en-US" sz="1050" b="1" dirty="0">
-                <a:solidFill>
-                  <a:srgbClr val="0F1B2D"/>
-                </a:solidFill>
-                <a:latin typeface="Calibri" pitchFamily="34" charset="0"/>
-                <a:ea typeface="Calibri" pitchFamily="34" charset="-122"/>
-                <a:cs typeface="Calibri" pitchFamily="34" charset="-120"/>
-              </a:rPr>
-              <a:t>Historical Learning (RAG)</a:t>
-            </a:r>
-            <a:endParaRPr lang="en-US" sz="1050" dirty="0"/>
-          </a:p>
-        </p:txBody>
-      </p:sp>
-      <p:sp>
-        <p:nvSpPr>
-          <p:cNvPr id="27" name="Text 24"/>
-          <p:cNvSpPr txBox="1"/>
-          <p:nvPr/>
-        </p:nvSpPr>
-        <p:spPr>
-          <a:xfrm>
-            <a:off x="886968" y="3198114"/>
-            <a:ext cx="2343836" cy="372618"/>
-          </a:xfrm>
-          <a:prstGeom prst="rect">
-            <a:avLst/>
-          </a:prstGeom>
-          <a:noFill/>
-          <a:ln/>
-        </p:spPr>
-        <p:txBody>
-          <a:bodyPr wrap="square" lIns="0" tIns="0" rIns="0" bIns="0" rtlCol="0" anchor="t"/>
-          <a:lstStyle/>
-          <a:p>
-            <a:pPr indent="0" marL="0">
-              <a:buNone/>
-            </a:pPr>
-            <a:r>
-              <a:rPr lang="en-US" sz="830" dirty="0">
-                <a:solidFill>
-                  <a:srgbClr val="6B7684"/>
-                </a:solidFill>
-                <a:latin typeface="Calibri" pitchFamily="34" charset="0"/>
-                <a:ea typeface="Calibri" pitchFamily="34" charset="-122"/>
-                <a:cs typeface="Calibri" pitchFamily="34" charset="-120"/>
-              </a:rPr>
-              <a:t>Vertex AI embedding search matching telemetry to past incident precedents</a:t>
-            </a:r>
-            <a:endParaRPr lang="en-US" sz="830" dirty="0"/>
-          </a:p>
-        </p:txBody>
-      </p:sp>
-      <p:sp>
-        <p:nvSpPr>
-          <p:cNvPr id="28" name="Shape 25"/>
-          <p:cNvSpPr/>
-          <p:nvPr/>
-        </p:nvSpPr>
-        <p:spPr>
-          <a:xfrm>
-            <a:off x="3468548" y="2740914"/>
-            <a:ext cx="2563292" cy="41148"/>
-          </a:xfrm>
-          <a:prstGeom prst="rect">
-            <a:avLst/>
-          </a:prstGeom>
-          <a:solidFill>
-            <a:srgbClr val="E8722C"/>
-          </a:solidFill>
-          <a:ln/>
-        </p:spPr>
-      </p:sp>
-      <p:sp>
-        <p:nvSpPr>
-          <p:cNvPr id="29" name="Shape 26"/>
-          <p:cNvSpPr/>
-          <p:nvPr/>
-        </p:nvSpPr>
-        <p:spPr>
-          <a:xfrm>
-            <a:off x="3468548" y="2782062"/>
-            <a:ext cx="2563292" cy="880110"/>
-          </a:xfrm>
-          <a:prstGeom prst="rect">
-            <a:avLst/>
-          </a:prstGeom>
-          <a:solidFill>
-            <a:srgbClr val="FFFFFF"/>
-          </a:solidFill>
-          <a:ln/>
-        </p:spPr>
-      </p:sp>
-      <p:sp>
-        <p:nvSpPr>
-          <p:cNvPr id="30" name="Text 27"/>
-          <p:cNvSpPr txBox="1"/>
-          <p:nvPr/>
-        </p:nvSpPr>
-        <p:spPr>
-          <a:xfrm>
-            <a:off x="3578276" y="2859786"/>
-            <a:ext cx="2343836" cy="365760"/>
-          </a:xfrm>
-          <a:prstGeom prst="rect">
-            <a:avLst/>
-          </a:prstGeom>
-          <a:noFill/>
-          <a:ln/>
-        </p:spPr>
-        <p:txBody>
-          <a:bodyPr wrap="square" lIns="0" tIns="0" rIns="0" bIns="0" rtlCol="0" anchor="t"/>
-          <a:lstStyle/>
-          <a:p>
-            <a:pPr indent="0" marL="0">
-              <a:buNone/>
-            </a:pPr>
-            <a:r>
-              <a:rPr lang="en-US" sz="1050" b="1" dirty="0">
-                <a:solidFill>
-                  <a:srgbClr val="0F1B2D"/>
-                </a:solidFill>
-                <a:latin typeface="Calibri" pitchFamily="34" charset="0"/>
-                <a:ea typeface="Calibri" pitchFamily="34" charset="-122"/>
-                <a:cs typeface="Calibri" pitchFamily="34" charset="-120"/>
-              </a:rPr>
-              <a:t>Interactive 8-Tab Command Center</a:t>
-            </a:r>
-            <a:endParaRPr lang="en-US" sz="1050" dirty="0"/>
-          </a:p>
-        </p:txBody>
-      </p:sp>
-      <p:sp>
-        <p:nvSpPr>
-          <p:cNvPr id="31" name="Text 28"/>
-          <p:cNvSpPr txBox="1"/>
-          <p:nvPr/>
-        </p:nvSpPr>
-        <p:spPr>
-          <a:xfrm>
-            <a:off x="3578276" y="3198114"/>
-            <a:ext cx="2343836" cy="372618"/>
-          </a:xfrm>
-          <a:prstGeom prst="rect">
-            <a:avLst/>
-          </a:prstGeom>
-          <a:noFill/>
-          <a:ln/>
-        </p:spPr>
-        <p:txBody>
-          <a:bodyPr wrap="square" lIns="0" tIns="0" rIns="0" bIns="0" rtlCol="0" anchor="t"/>
-          <a:lstStyle/>
-          <a:p>
-            <a:pPr indent="0" marL="0">
-              <a:buNone/>
-            </a:pPr>
-            <a:r>
-              <a:rPr lang="en-US" sz="830" dirty="0">
-                <a:solidFill>
-                  <a:srgbClr val="6B7684"/>
-                </a:solidFill>
-                <a:latin typeface="Calibri" pitchFamily="34" charset="0"/>
-                <a:ea typeface="Calibri" pitchFamily="34" charset="-122"/>
-                <a:cs typeface="Calibri" pitchFamily="34" charset="-120"/>
-              </a:rPr>
-              <a:t>Dedicated operational workspace for every hazard type</a:t>
-            </a:r>
-            <a:endParaRPr lang="en-US" sz="830" dirty="0"/>
-          </a:p>
-        </p:txBody>
-      </p:sp>
-      <p:sp>
-        <p:nvSpPr>
-          <p:cNvPr id="32" name="Shape 29"/>
-          <p:cNvSpPr/>
-          <p:nvPr/>
-        </p:nvSpPr>
-        <p:spPr>
-          <a:xfrm>
-            <a:off x="6159856" y="2740914"/>
-            <a:ext cx="2563292" cy="41148"/>
-          </a:xfrm>
-          <a:prstGeom prst="rect">
-            <a:avLst/>
-          </a:prstGeom>
-          <a:solidFill>
-            <a:srgbClr val="E8722C"/>
-          </a:solidFill>
-          <a:ln/>
-        </p:spPr>
-      </p:sp>
-      <p:sp>
-        <p:nvSpPr>
-          <p:cNvPr id="33" name="Shape 30"/>
-          <p:cNvSpPr/>
-          <p:nvPr/>
-        </p:nvSpPr>
-        <p:spPr>
-          <a:xfrm>
-            <a:off x="6159856" y="2782062"/>
-            <a:ext cx="2563292" cy="880110"/>
-          </a:xfrm>
-          <a:prstGeom prst="rect">
-            <a:avLst/>
-          </a:prstGeom>
-          <a:solidFill>
-            <a:srgbClr val="FFFFFF"/>
-          </a:solidFill>
-          <a:ln/>
-        </p:spPr>
-      </p:sp>
-      <p:sp>
-        <p:nvSpPr>
-          <p:cNvPr id="34" name="Text 31"/>
-          <p:cNvSpPr txBox="1"/>
-          <p:nvPr/>
-        </p:nvSpPr>
-        <p:spPr>
-          <a:xfrm>
-            <a:off x="6269584" y="2859786"/>
-            <a:ext cx="2343836" cy="365760"/>
-          </a:xfrm>
-          <a:prstGeom prst="rect">
-            <a:avLst/>
-          </a:prstGeom>
-          <a:noFill/>
-          <a:ln/>
-        </p:spPr>
-        <p:txBody>
-          <a:bodyPr wrap="square" lIns="0" tIns="0" rIns="0" bIns="0" rtlCol="0" anchor="t"/>
-          <a:lstStyle/>
-          <a:p>
-            <a:pPr indent="0" marL="0">
-              <a:buNone/>
-            </a:pPr>
-            <a:r>
-              <a:rPr lang="en-US" sz="1050" b="1" dirty="0">
-                <a:solidFill>
-                  <a:srgbClr val="0F1B2D"/>
-                </a:solidFill>
-                <a:latin typeface="Calibri" pitchFamily="34" charset="0"/>
-                <a:ea typeface="Calibri" pitchFamily="34" charset="-122"/>
-                <a:cs typeface="Calibri" pitchFamily="34" charset="-120"/>
-              </a:rPr>
-              <a:t>Source of Truth (Data Lineage)</a:t>
-            </a:r>
-            <a:endParaRPr lang="en-US" sz="1050" dirty="0"/>
-          </a:p>
-        </p:txBody>
-      </p:sp>
-      <p:sp>
-        <p:nvSpPr>
-          <p:cNvPr id="35" name="Text 32"/>
-          <p:cNvSpPr txBox="1"/>
-          <p:nvPr/>
-        </p:nvSpPr>
-        <p:spPr>
-          <a:xfrm>
-            <a:off x="6269584" y="3198114"/>
-            <a:ext cx="2343836" cy="372618"/>
-          </a:xfrm>
-          <a:prstGeom prst="rect">
-            <a:avLst/>
-          </a:prstGeom>
-          <a:noFill/>
-          <a:ln/>
-        </p:spPr>
-        <p:txBody>
-          <a:bodyPr wrap="square" lIns="0" tIns="0" rIns="0" bIns="0" rtlCol="0" anchor="t"/>
-          <a:lstStyle/>
-          <a:p>
-            <a:pPr indent="0" marL="0">
-              <a:buNone/>
-            </a:pPr>
-            <a:r>
-              <a:rPr lang="en-US" sz="830" dirty="0">
-                <a:solidFill>
-                  <a:srgbClr val="6B7684"/>
-                </a:solidFill>
-                <a:latin typeface="Calibri" pitchFamily="34" charset="0"/>
-                <a:ea typeface="Calibri" pitchFamily="34" charset="-122"/>
-                <a:cs typeface="Calibri" pitchFamily="34" charset="-120"/>
-              </a:rPr>
-              <a:t>4-layer lineage — raw → validated → enriched → stored — every AI output logged</a:t>
-            </a:r>
-            <a:endParaRPr lang="en-US" sz="830" dirty="0"/>
-          </a:p>
-        </p:txBody>
-      </p:sp>
-      <p:sp>
-        <p:nvSpPr>
-          <p:cNvPr id="36" name="Shape 33"/>
-          <p:cNvSpPr/>
-          <p:nvPr/>
-        </p:nvSpPr>
-        <p:spPr>
-          <a:xfrm>
-            <a:off x="8851163" y="2740914"/>
-            <a:ext cx="2563292" cy="41148"/>
-          </a:xfrm>
-          <a:prstGeom prst="rect">
-            <a:avLst/>
-          </a:prstGeom>
-          <a:solidFill>
-            <a:srgbClr val="E8722C"/>
-          </a:solidFill>
-          <a:ln/>
-        </p:spPr>
-      </p:sp>
-      <p:sp>
-        <p:nvSpPr>
-          <p:cNvPr id="37" name="Shape 34"/>
-          <p:cNvSpPr/>
-          <p:nvPr/>
-        </p:nvSpPr>
-        <p:spPr>
-          <a:xfrm>
-            <a:off x="8851163" y="2782062"/>
-            <a:ext cx="2563292" cy="880110"/>
-          </a:xfrm>
-          <a:prstGeom prst="rect">
-            <a:avLst/>
-          </a:prstGeom>
-          <a:solidFill>
-            <a:srgbClr val="FFFFFF"/>
-          </a:solidFill>
-          <a:ln/>
-        </p:spPr>
-      </p:sp>
-      <p:sp>
-        <p:nvSpPr>
-          <p:cNvPr id="38" name="Text 35"/>
-          <p:cNvSpPr txBox="1"/>
-          <p:nvPr/>
-        </p:nvSpPr>
-        <p:spPr>
-          <a:xfrm>
-            <a:off x="8960891" y="2859786"/>
-            <a:ext cx="2343836" cy="365760"/>
-          </a:xfrm>
-          <a:prstGeom prst="rect">
-            <a:avLst/>
-          </a:prstGeom>
-          <a:noFill/>
-          <a:ln/>
-        </p:spPr>
-        <p:txBody>
-          <a:bodyPr wrap="square" lIns="0" tIns="0" rIns="0" bIns="0" rtlCol="0" anchor="t"/>
-          <a:lstStyle/>
-          <a:p>
-            <a:pPr indent="0" marL="0">
-              <a:buNone/>
-            </a:pPr>
-            <a:r>
-              <a:rPr lang="en-US" sz="1050" b="1" dirty="0">
-                <a:solidFill>
-                  <a:srgbClr val="0F1B2D"/>
-                </a:solidFill>
-                <a:latin typeface="Calibri" pitchFamily="34" charset="0"/>
-                <a:ea typeface="Calibri" pitchFamily="34" charset="-122"/>
-                <a:cs typeface="Calibri" pitchFamily="34" charset="-120"/>
-              </a:rPr>
-              <a:t>Cascade &amp; Resource Optimizer</a:t>
-            </a:r>
-            <a:endParaRPr lang="en-US" sz="1050" dirty="0"/>
-          </a:p>
-        </p:txBody>
-      </p:sp>
-      <p:sp>
-        <p:nvSpPr>
-          <p:cNvPr id="39" name="Text 36"/>
-          <p:cNvSpPr txBox="1"/>
-          <p:nvPr/>
-        </p:nvSpPr>
-        <p:spPr>
-          <a:xfrm>
-            <a:off x="8960891" y="3198114"/>
-            <a:ext cx="2343836" cy="372618"/>
-          </a:xfrm>
-          <a:prstGeom prst="rect">
-            <a:avLst/>
-          </a:prstGeom>
-          <a:noFill/>
-          <a:ln/>
-        </p:spPr>
-        <p:txBody>
-          <a:bodyPr wrap="square" lIns="0" tIns="0" rIns="0" bIns="0" rtlCol="0" anchor="t"/>
-          <a:lstStyle/>
-          <a:p>
-            <a:pPr indent="0" marL="0">
-              <a:buNone/>
-            </a:pPr>
-            <a:r>
-              <a:rPr lang="en-US" sz="830" dirty="0">
-                <a:solidFill>
-                  <a:srgbClr val="6B7684"/>
-                </a:solidFill>
-                <a:latin typeface="Calibri" pitchFamily="34" charset="0"/>
-                <a:ea typeface="Calibri" pitchFamily="34" charset="-122"/>
-                <a:cs typeface="Calibri" pitchFamily="34" charset="-120"/>
-              </a:rPr>
-              <a:t>Deterministic Hamilton-apportionment allocation — no AI guesswork or rounding drift</a:t>
-            </a:r>
-            <a:endParaRPr lang="en-US" sz="830" dirty="0"/>
-          </a:p>
-        </p:txBody>
-      </p:sp>
-      <p:sp>
-        <p:nvSpPr>
-          <p:cNvPr id="40" name="Shape 37"/>
-          <p:cNvSpPr/>
-          <p:nvPr/>
-        </p:nvSpPr>
-        <p:spPr>
-          <a:xfrm>
-            <a:off x="777240" y="3790188"/>
-            <a:ext cx="2563292" cy="41148"/>
-          </a:xfrm>
-          <a:prstGeom prst="rect">
-            <a:avLst/>
-          </a:prstGeom>
-          <a:solidFill>
-            <a:srgbClr val="E8722C"/>
-          </a:solidFill>
-          <a:ln/>
-        </p:spPr>
-      </p:sp>
-      <p:sp>
-        <p:nvSpPr>
-          <p:cNvPr id="41" name="Shape 38"/>
-          <p:cNvSpPr/>
-          <p:nvPr/>
-        </p:nvSpPr>
-        <p:spPr>
-          <a:xfrm>
-            <a:off x="777240" y="3831336"/>
-            <a:ext cx="2563292" cy="880110"/>
-          </a:xfrm>
-          <a:prstGeom prst="rect">
-            <a:avLst/>
-          </a:prstGeom>
-          <a:solidFill>
-            <a:srgbClr val="FFFFFF"/>
-          </a:solidFill>
-          <a:ln/>
-        </p:spPr>
-      </p:sp>
-      <p:sp>
-        <p:nvSpPr>
-          <p:cNvPr id="42" name="Text 39"/>
-          <p:cNvSpPr txBox="1"/>
-          <p:nvPr/>
-        </p:nvSpPr>
-        <p:spPr>
-          <a:xfrm>
-            <a:off x="886968" y="3909060"/>
-            <a:ext cx="2343836" cy="365760"/>
-          </a:xfrm>
-          <a:prstGeom prst="rect">
-            <a:avLst/>
-          </a:prstGeom>
-          <a:noFill/>
-          <a:ln/>
-        </p:spPr>
-        <p:txBody>
-          <a:bodyPr wrap="square" lIns="0" tIns="0" rIns="0" bIns="0" rtlCol="0" anchor="t"/>
-          <a:lstStyle/>
-          <a:p>
-            <a:pPr indent="0" marL="0">
-              <a:buNone/>
-            </a:pPr>
-            <a:r>
-              <a:rPr lang="en-US" sz="1050" b="1" dirty="0">
-                <a:solidFill>
-                  <a:srgbClr val="0F1B2D"/>
-                </a:solidFill>
-                <a:latin typeface="Calibri" pitchFamily="34" charset="0"/>
-                <a:ea typeface="Calibri" pitchFamily="34" charset="-122"/>
-                <a:cs typeface="Calibri" pitchFamily="34" charset="-120"/>
-              </a:rPr>
-              <a:t>Impact Scoring</a:t>
-            </a:r>
-            <a:endParaRPr lang="en-US" sz="1050" dirty="0"/>
-          </a:p>
-        </p:txBody>
-      </p:sp>
-      <p:sp>
-        <p:nvSpPr>
-          <p:cNvPr id="43" name="Text 40"/>
-          <p:cNvSpPr txBox="1"/>
-          <p:nvPr/>
-        </p:nvSpPr>
-        <p:spPr>
-          <a:xfrm>
-            <a:off x="886968" y="4247388"/>
-            <a:ext cx="2343836" cy="372618"/>
-          </a:xfrm>
-          <a:prstGeom prst="rect">
-            <a:avLst/>
-          </a:prstGeom>
-          <a:noFill/>
-          <a:ln/>
-        </p:spPr>
-        <p:txBody>
-          <a:bodyPr wrap="square" lIns="0" tIns="0" rIns="0" bIns="0" rtlCol="0" anchor="t"/>
-          <a:lstStyle/>
-          <a:p>
-            <a:pPr indent="0" marL="0">
-              <a:buNone/>
-            </a:pPr>
-            <a:r>
-              <a:rPr lang="en-US" sz="830" dirty="0">
-                <a:solidFill>
-                  <a:srgbClr val="6B7684"/>
-                </a:solidFill>
-                <a:latin typeface="Calibri" pitchFamily="34" charset="0"/>
-                <a:ea typeface="Calibri" pitchFamily="34" charset="-122"/>
-                <a:cs typeface="Calibri" pitchFamily="34" charset="-120"/>
-              </a:rPr>
-              <a:t>Hazard + Exposure + Vulnerability, quantified 0–100</a:t>
-            </a:r>
-            <a:endParaRPr lang="en-US" sz="830" dirty="0"/>
-          </a:p>
-        </p:txBody>
-      </p:sp>
-      <p:sp>
-        <p:nvSpPr>
-          <p:cNvPr id="44" name="Shape 41"/>
-          <p:cNvSpPr/>
-          <p:nvPr/>
-        </p:nvSpPr>
-        <p:spPr>
-          <a:xfrm>
-            <a:off x="3468548" y="3790188"/>
-            <a:ext cx="2563292" cy="41148"/>
-          </a:xfrm>
-          <a:prstGeom prst="rect">
-            <a:avLst/>
-          </a:prstGeom>
-          <a:solidFill>
-            <a:srgbClr val="E8722C"/>
-          </a:solidFill>
-          <a:ln/>
-        </p:spPr>
-      </p:sp>
-      <p:sp>
-        <p:nvSpPr>
-          <p:cNvPr id="45" name="Shape 42"/>
-          <p:cNvSpPr/>
-          <p:nvPr/>
-        </p:nvSpPr>
-        <p:spPr>
-          <a:xfrm>
-            <a:off x="3468548" y="3831336"/>
-            <a:ext cx="2563292" cy="880110"/>
-          </a:xfrm>
-          <a:prstGeom prst="rect">
-            <a:avLst/>
-          </a:prstGeom>
-          <a:solidFill>
-            <a:srgbClr val="FFFFFF"/>
-          </a:solidFill>
-          <a:ln/>
-        </p:spPr>
-      </p:sp>
-      <p:sp>
-        <p:nvSpPr>
-          <p:cNvPr id="46" name="Text 43"/>
-          <p:cNvSpPr txBox="1"/>
-          <p:nvPr/>
-        </p:nvSpPr>
-        <p:spPr>
-          <a:xfrm>
-            <a:off x="3578276" y="3909060"/>
-            <a:ext cx="2343836" cy="365760"/>
-          </a:xfrm>
-          <a:prstGeom prst="rect">
-            <a:avLst/>
-          </a:prstGeom>
-          <a:noFill/>
-          <a:ln/>
-        </p:spPr>
-        <p:txBody>
-          <a:bodyPr wrap="square" lIns="0" tIns="0" rIns="0" bIns="0" rtlCol="0" anchor="t"/>
-          <a:lstStyle/>
-          <a:p>
-            <a:pPr indent="0" marL="0">
-              <a:buNone/>
-            </a:pPr>
-            <a:r>
-              <a:rPr lang="en-US" sz="1050" b="1" dirty="0">
-                <a:solidFill>
-                  <a:srgbClr val="0F1B2D"/>
-                </a:solidFill>
-                <a:latin typeface="Calibri" pitchFamily="34" charset="0"/>
-                <a:ea typeface="Calibri" pitchFamily="34" charset="-122"/>
-                <a:cs typeface="Calibri" pitchFamily="34" charset="-120"/>
-              </a:rPr>
-              <a:t>Evacuation Route Finding</a:t>
-            </a:r>
-            <a:endParaRPr lang="en-US" sz="1050" dirty="0"/>
-          </a:p>
-        </p:txBody>
-      </p:sp>
-      <p:sp>
-        <p:nvSpPr>
-          <p:cNvPr id="47" name="Text 44"/>
-          <p:cNvSpPr txBox="1"/>
-          <p:nvPr/>
-        </p:nvSpPr>
-        <p:spPr>
-          <a:xfrm>
-            <a:off x="3578276" y="4247388"/>
-            <a:ext cx="2343836" cy="372618"/>
-          </a:xfrm>
-          <a:prstGeom prst="rect">
-            <a:avLst/>
-          </a:prstGeom>
-          <a:noFill/>
-          <a:ln/>
-        </p:spPr>
-        <p:txBody>
-          <a:bodyPr wrap="square" lIns="0" tIns="0" rIns="0" bIns="0" rtlCol="0" anchor="t"/>
-          <a:lstStyle/>
-          <a:p>
-            <a:pPr indent="0" marL="0">
-              <a:buNone/>
-            </a:pPr>
-            <a:r>
-              <a:rPr lang="en-US" sz="830" dirty="0">
-                <a:solidFill>
-                  <a:srgbClr val="6B7684"/>
-                </a:solidFill>
-                <a:latin typeface="Calibri" pitchFamily="34" charset="0"/>
-                <a:ea typeface="Calibri" pitchFamily="34" charset="-122"/>
-                <a:cs typeface="Calibri" pitchFamily="34" charset="-120"/>
-              </a:rPr>
-              <a:t>OSRM road-network pathfinding, with automatic geodesic fallback</a:t>
-            </a:r>
-            <a:endParaRPr lang="en-US" sz="830" dirty="0"/>
-          </a:p>
-        </p:txBody>
-      </p:sp>
-      <p:sp>
-        <p:nvSpPr>
-          <p:cNvPr id="48" name="Shape 45"/>
-          <p:cNvSpPr/>
-          <p:nvPr/>
-        </p:nvSpPr>
-        <p:spPr>
-          <a:xfrm>
-            <a:off x="6159856" y="3790188"/>
-            <a:ext cx="2563292" cy="41148"/>
-          </a:xfrm>
-          <a:prstGeom prst="rect">
-            <a:avLst/>
-          </a:prstGeom>
-          <a:solidFill>
-            <a:srgbClr val="E8722C"/>
-          </a:solidFill>
-          <a:ln/>
-        </p:spPr>
-      </p:sp>
-      <p:sp>
-        <p:nvSpPr>
-          <p:cNvPr id="49" name="Shape 46"/>
-          <p:cNvSpPr/>
-          <p:nvPr/>
-        </p:nvSpPr>
-        <p:spPr>
-          <a:xfrm>
-            <a:off x="6159856" y="3831336"/>
-            <a:ext cx="2563292" cy="880110"/>
-          </a:xfrm>
-          <a:prstGeom prst="rect">
-            <a:avLst/>
-          </a:prstGeom>
-          <a:solidFill>
-            <a:srgbClr val="FFFFFF"/>
-          </a:solidFill>
-          <a:ln/>
-        </p:spPr>
-      </p:sp>
-      <p:sp>
-        <p:nvSpPr>
-          <p:cNvPr id="50" name="Text 47"/>
-          <p:cNvSpPr txBox="1"/>
-          <p:nvPr/>
-        </p:nvSpPr>
-        <p:spPr>
-          <a:xfrm>
-            <a:off x="6269584" y="3909060"/>
-            <a:ext cx="2343836" cy="365760"/>
-          </a:xfrm>
-          <a:prstGeom prst="rect">
-            <a:avLst/>
-          </a:prstGeom>
-          <a:noFill/>
-          <a:ln/>
-        </p:spPr>
-        <p:txBody>
-          <a:bodyPr wrap="square" lIns="0" tIns="0" rIns="0" bIns="0" rtlCol="0" anchor="t"/>
-          <a:lstStyle/>
-          <a:p>
-            <a:pPr indent="0" marL="0">
-              <a:buNone/>
-            </a:pPr>
-            <a:r>
-              <a:rPr lang="en-US" sz="1050" b="1" dirty="0">
-                <a:solidFill>
-                  <a:srgbClr val="0F1B2D"/>
-                </a:solidFill>
-                <a:latin typeface="Calibri" pitchFamily="34" charset="0"/>
-                <a:ea typeface="Calibri" pitchFamily="34" charset="-122"/>
-                <a:cs typeface="Calibri" pitchFamily="34" charset="-120"/>
-              </a:rPr>
-              <a:t>Phased Response Timeline</a:t>
-            </a:r>
-            <a:endParaRPr lang="en-US" sz="1050" dirty="0"/>
-          </a:p>
-        </p:txBody>
-      </p:sp>
-      <p:sp>
-        <p:nvSpPr>
-          <p:cNvPr id="51" name="Text 48"/>
-          <p:cNvSpPr txBox="1"/>
-          <p:nvPr/>
-        </p:nvSpPr>
-        <p:spPr>
-          <a:xfrm>
-            <a:off x="6269584" y="4247388"/>
-            <a:ext cx="2343836" cy="372618"/>
-          </a:xfrm>
-          <a:prstGeom prst="rect">
-            <a:avLst/>
-          </a:prstGeom>
-          <a:noFill/>
-          <a:ln/>
-        </p:spPr>
-        <p:txBody>
-          <a:bodyPr wrap="square" lIns="0" tIns="0" rIns="0" bIns="0" rtlCol="0" anchor="t"/>
-          <a:lstStyle/>
-          <a:p>
-            <a:pPr indent="0" marL="0">
-              <a:buNone/>
-            </a:pPr>
-            <a:r>
-              <a:rPr lang="en-US" sz="830" dirty="0">
-                <a:solidFill>
-                  <a:srgbClr val="6B7684"/>
-                </a:solidFill>
-                <a:latin typeface="Calibri" pitchFamily="34" charset="0"/>
-                <a:ea typeface="Calibri" pitchFamily="34" charset="-122"/>
-                <a:cs typeface="Calibri" pitchFamily="34" charset="-120"/>
-              </a:rPr>
-              <a:t>Triage buckets — Immediate (0–2h), Urgent (2–6h), Sustained (6–12h)</a:t>
-            </a:r>
-            <a:endParaRPr lang="en-US" sz="830" dirty="0"/>
-          </a:p>
-        </p:txBody>
-      </p:sp>
-      <p:sp>
-        <p:nvSpPr>
-          <p:cNvPr id="52" name="Shape 49"/>
-          <p:cNvSpPr/>
-          <p:nvPr/>
-        </p:nvSpPr>
-        <p:spPr>
-          <a:xfrm>
-            <a:off x="8851163" y="3790188"/>
-            <a:ext cx="2563292" cy="41148"/>
-          </a:xfrm>
-          <a:prstGeom prst="rect">
-            <a:avLst/>
-          </a:prstGeom>
-          <a:solidFill>
-            <a:srgbClr val="E8722C"/>
-          </a:solidFill>
-          <a:ln/>
-        </p:spPr>
-      </p:sp>
-      <p:sp>
-        <p:nvSpPr>
-          <p:cNvPr id="53" name="Shape 50"/>
-          <p:cNvSpPr/>
-          <p:nvPr/>
-        </p:nvSpPr>
-        <p:spPr>
-          <a:xfrm>
-            <a:off x="8851163" y="3831336"/>
-            <a:ext cx="2563292" cy="880110"/>
-          </a:xfrm>
-          <a:prstGeom prst="rect">
-            <a:avLst/>
-          </a:prstGeom>
-          <a:solidFill>
-            <a:srgbClr val="FFFFFF"/>
-          </a:solidFill>
-          <a:ln/>
-        </p:spPr>
-      </p:sp>
-      <p:sp>
-        <p:nvSpPr>
-          <p:cNvPr id="54" name="Text 51"/>
-          <p:cNvSpPr txBox="1"/>
-          <p:nvPr/>
-        </p:nvSpPr>
-        <p:spPr>
-          <a:xfrm>
-            <a:off x="8960891" y="3909060"/>
-            <a:ext cx="2343836" cy="365760"/>
-          </a:xfrm>
-          <a:prstGeom prst="rect">
-            <a:avLst/>
-          </a:prstGeom>
-          <a:noFill/>
-          <a:ln/>
-        </p:spPr>
-        <p:txBody>
-          <a:bodyPr wrap="square" lIns="0" tIns="0" rIns="0" bIns="0" rtlCol="0" anchor="t"/>
-          <a:lstStyle/>
-          <a:p>
-            <a:pPr indent="0" marL="0">
-              <a:buNone/>
-            </a:pPr>
-            <a:r>
-              <a:rPr lang="en-US" sz="1050" b="1" dirty="0">
-                <a:solidFill>
-                  <a:srgbClr val="0F1B2D"/>
-                </a:solidFill>
-                <a:latin typeface="Calibri" pitchFamily="34" charset="0"/>
-                <a:ea typeface="Calibri" pitchFamily="34" charset="-122"/>
-                <a:cs typeface="Calibri" pitchFamily="34" charset="-120"/>
-              </a:rPr>
-              <a:t>Causal Chain Explanation</a:t>
-            </a:r>
-            <a:endParaRPr lang="en-US" sz="1050" dirty="0"/>
-          </a:p>
-        </p:txBody>
-      </p:sp>
-      <p:sp>
-        <p:nvSpPr>
-          <p:cNvPr id="55" name="Text 52"/>
-          <p:cNvSpPr txBox="1"/>
-          <p:nvPr/>
-        </p:nvSpPr>
-        <p:spPr>
-          <a:xfrm>
-            <a:off x="8960891" y="4247388"/>
-            <a:ext cx="2343836" cy="372618"/>
-          </a:xfrm>
-          <a:prstGeom prst="rect">
-            <a:avLst/>
-          </a:prstGeom>
-          <a:noFill/>
-          <a:ln/>
-        </p:spPr>
-        <p:txBody>
-          <a:bodyPr wrap="square" lIns="0" tIns="0" rIns="0" bIns="0" rtlCol="0" anchor="t"/>
-          <a:lstStyle/>
-          <a:p>
-            <a:pPr indent="0" marL="0">
-              <a:buNone/>
-            </a:pPr>
-            <a:r>
-              <a:rPr lang="en-US" sz="830" dirty="0">
-                <a:solidFill>
-                  <a:srgbClr val="6B7684"/>
-                </a:solidFill>
-                <a:latin typeface="Calibri" pitchFamily="34" charset="0"/>
-                <a:ea typeface="Calibri" pitchFamily="34" charset="-122"/>
-                <a:cs typeface="Calibri" pitchFamily="34" charset="-120"/>
-              </a:rPr>
-              <a:t>Visual flowchart — Trigger → Infrastructure → Result → Precedent</a:t>
-            </a:r>
-            <a:endParaRPr lang="en-US" sz="830" dirty="0"/>
-          </a:p>
-        </p:txBody>
-      </p:sp>
-      <p:sp>
-        <p:nvSpPr>
-          <p:cNvPr id="56" name="Shape 53"/>
-          <p:cNvSpPr/>
-          <p:nvPr/>
-        </p:nvSpPr>
-        <p:spPr>
-          <a:xfrm>
-            <a:off x="777240" y="4839462"/>
-            <a:ext cx="2563292" cy="41148"/>
-          </a:xfrm>
-          <a:prstGeom prst="rect">
-            <a:avLst/>
-          </a:prstGeom>
-          <a:solidFill>
-            <a:srgbClr val="5B6472"/>
-          </a:solidFill>
-          <a:ln/>
-        </p:spPr>
-      </p:sp>
-      <p:sp>
-        <p:nvSpPr>
-          <p:cNvPr id="57" name="Shape 54"/>
-          <p:cNvSpPr/>
-          <p:nvPr/>
-        </p:nvSpPr>
-        <p:spPr>
-          <a:xfrm>
-            <a:off x="777240" y="4880610"/>
-            <a:ext cx="2563292" cy="880110"/>
-          </a:xfrm>
-          <a:prstGeom prst="rect">
-            <a:avLst/>
-          </a:prstGeom>
-          <a:solidFill>
-            <a:srgbClr val="FFFFFF"/>
-          </a:solidFill>
-          <a:ln/>
-        </p:spPr>
-      </p:sp>
-      <p:sp>
-        <p:nvSpPr>
-          <p:cNvPr id="58" name="Text 55"/>
-          <p:cNvSpPr txBox="1"/>
-          <p:nvPr/>
-        </p:nvSpPr>
-        <p:spPr>
-          <a:xfrm>
-            <a:off x="886968" y="4958334"/>
-            <a:ext cx="2343836" cy="365760"/>
-          </a:xfrm>
-          <a:prstGeom prst="rect">
-            <a:avLst/>
-          </a:prstGeom>
-          <a:noFill/>
-          <a:ln/>
-        </p:spPr>
-        <p:txBody>
-          <a:bodyPr wrap="square" lIns="0" tIns="0" rIns="0" bIns="0" rtlCol="0" anchor="t"/>
-          <a:lstStyle/>
-          <a:p>
-            <a:pPr indent="0" marL="0">
-              <a:buNone/>
-            </a:pPr>
-            <a:r>
-              <a:rPr lang="en-US" sz="1050" b="1" dirty="0">
-                <a:solidFill>
-                  <a:srgbClr val="0F1B2D"/>
-                </a:solidFill>
-                <a:latin typeface="Calibri" pitchFamily="34" charset="0"/>
-                <a:ea typeface="Calibri" pitchFamily="34" charset="-122"/>
-                <a:cs typeface="Calibri" pitchFamily="34" charset="-120"/>
-              </a:rPr>
-              <a:t>Country-Aware Sovereign Routing</a:t>
-            </a:r>
-            <a:endParaRPr lang="en-US" sz="1050" dirty="0"/>
-          </a:p>
-        </p:txBody>
-      </p:sp>
-      <p:sp>
-        <p:nvSpPr>
-          <p:cNvPr id="59" name="Text 56"/>
-          <p:cNvSpPr txBox="1"/>
-          <p:nvPr/>
-        </p:nvSpPr>
-        <p:spPr>
-          <a:xfrm>
-            <a:off x="886968" y="5296662"/>
-            <a:ext cx="2343836" cy="372618"/>
-          </a:xfrm>
-          <a:prstGeom prst="rect">
-            <a:avLst/>
-          </a:prstGeom>
-          <a:noFill/>
-          <a:ln/>
-        </p:spPr>
-        <p:txBody>
-          <a:bodyPr wrap="square" lIns="0" tIns="0" rIns="0" bIns="0" rtlCol="0" anchor="t"/>
-          <a:lstStyle/>
-          <a:p>
-            <a:pPr indent="0" marL="0">
-              <a:buNone/>
-            </a:pPr>
-            <a:r>
-              <a:rPr lang="en-US" sz="830" dirty="0">
-                <a:solidFill>
-                  <a:srgbClr val="6B7684"/>
-                </a:solidFill>
-                <a:latin typeface="Calibri" pitchFamily="34" charset="0"/>
-                <a:ea typeface="Calibri" pitchFamily="34" charset="-122"/>
-                <a:cs typeface="Calibri" pitchFamily="34" charset="-120"/>
-              </a:rPr>
-              <a:t>IMD-first for India; global fallback active for other countries</a:t>
-            </a:r>
-            <a:endParaRPr lang="en-US" sz="830" dirty="0"/>
-          </a:p>
-        </p:txBody>
-      </p:sp>
-      <p:sp>
-        <p:nvSpPr>
-          <p:cNvPr id="60" name="Shape 57"/>
-          <p:cNvSpPr/>
-          <p:nvPr/>
-        </p:nvSpPr>
-        <p:spPr>
-          <a:xfrm>
-            <a:off x="3468548" y="4839462"/>
-            <a:ext cx="2563292" cy="41148"/>
-          </a:xfrm>
-          <a:prstGeom prst="rect">
-            <a:avLst/>
-          </a:prstGeom>
-          <a:solidFill>
-            <a:srgbClr val="E8722C"/>
-          </a:solidFill>
-          <a:ln/>
-        </p:spPr>
-      </p:sp>
-      <p:sp>
-        <p:nvSpPr>
-          <p:cNvPr id="61" name="Shape 58"/>
-          <p:cNvSpPr/>
-          <p:nvPr/>
-        </p:nvSpPr>
-        <p:spPr>
-          <a:xfrm>
-            <a:off x="3468548" y="4880610"/>
-            <a:ext cx="2563292" cy="880110"/>
-          </a:xfrm>
-          <a:prstGeom prst="rect">
-            <a:avLst/>
-          </a:prstGeom>
-          <a:solidFill>
-            <a:srgbClr val="FFFFFF"/>
-          </a:solidFill>
-          <a:ln/>
-        </p:spPr>
-      </p:sp>
-      <p:sp>
-        <p:nvSpPr>
-          <p:cNvPr id="62" name="Text 59"/>
-          <p:cNvSpPr txBox="1"/>
-          <p:nvPr/>
-        </p:nvSpPr>
-        <p:spPr>
-          <a:xfrm>
-            <a:off x="3578276" y="4958334"/>
-            <a:ext cx="2343836" cy="365760"/>
-          </a:xfrm>
-          <a:prstGeom prst="rect">
-            <a:avLst/>
-          </a:prstGeom>
-          <a:noFill/>
-          <a:ln/>
-        </p:spPr>
-        <p:txBody>
-          <a:bodyPr wrap="square" lIns="0" tIns="0" rIns="0" bIns="0" rtlCol="0" anchor="t"/>
-          <a:lstStyle/>
-          <a:p>
-            <a:pPr indent="0" marL="0">
-              <a:buNone/>
-            </a:pPr>
-            <a:r>
-              <a:rPr lang="en-US" sz="1050" b="1" dirty="0">
-                <a:solidFill>
-                  <a:srgbClr val="0F1B2D"/>
-                </a:solidFill>
-                <a:latin typeface="Calibri" pitchFamily="34" charset="0"/>
-                <a:ea typeface="Calibri" pitchFamily="34" charset="-122"/>
-                <a:cs typeface="Calibri" pitchFamily="34" charset="-120"/>
-              </a:rPr>
-              <a:t>Satellite Image Cross-Validation</a:t>
-            </a:r>
-            <a:endParaRPr lang="en-US" sz="1050" dirty="0"/>
-          </a:p>
-        </p:txBody>
-      </p:sp>
-      <p:sp>
-        <p:nvSpPr>
-          <p:cNvPr id="63" name="Text 60"/>
-          <p:cNvSpPr txBox="1"/>
-          <p:nvPr/>
-        </p:nvSpPr>
-        <p:spPr>
-          <a:xfrm>
-            <a:off x="3578276" y="5296662"/>
-            <a:ext cx="2343836" cy="372618"/>
-          </a:xfrm>
-          <a:prstGeom prst="rect">
-            <a:avLst/>
-          </a:prstGeom>
-          <a:noFill/>
-          <a:ln/>
-        </p:spPr>
-        <p:txBody>
-          <a:bodyPr wrap="square" lIns="0" tIns="0" rIns="0" bIns="0" rtlCol="0" anchor="t"/>
-          <a:lstStyle/>
-          <a:p>
-            <a:pPr indent="0" marL="0">
-              <a:buNone/>
-            </a:pPr>
-            <a:r>
-              <a:rPr lang="en-US" sz="830" dirty="0">
-                <a:solidFill>
-                  <a:srgbClr val="6B7684"/>
-                </a:solidFill>
-                <a:latin typeface="Calibri" pitchFamily="34" charset="0"/>
-                <a:ea typeface="Calibri" pitchFamily="34" charset="-122"/>
-                <a:cs typeface="Calibri" pitchFamily="34" charset="-120"/>
-              </a:rPr>
-              <a:t>Gemini multimodal check of a real satellite image against the reported event</a:t>
-            </a:r>
-            <a:endParaRPr lang="en-US" sz="830" dirty="0"/>
-          </a:p>
-        </p:txBody>
-      </p:sp>
-      <p:sp>
-        <p:nvSpPr>
-          <p:cNvPr id="64" name="Shape 61"/>
-          <p:cNvSpPr/>
-          <p:nvPr/>
-        </p:nvSpPr>
-        <p:spPr>
-          <a:xfrm>
-            <a:off x="6159856" y="4839462"/>
-            <a:ext cx="2563292" cy="41148"/>
-          </a:xfrm>
-          <a:prstGeom prst="rect">
-            <a:avLst/>
-          </a:prstGeom>
-          <a:solidFill>
-            <a:srgbClr val="E8722C"/>
-          </a:solidFill>
-          <a:ln/>
-        </p:spPr>
-      </p:sp>
-      <p:sp>
-        <p:nvSpPr>
-          <p:cNvPr id="65" name="Shape 62"/>
-          <p:cNvSpPr/>
-          <p:nvPr/>
-        </p:nvSpPr>
-        <p:spPr>
-          <a:xfrm>
-            <a:off x="6159856" y="4880610"/>
-            <a:ext cx="2563292" cy="880110"/>
-          </a:xfrm>
-          <a:prstGeom prst="rect">
-            <a:avLst/>
-          </a:prstGeom>
-          <a:solidFill>
-            <a:srgbClr val="FFFFFF"/>
-          </a:solidFill>
-          <a:ln/>
-        </p:spPr>
-      </p:sp>
-      <p:sp>
-        <p:nvSpPr>
-          <p:cNvPr id="66" name="Text 63"/>
-          <p:cNvSpPr txBox="1"/>
-          <p:nvPr/>
-        </p:nvSpPr>
-        <p:spPr>
-          <a:xfrm>
-            <a:off x="6269584" y="4958334"/>
-            <a:ext cx="2343836" cy="365760"/>
-          </a:xfrm>
-          <a:prstGeom prst="rect">
-            <a:avLst/>
-          </a:prstGeom>
-          <a:noFill/>
-          <a:ln/>
-        </p:spPr>
-        <p:txBody>
-          <a:bodyPr wrap="square" lIns="0" tIns="0" rIns="0" bIns="0" rtlCol="0" anchor="t"/>
-          <a:lstStyle/>
-          <a:p>
-            <a:pPr indent="0" marL="0">
-              <a:buNone/>
-            </a:pPr>
-            <a:r>
-              <a:rPr lang="en-US" sz="1050" b="1" dirty="0">
-                <a:solidFill>
-                  <a:srgbClr val="0F1B2D"/>
-                </a:solidFill>
-                <a:latin typeface="Calibri" pitchFamily="34" charset="0"/>
-                <a:ea typeface="Calibri" pitchFamily="34" charset="-122"/>
-                <a:cs typeface="Calibri" pitchFamily="34" charset="-120"/>
-              </a:rPr>
-              <a:t>Sentinel-1 SAR Flood Detection</a:t>
-            </a:r>
-            <a:endParaRPr lang="en-US" sz="1050" dirty="0"/>
-          </a:p>
-        </p:txBody>
-      </p:sp>
-      <p:sp>
-        <p:nvSpPr>
-          <p:cNvPr id="67" name="Text 64"/>
-          <p:cNvSpPr txBox="1"/>
-          <p:nvPr/>
-        </p:nvSpPr>
-        <p:spPr>
-          <a:xfrm>
-            <a:off x="6269584" y="5296662"/>
-            <a:ext cx="2343836" cy="372618"/>
-          </a:xfrm>
-          <a:prstGeom prst="rect">
-            <a:avLst/>
-          </a:prstGeom>
-          <a:noFill/>
-          <a:ln/>
-        </p:spPr>
-        <p:txBody>
-          <a:bodyPr wrap="square" lIns="0" tIns="0" rIns="0" bIns="0" rtlCol="0" anchor="t"/>
-          <a:lstStyle/>
-          <a:p>
-            <a:pPr indent="0" marL="0">
-              <a:buNone/>
-            </a:pPr>
-            <a:r>
-              <a:rPr lang="en-US" sz="830" dirty="0">
-                <a:solidFill>
-                  <a:srgbClr val="6B7684"/>
-                </a:solidFill>
-                <a:latin typeface="Calibri" pitchFamily="34" charset="0"/>
-                <a:ea typeface="Calibri" pitchFamily="34" charset="-122"/>
-                <a:cs typeface="Calibri" pitchFamily="34" charset="-120"/>
-              </a:rPr>
-              <a:t>Google Earth Engine port of the DeVries et al. (2020) SAR flood methodology</a:t>
-            </a:r>
-            <a:endParaRPr lang="en-US" sz="830" dirty="0"/>
-          </a:p>
-        </p:txBody>
-      </p:sp>
-      <p:sp>
-        <p:nvSpPr>
-          <p:cNvPr id="68" name="Shape 65"/>
-          <p:cNvSpPr/>
-          <p:nvPr/>
-        </p:nvSpPr>
-        <p:spPr>
-          <a:xfrm>
-            <a:off x="8851163" y="4839462"/>
-            <a:ext cx="2563292" cy="41148"/>
-          </a:xfrm>
-          <a:prstGeom prst="rect">
-            <a:avLst/>
-          </a:prstGeom>
-          <a:solidFill>
-            <a:srgbClr val="E8722C"/>
-          </a:solidFill>
-          <a:ln/>
-        </p:spPr>
-      </p:sp>
-      <p:sp>
-        <p:nvSpPr>
-          <p:cNvPr id="69" name="Shape 66"/>
-          <p:cNvSpPr/>
-          <p:nvPr/>
-        </p:nvSpPr>
-        <p:spPr>
-          <a:xfrm>
-            <a:off x="8851163" y="4880610"/>
-            <a:ext cx="2563292" cy="880110"/>
-          </a:xfrm>
-          <a:prstGeom prst="rect">
-            <a:avLst/>
-          </a:prstGeom>
-          <a:solidFill>
-            <a:srgbClr val="FFFFFF"/>
-          </a:solidFill>
-          <a:ln/>
-        </p:spPr>
-      </p:sp>
-      <p:sp>
-        <p:nvSpPr>
-          <p:cNvPr id="70" name="Text 67"/>
-          <p:cNvSpPr txBox="1"/>
-          <p:nvPr/>
-        </p:nvSpPr>
-        <p:spPr>
-          <a:xfrm>
-            <a:off x="8960891" y="4958334"/>
-            <a:ext cx="2343836" cy="365760"/>
-          </a:xfrm>
-          <a:prstGeom prst="rect">
-            <a:avLst/>
-          </a:prstGeom>
-          <a:noFill/>
-          <a:ln/>
-        </p:spPr>
-        <p:txBody>
-          <a:bodyPr wrap="square" lIns="0" tIns="0" rIns="0" bIns="0" rtlCol="0" anchor="t"/>
-          <a:lstStyle/>
-          <a:p>
-            <a:pPr indent="0" marL="0">
-              <a:buNone/>
-            </a:pPr>
-            <a:r>
-              <a:rPr lang="en-US" sz="1050" b="1" dirty="0">
-                <a:solidFill>
-                  <a:srgbClr val="0F1B2D"/>
-                </a:solidFill>
-                <a:latin typeface="Calibri" pitchFamily="34" charset="0"/>
-                <a:ea typeface="Calibri" pitchFamily="34" charset="-122"/>
-                <a:cs typeface="Calibri" pitchFamily="34" charset="-120"/>
-              </a:rPr>
-              <a:t>Multi-Language UI</a:t>
-            </a:r>
-            <a:endParaRPr lang="en-US" sz="1050" dirty="0"/>
-          </a:p>
-        </p:txBody>
-      </p:sp>
-      <p:sp>
-        <p:nvSpPr>
-          <p:cNvPr id="71" name="Text 68"/>
-          <p:cNvSpPr txBox="1"/>
-          <p:nvPr/>
-        </p:nvSpPr>
-        <p:spPr>
-          <a:xfrm>
-            <a:off x="8960891" y="5296662"/>
-            <a:ext cx="2343836" cy="372618"/>
-          </a:xfrm>
-          <a:prstGeom prst="rect">
-            <a:avLst/>
-          </a:prstGeom>
-          <a:noFill/>
-          <a:ln/>
-        </p:spPr>
-        <p:txBody>
-          <a:bodyPr wrap="square" lIns="0" tIns="0" rIns="0" bIns="0" rtlCol="0" anchor="t"/>
-          <a:lstStyle/>
-          <a:p>
-            <a:pPr indent="0" marL="0">
-              <a:buNone/>
-            </a:pPr>
-            <a:r>
-              <a:rPr lang="en-US" sz="830" dirty="0">
-                <a:solidFill>
-                  <a:srgbClr val="6B7684"/>
-                </a:solidFill>
-                <a:latin typeface="Calibri" pitchFamily="34" charset="0"/>
-                <a:ea typeface="Calibri" pitchFamily="34" charset="-122"/>
-                <a:cs typeface="Calibri" pitchFamily="34" charset="-120"/>
-              </a:rPr>
-              <a:t>vue-i18n across the full dashboard</a:t>
-            </a:r>
-            <a:endParaRPr lang="en-US" sz="830" dirty="0"/>
-          </a:p>
-        </p:txBody>
-      </p:sp>
-      <p:sp>
-        <p:nvSpPr>
-          <p:cNvPr id="72" name="Text 69"/>
-          <p:cNvSpPr txBox="1"/>
-          <p:nvPr/>
-        </p:nvSpPr>
-        <p:spPr>
-          <a:xfrm>
-            <a:off x="777240" y="5870448"/>
-            <a:ext cx="10637215" cy="411480"/>
-          </a:xfrm>
-          <a:prstGeom prst="rect">
-            <a:avLst/>
-          </a:prstGeom>
-          <a:noFill/>
-          <a:ln/>
-        </p:spPr>
-        <p:txBody>
-          <a:bodyPr wrap="square" lIns="0" tIns="0" rIns="0" bIns="0" rtlCol="0" anchor="ctr"/>
-          <a:lstStyle/>
-          <a:p>
-            <a:pPr indent="0" marL="0">
-              <a:buNone/>
-            </a:pPr>
-            <a:r>
-              <a:rPr lang="en-US" sz="900" i="1" dirty="0">
-                <a:solidFill>
-                  <a:srgbClr val="8A8470"/>
-                </a:solidFill>
-              </a:rPr>
-              <a:t>Gemini decision support, RAG, satellite cross-validation, and SAR flood detection all have their Google Cloud credentials verified live via a standalone test script; re-testing through the running backend is the next step before launch. WhatsApp (WAHA) and SMS are built but excluded from this list until production-reliable.</a:t>
-            </a:r>
-            <a:endParaRPr lang="en-US" sz="900" dirty="0"/>
-          </a:p>
-        </p:txBody>
-      </p:sp>
+      <p:pic>
+        <p:nvPicPr>
+          <p:cNvPr id="9" name="Image 1" descr="/home/claude/pptx-build/assets/efc5ace416bee97a84d8a2941dfa8329.png">    </p:cNvPr>
+          <p:cNvPicPr>
+            <a:picLocks noChangeAspect="1"/>
+          </p:cNvPicPr>
+          <p:nvPr/>
+        </p:nvPicPr>
+        <p:blipFill>
+          <a:blip r:embed="rId2"/>
+          <a:srcRect l="0" r="0" t="0" b="0"/>
+          <a:stretch/>
+        </p:blipFill>
+        <p:spPr>
+          <a:xfrm>
+            <a:off x="914400" y="1828800"/>
+            <a:ext cx="10362895" cy="4206240"/>
+          </a:xfrm>
+          <a:prstGeom prst="rect">
+            <a:avLst/>
+          </a:prstGeom>
+        </p:spPr>
+      </p:pic>
     </p:spTree>
   </p:cSld>
   <p:clrMapOvr>
@@ -20203,7 +17904,7 @@
                 <a:ea typeface="Calibri" pitchFamily="34" charset="-122"/>
                 <a:cs typeface="Calibri" pitchFamily="34" charset="-120"/>
               </a:rPr>
-              <a:t>09 / 17</a:t>
+              <a:t>09 / 16</a:t>
             </a:r>
             <a:endParaRPr lang="en-US" sz="1100" dirty="0"/>
           </a:p>
@@ -20262,7 +17963,7 @@
                 <a:ea typeface="Calibri" pitchFamily="34" charset="-122"/>
                 <a:cs typeface="Calibri" pitchFamily="34" charset="-120"/>
               </a:rPr>
-              <a:t>PROCESS FLOW DIAGRAM</a:t>
+              <a:t>ARCHITECTURE DIAGRAM</a:t>
             </a:r>
             <a:endParaRPr lang="en-US" sz="1300" dirty="0"/>
           </a:p>
@@ -20301,7 +18002,7 @@
                 <a:ea typeface="Cambria" pitchFamily="34" charset="-122"/>
                 <a:cs typeface="Cambria" pitchFamily="34" charset="-120"/>
               </a:rPr>
-              <a:t>The Full Disaster Lifecycle, As Built</a:t>
+              <a:t>System Architecture, As Deployed</a:t>
             </a:r>
             <a:endParaRPr lang="en-US" sz="2000" dirty="0"/>
           </a:p>
@@ -20331,7 +18032,7 @@
       </p:sp>
       <p:pic>
         <p:nvPicPr>
-          <p:cNvPr id="9" name="Image 1" descr="/home/claude/pptx-build/assets/efc5ace416bee97a84d8a2941dfa8329.png">    </p:cNvPr>
+          <p:cNvPr id="9" name="Image 1" descr="/home/claude/pptx-build/assets/d0fc448611146c1aa89d7aeca1c3ec3b.png">    </p:cNvPr>
           <p:cNvPicPr>
             <a:picLocks noChangeAspect="1"/>
           </p:cNvPicPr>

--- a/docs/PPT/TerraGrid_AI_Builder_Cup_Submission_copilot_terragrid.pptx
+++ b/docs/PPT/TerraGrid_AI_Builder_Cup_Submission_copilot_terragrid.pptx
@@ -16544,7 +16544,7 @@
         </p:nvSpPr>
         <p:spPr>
           <a:xfrm>
-            <a:off x="777240" y="1143000"/>
+            <a:off x="777240" y="1097280"/>
             <a:ext cx="10637215" cy="548640"/>
           </a:xfrm>
           <a:prstGeom prst="rect">
@@ -16561,7 +16561,7 @@
               <a:buNone/>
             </a:pPr>
             <a:r>
-              <a:rPr lang="en-US" sz="2000" b="1" dirty="0">
+              <a:rPr lang="en-US" sz="1900" b="1" dirty="0">
                 <a:solidFill>
                   <a:srgbClr val="0F1B2D"/>
                 </a:solidFill>
@@ -16571,7 +16571,7 @@
               </a:rPr>
               <a:t>Features Offered By The Solution — Across The 4-Phase Model</a:t>
             </a:r>
-            <a:endParaRPr lang="en-US" sz="2000" dirty="0"/>
+            <a:endParaRPr lang="en-US" sz="1900" dirty="0"/>
           </a:p>
         </p:txBody>
       </p:sp>
@@ -16583,8 +16583,8 @@
         </p:nvSpPr>
         <p:spPr>
           <a:xfrm>
-            <a:off x="777240" y="1600200"/>
-            <a:ext cx="2330265" cy="4297680"/>
+            <a:off x="777240" y="1508760"/>
+            <a:ext cx="2330265" cy="3749040"/>
           </a:xfrm>
           <a:prstGeom prst="roundRect">
             <a:avLst>
@@ -16610,7 +16610,7 @@
         </p:nvSpPr>
         <p:spPr>
           <a:xfrm>
-            <a:off x="905256" y="1719072"/>
+            <a:off x="905256" y="1627632"/>
             <a:ext cx="2074233" cy="274320"/>
           </a:xfrm>
           <a:prstGeom prst="rect">
@@ -16646,7 +16646,7 @@
         </p:nvSpPr>
         <p:spPr>
           <a:xfrm>
-            <a:off x="905256" y="1965960"/>
+            <a:off x="905256" y="1874520"/>
             <a:ext cx="2074233" cy="201168"/>
           </a:xfrm>
           <a:prstGeom prst="rect">
@@ -16682,8 +16682,8 @@
         </p:nvSpPr>
         <p:spPr>
           <a:xfrm>
-            <a:off x="905256" y="2258568"/>
-            <a:ext cx="2074233" cy="3063240"/>
+            <a:off x="905256" y="2167128"/>
+            <a:ext cx="2074233" cy="2514600"/>
           </a:xfrm>
           <a:prstGeom prst="rect">
             <a:avLst/>
@@ -16758,7 +16758,7 @@
         </p:nvSpPr>
         <p:spPr>
           <a:xfrm>
-            <a:off x="905256" y="5577840"/>
+            <a:off x="905256" y="4937760"/>
             <a:ext cx="2074233" cy="256032"/>
           </a:xfrm>
           <a:prstGeom prst="rect">
@@ -16794,7 +16794,7 @@
         </p:nvSpPr>
         <p:spPr>
           <a:xfrm>
-            <a:off x="3235521" y="1600200"/>
+            <a:off x="3235521" y="1508760"/>
             <a:ext cx="2796318" cy="50292"/>
           </a:xfrm>
           <a:prstGeom prst="rect">
@@ -16814,8 +16814,8 @@
         </p:nvSpPr>
         <p:spPr>
           <a:xfrm>
-            <a:off x="3235521" y="1650492"/>
-            <a:ext cx="2796318" cy="4247388"/>
+            <a:off x="3235521" y="1559052"/>
+            <a:ext cx="2796318" cy="3698748"/>
           </a:xfrm>
           <a:prstGeom prst="rect">
             <a:avLst/>
@@ -16834,7 +16834,7 @@
         </p:nvSpPr>
         <p:spPr>
           <a:xfrm>
-            <a:off x="3363537" y="1737360"/>
+            <a:off x="3363537" y="1645920"/>
             <a:ext cx="2540286" cy="274320"/>
           </a:xfrm>
           <a:prstGeom prst="rect">
@@ -16870,8 +16870,8 @@
         </p:nvSpPr>
         <p:spPr>
           <a:xfrm>
-            <a:off x="3363537" y="2057400"/>
-            <a:ext cx="2540286" cy="3703320"/>
+            <a:off x="3363537" y="1965960"/>
+            <a:ext cx="2540286" cy="3154680"/>
           </a:xfrm>
           <a:prstGeom prst="rect">
             <a:avLst/>
@@ -16990,6 +16990,104 @@
             </a:r>
             <a:endParaRPr lang="en-US" sz="830" dirty="0"/>
           </a:p>
+        </p:txBody>
+      </p:sp>
+      <p:sp>
+        <p:nvSpPr>
+          <p:cNvPr id="17" name="Shape 14"/>
+          <p:cNvSpPr/>
+          <p:nvPr/>
+        </p:nvSpPr>
+        <p:spPr>
+          <a:xfrm>
+            <a:off x="6159856" y="1508760"/>
+            <a:ext cx="2796318" cy="50292"/>
+          </a:xfrm>
+          <a:prstGeom prst="rect">
+            <a:avLst/>
+          </a:prstGeom>
+          <a:solidFill>
+            <a:srgbClr val="E8722C"/>
+          </a:solidFill>
+          <a:ln/>
+        </p:spPr>
+      </p:sp>
+      <p:sp>
+        <p:nvSpPr>
+          <p:cNvPr id="18" name="Shape 15"/>
+          <p:cNvSpPr/>
+          <p:nvPr/>
+        </p:nvSpPr>
+        <p:spPr>
+          <a:xfrm>
+            <a:off x="6159856" y="1559052"/>
+            <a:ext cx="2796318" cy="3698748"/>
+          </a:xfrm>
+          <a:prstGeom prst="rect">
+            <a:avLst/>
+          </a:prstGeom>
+          <a:solidFill>
+            <a:srgbClr val="FFFFFF"/>
+          </a:solidFill>
+          <a:ln/>
+        </p:spPr>
+      </p:sp>
+      <p:sp>
+        <p:nvSpPr>
+          <p:cNvPr id="19" name="Text 16"/>
+          <p:cNvSpPr txBox="1"/>
+          <p:nvPr/>
+        </p:nvSpPr>
+        <p:spPr>
+          <a:xfrm>
+            <a:off x="6287872" y="1645920"/>
+            <a:ext cx="2540286" cy="274320"/>
+          </a:xfrm>
+          <a:prstGeom prst="rect">
+            <a:avLst/>
+          </a:prstGeom>
+          <a:noFill/>
+          <a:ln/>
+        </p:spPr>
+        <p:txBody>
+          <a:bodyPr wrap="square" lIns="0" tIns="0" rIns="0" bIns="0" rtlCol="0" anchor="ctr"/>
+          <a:lstStyle/>
+          <a:p>
+            <a:pPr indent="0" marL="0">
+              <a:buNone/>
+            </a:pPr>
+            <a:r>
+              <a:rPr lang="en-US" sz="1350" b="1" dirty="0">
+                <a:solidFill>
+                  <a:srgbClr val="E8722C"/>
+                </a:solidFill>
+              </a:rPr>
+              <a:t>Respond</a:t>
+            </a:r>
+            <a:endParaRPr lang="en-US" sz="1350" dirty="0"/>
+          </a:p>
+        </p:txBody>
+      </p:sp>
+      <p:sp>
+        <p:nvSpPr>
+          <p:cNvPr id="20" name="Text 17"/>
+          <p:cNvSpPr txBox="1"/>
+          <p:nvPr/>
+        </p:nvSpPr>
+        <p:spPr>
+          <a:xfrm>
+            <a:off x="6287872" y="1965960"/>
+            <a:ext cx="2540286" cy="3154680"/>
+          </a:xfrm>
+          <a:prstGeom prst="rect">
+            <a:avLst/>
+          </a:prstGeom>
+          <a:noFill/>
+          <a:ln/>
+        </p:spPr>
+        <p:txBody>
+          <a:bodyPr wrap="square" lIns="0" tIns="0" rIns="0" bIns="0" rtlCol="0" anchor="t"/>
+          <a:lstStyle/>
           <a:p>
             <a:pPr marL="342900" indent="-342900">
               <a:spcAft>
@@ -17004,108 +17102,10 @@
                   <a:srgbClr val="3A4452"/>
                 </a:solidFill>
               </a:rPr>
-              <a:t>Source of Truth — forecast data-integrity audit</a:t>
+              <a:t>Interactive live incident map — Mapbox GL, evacuation zones</a:t>
             </a:r>
             <a:endParaRPr lang="en-US" sz="830" dirty="0"/>
           </a:p>
-        </p:txBody>
-      </p:sp>
-      <p:sp>
-        <p:nvSpPr>
-          <p:cNvPr id="17" name="Shape 14"/>
-          <p:cNvSpPr/>
-          <p:nvPr/>
-        </p:nvSpPr>
-        <p:spPr>
-          <a:xfrm>
-            <a:off x="6159856" y="1600200"/>
-            <a:ext cx="2796318" cy="50292"/>
-          </a:xfrm>
-          <a:prstGeom prst="rect">
-            <a:avLst/>
-          </a:prstGeom>
-          <a:solidFill>
-            <a:srgbClr val="E8722C"/>
-          </a:solidFill>
-          <a:ln/>
-        </p:spPr>
-      </p:sp>
-      <p:sp>
-        <p:nvSpPr>
-          <p:cNvPr id="18" name="Shape 15"/>
-          <p:cNvSpPr/>
-          <p:nvPr/>
-        </p:nvSpPr>
-        <p:spPr>
-          <a:xfrm>
-            <a:off x="6159856" y="1650492"/>
-            <a:ext cx="2796318" cy="4247388"/>
-          </a:xfrm>
-          <a:prstGeom prst="rect">
-            <a:avLst/>
-          </a:prstGeom>
-          <a:solidFill>
-            <a:srgbClr val="FFFFFF"/>
-          </a:solidFill>
-          <a:ln/>
-        </p:spPr>
-      </p:sp>
-      <p:sp>
-        <p:nvSpPr>
-          <p:cNvPr id="19" name="Text 16"/>
-          <p:cNvSpPr txBox="1"/>
-          <p:nvPr/>
-        </p:nvSpPr>
-        <p:spPr>
-          <a:xfrm>
-            <a:off x="6287872" y="1737360"/>
-            <a:ext cx="2540286" cy="274320"/>
-          </a:xfrm>
-          <a:prstGeom prst="rect">
-            <a:avLst/>
-          </a:prstGeom>
-          <a:noFill/>
-          <a:ln/>
-        </p:spPr>
-        <p:txBody>
-          <a:bodyPr wrap="square" lIns="0" tIns="0" rIns="0" bIns="0" rtlCol="0" anchor="ctr"/>
-          <a:lstStyle/>
-          <a:p>
-            <a:pPr indent="0" marL="0">
-              <a:buNone/>
-            </a:pPr>
-            <a:r>
-              <a:rPr lang="en-US" sz="1350" b="1" dirty="0">
-                <a:solidFill>
-                  <a:srgbClr val="E8722C"/>
-                </a:solidFill>
-              </a:rPr>
-              <a:t>Respond</a:t>
-            </a:r>
-            <a:endParaRPr lang="en-US" sz="1350" dirty="0"/>
-          </a:p>
-        </p:txBody>
-      </p:sp>
-      <p:sp>
-        <p:nvSpPr>
-          <p:cNvPr id="20" name="Text 17"/>
-          <p:cNvSpPr txBox="1"/>
-          <p:nvPr/>
-        </p:nvSpPr>
-        <p:spPr>
-          <a:xfrm>
-            <a:off x="6287872" y="2057400"/>
-            <a:ext cx="2540286" cy="3703320"/>
-          </a:xfrm>
-          <a:prstGeom prst="rect">
-            <a:avLst/>
-          </a:prstGeom>
-          <a:noFill/>
-          <a:ln/>
-        </p:spPr>
-        <p:txBody>
-          <a:bodyPr wrap="square" lIns="0" tIns="0" rIns="0" bIns="0" rtlCol="0" anchor="t"/>
-          <a:lstStyle/>
           <a:p>
             <a:pPr marL="342900" indent="-342900">
               <a:spcAft>
@@ -17120,7 +17120,7 @@
                   <a:srgbClr val="3A4452"/>
                 </a:solidFill>
               </a:rPr>
-              <a:t>Interactive live incident map — Mapbox GL, evacuation zones</a:t>
+              <a:t>Gemini 2.5 Flash decision support with confidence scoring</a:t>
             </a:r>
             <a:endParaRPr lang="en-US" sz="830" dirty="0"/>
           </a:p>
@@ -17138,7 +17138,7 @@
                   <a:srgbClr val="3A4452"/>
                 </a:solidFill>
               </a:rPr>
-              <a:t>Gemini 2.5 Flash decision support with confidence scoring</a:t>
+              <a:t>Deterministic cascade &amp; resource optimizer (Hamilton apportionment, not AI-guessed)</a:t>
             </a:r>
             <a:endParaRPr lang="en-US" sz="830" dirty="0"/>
           </a:p>
@@ -17156,7 +17156,7 @@
                   <a:srgbClr val="3A4452"/>
                 </a:solidFill>
               </a:rPr>
-              <a:t>Source of Truth — full incident data lineage, every AI output logged</a:t>
+              <a:t>Satellite image + Sentinel-1 SAR cross-validation</a:t>
             </a:r>
             <a:endParaRPr lang="en-US" sz="830" dirty="0"/>
           </a:p>
@@ -17174,7 +17174,7 @@
                   <a:srgbClr val="3A4452"/>
                 </a:solidFill>
               </a:rPr>
-              <a:t>Deterministic cascade &amp; resource optimizer (Hamilton apportionment, not AI-guessed)</a:t>
+              <a:t>Impact scoring — Hazard + Exposure + Vulnerability (0–100)</a:t>
             </a:r>
             <a:endParaRPr lang="en-US" sz="830" dirty="0"/>
           </a:p>
@@ -17192,7 +17192,7 @@
                   <a:srgbClr val="3A4452"/>
                 </a:solidFill>
               </a:rPr>
-              <a:t>Satellite image + Sentinel-1 SAR cross-validation</a:t>
+              <a:t>Phased response timeline — Immediate / Urgent / Sustained</a:t>
             </a:r>
             <a:endParaRPr lang="en-US" sz="830" dirty="0"/>
           </a:p>
@@ -17210,42 +17210,6 @@
                   <a:srgbClr val="3A4452"/>
                 </a:solidFill>
               </a:rPr>
-              <a:t>Impact scoring — Hazard + Exposure + Vulnerability (0–100)</a:t>
-            </a:r>
-            <a:endParaRPr lang="en-US" sz="830" dirty="0"/>
-          </a:p>
-          <a:p>
-            <a:pPr marL="342900" indent="-342900">
-              <a:spcAft>
-                <a:spcPts val="600"/>
-              </a:spcAft>
-              <a:buSzPct val="100000"/>
-              <a:buChar char="✓"/>
-            </a:pPr>
-            <a:r>
-              <a:rPr lang="en-US" sz="830" dirty="0">
-                <a:solidFill>
-                  <a:srgbClr val="3A4452"/>
-                </a:solidFill>
-              </a:rPr>
-              <a:t>Phased response timeline — Immediate / Urgent / Sustained</a:t>
-            </a:r>
-            <a:endParaRPr lang="en-US" sz="830" dirty="0"/>
-          </a:p>
-          <a:p>
-            <a:pPr marL="342900" indent="-342900">
-              <a:spcAft>
-                <a:spcPts val="600"/>
-              </a:spcAft>
-              <a:buSzPct val="100000"/>
-              <a:buChar char="✓"/>
-            </a:pPr>
-            <a:r>
-              <a:rPr lang="en-US" sz="830" dirty="0">
-                <a:solidFill>
-                  <a:srgbClr val="3A4452"/>
-                </a:solidFill>
-              </a:rPr>
               <a:t>Causal chain explanation flowchart</a:t>
             </a:r>
             <a:endParaRPr lang="en-US" sz="830" dirty="0"/>
@@ -17260,8 +17224,8 @@
         </p:nvSpPr>
         <p:spPr>
           <a:xfrm>
-            <a:off x="9084190" y="1600200"/>
-            <a:ext cx="2330265" cy="4297680"/>
+            <a:off x="9084190" y="1508760"/>
+            <a:ext cx="2330265" cy="3749040"/>
           </a:xfrm>
           <a:prstGeom prst="roundRect">
             <a:avLst>
@@ -17287,7 +17251,7 @@
         </p:nvSpPr>
         <p:spPr>
           <a:xfrm>
-            <a:off x="9212206" y="1719072"/>
+            <a:off x="9212206" y="1627632"/>
             <a:ext cx="2074233" cy="274320"/>
           </a:xfrm>
           <a:prstGeom prst="rect">
@@ -17323,7 +17287,7 @@
         </p:nvSpPr>
         <p:spPr>
           <a:xfrm>
-            <a:off x="9212206" y="1965960"/>
+            <a:off x="9212206" y="1874520"/>
             <a:ext cx="2074233" cy="201168"/>
           </a:xfrm>
           <a:prstGeom prst="rect">
@@ -17359,8 +17323,8 @@
         </p:nvSpPr>
         <p:spPr>
           <a:xfrm>
-            <a:off x="9212206" y="2258568"/>
-            <a:ext cx="2074233" cy="3063240"/>
+            <a:off x="9212206" y="2167128"/>
+            <a:ext cx="2074233" cy="2514600"/>
           </a:xfrm>
           <a:prstGeom prst="rect">
             <a:avLst/>
@@ -17435,7 +17399,7 @@
         </p:nvSpPr>
         <p:spPr>
           <a:xfrm>
-            <a:off x="9212206" y="5577840"/>
+            <a:off x="9212206" y="4937760"/>
             <a:ext cx="2074233" cy="256032"/>
           </a:xfrm>
           <a:prstGeom prst="rect">
@@ -17465,14 +17429,36 @@
       </p:sp>
       <p:sp>
         <p:nvSpPr>
-          <p:cNvPr id="26" name="Text 23"/>
-          <p:cNvSpPr txBox="1"/>
-          <p:nvPr/>
-        </p:nvSpPr>
-        <p:spPr>
-          <a:xfrm>
-            <a:off x="777240" y="5989320"/>
-            <a:ext cx="10637215" cy="384048"/>
+          <p:cNvPr id="26" name="Shape 23"/>
+          <p:cNvSpPr/>
+          <p:nvPr/>
+        </p:nvSpPr>
+        <p:spPr>
+          <a:xfrm>
+            <a:off x="777240" y="5376672"/>
+            <a:ext cx="10637215" cy="749808"/>
+          </a:xfrm>
+          <a:prstGeom prst="roundRect">
+            <a:avLst>
+              <a:gd name="adj" fmla="val 8537"/>
+            </a:avLst>
+          </a:prstGeom>
+          <a:solidFill>
+            <a:srgbClr val="0F1B2D"/>
+          </a:solidFill>
+          <a:ln/>
+        </p:spPr>
+      </p:sp>
+      <p:sp>
+        <p:nvSpPr>
+          <p:cNvPr id="27" name="Text 24"/>
+          <p:cNvSpPr txBox="1"/>
+          <p:nvPr/>
+        </p:nvSpPr>
+        <p:spPr>
+          <a:xfrm>
+            <a:off x="978408" y="5468112"/>
+            <a:ext cx="10234879" cy="219456"/>
           </a:xfrm>
           <a:prstGeom prst="rect">
             <a:avLst/>
@@ -17488,14 +17474,265 @@
               <a:buNone/>
             </a:pPr>
             <a:r>
-              <a:rPr lang="en-US" sz="880" i="1" dirty="0">
+              <a:rPr lang="en-US" sz="1050" b="1" spc="50" kern="0" dirty="0">
+                <a:solidFill>
+                  <a:srgbClr val="F3F4F2"/>
+                </a:solidFill>
+                <a:latin typeface="Calibri" pitchFamily="34" charset="0"/>
+                <a:ea typeface="Calibri" pitchFamily="34" charset="-122"/>
+                <a:cs typeface="Calibri" pitchFamily="34" charset="-120"/>
+              </a:rPr>
+              <a:t>COMMON CAPABILITIES — BUILT ONCE, RUNNING ACROSS EVERY PHASE</a:t>
+            </a:r>
+            <a:endParaRPr lang="en-US" sz="1050" dirty="0"/>
+          </a:p>
+        </p:txBody>
+      </p:sp>
+      <p:sp>
+        <p:nvSpPr>
+          <p:cNvPr id="28" name="Text 25"/>
+          <p:cNvSpPr txBox="1"/>
+          <p:nvPr/>
+        </p:nvSpPr>
+        <p:spPr>
+          <a:xfrm>
+            <a:off x="978408" y="5742432"/>
+            <a:ext cx="2421560" cy="347472"/>
+          </a:xfrm>
+          <a:prstGeom prst="rect">
+            <a:avLst/>
+          </a:prstGeom>
+          <a:noFill/>
+          <a:ln/>
+        </p:spPr>
+        <p:txBody>
+          <a:bodyPr wrap="square" lIns="0" tIns="0" rIns="0" bIns="0" rtlCol="0" anchor="t"/>
+          <a:lstStyle/>
+          <a:p>
+            <a:pPr indent="0" marL="0">
+              <a:buNone/>
+            </a:pPr>
+            <a:r>
+              <a:rPr lang="en-US" sz="900" b="1" dirty="0">
+                <a:solidFill>
+                  <a:srgbClr val="F3F4F2"/>
+                </a:solidFill>
+                <a:latin typeface="Calibri" pitchFamily="34" charset="0"/>
+                <a:ea typeface="Calibri" pitchFamily="34" charset="-122"/>
+                <a:cs typeface="Calibri" pitchFamily="34" charset="-120"/>
+              </a:rPr>
+              <a:t>Source of Truth — </a:t>
+            </a:r>
+            <a:pPr indent="0" marL="0">
+              <a:buNone/>
+            </a:pPr>
+            <a:r>
+              <a:rPr lang="en-US" sz="900" dirty="0">
+                <a:solidFill>
+                  <a:srgbClr val="E3E8EE"/>
+                </a:solidFill>
+                <a:latin typeface="Calibri" pitchFamily="34" charset="0"/>
+                <a:ea typeface="Calibri" pitchFamily="34" charset="-122"/>
+                <a:cs typeface="Calibri" pitchFamily="34" charset="-120"/>
+              </a:rPr>
+              <a:t>4-layer data lineage &amp; audit trail, live in Prepare + Respond, scoped for Predict + Recover</a:t>
+            </a:r>
+            <a:endParaRPr lang="en-US" sz="900" dirty="0"/>
+          </a:p>
+        </p:txBody>
+      </p:sp>
+      <p:sp>
+        <p:nvSpPr>
+          <p:cNvPr id="29" name="Text 26"/>
+          <p:cNvSpPr txBox="1"/>
+          <p:nvPr/>
+        </p:nvSpPr>
+        <p:spPr>
+          <a:xfrm>
+            <a:off x="3582848" y="5742432"/>
+            <a:ext cx="2421560" cy="347472"/>
+          </a:xfrm>
+          <a:prstGeom prst="rect">
+            <a:avLst/>
+          </a:prstGeom>
+          <a:noFill/>
+          <a:ln/>
+        </p:spPr>
+        <p:txBody>
+          <a:bodyPr wrap="square" lIns="0" tIns="0" rIns="0" bIns="0" rtlCol="0" anchor="t"/>
+          <a:lstStyle/>
+          <a:p>
+            <a:pPr indent="0" marL="0">
+              <a:buNone/>
+            </a:pPr>
+            <a:r>
+              <a:rPr lang="en-US" sz="900" b="1" dirty="0">
+                <a:solidFill>
+                  <a:srgbClr val="F3F4F2"/>
+                </a:solidFill>
+                <a:latin typeface="Calibri" pitchFamily="34" charset="0"/>
+                <a:ea typeface="Calibri" pitchFamily="34" charset="-122"/>
+                <a:cs typeface="Calibri" pitchFamily="34" charset="-120"/>
+              </a:rPr>
+              <a:t>Multi-source live ingestion — </a:t>
+            </a:r>
+            <a:pPr indent="0" marL="0">
+              <a:buNone/>
+            </a:pPr>
+            <a:r>
+              <a:rPr lang="en-US" sz="900" dirty="0">
+                <a:solidFill>
+                  <a:srgbClr val="E3E8EE"/>
+                </a:solidFill>
+                <a:latin typeface="Calibri" pitchFamily="34" charset="0"/>
+                <a:ea typeface="Calibri" pitchFamily="34" charset="-122"/>
+                <a:cs typeface="Calibri" pitchFamily="34" charset="-120"/>
+              </a:rPr>
+              <a:t>6 APIs (NASA EONET, USGS, NOAA, GDACS, OpenWeatherMap, OSM/Overpass)</a:t>
+            </a:r>
+            <a:endParaRPr lang="en-US" sz="900" dirty="0"/>
+          </a:p>
+        </p:txBody>
+      </p:sp>
+      <p:sp>
+        <p:nvSpPr>
+          <p:cNvPr id="30" name="Text 27"/>
+          <p:cNvSpPr txBox="1"/>
+          <p:nvPr/>
+        </p:nvSpPr>
+        <p:spPr>
+          <a:xfrm>
+            <a:off x="6187288" y="5742432"/>
+            <a:ext cx="2421560" cy="347472"/>
+          </a:xfrm>
+          <a:prstGeom prst="rect">
+            <a:avLst/>
+          </a:prstGeom>
+          <a:noFill/>
+          <a:ln/>
+        </p:spPr>
+        <p:txBody>
+          <a:bodyPr wrap="square" lIns="0" tIns="0" rIns="0" bIns="0" rtlCol="0" anchor="t"/>
+          <a:lstStyle/>
+          <a:p>
+            <a:pPr indent="0" marL="0">
+              <a:buNone/>
+            </a:pPr>
+            <a:r>
+              <a:rPr lang="en-US" sz="900" b="1" dirty="0">
+                <a:solidFill>
+                  <a:srgbClr val="F3F4F2"/>
+                </a:solidFill>
+                <a:latin typeface="Calibri" pitchFamily="34" charset="0"/>
+                <a:ea typeface="Calibri" pitchFamily="34" charset="-122"/>
+                <a:cs typeface="Calibri" pitchFamily="34" charset="-120"/>
+              </a:rPr>
+              <a:t>Real-time WebSocket updates — </a:t>
+            </a:r>
+            <a:pPr indent="0" marL="0">
+              <a:buNone/>
+            </a:pPr>
+            <a:r>
+              <a:rPr lang="en-US" sz="900" dirty="0">
+                <a:solidFill>
+                  <a:srgbClr val="E3E8EE"/>
+                </a:solidFill>
+                <a:latin typeface="Calibri" pitchFamily="34" charset="0"/>
+                <a:ea typeface="Calibri" pitchFamily="34" charset="-122"/>
+                <a:cs typeface="Calibri" pitchFamily="34" charset="-120"/>
+              </a:rPr>
+              <a:t>across the dashboard — no manual refresh</a:t>
+            </a:r>
+            <a:endParaRPr lang="en-US" sz="900" dirty="0"/>
+          </a:p>
+        </p:txBody>
+      </p:sp>
+      <p:sp>
+        <p:nvSpPr>
+          <p:cNvPr id="31" name="Text 28"/>
+          <p:cNvSpPr txBox="1"/>
+          <p:nvPr/>
+        </p:nvSpPr>
+        <p:spPr>
+          <a:xfrm>
+            <a:off x="8791727" y="5742432"/>
+            <a:ext cx="2421560" cy="347472"/>
+          </a:xfrm>
+          <a:prstGeom prst="rect">
+            <a:avLst/>
+          </a:prstGeom>
+          <a:noFill/>
+          <a:ln/>
+        </p:spPr>
+        <p:txBody>
+          <a:bodyPr wrap="square" lIns="0" tIns="0" rIns="0" bIns="0" rtlCol="0" anchor="t"/>
+          <a:lstStyle/>
+          <a:p>
+            <a:pPr indent="0" marL="0">
+              <a:buNone/>
+            </a:pPr>
+            <a:r>
+              <a:rPr lang="en-US" sz="900" b="1" dirty="0">
+                <a:solidFill>
+                  <a:srgbClr val="F3F4F2"/>
+                </a:solidFill>
+                <a:latin typeface="Calibri" pitchFamily="34" charset="0"/>
+                <a:ea typeface="Calibri" pitchFamily="34" charset="-122"/>
+                <a:cs typeface="Calibri" pitchFamily="34" charset="-120"/>
+              </a:rPr>
+              <a:t>Multi-language UI — </a:t>
+            </a:r>
+            <a:pPr indent="0" marL="0">
+              <a:buNone/>
+            </a:pPr>
+            <a:r>
+              <a:rPr lang="en-US" sz="900" dirty="0">
+                <a:solidFill>
+                  <a:srgbClr val="E3E8EE"/>
+                </a:solidFill>
+                <a:latin typeface="Calibri" pitchFamily="34" charset="0"/>
+                <a:ea typeface="Calibri" pitchFamily="34" charset="-122"/>
+                <a:cs typeface="Calibri" pitchFamily="34" charset="-120"/>
+              </a:rPr>
+              <a:t>vue-i18n across the full dashboard</a:t>
+            </a:r>
+            <a:endParaRPr lang="en-US" sz="900" dirty="0"/>
+          </a:p>
+        </p:txBody>
+      </p:sp>
+      <p:sp>
+        <p:nvSpPr>
+          <p:cNvPr id="32" name="Text 29"/>
+          <p:cNvSpPr txBox="1"/>
+          <p:nvPr/>
+        </p:nvSpPr>
+        <p:spPr>
+          <a:xfrm>
+            <a:off x="777240" y="6181344"/>
+            <a:ext cx="10637215" cy="182880"/>
+          </a:xfrm>
+          <a:prstGeom prst="rect">
+            <a:avLst/>
+          </a:prstGeom>
+          <a:noFill/>
+          <a:ln/>
+        </p:spPr>
+        <p:txBody>
+          <a:bodyPr wrap="square" lIns="0" tIns="0" rIns="0" bIns="0" rtlCol="0" anchor="ctr"/>
+          <a:lstStyle/>
+          <a:p>
+            <a:pPr indent="0" marL="0">
+              <a:buNone/>
+            </a:pPr>
+            <a:r>
+              <a:rPr lang="en-US" sz="830" i="1" dirty="0">
                 <a:solidFill>
                   <a:srgbClr val="8A8470"/>
                 </a:solidFill>
               </a:rPr>
-              <a:t>Also built and running across every phase, shown live in the demo rather than listed per phase: 6-API live data fusion, real-time WebSocket updates, multi-language UI (vue-i18n). Predict and Recover have no functionality built yet — only Prepare and Respond are shipped today.</a:t>
-            </a:r>
-            <a:endParaRPr lang="en-US" sz="880" dirty="0"/>
+              <a:t>Predict and Recover are part of the 4-phase design (see The 4-Phase Model) but have no functionality built yet — only Prepare and Respond are shipped today.</a:t>
+            </a:r>
+            <a:endParaRPr lang="en-US" sz="830" dirty="0"/>
           </a:p>
         </p:txBody>
       </p:sp>
